--- a/web/rapports/GRSCI/dernier.pptx
+++ b/web/rapports/GRSCI/dernier.pptx
@@ -2437,34 +2437,34 @@
               <a:buNone/>
             </a:pPr>
             <a:r>
-              <a:rPr lang="en-US" sz="4000" b="1" dirty="0">
+              <a:rPr lang="en-US" sz="4400" dirty="0">
                 <a:solidFill>
                   <a:srgbClr val="FFFFFF"/>
                 </a:solidFill>
-                <a:latin typeface="Calibri" pitchFamily="34" charset="0"/>
-                <a:ea typeface="Calibri" pitchFamily="34" charset="-122"/>
-                <a:cs typeface="Calibri" pitchFamily="34" charset="-120"/>
+                <a:latin typeface="Arial Narrow" pitchFamily="34" charset="0"/>
+                <a:ea typeface="Arial Narrow" pitchFamily="34" charset="-122"/>
+                <a:cs typeface="Arial Narrow" pitchFamily="34" charset="-120"/>
               </a:rPr>
               <a:t>RENCONTRE MENSUELLE</a:t>
             </a:r>
-            <a:endParaRPr lang="en-US" sz="4000" dirty="0"/>
-          </a:p>
-          <a:p>
-            <a:pPr algn="ctr" indent="0" marL="0">
-              <a:buNone/>
-            </a:pPr>
-            <a:r>
-              <a:rPr lang="en-US" sz="4000" b="1" dirty="0">
+            <a:endParaRPr lang="en-US" sz="4400" dirty="0"/>
+          </a:p>
+          <a:p>
+            <a:pPr algn="ctr" indent="0" marL="0">
+              <a:buNone/>
+            </a:pPr>
+            <a:r>
+              <a:rPr lang="en-US" sz="4400" dirty="0">
                 <a:solidFill>
                   <a:srgbClr val="FFFFFF"/>
                 </a:solidFill>
-                <a:latin typeface="Calibri" pitchFamily="34" charset="0"/>
-                <a:ea typeface="Calibri" pitchFamily="34" charset="-122"/>
-                <a:cs typeface="Calibri" pitchFamily="34" charset="-120"/>
+                <a:latin typeface="Arial Narrow" pitchFamily="34" charset="0"/>
+                <a:ea typeface="Arial Narrow" pitchFamily="34" charset="-122"/>
+                <a:cs typeface="Arial Narrow" pitchFamily="34" charset="-120"/>
               </a:rPr>
               <a:t>G.R.S.CI</a:t>
             </a:r>
-            <a:endParaRPr lang="en-US" sz="4000" dirty="0"/>
+            <a:endParaRPr lang="en-US" sz="4400" dirty="0"/>
           </a:p>
         </p:txBody>
       </p:sp>
@@ -2838,17 +2838,17 @@
               <a:buNone/>
             </a:pPr>
             <a:r>
-              <a:rPr lang="en-US" sz="2200" b="1" dirty="0">
+              <a:rPr lang="en-US" sz="2400" dirty="0">
                 <a:solidFill>
                   <a:srgbClr val="FFFFFF"/>
                 </a:solidFill>
-                <a:latin typeface="Calibri" pitchFamily="34" charset="0"/>
-                <a:ea typeface="Calibri" pitchFamily="34" charset="-122"/>
-                <a:cs typeface="Calibri" pitchFamily="34" charset="-120"/>
+                <a:latin typeface="Arial Narrow" pitchFamily="34" charset="0"/>
+                <a:ea typeface="Arial Narrow" pitchFamily="34" charset="-122"/>
+                <a:cs typeface="Arial Narrow" pitchFamily="34" charset="-120"/>
               </a:rPr>
               <a:t>I</a:t>
             </a:r>
-            <a:endParaRPr lang="en-US" sz="2200" dirty="0"/>
+            <a:endParaRPr lang="en-US" sz="2400" dirty="0"/>
           </a:p>
         </p:txBody>
       </p:sp>
@@ -2877,13 +2877,13 @@
               <a:buNone/>
             </a:pPr>
             <a:r>
-              <a:rPr lang="en-US" sz="2800" b="1" dirty="0">
+              <a:rPr lang="en-US" sz="2800" u="sng" dirty="0">
                 <a:solidFill>
                   <a:srgbClr val="1F6B5E"/>
                 </a:solidFill>
-                <a:latin typeface="Calibri" pitchFamily="34" charset="0"/>
-                <a:ea typeface="Calibri" pitchFamily="34" charset="-122"/>
-                <a:cs typeface="Calibri" pitchFamily="34" charset="-120"/>
+                <a:latin typeface="Arial Narrow" pitchFamily="34" charset="0"/>
+                <a:ea typeface="Arial Narrow" pitchFamily="34" charset="-122"/>
+                <a:cs typeface="Arial Narrow" pitchFamily="34" charset="-120"/>
               </a:rPr>
               <a:t>Mali : situation au 21/10/26</a:t>
             </a:r>
@@ -2894,6 +2894,103 @@
       <p:sp>
         <p:nvSpPr>
           <p:cNvPr id="4" name="Shape 2"/>
+          <p:cNvSpPr/>
+          <p:nvPr/>
+        </p:nvSpPr>
+        <p:spPr>
+          <a:xfrm>
+            <a:off x="10881360" y="274320"/>
+            <a:ext cx="301752" cy="566928"/>
+          </a:xfrm>
+          <a:prstGeom prst="rect">
+            <a:avLst/>
+          </a:prstGeom>
+          <a:solidFill>
+            <a:srgbClr val="14B53A"/>
+          </a:solidFill>
+          <a:ln w="12700">
+            <a:solidFill>
+              <a:srgbClr val="14B53A"/>
+            </a:solidFill>
+            <a:prstDash val="solid"/>
+          </a:ln>
+        </p:spPr>
+      </p:sp>
+      <p:sp>
+        <p:nvSpPr>
+          <p:cNvPr id="5" name="Shape 3"/>
+          <p:cNvSpPr/>
+          <p:nvPr/>
+        </p:nvSpPr>
+        <p:spPr>
+          <a:xfrm>
+            <a:off x="11183112" y="274320"/>
+            <a:ext cx="301752" cy="566928"/>
+          </a:xfrm>
+          <a:prstGeom prst="rect">
+            <a:avLst/>
+          </a:prstGeom>
+          <a:solidFill>
+            <a:srgbClr val="FCD116"/>
+          </a:solidFill>
+          <a:ln w="12700">
+            <a:solidFill>
+              <a:srgbClr val="FCD116"/>
+            </a:solidFill>
+            <a:prstDash val="solid"/>
+          </a:ln>
+        </p:spPr>
+      </p:sp>
+      <p:sp>
+        <p:nvSpPr>
+          <p:cNvPr id="6" name="Shape 4"/>
+          <p:cNvSpPr/>
+          <p:nvPr/>
+        </p:nvSpPr>
+        <p:spPr>
+          <a:xfrm>
+            <a:off x="11484864" y="274320"/>
+            <a:ext cx="301752" cy="566928"/>
+          </a:xfrm>
+          <a:prstGeom prst="rect">
+            <a:avLst/>
+          </a:prstGeom>
+          <a:solidFill>
+            <a:srgbClr val="CE1126"/>
+          </a:solidFill>
+          <a:ln w="12700">
+            <a:solidFill>
+              <a:srgbClr val="CE1126"/>
+            </a:solidFill>
+            <a:prstDash val="solid"/>
+          </a:ln>
+        </p:spPr>
+      </p:sp>
+      <p:sp>
+        <p:nvSpPr>
+          <p:cNvPr id="7" name="Shape 5"/>
+          <p:cNvSpPr/>
+          <p:nvPr/>
+        </p:nvSpPr>
+        <p:spPr>
+          <a:xfrm>
+            <a:off x="10881360" y="274320"/>
+            <a:ext cx="905256" cy="566928"/>
+          </a:xfrm>
+          <a:prstGeom prst="rect">
+            <a:avLst/>
+          </a:prstGeom>
+          <a:ln w="6350">
+            <a:solidFill>
+              <a:srgbClr val="1F2937"/>
+            </a:solidFill>
+            <a:prstDash val="solid"/>
+          </a:ln>
+        </p:spPr>
+      </p:sp>
+      <p:sp>
+        <p:nvSpPr>
+          <p:cNvPr id="8" name="Shape 6"/>
           <p:cNvSpPr/>
           <p:nvPr/>
         </p:nvSpPr>
@@ -2916,7 +3013,7 @@
       </p:sp>
       <p:sp>
         <p:nvSpPr>
-          <p:cNvPr id="5" name="Text 3"/>
+          <p:cNvPr id="9" name="Text 7"/>
           <p:cNvSpPr/>
           <p:nvPr/>
         </p:nvSpPr>
@@ -2957,7 +3054,7 @@
       </p:sp>
       <p:sp>
         <p:nvSpPr>
-          <p:cNvPr id="6" name="Text 4"/>
+          <p:cNvPr id="10" name="Text 8"/>
           <p:cNvSpPr/>
           <p:nvPr/>
         </p:nvSpPr>
@@ -2992,7 +3089,7 @@
                 <a:ea typeface="Calibri" pitchFamily="34" charset="-122"/>
                 <a:cs typeface="Calibri" pitchFamily="34" charset="-120"/>
               </a:rPr>
-              <a:t>Massacre au Mali : l’État islamique s’attaque à la communauté idaksahak dans la région de Ménaka</a:t>
+              <a:t>Abyei : Alourdissement du bilan et tensions diplomatiques après une frappe aérienne dans la zone contestée</a:t>
             </a:r>
             <a:endParaRPr lang="en-US" sz="1300" dirty="0"/>
           </a:p>
@@ -3012,7 +3109,7 @@
                 <a:ea typeface="Calibri" pitchFamily="34" charset="-122"/>
                 <a:cs typeface="Calibri" pitchFamily="34" charset="-120"/>
               </a:rPr>
-              <a:t>Jeune Afrique · 20/10 16h UTC · niveau critique · Probable</a:t>
+              <a:t>Maliactu · 21/10 06h UTC · niveau critique · Probable</a:t>
             </a:r>
             <a:endParaRPr lang="en-US" sz="1300" dirty="0"/>
           </a:p>
@@ -3033,7 +3130,7 @@
                 <a:ea typeface="Calibri" pitchFamily="34" charset="-122"/>
                 <a:cs typeface="Calibri" pitchFamily="34" charset="-120"/>
               </a:rPr>
-              <a:t>Mali : une quarantaine de civils tuée dans un camp dans la région de Menaka</a:t>
+              <a:t>Massacre au Mali : l’État islamique s’attaque à la communauté idaksahak dans la région de Ménaka</a:t>
             </a:r>
             <a:endParaRPr lang="en-US" sz="1300" dirty="0"/>
           </a:p>
@@ -3053,7 +3150,7 @@
                 <a:ea typeface="Calibri" pitchFamily="34" charset="-122"/>
                 <a:cs typeface="Calibri" pitchFamily="34" charset="-120"/>
               </a:rPr>
-              <a:t>fr.saharamedias.net · 20/10 14h UTC · niveau critique · Non confirmé</a:t>
+              <a:t>Jeune Afrique · 20/10 16h UTC · niveau critique · Probable</a:t>
             </a:r>
             <a:endParaRPr lang="en-US" sz="1300" dirty="0"/>
           </a:p>
@@ -3074,7 +3171,7 @@
                 <a:ea typeface="Calibri" pitchFamily="34" charset="-122"/>
                 <a:cs typeface="Calibri" pitchFamily="34" charset="-120"/>
               </a:rPr>
-              <a:t>More than 40 civilians killed in Mali attack blamed on Islamic State</a:t>
+              <a:t>Mali : une quarantaine de civils tuée dans un camp dans la région de Menaka</a:t>
             </a:r>
             <a:endParaRPr lang="en-US" sz="1300" dirty="0"/>
           </a:p>
@@ -3094,7 +3191,7 @@
                 <a:ea typeface="Calibri" pitchFamily="34" charset="-122"/>
                 <a:cs typeface="Calibri" pitchFamily="34" charset="-120"/>
               </a:rPr>
-              <a:t>Africanews · 20/10 12h UTC · niveau critique · Probable</a:t>
+              <a:t>fr.saharamedias.net · 20/10 14h UTC · niveau critique · Non confirmé</a:t>
             </a:r>
             <a:endParaRPr lang="en-US" sz="1300" dirty="0"/>
           </a:p>
@@ -3115,7 +3212,7 @@
                 <a:ea typeface="Calibri" pitchFamily="34" charset="-122"/>
                 <a:cs typeface="Calibri" pitchFamily="34" charset="-120"/>
               </a:rPr>
-              <a:t>Défense et Sécurité : 678 jeunes soldats formés et présentés au drapeau à Koutiala</a:t>
+              <a:t>More than 40 civilians killed in Mali attack blamed on Islamic State</a:t>
             </a:r>
             <a:endParaRPr lang="en-US" sz="1300" dirty="0"/>
           </a:p>
@@ -3135,7 +3232,7 @@
                 <a:ea typeface="Calibri" pitchFamily="34" charset="-122"/>
                 <a:cs typeface="Calibri" pitchFamily="34" charset="-120"/>
               </a:rPr>
-              <a:t>Malijet · 20/10 09h UTC · niveau élevé · Probable</a:t>
+              <a:t>Africanews · 20/10 12h UTC · niveau critique · Probable</a:t>
             </a:r>
             <a:endParaRPr lang="en-US" sz="1300" dirty="0"/>
           </a:p>
@@ -3143,7 +3240,7 @@
       </p:sp>
       <p:sp>
         <p:nvSpPr>
-          <p:cNvPr id="7" name="Shape 5"/>
+          <p:cNvPr id="11" name="Shape 9"/>
           <p:cNvSpPr/>
           <p:nvPr/>
         </p:nvSpPr>
@@ -3168,7 +3265,7 @@
       </p:sp>
       <p:sp>
         <p:nvSpPr>
-          <p:cNvPr id="8" name="Text 6"/>
+          <p:cNvPr id="12" name="Text 10"/>
           <p:cNvSpPr/>
           <p:nvPr/>
         </p:nvSpPr>
@@ -3207,7 +3304,7 @@
       </p:sp>
       <p:sp>
         <p:nvSpPr>
-          <p:cNvPr id="9" name="Text 7"/>
+          <p:cNvPr id="13" name="Text 11"/>
           <p:cNvSpPr/>
           <p:nvPr/>
         </p:nvSpPr>
@@ -3242,7 +3339,7 @@
                 <a:ea typeface="Calibri" pitchFamily="34" charset="-122"/>
                 <a:cs typeface="Calibri" pitchFamily="34" charset="-120"/>
               </a:rPr>
-              <a:t>Niveau rouge (grave, 84.7/100), confiance moyenne.</a:t>
+              <a:t>Niveau rouge (grave, 84.7/100), confiance faible.</a:t>
             </a:r>
             <a:endParaRPr lang="en-US" sz="1200" dirty="0"/>
           </a:p>
@@ -3263,7 +3360,7 @@
                 <a:ea typeface="Calibri" pitchFamily="34" charset="-122"/>
                 <a:cs typeface="Calibri" pitchFamily="34" charset="-120"/>
               </a:rPr>
-              <a:t>Fondement : incident vérifié le plus récent : 114 jours ; 2 signaux du jour.</a:t>
+              <a:t>Fondement : incident vérifié le plus récent : 114 jours ; aucun signal du jour.</a:t>
             </a:r>
             <a:endParaRPr lang="en-US" sz="1200" dirty="0"/>
           </a:p>
@@ -3305,7 +3402,7 @@
                 <a:ea typeface="Calibri" pitchFamily="34" charset="-122"/>
                 <a:cs typeface="Calibri" pitchFamily="34" charset="-120"/>
               </a:rPr>
-              <a:t>12 fait(s) au-dessus du normal dans les 36 dernières heures.</a:t>
+              <a:t>9 fait(s) au-dessus du normal dans les 36 dernières heures.</a:t>
             </a:r>
             <a:endParaRPr lang="en-US" sz="1200" dirty="0"/>
           </a:p>
@@ -3313,7 +3410,7 @@
       </p:sp>
       <p:pic>
         <p:nvPicPr>
-          <p:cNvPr id="10" name="Image 0" descr="/home/runner/work/SentiqS/SentiqS/scripts/assets/grsci/logo-grsci.png">    </p:cNvPr>
+          <p:cNvPr id="14" name="Image 0" descr="/home/runner/work/SentiqS/SentiqS/scripts/assets/grsci/logo-grsci.png">    </p:cNvPr>
           <p:cNvPicPr>
             <a:picLocks noChangeAspect="1"/>
           </p:cNvPicPr>
@@ -3337,7 +3434,7 @@
       </p:pic>
       <p:sp>
         <p:nvSpPr>
-          <p:cNvPr id="11" name="Text 8"/>
+          <p:cNvPr id="15" name="Text 12"/>
           <p:cNvSpPr/>
           <p:nvPr/>
         </p:nvSpPr>
@@ -3506,7 +3603,7 @@
       </p:sp>
       <p:sp>
         <p:nvSpPr>
-          <p:cNvPr id="12" name="Text 9"/>
+          <p:cNvPr id="16" name="Text 13"/>
           <p:cNvSpPr/>
           <p:nvPr/>
         </p:nvSpPr>
@@ -3595,17 +3692,17 @@
               <a:buNone/>
             </a:pPr>
             <a:r>
-              <a:rPr lang="en-US" sz="2200" b="1" dirty="0">
+              <a:rPr lang="en-US" sz="2400" dirty="0">
                 <a:solidFill>
                   <a:srgbClr val="FFFFFF"/>
                 </a:solidFill>
-                <a:latin typeface="Calibri" pitchFamily="34" charset="0"/>
-                <a:ea typeface="Calibri" pitchFamily="34" charset="-122"/>
-                <a:cs typeface="Calibri" pitchFamily="34" charset="-120"/>
+                <a:latin typeface="Arial Narrow" pitchFamily="34" charset="0"/>
+                <a:ea typeface="Arial Narrow" pitchFamily="34" charset="-122"/>
+                <a:cs typeface="Arial Narrow" pitchFamily="34" charset="-120"/>
               </a:rPr>
               <a:t>I</a:t>
             </a:r>
-            <a:endParaRPr lang="en-US" sz="2200" dirty="0"/>
+            <a:endParaRPr lang="en-US" sz="2400" dirty="0"/>
           </a:p>
         </p:txBody>
       </p:sp>
@@ -3634,13 +3731,13 @@
               <a:buNone/>
             </a:pPr>
             <a:r>
-              <a:rPr lang="en-US" sz="2800" b="1" dirty="0">
+              <a:rPr lang="en-US" sz="2800" u="sng" dirty="0">
                 <a:solidFill>
                   <a:srgbClr val="1F6B5E"/>
                 </a:solidFill>
-                <a:latin typeface="Calibri" pitchFamily="34" charset="0"/>
-                <a:ea typeface="Calibri" pitchFamily="34" charset="-122"/>
-                <a:cs typeface="Calibri" pitchFamily="34" charset="-120"/>
+                <a:latin typeface="Arial Narrow" pitchFamily="34" charset="0"/>
+                <a:ea typeface="Arial Narrow" pitchFamily="34" charset="-122"/>
+                <a:cs typeface="Arial Narrow" pitchFamily="34" charset="-120"/>
               </a:rPr>
               <a:t>Niger : situation au 21/10/26</a:t>
             </a:r>
@@ -3651,6 +3748,103 @@
       <p:sp>
         <p:nvSpPr>
           <p:cNvPr id="4" name="Shape 2"/>
+          <p:cNvSpPr/>
+          <p:nvPr/>
+        </p:nvSpPr>
+        <p:spPr>
+          <a:xfrm>
+            <a:off x="10881360" y="274320"/>
+            <a:ext cx="905256" cy="188976"/>
+          </a:xfrm>
+          <a:prstGeom prst="rect">
+            <a:avLst/>
+          </a:prstGeom>
+          <a:solidFill>
+            <a:srgbClr val="E05206"/>
+          </a:solidFill>
+          <a:ln w="12700">
+            <a:solidFill>
+              <a:srgbClr val="E05206"/>
+            </a:solidFill>
+            <a:prstDash val="solid"/>
+          </a:ln>
+        </p:spPr>
+      </p:sp>
+      <p:sp>
+        <p:nvSpPr>
+          <p:cNvPr id="5" name="Shape 3"/>
+          <p:cNvSpPr/>
+          <p:nvPr/>
+        </p:nvSpPr>
+        <p:spPr>
+          <a:xfrm>
+            <a:off x="10881360" y="463296"/>
+            <a:ext cx="905256" cy="188976"/>
+          </a:xfrm>
+          <a:prstGeom prst="rect">
+            <a:avLst/>
+          </a:prstGeom>
+          <a:solidFill>
+            <a:srgbClr val="FFFFFF"/>
+          </a:solidFill>
+          <a:ln w="12700">
+            <a:solidFill>
+              <a:srgbClr val="FFFFFF"/>
+            </a:solidFill>
+            <a:prstDash val="solid"/>
+          </a:ln>
+        </p:spPr>
+      </p:sp>
+      <p:sp>
+        <p:nvSpPr>
+          <p:cNvPr id="6" name="Shape 4"/>
+          <p:cNvSpPr/>
+          <p:nvPr/>
+        </p:nvSpPr>
+        <p:spPr>
+          <a:xfrm>
+            <a:off x="10881360" y="652272"/>
+            <a:ext cx="905256" cy="188976"/>
+          </a:xfrm>
+          <a:prstGeom prst="rect">
+            <a:avLst/>
+          </a:prstGeom>
+          <a:solidFill>
+            <a:srgbClr val="0DB02B"/>
+          </a:solidFill>
+          <a:ln w="12700">
+            <a:solidFill>
+              <a:srgbClr val="0DB02B"/>
+            </a:solidFill>
+            <a:prstDash val="solid"/>
+          </a:ln>
+        </p:spPr>
+      </p:sp>
+      <p:sp>
+        <p:nvSpPr>
+          <p:cNvPr id="7" name="Shape 5"/>
+          <p:cNvSpPr/>
+          <p:nvPr/>
+        </p:nvSpPr>
+        <p:spPr>
+          <a:xfrm>
+            <a:off x="10881360" y="274320"/>
+            <a:ext cx="905256" cy="566928"/>
+          </a:xfrm>
+          <a:prstGeom prst="rect">
+            <a:avLst/>
+          </a:prstGeom>
+          <a:ln w="6350">
+            <a:solidFill>
+              <a:srgbClr val="1F2937"/>
+            </a:solidFill>
+            <a:prstDash val="solid"/>
+          </a:ln>
+        </p:spPr>
+      </p:sp>
+      <p:sp>
+        <p:nvSpPr>
+          <p:cNvPr id="8" name="Shape 6"/>
           <p:cNvSpPr/>
           <p:nvPr/>
         </p:nvSpPr>
@@ -3673,7 +3867,7 @@
       </p:sp>
       <p:sp>
         <p:nvSpPr>
-          <p:cNvPr id="5" name="Text 3"/>
+          <p:cNvPr id="9" name="Text 7"/>
           <p:cNvSpPr/>
           <p:nvPr/>
         </p:nvSpPr>
@@ -3714,7 +3908,7 @@
       </p:sp>
       <p:sp>
         <p:nvSpPr>
-          <p:cNvPr id="6" name="Text 4"/>
+          <p:cNvPr id="10" name="Text 8"/>
           <p:cNvSpPr/>
           <p:nvPr/>
         </p:nvSpPr>
@@ -3773,52 +3967,11 @@
             </a:r>
             <a:endParaRPr lang="en-US" sz="1300" dirty="0"/>
           </a:p>
-          <a:p>
-            <a:pPr marL="342900" indent="-342900">
-              <a:spcAft>
-                <a:spcPts val="300"/>
-              </a:spcAft>
-              <a:buSzPct val="100000"/>
-              <a:buChar char="✓"/>
-            </a:pPr>
-            <a:r>
-              <a:rPr lang="en-US" sz="1300" b="1" dirty="0">
-                <a:solidFill>
-                  <a:srgbClr val="1F2937"/>
-                </a:solidFill>
-                <a:latin typeface="Calibri" pitchFamily="34" charset="0"/>
-                <a:ea typeface="Calibri" pitchFamily="34" charset="-122"/>
-                <a:cs typeface="Calibri" pitchFamily="34" charset="-120"/>
-              </a:rPr>
-              <a:t>OCRTIS, un rempart contre la drogue et la criminalité au Niger…</a:t>
-            </a:r>
-            <a:endParaRPr lang="en-US" sz="1300" dirty="0"/>
-          </a:p>
-          <a:p>
-            <a:pPr lvl="1" indent="0" marL="0">
-              <a:spcAft>
-                <a:spcPts val="300"/>
-              </a:spcAft>
-              <a:buNone/>
-            </a:pPr>
-            <a:r>
-              <a:rPr lang="en-US" sz="1100" i="1" dirty="0">
-                <a:solidFill>
-                  <a:srgbClr val="6B7280"/>
-                </a:solidFill>
-                <a:latin typeface="Calibri" pitchFamily="34" charset="0"/>
-                <a:ea typeface="Calibri" pitchFamily="34" charset="-122"/>
-                <a:cs typeface="Calibri" pitchFamily="34" charset="-120"/>
-              </a:rPr>
-              <a:t>Tamtaminfo · 19/10 18h UTC · niveau élevé · Non confirmé</a:t>
-            </a:r>
-            <a:endParaRPr lang="en-US" sz="1300" dirty="0"/>
-          </a:p>
         </p:txBody>
       </p:sp>
       <p:sp>
         <p:nvSpPr>
-          <p:cNvPr id="7" name="Shape 5"/>
+          <p:cNvPr id="11" name="Shape 9"/>
           <p:cNvSpPr/>
           <p:nvPr/>
         </p:nvSpPr>
@@ -3843,7 +3996,7 @@
       </p:sp>
       <p:sp>
         <p:nvSpPr>
-          <p:cNvPr id="8" name="Text 6"/>
+          <p:cNvPr id="12" name="Text 10"/>
           <p:cNvSpPr/>
           <p:nvPr/>
         </p:nvSpPr>
@@ -3882,7 +4035,7 @@
       </p:sp>
       <p:sp>
         <p:nvSpPr>
-          <p:cNvPr id="9" name="Text 7"/>
+          <p:cNvPr id="13" name="Text 11"/>
           <p:cNvSpPr/>
           <p:nvPr/>
         </p:nvSpPr>
@@ -4001,7 +4154,7 @@
                 <a:ea typeface="Calibri" pitchFamily="34" charset="-122"/>
                 <a:cs typeface="Calibri" pitchFamily="34" charset="-120"/>
               </a:rPr>
-              <a:t>2 fait(s) au-dessus du normal dans les 36 dernières heures.</a:t>
+              <a:t>1 fait(s) au-dessus du normal dans les 36 dernières heures.</a:t>
             </a:r>
             <a:endParaRPr lang="en-US" sz="1200" dirty="0"/>
           </a:p>
@@ -4009,7 +4162,7 @@
       </p:sp>
       <p:pic>
         <p:nvPicPr>
-          <p:cNvPr id="10" name="Image 0" descr="/home/runner/work/SentiqS/SentiqS/scripts/assets/grsci/logo-grsci.png">    </p:cNvPr>
+          <p:cNvPr id="14" name="Image 0" descr="/home/runner/work/SentiqS/SentiqS/scripts/assets/grsci/logo-grsci.png">    </p:cNvPr>
           <p:cNvPicPr>
             <a:picLocks noChangeAspect="1"/>
           </p:cNvPicPr>
@@ -4033,7 +4186,7 @@
       </p:pic>
       <p:sp>
         <p:nvSpPr>
-          <p:cNvPr id="11" name="Text 8"/>
+          <p:cNvPr id="15" name="Text 12"/>
           <p:cNvSpPr/>
           <p:nvPr/>
         </p:nvSpPr>
@@ -4202,7 +4355,7 @@
       </p:sp>
       <p:sp>
         <p:nvSpPr>
-          <p:cNvPr id="12" name="Text 9"/>
+          <p:cNvPr id="16" name="Text 13"/>
           <p:cNvSpPr/>
           <p:nvPr/>
         </p:nvSpPr>
@@ -4291,17 +4444,17 @@
               <a:buNone/>
             </a:pPr>
             <a:r>
-              <a:rPr lang="en-US" sz="2200" b="1" dirty="0">
+              <a:rPr lang="en-US" sz="2400" dirty="0">
                 <a:solidFill>
                   <a:srgbClr val="FFFFFF"/>
                 </a:solidFill>
-                <a:latin typeface="Calibri" pitchFamily="34" charset="0"/>
-                <a:ea typeface="Calibri" pitchFamily="34" charset="-122"/>
-                <a:cs typeface="Calibri" pitchFamily="34" charset="-120"/>
+                <a:latin typeface="Arial Narrow" pitchFamily="34" charset="0"/>
+                <a:ea typeface="Arial Narrow" pitchFamily="34" charset="-122"/>
+                <a:cs typeface="Arial Narrow" pitchFamily="34" charset="-120"/>
               </a:rPr>
               <a:t>I</a:t>
             </a:r>
-            <a:endParaRPr lang="en-US" sz="2200" dirty="0"/>
+            <a:endParaRPr lang="en-US" sz="2400" dirty="0"/>
           </a:p>
         </p:txBody>
       </p:sp>
@@ -4330,13 +4483,13 @@
               <a:buNone/>
             </a:pPr>
             <a:r>
-              <a:rPr lang="en-US" sz="2800" b="1" dirty="0">
+              <a:rPr lang="en-US" sz="2800" u="sng" dirty="0">
                 <a:solidFill>
                   <a:srgbClr val="1F6B5E"/>
                 </a:solidFill>
-                <a:latin typeface="Calibri" pitchFamily="34" charset="0"/>
-                <a:ea typeface="Calibri" pitchFamily="34" charset="-122"/>
-                <a:cs typeface="Calibri" pitchFamily="34" charset="-120"/>
+                <a:latin typeface="Arial Narrow" pitchFamily="34" charset="0"/>
+                <a:ea typeface="Arial Narrow" pitchFamily="34" charset="-122"/>
+                <a:cs typeface="Arial Narrow" pitchFamily="34" charset="-120"/>
               </a:rPr>
               <a:t>Ghana : situation au 21/10/26</a:t>
             </a:r>
@@ -4347,6 +4500,103 @@
       <p:sp>
         <p:nvSpPr>
           <p:cNvPr id="4" name="Shape 2"/>
+          <p:cNvSpPr/>
+          <p:nvPr/>
+        </p:nvSpPr>
+        <p:spPr>
+          <a:xfrm>
+            <a:off x="10881360" y="274320"/>
+            <a:ext cx="905256" cy="188976"/>
+          </a:xfrm>
+          <a:prstGeom prst="rect">
+            <a:avLst/>
+          </a:prstGeom>
+          <a:solidFill>
+            <a:srgbClr val="CE1126"/>
+          </a:solidFill>
+          <a:ln w="12700">
+            <a:solidFill>
+              <a:srgbClr val="CE1126"/>
+            </a:solidFill>
+            <a:prstDash val="solid"/>
+          </a:ln>
+        </p:spPr>
+      </p:sp>
+      <p:sp>
+        <p:nvSpPr>
+          <p:cNvPr id="5" name="Shape 3"/>
+          <p:cNvSpPr/>
+          <p:nvPr/>
+        </p:nvSpPr>
+        <p:spPr>
+          <a:xfrm>
+            <a:off x="10881360" y="463296"/>
+            <a:ext cx="905256" cy="188976"/>
+          </a:xfrm>
+          <a:prstGeom prst="rect">
+            <a:avLst/>
+          </a:prstGeom>
+          <a:solidFill>
+            <a:srgbClr val="FCD116"/>
+          </a:solidFill>
+          <a:ln w="12700">
+            <a:solidFill>
+              <a:srgbClr val="FCD116"/>
+            </a:solidFill>
+            <a:prstDash val="solid"/>
+          </a:ln>
+        </p:spPr>
+      </p:sp>
+      <p:sp>
+        <p:nvSpPr>
+          <p:cNvPr id="6" name="Shape 4"/>
+          <p:cNvSpPr/>
+          <p:nvPr/>
+        </p:nvSpPr>
+        <p:spPr>
+          <a:xfrm>
+            <a:off x="10881360" y="652272"/>
+            <a:ext cx="905256" cy="188976"/>
+          </a:xfrm>
+          <a:prstGeom prst="rect">
+            <a:avLst/>
+          </a:prstGeom>
+          <a:solidFill>
+            <a:srgbClr val="006B3F"/>
+          </a:solidFill>
+          <a:ln w="12700">
+            <a:solidFill>
+              <a:srgbClr val="006B3F"/>
+            </a:solidFill>
+            <a:prstDash val="solid"/>
+          </a:ln>
+        </p:spPr>
+      </p:sp>
+      <p:sp>
+        <p:nvSpPr>
+          <p:cNvPr id="7" name="Shape 5"/>
+          <p:cNvSpPr/>
+          <p:nvPr/>
+        </p:nvSpPr>
+        <p:spPr>
+          <a:xfrm>
+            <a:off x="10881360" y="274320"/>
+            <a:ext cx="905256" cy="566928"/>
+          </a:xfrm>
+          <a:prstGeom prst="rect">
+            <a:avLst/>
+          </a:prstGeom>
+          <a:ln w="6350">
+            <a:solidFill>
+              <a:srgbClr val="1F2937"/>
+            </a:solidFill>
+            <a:prstDash val="solid"/>
+          </a:ln>
+        </p:spPr>
+      </p:sp>
+      <p:sp>
+        <p:nvSpPr>
+          <p:cNvPr id="8" name="Shape 6"/>
           <p:cNvSpPr/>
           <p:nvPr/>
         </p:nvSpPr>
@@ -4369,7 +4619,7 @@
       </p:sp>
       <p:sp>
         <p:nvSpPr>
-          <p:cNvPr id="5" name="Text 3"/>
+          <p:cNvPr id="9" name="Text 7"/>
           <p:cNvSpPr/>
           <p:nvPr/>
         </p:nvSpPr>
@@ -4410,7 +4660,7 @@
       </p:sp>
       <p:sp>
         <p:nvSpPr>
-          <p:cNvPr id="6" name="Text 4"/>
+          <p:cNvPr id="10" name="Text 8"/>
           <p:cNvSpPr/>
           <p:nvPr/>
         </p:nvSpPr>
@@ -4445,7 +4695,7 @@
                 <a:ea typeface="Calibri" pitchFamily="34" charset="-122"/>
                 <a:cs typeface="Calibri" pitchFamily="34" charset="-120"/>
               </a:rPr>
-              <a:t>ECG to begin nationwide meter audit exercise</a:t>
+              <a:t>Four pupils killed as van crashes into children in Aboabo</a:t>
             </a:r>
             <a:endParaRPr lang="en-US" sz="1300" dirty="0"/>
           </a:p>
@@ -4465,15 +4715,56 @@
                 <a:ea typeface="Calibri" pitchFamily="34" charset="-122"/>
                 <a:cs typeface="Calibri" pitchFamily="34" charset="-120"/>
               </a:rPr>
-              <a:t>Ghanaian Times · 20/10 14h UTC · niveau modéré · Non confirmé</a:t>
+              <a:t>JoyOnline · 21/10 06h UTC · niveau critique · Probable</a:t>
             </a:r>
             <a:endParaRPr lang="en-US" sz="1300" dirty="0"/>
           </a:p>
+          <a:p>
+            <a:pPr marL="342900" indent="-342900">
+              <a:spcAft>
+                <a:spcPts val="300"/>
+              </a:spcAft>
+              <a:buSzPct val="100000"/>
+              <a:buChar char="✓"/>
+            </a:pPr>
+            <a:r>
+              <a:rPr lang="en-US" sz="1300" b="1" dirty="0">
+                <a:solidFill>
+                  <a:srgbClr val="1F2937"/>
+                </a:solidFill>
+                <a:latin typeface="Calibri" pitchFamily="34" charset="0"/>
+                <a:ea typeface="Calibri" pitchFamily="34" charset="-122"/>
+                <a:cs typeface="Calibri" pitchFamily="34" charset="-120"/>
+              </a:rPr>
+              <a:t>Women groups condemn Obuasi SHTS sexual abuse scandal</a:t>
+            </a:r>
+            <a:endParaRPr lang="en-US" sz="1300" dirty="0"/>
+          </a:p>
+          <a:p>
+            <a:pPr lvl="1" indent="0" marL="0">
+              <a:spcAft>
+                <a:spcPts val="300"/>
+              </a:spcAft>
+              <a:buNone/>
+            </a:pPr>
+            <a:r>
+              <a:rPr lang="en-US" sz="1100" i="1" dirty="0">
+                <a:solidFill>
+                  <a:srgbClr val="6B7280"/>
+                </a:solidFill>
+                <a:latin typeface="Calibri" pitchFamily="34" charset="0"/>
+                <a:ea typeface="Calibri" pitchFamily="34" charset="-122"/>
+                <a:cs typeface="Calibri" pitchFamily="34" charset="-120"/>
+              </a:rPr>
+              <a:t>Ghana Business News · 21/10 06h UTC · niveau modéré · Non confirmé</a:t>
+            </a:r>
+            <a:endParaRPr lang="en-US" sz="1300" dirty="0"/>
+          </a:p>
         </p:txBody>
       </p:sp>
       <p:sp>
         <p:nvSpPr>
-          <p:cNvPr id="7" name="Shape 5"/>
+          <p:cNvPr id="11" name="Shape 9"/>
           <p:cNvSpPr/>
           <p:nvPr/>
         </p:nvSpPr>
@@ -4498,7 +4789,7 @@
       </p:sp>
       <p:sp>
         <p:nvSpPr>
-          <p:cNvPr id="8" name="Text 6"/>
+          <p:cNvPr id="12" name="Text 10"/>
           <p:cNvSpPr/>
           <p:nvPr/>
         </p:nvSpPr>
@@ -4537,7 +4828,7 @@
       </p:sp>
       <p:sp>
         <p:nvSpPr>
-          <p:cNvPr id="9" name="Text 7"/>
+          <p:cNvPr id="13" name="Text 11"/>
           <p:cNvSpPr/>
           <p:nvPr/>
         </p:nvSpPr>
@@ -4635,7 +4926,7 @@
                 <a:ea typeface="Calibri" pitchFamily="34" charset="-122"/>
                 <a:cs typeface="Calibri" pitchFamily="34" charset="-120"/>
               </a:rPr>
-              <a:t>1 fait(s) au-dessus du normal dans les 36 dernières heures.</a:t>
+              <a:t>2 fait(s) au-dessus du normal dans les 36 dernières heures.</a:t>
             </a:r>
             <a:endParaRPr lang="en-US" sz="1200" dirty="0"/>
           </a:p>
@@ -4643,7 +4934,7 @@
       </p:sp>
       <p:pic>
         <p:nvPicPr>
-          <p:cNvPr id="10" name="Image 0" descr="/home/runner/work/SentiqS/SentiqS/scripts/assets/grsci/logo-grsci.png">    </p:cNvPr>
+          <p:cNvPr id="14" name="Image 0" descr="/home/runner/work/SentiqS/SentiqS/scripts/assets/grsci/logo-grsci.png">    </p:cNvPr>
           <p:cNvPicPr>
             <a:picLocks noChangeAspect="1"/>
           </p:cNvPicPr>
@@ -4667,7 +4958,7 @@
       </p:pic>
       <p:sp>
         <p:nvSpPr>
-          <p:cNvPr id="11" name="Text 8"/>
+          <p:cNvPr id="15" name="Text 12"/>
           <p:cNvSpPr/>
           <p:nvPr/>
         </p:nvSpPr>
@@ -4836,7 +5127,7 @@
       </p:sp>
       <p:sp>
         <p:nvSpPr>
-          <p:cNvPr id="12" name="Text 9"/>
+          <p:cNvPr id="16" name="Text 13"/>
           <p:cNvSpPr/>
           <p:nvPr/>
         </p:nvSpPr>
@@ -4925,17 +5216,17 @@
               <a:buNone/>
             </a:pPr>
             <a:r>
-              <a:rPr lang="en-US" sz="2200" b="1" dirty="0">
+              <a:rPr lang="en-US" sz="2400" dirty="0">
                 <a:solidFill>
                   <a:srgbClr val="FFFFFF"/>
                 </a:solidFill>
-                <a:latin typeface="Calibri" pitchFamily="34" charset="0"/>
-                <a:ea typeface="Calibri" pitchFamily="34" charset="-122"/>
-                <a:cs typeface="Calibri" pitchFamily="34" charset="-120"/>
+                <a:latin typeface="Arial Narrow" pitchFamily="34" charset="0"/>
+                <a:ea typeface="Arial Narrow" pitchFamily="34" charset="-122"/>
+                <a:cs typeface="Arial Narrow" pitchFamily="34" charset="-120"/>
               </a:rPr>
               <a:t>I</a:t>
             </a:r>
-            <a:endParaRPr lang="en-US" sz="2200" dirty="0"/>
+            <a:endParaRPr lang="en-US" sz="2400" dirty="0"/>
           </a:p>
         </p:txBody>
       </p:sp>
@@ -4964,13 +5255,13 @@
               <a:buNone/>
             </a:pPr>
             <a:r>
-              <a:rPr lang="en-US" sz="2800" b="1" dirty="0">
+              <a:rPr lang="en-US" sz="2800" u="sng" dirty="0">
                 <a:solidFill>
                   <a:srgbClr val="1F6B5E"/>
                 </a:solidFill>
-                <a:latin typeface="Calibri" pitchFamily="34" charset="0"/>
-                <a:ea typeface="Calibri" pitchFamily="34" charset="-122"/>
-                <a:cs typeface="Calibri" pitchFamily="34" charset="-120"/>
+                <a:latin typeface="Arial Narrow" pitchFamily="34" charset="0"/>
+                <a:ea typeface="Arial Narrow" pitchFamily="34" charset="-122"/>
+                <a:cs typeface="Arial Narrow" pitchFamily="34" charset="-120"/>
               </a:rPr>
               <a:t>Togo : situation au 21/10/26</a:t>
             </a:r>
@@ -4981,6 +5272,153 @@
       <p:sp>
         <p:nvSpPr>
           <p:cNvPr id="4" name="Shape 2"/>
+          <p:cNvSpPr/>
+          <p:nvPr/>
+        </p:nvSpPr>
+        <p:spPr>
+          <a:xfrm>
+            <a:off x="10881360" y="274320"/>
+            <a:ext cx="905256" cy="113386"/>
+          </a:xfrm>
+          <a:prstGeom prst="rect">
+            <a:avLst/>
+          </a:prstGeom>
+          <a:solidFill>
+            <a:srgbClr val="006A4E"/>
+          </a:solidFill>
+          <a:ln w="12700">
+            <a:solidFill>
+              <a:srgbClr val="006A4E"/>
+            </a:solidFill>
+            <a:prstDash val="solid"/>
+          </a:ln>
+        </p:spPr>
+      </p:sp>
+      <p:sp>
+        <p:nvSpPr>
+          <p:cNvPr id="5" name="Shape 3"/>
+          <p:cNvSpPr/>
+          <p:nvPr/>
+        </p:nvSpPr>
+        <p:spPr>
+          <a:xfrm>
+            <a:off x="10881360" y="387706"/>
+            <a:ext cx="905256" cy="113386"/>
+          </a:xfrm>
+          <a:prstGeom prst="rect">
+            <a:avLst/>
+          </a:prstGeom>
+          <a:solidFill>
+            <a:srgbClr val="FFCE00"/>
+          </a:solidFill>
+          <a:ln w="12700">
+            <a:solidFill>
+              <a:srgbClr val="FFCE00"/>
+            </a:solidFill>
+            <a:prstDash val="solid"/>
+          </a:ln>
+        </p:spPr>
+      </p:sp>
+      <p:sp>
+        <p:nvSpPr>
+          <p:cNvPr id="6" name="Shape 4"/>
+          <p:cNvSpPr/>
+          <p:nvPr/>
+        </p:nvSpPr>
+        <p:spPr>
+          <a:xfrm>
+            <a:off x="10881360" y="501091"/>
+            <a:ext cx="905256" cy="113386"/>
+          </a:xfrm>
+          <a:prstGeom prst="rect">
+            <a:avLst/>
+          </a:prstGeom>
+          <a:solidFill>
+            <a:srgbClr val="006A4E"/>
+          </a:solidFill>
+          <a:ln w="12700">
+            <a:solidFill>
+              <a:srgbClr val="006A4E"/>
+            </a:solidFill>
+            <a:prstDash val="solid"/>
+          </a:ln>
+        </p:spPr>
+      </p:sp>
+      <p:sp>
+        <p:nvSpPr>
+          <p:cNvPr id="7" name="Shape 5"/>
+          <p:cNvSpPr/>
+          <p:nvPr/>
+        </p:nvSpPr>
+        <p:spPr>
+          <a:xfrm>
+            <a:off x="10881360" y="614477"/>
+            <a:ext cx="905256" cy="113386"/>
+          </a:xfrm>
+          <a:prstGeom prst="rect">
+            <a:avLst/>
+          </a:prstGeom>
+          <a:solidFill>
+            <a:srgbClr val="FFCE00"/>
+          </a:solidFill>
+          <a:ln w="12700">
+            <a:solidFill>
+              <a:srgbClr val="FFCE00"/>
+            </a:solidFill>
+            <a:prstDash val="solid"/>
+          </a:ln>
+        </p:spPr>
+      </p:sp>
+      <p:sp>
+        <p:nvSpPr>
+          <p:cNvPr id="8" name="Shape 6"/>
+          <p:cNvSpPr/>
+          <p:nvPr/>
+        </p:nvSpPr>
+        <p:spPr>
+          <a:xfrm>
+            <a:off x="10881360" y="727862"/>
+            <a:ext cx="905256" cy="113386"/>
+          </a:xfrm>
+          <a:prstGeom prst="rect">
+            <a:avLst/>
+          </a:prstGeom>
+          <a:solidFill>
+            <a:srgbClr val="006A4E"/>
+          </a:solidFill>
+          <a:ln w="12700">
+            <a:solidFill>
+              <a:srgbClr val="006A4E"/>
+            </a:solidFill>
+            <a:prstDash val="solid"/>
+          </a:ln>
+        </p:spPr>
+      </p:sp>
+      <p:sp>
+        <p:nvSpPr>
+          <p:cNvPr id="9" name="Shape 7"/>
+          <p:cNvSpPr/>
+          <p:nvPr/>
+        </p:nvSpPr>
+        <p:spPr>
+          <a:xfrm>
+            <a:off x="10881360" y="274320"/>
+            <a:ext cx="905256" cy="566928"/>
+          </a:xfrm>
+          <a:prstGeom prst="rect">
+            <a:avLst/>
+          </a:prstGeom>
+          <a:ln w="6350">
+            <a:solidFill>
+              <a:srgbClr val="1F2937"/>
+            </a:solidFill>
+            <a:prstDash val="solid"/>
+          </a:ln>
+        </p:spPr>
+      </p:sp>
+      <p:sp>
+        <p:nvSpPr>
+          <p:cNvPr id="10" name="Shape 8"/>
           <p:cNvSpPr/>
           <p:nvPr/>
         </p:nvSpPr>
@@ -5003,7 +5441,7 @@
       </p:sp>
       <p:sp>
         <p:nvSpPr>
-          <p:cNvPr id="5" name="Text 3"/>
+          <p:cNvPr id="11" name="Text 9"/>
           <p:cNvSpPr/>
           <p:nvPr/>
         </p:nvSpPr>
@@ -5044,7 +5482,7 @@
       </p:sp>
       <p:sp>
         <p:nvSpPr>
-          <p:cNvPr id="6" name="Text 4"/>
+          <p:cNvPr id="12" name="Text 10"/>
           <p:cNvSpPr/>
           <p:nvPr/>
         </p:nvSpPr>
@@ -5120,7 +5558,7 @@
                 <a:ea typeface="Calibri" pitchFamily="34" charset="-122"/>
                 <a:cs typeface="Calibri" pitchFamily="34" charset="-120"/>
               </a:rPr>
-              <a:t>Systèmes agroalimentaires : Le Togo engagé à traduire la Déclaration de Kampala en actions concrètes</a:t>
+              <a:t>Togo- Les leaders du CNCC invités à reporter leur meeting</a:t>
             </a:r>
             <a:endParaRPr lang="en-US" sz="1300" dirty="0"/>
           </a:p>
@@ -5140,7 +5578,7 @@
                 <a:ea typeface="Calibri" pitchFamily="34" charset="-122"/>
                 <a:cs typeface="Calibri" pitchFamily="34" charset="-120"/>
               </a:rPr>
-              <a:t>Togo-Presse · 20/10 20h UTC · niveau modéré · Non confirmé</a:t>
+              <a:t>Icilome · 21/10 06h UTC · niveau modéré · Non confirmé</a:t>
             </a:r>
             <a:endParaRPr lang="en-US" sz="1300" dirty="0"/>
           </a:p>
@@ -5161,7 +5599,7 @@
                 <a:ea typeface="Calibri" pitchFamily="34" charset="-122"/>
                 <a:cs typeface="Calibri" pitchFamily="34" charset="-120"/>
               </a:rPr>
-              <a:t>Pintade, sécurité alimentaire et revenus</a:t>
+              <a:t>Systèmes agroalimentaires : Le Togo engagé à traduire la Déclaration de Kampala en actions concrètes</a:t>
             </a:r>
             <a:endParaRPr lang="en-US" sz="1300" dirty="0"/>
           </a:p>
@@ -5181,15 +5619,56 @@
                 <a:ea typeface="Calibri" pitchFamily="34" charset="-122"/>
                 <a:cs typeface="Calibri" pitchFamily="34" charset="-120"/>
               </a:rPr>
-              <a:t>AllAfrica (TG) · 20/10 09h UTC · niveau modéré · Probable</a:t>
+              <a:t>Togo-Presse · 20/10 20h UTC · niveau modéré · Non confirmé</a:t>
             </a:r>
             <a:endParaRPr lang="en-US" sz="1300" dirty="0"/>
           </a:p>
+          <a:p>
+            <a:pPr marL="342900" indent="-342900">
+              <a:spcAft>
+                <a:spcPts val="300"/>
+              </a:spcAft>
+              <a:buSzPct val="100000"/>
+              <a:buChar char="✓"/>
+            </a:pPr>
+            <a:r>
+              <a:rPr lang="en-US" sz="1300" b="1" dirty="0">
+                <a:solidFill>
+                  <a:srgbClr val="1F2937"/>
+                </a:solidFill>
+                <a:latin typeface="Calibri" pitchFamily="34" charset="0"/>
+                <a:ea typeface="Calibri" pitchFamily="34" charset="-122"/>
+                <a:cs typeface="Calibri" pitchFamily="34" charset="-120"/>
+              </a:rPr>
+              <a:t>Lomé : une flèche verte aux feux tricolores pour fluidifier la circulation et sécuriser les carrefours</a:t>
+            </a:r>
+            <a:endParaRPr lang="en-US" sz="1300" dirty="0"/>
+          </a:p>
+          <a:p>
+            <a:pPr lvl="1" indent="0" marL="0">
+              <a:spcAft>
+                <a:spcPts val="300"/>
+              </a:spcAft>
+              <a:buNone/>
+            </a:pPr>
+            <a:r>
+              <a:rPr lang="en-US" sz="1100" i="1" dirty="0">
+                <a:solidFill>
+                  <a:srgbClr val="6B7280"/>
+                </a:solidFill>
+                <a:latin typeface="Calibri" pitchFamily="34" charset="0"/>
+                <a:ea typeface="Calibri" pitchFamily="34" charset="-122"/>
+                <a:cs typeface="Calibri" pitchFamily="34" charset="-120"/>
+              </a:rPr>
+              <a:t>Le Nouveau Reporter · 20/10 16h UTC · niveau modéré · Non confirmé</a:t>
+            </a:r>
+            <a:endParaRPr lang="en-US" sz="1300" dirty="0"/>
+          </a:p>
         </p:txBody>
       </p:sp>
       <p:sp>
         <p:nvSpPr>
-          <p:cNvPr id="7" name="Shape 5"/>
+          <p:cNvPr id="13" name="Shape 11"/>
           <p:cNvSpPr/>
           <p:nvPr/>
         </p:nvSpPr>
@@ -5214,7 +5693,7 @@
       </p:sp>
       <p:sp>
         <p:nvSpPr>
-          <p:cNvPr id="8" name="Text 6"/>
+          <p:cNvPr id="14" name="Text 12"/>
           <p:cNvSpPr/>
           <p:nvPr/>
         </p:nvSpPr>
@@ -5253,7 +5732,7 @@
       </p:sp>
       <p:sp>
         <p:nvSpPr>
-          <p:cNvPr id="9" name="Text 7"/>
+          <p:cNvPr id="15" name="Text 13"/>
           <p:cNvSpPr/>
           <p:nvPr/>
         </p:nvSpPr>
@@ -5351,7 +5830,7 @@
                 <a:ea typeface="Calibri" pitchFamily="34" charset="-122"/>
                 <a:cs typeface="Calibri" pitchFamily="34" charset="-120"/>
               </a:rPr>
-              <a:t>3 fait(s) au-dessus du normal dans les 36 dernières heures.</a:t>
+              <a:t>5 fait(s) au-dessus du normal dans les 36 dernières heures.</a:t>
             </a:r>
             <a:endParaRPr lang="en-US" sz="1200" dirty="0"/>
           </a:p>
@@ -5359,7 +5838,7 @@
       </p:sp>
       <p:pic>
         <p:nvPicPr>
-          <p:cNvPr id="10" name="Image 0" descr="/home/runner/work/SentiqS/SentiqS/scripts/assets/grsci/logo-grsci.png">    </p:cNvPr>
+          <p:cNvPr id="16" name="Image 0" descr="/home/runner/work/SentiqS/SentiqS/scripts/assets/grsci/logo-grsci.png">    </p:cNvPr>
           <p:cNvPicPr>
             <a:picLocks noChangeAspect="1"/>
           </p:cNvPicPr>
@@ -5383,7 +5862,7 @@
       </p:pic>
       <p:sp>
         <p:nvSpPr>
-          <p:cNvPr id="11" name="Text 8"/>
+          <p:cNvPr id="17" name="Text 14"/>
           <p:cNvSpPr/>
           <p:nvPr/>
         </p:nvSpPr>
@@ -5552,7 +6031,7 @@
       </p:sp>
       <p:sp>
         <p:nvSpPr>
-          <p:cNvPr id="12" name="Text 9"/>
+          <p:cNvPr id="18" name="Text 15"/>
           <p:cNvSpPr/>
           <p:nvPr/>
         </p:nvSpPr>
@@ -5641,17 +6120,17 @@
               <a:buNone/>
             </a:pPr>
             <a:r>
-              <a:rPr lang="en-US" sz="2200" b="1" dirty="0">
+              <a:rPr lang="en-US" sz="2400" dirty="0">
                 <a:solidFill>
                   <a:srgbClr val="FFFFFF"/>
                 </a:solidFill>
-                <a:latin typeface="Calibri" pitchFamily="34" charset="0"/>
-                <a:ea typeface="Calibri" pitchFamily="34" charset="-122"/>
-                <a:cs typeface="Calibri" pitchFamily="34" charset="-120"/>
+                <a:latin typeface="Arial Narrow" pitchFamily="34" charset="0"/>
+                <a:ea typeface="Arial Narrow" pitchFamily="34" charset="-122"/>
+                <a:cs typeface="Arial Narrow" pitchFamily="34" charset="-120"/>
               </a:rPr>
               <a:t>I</a:t>
             </a:r>
-            <a:endParaRPr lang="en-US" sz="2200" dirty="0"/>
+            <a:endParaRPr lang="en-US" sz="2400" dirty="0"/>
           </a:p>
         </p:txBody>
       </p:sp>
@@ -5680,13 +6159,13 @@
               <a:buNone/>
             </a:pPr>
             <a:r>
-              <a:rPr lang="en-US" sz="2800" b="1" dirty="0">
+              <a:rPr lang="en-US" sz="2800" u="sng" dirty="0">
                 <a:solidFill>
                   <a:srgbClr val="1F6B5E"/>
                 </a:solidFill>
-                <a:latin typeface="Calibri" pitchFamily="34" charset="0"/>
-                <a:ea typeface="Calibri" pitchFamily="34" charset="-122"/>
-                <a:cs typeface="Calibri" pitchFamily="34" charset="-120"/>
+                <a:latin typeface="Arial Narrow" pitchFamily="34" charset="0"/>
+                <a:ea typeface="Arial Narrow" pitchFamily="34" charset="-122"/>
+                <a:cs typeface="Arial Narrow" pitchFamily="34" charset="-120"/>
               </a:rPr>
               <a:t>Bénin : situation au 21/10/26</a:t>
             </a:r>
@@ -5697,6 +6176,103 @@
       <p:sp>
         <p:nvSpPr>
           <p:cNvPr id="4" name="Shape 2"/>
+          <p:cNvSpPr/>
+          <p:nvPr/>
+        </p:nvSpPr>
+        <p:spPr>
+          <a:xfrm>
+            <a:off x="10881360" y="274320"/>
+            <a:ext cx="362102" cy="566928"/>
+          </a:xfrm>
+          <a:prstGeom prst="rect">
+            <a:avLst/>
+          </a:prstGeom>
+          <a:solidFill>
+            <a:srgbClr val="008751"/>
+          </a:solidFill>
+          <a:ln w="12700">
+            <a:solidFill>
+              <a:srgbClr val="008751"/>
+            </a:solidFill>
+            <a:prstDash val="solid"/>
+          </a:ln>
+        </p:spPr>
+      </p:sp>
+      <p:sp>
+        <p:nvSpPr>
+          <p:cNvPr id="5" name="Shape 3"/>
+          <p:cNvSpPr/>
+          <p:nvPr/>
+        </p:nvSpPr>
+        <p:spPr>
+          <a:xfrm>
+            <a:off x="11243462" y="274320"/>
+            <a:ext cx="543154" cy="283464"/>
+          </a:xfrm>
+          <a:prstGeom prst="rect">
+            <a:avLst/>
+          </a:prstGeom>
+          <a:solidFill>
+            <a:srgbClr val="FCD116"/>
+          </a:solidFill>
+          <a:ln w="12700">
+            <a:solidFill>
+              <a:srgbClr val="FCD116"/>
+            </a:solidFill>
+            <a:prstDash val="solid"/>
+          </a:ln>
+        </p:spPr>
+      </p:sp>
+      <p:sp>
+        <p:nvSpPr>
+          <p:cNvPr id="6" name="Shape 4"/>
+          <p:cNvSpPr/>
+          <p:nvPr/>
+        </p:nvSpPr>
+        <p:spPr>
+          <a:xfrm>
+            <a:off x="11243462" y="557784"/>
+            <a:ext cx="543154" cy="283464"/>
+          </a:xfrm>
+          <a:prstGeom prst="rect">
+            <a:avLst/>
+          </a:prstGeom>
+          <a:solidFill>
+            <a:srgbClr val="E8112D"/>
+          </a:solidFill>
+          <a:ln w="12700">
+            <a:solidFill>
+              <a:srgbClr val="E8112D"/>
+            </a:solidFill>
+            <a:prstDash val="solid"/>
+          </a:ln>
+        </p:spPr>
+      </p:sp>
+      <p:sp>
+        <p:nvSpPr>
+          <p:cNvPr id="7" name="Shape 5"/>
+          <p:cNvSpPr/>
+          <p:nvPr/>
+        </p:nvSpPr>
+        <p:spPr>
+          <a:xfrm>
+            <a:off x="10881360" y="274320"/>
+            <a:ext cx="905256" cy="566928"/>
+          </a:xfrm>
+          <a:prstGeom prst="rect">
+            <a:avLst/>
+          </a:prstGeom>
+          <a:ln w="6350">
+            <a:solidFill>
+              <a:srgbClr val="1F2937"/>
+            </a:solidFill>
+            <a:prstDash val="solid"/>
+          </a:ln>
+        </p:spPr>
+      </p:sp>
+      <p:sp>
+        <p:nvSpPr>
+          <p:cNvPr id="8" name="Shape 6"/>
           <p:cNvSpPr/>
           <p:nvPr/>
         </p:nvSpPr>
@@ -5719,7 +6295,7 @@
       </p:sp>
       <p:sp>
         <p:nvSpPr>
-          <p:cNvPr id="5" name="Text 3"/>
+          <p:cNvPr id="9" name="Text 7"/>
           <p:cNvSpPr/>
           <p:nvPr/>
         </p:nvSpPr>
@@ -5760,7 +6336,7 @@
       </p:sp>
       <p:sp>
         <p:nvSpPr>
-          <p:cNvPr id="6" name="Text 4"/>
+          <p:cNvPr id="10" name="Text 8"/>
           <p:cNvSpPr/>
           <p:nvPr/>
         </p:nvSpPr>
@@ -5823,7 +6399,7 @@
       </p:sp>
       <p:sp>
         <p:nvSpPr>
-          <p:cNvPr id="7" name="Shape 5"/>
+          <p:cNvPr id="11" name="Shape 9"/>
           <p:cNvSpPr/>
           <p:nvPr/>
         </p:nvSpPr>
@@ -5848,7 +6424,7 @@
       </p:sp>
       <p:sp>
         <p:nvSpPr>
-          <p:cNvPr id="8" name="Text 6"/>
+          <p:cNvPr id="12" name="Text 10"/>
           <p:cNvSpPr/>
           <p:nvPr/>
         </p:nvSpPr>
@@ -5887,7 +6463,7 @@
       </p:sp>
       <p:sp>
         <p:nvSpPr>
-          <p:cNvPr id="9" name="Text 7"/>
+          <p:cNvPr id="13" name="Text 11"/>
           <p:cNvSpPr/>
           <p:nvPr/>
         </p:nvSpPr>
@@ -6014,7 +6590,7 @@
       </p:sp>
       <p:pic>
         <p:nvPicPr>
-          <p:cNvPr id="10" name="Image 0" descr="/home/runner/work/SentiqS/SentiqS/scripts/assets/grsci/logo-grsci.png">    </p:cNvPr>
+          <p:cNvPr id="14" name="Image 0" descr="/home/runner/work/SentiqS/SentiqS/scripts/assets/grsci/logo-grsci.png">    </p:cNvPr>
           <p:cNvPicPr>
             <a:picLocks noChangeAspect="1"/>
           </p:cNvPicPr>
@@ -6038,7 +6614,7 @@
       </p:pic>
       <p:sp>
         <p:nvSpPr>
-          <p:cNvPr id="11" name="Text 8"/>
+          <p:cNvPr id="15" name="Text 12"/>
           <p:cNvSpPr/>
           <p:nvPr/>
         </p:nvSpPr>
@@ -6207,7 +6783,7 @@
       </p:sp>
       <p:sp>
         <p:nvSpPr>
-          <p:cNvPr id="12" name="Text 9"/>
+          <p:cNvPr id="16" name="Text 13"/>
           <p:cNvSpPr/>
           <p:nvPr/>
         </p:nvSpPr>
@@ -6296,17 +6872,17 @@
               <a:buNone/>
             </a:pPr>
             <a:r>
-              <a:rPr lang="en-US" sz="2200" b="1" dirty="0">
+              <a:rPr lang="en-US" sz="2400" dirty="0">
                 <a:solidFill>
                   <a:srgbClr val="FFFFFF"/>
                 </a:solidFill>
-                <a:latin typeface="Calibri" pitchFamily="34" charset="0"/>
-                <a:ea typeface="Calibri" pitchFamily="34" charset="-122"/>
-                <a:cs typeface="Calibri" pitchFamily="34" charset="-120"/>
+                <a:latin typeface="Arial Narrow" pitchFamily="34" charset="0"/>
+                <a:ea typeface="Arial Narrow" pitchFamily="34" charset="-122"/>
+                <a:cs typeface="Arial Narrow" pitchFamily="34" charset="-120"/>
               </a:rPr>
               <a:t>I</a:t>
             </a:r>
-            <a:endParaRPr lang="en-US" sz="2200" dirty="0"/>
+            <a:endParaRPr lang="en-US" sz="2400" dirty="0"/>
           </a:p>
         </p:txBody>
       </p:sp>
@@ -6335,13 +6911,13 @@
               <a:buNone/>
             </a:pPr>
             <a:r>
-              <a:rPr lang="en-US" sz="2800" b="1" dirty="0">
+              <a:rPr lang="en-US" sz="2800" u="sng" dirty="0">
                 <a:solidFill>
                   <a:srgbClr val="1F6B5E"/>
                 </a:solidFill>
-                <a:latin typeface="Calibri" pitchFamily="34" charset="0"/>
-                <a:ea typeface="Calibri" pitchFamily="34" charset="-122"/>
-                <a:cs typeface="Calibri" pitchFamily="34" charset="-120"/>
+                <a:latin typeface="Arial Narrow" pitchFamily="34" charset="0"/>
+                <a:ea typeface="Arial Narrow" pitchFamily="34" charset="-122"/>
+                <a:cs typeface="Arial Narrow" pitchFamily="34" charset="-120"/>
               </a:rPr>
               <a:t>Guinée : situation au 21/10/26</a:t>
             </a:r>
@@ -6352,6 +6928,103 @@
       <p:sp>
         <p:nvSpPr>
           <p:cNvPr id="4" name="Shape 2"/>
+          <p:cNvSpPr/>
+          <p:nvPr/>
+        </p:nvSpPr>
+        <p:spPr>
+          <a:xfrm>
+            <a:off x="10881360" y="274320"/>
+            <a:ext cx="301752" cy="566928"/>
+          </a:xfrm>
+          <a:prstGeom prst="rect">
+            <a:avLst/>
+          </a:prstGeom>
+          <a:solidFill>
+            <a:srgbClr val="CE1126"/>
+          </a:solidFill>
+          <a:ln w="12700">
+            <a:solidFill>
+              <a:srgbClr val="CE1126"/>
+            </a:solidFill>
+            <a:prstDash val="solid"/>
+          </a:ln>
+        </p:spPr>
+      </p:sp>
+      <p:sp>
+        <p:nvSpPr>
+          <p:cNvPr id="5" name="Shape 3"/>
+          <p:cNvSpPr/>
+          <p:nvPr/>
+        </p:nvSpPr>
+        <p:spPr>
+          <a:xfrm>
+            <a:off x="11183112" y="274320"/>
+            <a:ext cx="301752" cy="566928"/>
+          </a:xfrm>
+          <a:prstGeom prst="rect">
+            <a:avLst/>
+          </a:prstGeom>
+          <a:solidFill>
+            <a:srgbClr val="FCD116"/>
+          </a:solidFill>
+          <a:ln w="12700">
+            <a:solidFill>
+              <a:srgbClr val="FCD116"/>
+            </a:solidFill>
+            <a:prstDash val="solid"/>
+          </a:ln>
+        </p:spPr>
+      </p:sp>
+      <p:sp>
+        <p:nvSpPr>
+          <p:cNvPr id="6" name="Shape 4"/>
+          <p:cNvSpPr/>
+          <p:nvPr/>
+        </p:nvSpPr>
+        <p:spPr>
+          <a:xfrm>
+            <a:off x="11484864" y="274320"/>
+            <a:ext cx="301752" cy="566928"/>
+          </a:xfrm>
+          <a:prstGeom prst="rect">
+            <a:avLst/>
+          </a:prstGeom>
+          <a:solidFill>
+            <a:srgbClr val="009460"/>
+          </a:solidFill>
+          <a:ln w="12700">
+            <a:solidFill>
+              <a:srgbClr val="009460"/>
+            </a:solidFill>
+            <a:prstDash val="solid"/>
+          </a:ln>
+        </p:spPr>
+      </p:sp>
+      <p:sp>
+        <p:nvSpPr>
+          <p:cNvPr id="7" name="Shape 5"/>
+          <p:cNvSpPr/>
+          <p:nvPr/>
+        </p:nvSpPr>
+        <p:spPr>
+          <a:xfrm>
+            <a:off x="10881360" y="274320"/>
+            <a:ext cx="905256" cy="566928"/>
+          </a:xfrm>
+          <a:prstGeom prst="rect">
+            <a:avLst/>
+          </a:prstGeom>
+          <a:ln w="6350">
+            <a:solidFill>
+              <a:srgbClr val="1F2937"/>
+            </a:solidFill>
+            <a:prstDash val="solid"/>
+          </a:ln>
+        </p:spPr>
+      </p:sp>
+      <p:sp>
+        <p:nvSpPr>
+          <p:cNvPr id="8" name="Shape 6"/>
           <p:cNvSpPr/>
           <p:nvPr/>
         </p:nvSpPr>
@@ -6374,7 +7047,7 @@
       </p:sp>
       <p:sp>
         <p:nvSpPr>
-          <p:cNvPr id="5" name="Text 3"/>
+          <p:cNvPr id="9" name="Text 7"/>
           <p:cNvSpPr/>
           <p:nvPr/>
         </p:nvSpPr>
@@ -6415,7 +7088,7 @@
       </p:sp>
       <p:sp>
         <p:nvSpPr>
-          <p:cNvPr id="6" name="Text 4"/>
+          <p:cNvPr id="10" name="Text 8"/>
           <p:cNvSpPr/>
           <p:nvPr/>
         </p:nvSpPr>
@@ -6491,7 +7164,7 @@
                 <a:ea typeface="Calibri" pitchFamily="34" charset="-122"/>
                 <a:cs typeface="Calibri" pitchFamily="34" charset="-120"/>
               </a:rPr>
-              <a:t>Web TV illégales en Guinée : la HAC sort la menace des sanctions</a:t>
+              <a:t>Kindia : un accident de bus fait deux morts et 34 blessés à Séguéya</a:t>
             </a:r>
             <a:endParaRPr lang="en-US" sz="1300" dirty="0"/>
           </a:p>
@@ -6511,7 +7184,7 @@
                 <a:ea typeface="Calibri" pitchFamily="34" charset="-122"/>
                 <a:cs typeface="Calibri" pitchFamily="34" charset="-120"/>
               </a:rPr>
-              <a:t>Guinee7.com · 20/10 11h UTC · niveau élevé · Non confirmé</a:t>
+              <a:t>Guineelive · 19/10 23h UTC · niveau élevé · Non confirmé</a:t>
             </a:r>
             <a:endParaRPr lang="en-US" sz="1300" dirty="0"/>
           </a:p>
@@ -6532,7 +7205,7 @@
                 <a:ea typeface="Calibri" pitchFamily="34" charset="-122"/>
                 <a:cs typeface="Calibri" pitchFamily="34" charset="-120"/>
               </a:rPr>
-              <a:t>Kindia : un accident de bus fait deux morts et 34 blessés à Séguéya</a:t>
+              <a:t>Lélouma : des écoles fermées par manque d’enseignants, plus de 500 élèves privés de scolarité</a:t>
             </a:r>
             <a:endParaRPr lang="en-US" sz="1300" dirty="0"/>
           </a:p>
@@ -6552,7 +7225,7 @@
                 <a:ea typeface="Calibri" pitchFamily="34" charset="-122"/>
                 <a:cs typeface="Calibri" pitchFamily="34" charset="-120"/>
               </a:rPr>
-              <a:t>Guineelive · 19/10 23h UTC · niveau élevé · Non confirmé</a:t>
+              <a:t>Guineematin.com · 20/10 22h UTC · niveau modéré · Non confirmé</a:t>
             </a:r>
             <a:endParaRPr lang="en-US" sz="1300" dirty="0"/>
           </a:p>
@@ -6573,7 +7246,7 @@
                 <a:ea typeface="Calibri" pitchFamily="34" charset="-122"/>
                 <a:cs typeface="Calibri" pitchFamily="34" charset="-120"/>
               </a:rPr>
-              <a:t>Lélouma : des écoles fermées par manque d’enseignants, plus de 500 élèves privés de scolarité</a:t>
+              <a:t>OGP : « Écouter sans perdre de temps », Mohamed Bang’s Bangoura fixe le cap</a:t>
             </a:r>
             <a:endParaRPr lang="en-US" sz="1300" dirty="0"/>
           </a:p>
@@ -6593,7 +7266,7 @@
                 <a:ea typeface="Calibri" pitchFamily="34" charset="-122"/>
                 <a:cs typeface="Calibri" pitchFamily="34" charset="-120"/>
               </a:rPr>
-              <a:t>Guineematin.com · 20/10 22h UTC · niveau modéré · Non confirmé</a:t>
+              <a:t>Guinee7.com · 20/10 14h UTC · niveau modéré · Non confirmé</a:t>
             </a:r>
             <a:endParaRPr lang="en-US" sz="1300" dirty="0"/>
           </a:p>
@@ -6601,7 +7274,7 @@
       </p:sp>
       <p:sp>
         <p:nvSpPr>
-          <p:cNvPr id="7" name="Shape 5"/>
+          <p:cNvPr id="11" name="Shape 9"/>
           <p:cNvSpPr/>
           <p:nvPr/>
         </p:nvSpPr>
@@ -6626,7 +7299,7 @@
       </p:sp>
       <p:sp>
         <p:nvSpPr>
-          <p:cNvPr id="8" name="Text 6"/>
+          <p:cNvPr id="12" name="Text 10"/>
           <p:cNvSpPr/>
           <p:nvPr/>
         </p:nvSpPr>
@@ -6665,7 +7338,7 @@
       </p:sp>
       <p:sp>
         <p:nvSpPr>
-          <p:cNvPr id="9" name="Text 7"/>
+          <p:cNvPr id="13" name="Text 11"/>
           <p:cNvSpPr/>
           <p:nvPr/>
         </p:nvSpPr>
@@ -6763,7 +7436,7 @@
                 <a:ea typeface="Calibri" pitchFamily="34" charset="-122"/>
                 <a:cs typeface="Calibri" pitchFamily="34" charset="-120"/>
               </a:rPr>
-              <a:t>5 fait(s) au-dessus du normal dans les 36 dernières heures.</a:t>
+              <a:t>4 fait(s) au-dessus du normal dans les 36 dernières heures.</a:t>
             </a:r>
             <a:endParaRPr lang="en-US" sz="1200" dirty="0"/>
           </a:p>
@@ -6771,7 +7444,7 @@
       </p:sp>
       <p:pic>
         <p:nvPicPr>
-          <p:cNvPr id="10" name="Image 0" descr="/home/runner/work/SentiqS/SentiqS/scripts/assets/grsci/logo-grsci.png">    </p:cNvPr>
+          <p:cNvPr id="14" name="Image 0" descr="/home/runner/work/SentiqS/SentiqS/scripts/assets/grsci/logo-grsci.png">    </p:cNvPr>
           <p:cNvPicPr>
             <a:picLocks noChangeAspect="1"/>
           </p:cNvPicPr>
@@ -6795,7 +7468,7 @@
       </p:pic>
       <p:sp>
         <p:nvSpPr>
-          <p:cNvPr id="11" name="Text 8"/>
+          <p:cNvPr id="15" name="Text 12"/>
           <p:cNvSpPr/>
           <p:nvPr/>
         </p:nvSpPr>
@@ -6964,7 +7637,7 @@
       </p:sp>
       <p:sp>
         <p:nvSpPr>
-          <p:cNvPr id="12" name="Text 9"/>
+          <p:cNvPr id="16" name="Text 13"/>
           <p:cNvSpPr/>
           <p:nvPr/>
         </p:nvSpPr>
@@ -7053,17 +7726,17 @@
               <a:buNone/>
             </a:pPr>
             <a:r>
-              <a:rPr lang="en-US" sz="2200" b="1" dirty="0">
+              <a:rPr lang="en-US" sz="2400" dirty="0">
                 <a:solidFill>
                   <a:srgbClr val="FFFFFF"/>
                 </a:solidFill>
-                <a:latin typeface="Calibri" pitchFamily="34" charset="0"/>
-                <a:ea typeface="Calibri" pitchFamily="34" charset="-122"/>
-                <a:cs typeface="Calibri" pitchFamily="34" charset="-120"/>
+                <a:latin typeface="Arial Narrow" pitchFamily="34" charset="0"/>
+                <a:ea typeface="Arial Narrow" pitchFamily="34" charset="-122"/>
+                <a:cs typeface="Arial Narrow" pitchFamily="34" charset="-120"/>
               </a:rPr>
               <a:t>I</a:t>
             </a:r>
-            <a:endParaRPr lang="en-US" sz="2200" dirty="0"/>
+            <a:endParaRPr lang="en-US" sz="2400" dirty="0"/>
           </a:p>
         </p:txBody>
       </p:sp>
@@ -7092,13 +7765,13 @@
               <a:buNone/>
             </a:pPr>
             <a:r>
-              <a:rPr lang="en-US" sz="2800" b="1" dirty="0">
+              <a:rPr lang="en-US" sz="2800" u="sng" dirty="0">
                 <a:solidFill>
                   <a:srgbClr val="1F6B5E"/>
                 </a:solidFill>
-                <a:latin typeface="Calibri" pitchFamily="34" charset="0"/>
-                <a:ea typeface="Calibri" pitchFamily="34" charset="-122"/>
-                <a:cs typeface="Calibri" pitchFamily="34" charset="-120"/>
+                <a:latin typeface="Arial Narrow" pitchFamily="34" charset="0"/>
+                <a:ea typeface="Arial Narrow" pitchFamily="34" charset="-122"/>
+                <a:cs typeface="Arial Narrow" pitchFamily="34" charset="-120"/>
               </a:rPr>
               <a:t>Liberia : situation au 21/10/26</a:t>
             </a:r>
@@ -7109,6 +7782,153 @@
       <p:sp>
         <p:nvSpPr>
           <p:cNvPr id="4" name="Shape 2"/>
+          <p:cNvSpPr/>
+          <p:nvPr/>
+        </p:nvSpPr>
+        <p:spPr>
+          <a:xfrm>
+            <a:off x="10881360" y="274320"/>
+            <a:ext cx="905256" cy="113386"/>
+          </a:xfrm>
+          <a:prstGeom prst="rect">
+            <a:avLst/>
+          </a:prstGeom>
+          <a:solidFill>
+            <a:srgbClr val="BF0A30"/>
+          </a:solidFill>
+          <a:ln w="12700">
+            <a:solidFill>
+              <a:srgbClr val="BF0A30"/>
+            </a:solidFill>
+            <a:prstDash val="solid"/>
+          </a:ln>
+        </p:spPr>
+      </p:sp>
+      <p:sp>
+        <p:nvSpPr>
+          <p:cNvPr id="5" name="Shape 3"/>
+          <p:cNvSpPr/>
+          <p:nvPr/>
+        </p:nvSpPr>
+        <p:spPr>
+          <a:xfrm>
+            <a:off x="10881360" y="387706"/>
+            <a:ext cx="905256" cy="113386"/>
+          </a:xfrm>
+          <a:prstGeom prst="rect">
+            <a:avLst/>
+          </a:prstGeom>
+          <a:solidFill>
+            <a:srgbClr val="FFFFFF"/>
+          </a:solidFill>
+          <a:ln w="12700">
+            <a:solidFill>
+              <a:srgbClr val="FFFFFF"/>
+            </a:solidFill>
+            <a:prstDash val="solid"/>
+          </a:ln>
+        </p:spPr>
+      </p:sp>
+      <p:sp>
+        <p:nvSpPr>
+          <p:cNvPr id="6" name="Shape 4"/>
+          <p:cNvSpPr/>
+          <p:nvPr/>
+        </p:nvSpPr>
+        <p:spPr>
+          <a:xfrm>
+            <a:off x="10881360" y="501091"/>
+            <a:ext cx="905256" cy="113386"/>
+          </a:xfrm>
+          <a:prstGeom prst="rect">
+            <a:avLst/>
+          </a:prstGeom>
+          <a:solidFill>
+            <a:srgbClr val="BF0A30"/>
+          </a:solidFill>
+          <a:ln w="12700">
+            <a:solidFill>
+              <a:srgbClr val="BF0A30"/>
+            </a:solidFill>
+            <a:prstDash val="solid"/>
+          </a:ln>
+        </p:spPr>
+      </p:sp>
+      <p:sp>
+        <p:nvSpPr>
+          <p:cNvPr id="7" name="Shape 5"/>
+          <p:cNvSpPr/>
+          <p:nvPr/>
+        </p:nvSpPr>
+        <p:spPr>
+          <a:xfrm>
+            <a:off x="10881360" y="614477"/>
+            <a:ext cx="905256" cy="113386"/>
+          </a:xfrm>
+          <a:prstGeom prst="rect">
+            <a:avLst/>
+          </a:prstGeom>
+          <a:solidFill>
+            <a:srgbClr val="FFFFFF"/>
+          </a:solidFill>
+          <a:ln w="12700">
+            <a:solidFill>
+              <a:srgbClr val="FFFFFF"/>
+            </a:solidFill>
+            <a:prstDash val="solid"/>
+          </a:ln>
+        </p:spPr>
+      </p:sp>
+      <p:sp>
+        <p:nvSpPr>
+          <p:cNvPr id="8" name="Shape 6"/>
+          <p:cNvSpPr/>
+          <p:nvPr/>
+        </p:nvSpPr>
+        <p:spPr>
+          <a:xfrm>
+            <a:off x="10881360" y="727862"/>
+            <a:ext cx="905256" cy="113386"/>
+          </a:xfrm>
+          <a:prstGeom prst="rect">
+            <a:avLst/>
+          </a:prstGeom>
+          <a:solidFill>
+            <a:srgbClr val="BF0A30"/>
+          </a:solidFill>
+          <a:ln w="12700">
+            <a:solidFill>
+              <a:srgbClr val="BF0A30"/>
+            </a:solidFill>
+            <a:prstDash val="solid"/>
+          </a:ln>
+        </p:spPr>
+      </p:sp>
+      <p:sp>
+        <p:nvSpPr>
+          <p:cNvPr id="9" name="Shape 7"/>
+          <p:cNvSpPr/>
+          <p:nvPr/>
+        </p:nvSpPr>
+        <p:spPr>
+          <a:xfrm>
+            <a:off x="10881360" y="274320"/>
+            <a:ext cx="905256" cy="566928"/>
+          </a:xfrm>
+          <a:prstGeom prst="rect">
+            <a:avLst/>
+          </a:prstGeom>
+          <a:ln w="6350">
+            <a:solidFill>
+              <a:srgbClr val="1F2937"/>
+            </a:solidFill>
+            <a:prstDash val="solid"/>
+          </a:ln>
+        </p:spPr>
+      </p:sp>
+      <p:sp>
+        <p:nvSpPr>
+          <p:cNvPr id="10" name="Shape 8"/>
           <p:cNvSpPr/>
           <p:nvPr/>
         </p:nvSpPr>
@@ -7131,7 +7951,7 @@
       </p:sp>
       <p:sp>
         <p:nvSpPr>
-          <p:cNvPr id="5" name="Text 3"/>
+          <p:cNvPr id="11" name="Text 9"/>
           <p:cNvSpPr/>
           <p:nvPr/>
         </p:nvSpPr>
@@ -7172,7 +7992,7 @@
       </p:sp>
       <p:sp>
         <p:nvSpPr>
-          <p:cNvPr id="6" name="Text 4"/>
+          <p:cNvPr id="12" name="Text 10"/>
           <p:cNvSpPr/>
           <p:nvPr/>
         </p:nvSpPr>
@@ -7191,51 +8011,30 @@
           <a:bodyPr wrap="square" rtlCol="0" anchor="t"/>
           <a:lstStyle/>
           <a:p>
-            <a:pPr marL="342900" indent="-342900">
+            <a:pPr indent="0" marL="0">
               <a:spcAft>
                 <a:spcPts val="300"/>
               </a:spcAft>
-              <a:buSzPct val="100000"/>
-              <a:buChar char="✓"/>
-            </a:pPr>
-            <a:r>
-              <a:rPr lang="en-US" sz="1300" b="1" dirty="0">
-                <a:solidFill>
-                  <a:srgbClr val="1F2937"/>
-                </a:solidFill>
-                <a:latin typeface="Calibri" pitchFamily="34" charset="0"/>
-                <a:ea typeface="Calibri" pitchFamily="34" charset="-122"/>
-                <a:cs typeface="Calibri" pitchFamily="34" charset="-120"/>
-              </a:rPr>
-              <a:t>Boakai Administration Receives New U.S. Chargé d’Affaires as Diplomatic Focus Turns to Investment, Health, and Security</a:t>
+              <a:buNone/>
+            </a:pPr>
+            <a:r>
+              <a:rPr lang="en-US" sz="1300" dirty="0">
+                <a:solidFill>
+                  <a:srgbClr val="6B7280"/>
+                </a:solidFill>
+                <a:latin typeface="Calibri" pitchFamily="34" charset="0"/>
+                <a:ea typeface="Calibri" pitchFamily="34" charset="-122"/>
+                <a:cs typeface="Calibri" pitchFamily="34" charset="-120"/>
+              </a:rPr>
+              <a:t>Aucun fait au-dessus du normal dans la fenêtre.</a:t>
             </a:r>
             <a:endParaRPr lang="en-US" sz="1300" dirty="0"/>
           </a:p>
-          <a:p>
-            <a:pPr lvl="1" indent="0" marL="0">
-              <a:spcAft>
-                <a:spcPts val="300"/>
-              </a:spcAft>
-              <a:buNone/>
-            </a:pPr>
-            <a:r>
-              <a:rPr lang="en-US" sz="1100" i="1" dirty="0">
-                <a:solidFill>
-                  <a:srgbClr val="6B7280"/>
-                </a:solidFill>
-                <a:latin typeface="Calibri" pitchFamily="34" charset="0"/>
-                <a:ea typeface="Calibri" pitchFamily="34" charset="-122"/>
-                <a:cs typeface="Calibri" pitchFamily="34" charset="-120"/>
-              </a:rPr>
-              <a:t>Global News Network Liberia · 19/10 20h UTC · niveau modéré · Non confirmé</a:t>
-            </a:r>
-            <a:endParaRPr lang="en-US" sz="1300" dirty="0"/>
-          </a:p>
         </p:txBody>
       </p:sp>
       <p:sp>
         <p:nvSpPr>
-          <p:cNvPr id="7" name="Shape 5"/>
+          <p:cNvPr id="13" name="Shape 11"/>
           <p:cNvSpPr/>
           <p:nvPr/>
         </p:nvSpPr>
@@ -7260,7 +8059,7 @@
       </p:sp>
       <p:sp>
         <p:nvSpPr>
-          <p:cNvPr id="8" name="Text 6"/>
+          <p:cNvPr id="14" name="Text 12"/>
           <p:cNvSpPr/>
           <p:nvPr/>
         </p:nvSpPr>
@@ -7299,7 +8098,7 @@
       </p:sp>
       <p:sp>
         <p:nvSpPr>
-          <p:cNvPr id="9" name="Text 7"/>
+          <p:cNvPr id="15" name="Text 13"/>
           <p:cNvSpPr/>
           <p:nvPr/>
         </p:nvSpPr>
@@ -7397,7 +8196,7 @@
                 <a:ea typeface="Calibri" pitchFamily="34" charset="-122"/>
                 <a:cs typeface="Calibri" pitchFamily="34" charset="-120"/>
               </a:rPr>
-              <a:t>1 fait(s) au-dessus du normal dans les 36 dernières heures.</a:t>
+              <a:t>Aucun fait au-dessus du niveau normal dans la fenêtre : cela ne veut pas dire qu'il ne s'est rien passé.</a:t>
             </a:r>
             <a:endParaRPr lang="en-US" sz="1200" dirty="0"/>
           </a:p>
@@ -7405,7 +8204,7 @@
       </p:sp>
       <p:pic>
         <p:nvPicPr>
-          <p:cNvPr id="10" name="Image 0" descr="/home/runner/work/SentiqS/SentiqS/scripts/assets/grsci/logo-grsci.png">    </p:cNvPr>
+          <p:cNvPr id="16" name="Image 0" descr="/home/runner/work/SentiqS/SentiqS/scripts/assets/grsci/logo-grsci.png">    </p:cNvPr>
           <p:cNvPicPr>
             <a:picLocks noChangeAspect="1"/>
           </p:cNvPicPr>
@@ -7429,7 +8228,7 @@
       </p:pic>
       <p:sp>
         <p:nvSpPr>
-          <p:cNvPr id="11" name="Text 8"/>
+          <p:cNvPr id="17" name="Text 14"/>
           <p:cNvSpPr/>
           <p:nvPr/>
         </p:nvSpPr>
@@ -7598,7 +8397,7 @@
       </p:sp>
       <p:sp>
         <p:nvSpPr>
-          <p:cNvPr id="12" name="Text 9"/>
+          <p:cNvPr id="18" name="Text 15"/>
           <p:cNvSpPr/>
           <p:nvPr/>
         </p:nvSpPr>
@@ -7687,17 +8486,17 @@
               <a:buNone/>
             </a:pPr>
             <a:r>
-              <a:rPr lang="en-US" sz="2200" b="1" dirty="0">
+              <a:rPr lang="en-US" sz="2400" dirty="0">
                 <a:solidFill>
                   <a:srgbClr val="FFFFFF"/>
                 </a:solidFill>
-                <a:latin typeface="Calibri" pitchFamily="34" charset="0"/>
-                <a:ea typeface="Calibri" pitchFamily="34" charset="-122"/>
-                <a:cs typeface="Calibri" pitchFamily="34" charset="-120"/>
+                <a:latin typeface="Arial Narrow" pitchFamily="34" charset="0"/>
+                <a:ea typeface="Arial Narrow" pitchFamily="34" charset="-122"/>
+                <a:cs typeface="Arial Narrow" pitchFamily="34" charset="-120"/>
               </a:rPr>
               <a:t>I</a:t>
             </a:r>
-            <a:endParaRPr lang="en-US" sz="2200" dirty="0"/>
+            <a:endParaRPr lang="en-US" sz="2400" dirty="0"/>
           </a:p>
         </p:txBody>
       </p:sp>
@@ -7726,13 +8525,13 @@
               <a:buNone/>
             </a:pPr>
             <a:r>
-              <a:rPr lang="en-US" sz="2800" b="1" dirty="0">
+              <a:rPr lang="en-US" sz="2800" u="sng" dirty="0">
                 <a:solidFill>
                   <a:srgbClr val="1F6B5E"/>
                 </a:solidFill>
-                <a:latin typeface="Calibri" pitchFamily="34" charset="0"/>
-                <a:ea typeface="Calibri" pitchFamily="34" charset="-122"/>
-                <a:cs typeface="Calibri" pitchFamily="34" charset="-120"/>
+                <a:latin typeface="Arial Narrow" pitchFamily="34" charset="0"/>
+                <a:ea typeface="Arial Narrow" pitchFamily="34" charset="-122"/>
+                <a:cs typeface="Arial Narrow" pitchFamily="34" charset="-120"/>
               </a:rPr>
               <a:t>Sénégal : situation au 21/10/26</a:t>
             </a:r>
@@ -7743,6 +8542,103 @@
       <p:sp>
         <p:nvSpPr>
           <p:cNvPr id="4" name="Shape 2"/>
+          <p:cNvSpPr/>
+          <p:nvPr/>
+        </p:nvSpPr>
+        <p:spPr>
+          <a:xfrm>
+            <a:off x="10881360" y="274320"/>
+            <a:ext cx="301752" cy="566928"/>
+          </a:xfrm>
+          <a:prstGeom prst="rect">
+            <a:avLst/>
+          </a:prstGeom>
+          <a:solidFill>
+            <a:srgbClr val="00853F"/>
+          </a:solidFill>
+          <a:ln w="12700">
+            <a:solidFill>
+              <a:srgbClr val="00853F"/>
+            </a:solidFill>
+            <a:prstDash val="solid"/>
+          </a:ln>
+        </p:spPr>
+      </p:sp>
+      <p:sp>
+        <p:nvSpPr>
+          <p:cNvPr id="5" name="Shape 3"/>
+          <p:cNvSpPr/>
+          <p:nvPr/>
+        </p:nvSpPr>
+        <p:spPr>
+          <a:xfrm>
+            <a:off x="11183112" y="274320"/>
+            <a:ext cx="301752" cy="566928"/>
+          </a:xfrm>
+          <a:prstGeom prst="rect">
+            <a:avLst/>
+          </a:prstGeom>
+          <a:solidFill>
+            <a:srgbClr val="FDEF42"/>
+          </a:solidFill>
+          <a:ln w="12700">
+            <a:solidFill>
+              <a:srgbClr val="FDEF42"/>
+            </a:solidFill>
+            <a:prstDash val="solid"/>
+          </a:ln>
+        </p:spPr>
+      </p:sp>
+      <p:sp>
+        <p:nvSpPr>
+          <p:cNvPr id="6" name="Shape 4"/>
+          <p:cNvSpPr/>
+          <p:nvPr/>
+        </p:nvSpPr>
+        <p:spPr>
+          <a:xfrm>
+            <a:off x="11484864" y="274320"/>
+            <a:ext cx="301752" cy="566928"/>
+          </a:xfrm>
+          <a:prstGeom prst="rect">
+            <a:avLst/>
+          </a:prstGeom>
+          <a:solidFill>
+            <a:srgbClr val="E31B23"/>
+          </a:solidFill>
+          <a:ln w="12700">
+            <a:solidFill>
+              <a:srgbClr val="E31B23"/>
+            </a:solidFill>
+            <a:prstDash val="solid"/>
+          </a:ln>
+        </p:spPr>
+      </p:sp>
+      <p:sp>
+        <p:nvSpPr>
+          <p:cNvPr id="7" name="Shape 5"/>
+          <p:cNvSpPr/>
+          <p:nvPr/>
+        </p:nvSpPr>
+        <p:spPr>
+          <a:xfrm>
+            <a:off x="10881360" y="274320"/>
+            <a:ext cx="905256" cy="566928"/>
+          </a:xfrm>
+          <a:prstGeom prst="rect">
+            <a:avLst/>
+          </a:prstGeom>
+          <a:ln w="6350">
+            <a:solidFill>
+              <a:srgbClr val="1F2937"/>
+            </a:solidFill>
+            <a:prstDash val="solid"/>
+          </a:ln>
+        </p:spPr>
+      </p:sp>
+      <p:sp>
+        <p:nvSpPr>
+          <p:cNvPr id="8" name="Shape 6"/>
           <p:cNvSpPr/>
           <p:nvPr/>
         </p:nvSpPr>
@@ -7765,7 +8661,7 @@
       </p:sp>
       <p:sp>
         <p:nvSpPr>
-          <p:cNvPr id="5" name="Text 3"/>
+          <p:cNvPr id="9" name="Text 7"/>
           <p:cNvSpPr/>
           <p:nvPr/>
         </p:nvSpPr>
@@ -7778,7 +8674,7 @@
             <a:avLst/>
           </a:prstGeom>
           <a:solidFill>
-            <a:srgbClr val="CA8A04"/>
+            <a:srgbClr val="EA580C"/>
           </a:solidFill>
           <a:ln/>
         </p:spPr>
@@ -7792,13 +8688,13 @@
             <a:r>
               <a:rPr lang="en-US" sz="1600" b="1" dirty="0">
                 <a:solidFill>
-                  <a:srgbClr val="1F2937"/>
-                </a:solidFill>
-                <a:latin typeface="Calibri" pitchFamily="34" charset="0"/>
-                <a:ea typeface="Calibri" pitchFamily="34" charset="-122"/>
-                <a:cs typeface="Calibri" pitchFamily="34" charset="-120"/>
-              </a:rPr>
-              <a:t>JAUNE</a:t>
+                  <a:srgbClr val="FFFFFF"/>
+                </a:solidFill>
+                <a:latin typeface="Calibri" pitchFamily="34" charset="0"/>
+                <a:ea typeface="Calibri" pitchFamily="34" charset="-122"/>
+                <a:cs typeface="Calibri" pitchFamily="34" charset="-120"/>
+              </a:rPr>
+              <a:t>ORANGE</a:t>
             </a:r>
             <a:endParaRPr lang="en-US" sz="1600" dirty="0"/>
           </a:p>
@@ -7806,7 +8702,7 @@
       </p:sp>
       <p:sp>
         <p:nvSpPr>
-          <p:cNvPr id="6" name="Text 4"/>
+          <p:cNvPr id="10" name="Text 8"/>
           <p:cNvSpPr/>
           <p:nvPr/>
         </p:nvSpPr>
@@ -7841,7 +8737,7 @@
                 <a:ea typeface="Calibri" pitchFamily="34" charset="-122"/>
                 <a:cs typeface="Calibri" pitchFamily="34" charset="-120"/>
               </a:rPr>
-              <a:t>Salaires : Ce que risquent les travailleurs qui seront en grève à partir de ce mercredi</a:t>
+              <a:t>Grève générale : l’État brandit les sanctions, un inspecteur du travail précise les règles…le bras de fer social prend une tournure juridique</a:t>
             </a:r>
             <a:endParaRPr lang="en-US" sz="1300" dirty="0"/>
           </a:p>
@@ -7861,7 +8757,7 @@
                 <a:ea typeface="Calibri" pitchFamily="34" charset="-122"/>
                 <a:cs typeface="Calibri" pitchFamily="34" charset="-120"/>
               </a:rPr>
-              <a:t>SeneNews · 20/10 22h UTC · niveau élevé · Non confirmé</a:t>
+              <a:t>Dakar Actu · 21/10 08h UTC · niveau élevé · Probable</a:t>
             </a:r>
             <a:endParaRPr lang="en-US" sz="1300" dirty="0"/>
           </a:p>
@@ -7882,7 +8778,7 @@
                 <a:ea typeface="Calibri" pitchFamily="34" charset="-122"/>
                 <a:cs typeface="Calibri" pitchFamily="34" charset="-120"/>
               </a:rPr>
-              <a:t>Crise institutionnelle : Amadou Ba parle à Bassirou Diomaye Faye et à Ousmane Sonko</a:t>
+              <a:t>Sénégal : un appel à la grève des travailleurs qui inquiète le pouvoir</a:t>
             </a:r>
             <a:endParaRPr lang="en-US" sz="1300" dirty="0"/>
           </a:p>
@@ -7902,7 +8798,7 @@
                 <a:ea typeface="Calibri" pitchFamily="34" charset="-122"/>
                 <a:cs typeface="Calibri" pitchFamily="34" charset="-120"/>
               </a:rPr>
-              <a:t>SeneNews · 20/10 21h UTC · niveau élevé · Non confirmé</a:t>
+              <a:t>Africanews — Chaine panafricaine · 21/10 07h UTC · niveau élevé · Probable</a:t>
             </a:r>
             <a:endParaRPr lang="en-US" sz="1300" dirty="0"/>
           </a:p>
@@ -7923,7 +8819,7 @@
                 <a:ea typeface="Calibri" pitchFamily="34" charset="-122"/>
                 <a:cs typeface="Calibri" pitchFamily="34" charset="-120"/>
               </a:rPr>
-              <a:t>Education: Le SELS/Authentique refuse de s'associer à la grève de 72 heures des enseignants</a:t>
+              <a:t>La grève générale de 72 heures au menu des quotidiens</a:t>
             </a:r>
             <a:endParaRPr lang="en-US" sz="1300" dirty="0"/>
           </a:p>
@@ -7943,7 +8839,7 @@
                 <a:ea typeface="Calibri" pitchFamily="34" charset="-122"/>
                 <a:cs typeface="Calibri" pitchFamily="34" charset="-120"/>
               </a:rPr>
-              <a:t>Pressafrik · 20/10 20h UTC · niveau élevé · Probable</a:t>
+              <a:t>APS — Agence Sénégalaise Presse · 21/10 07h UTC · niveau élevé · Probable</a:t>
             </a:r>
             <a:endParaRPr lang="en-US" sz="1300" dirty="0"/>
           </a:p>
@@ -7992,7 +8888,7 @@
       </p:sp>
       <p:sp>
         <p:nvSpPr>
-          <p:cNvPr id="7" name="Shape 5"/>
+          <p:cNvPr id="11" name="Shape 9"/>
           <p:cNvSpPr/>
           <p:nvPr/>
         </p:nvSpPr>
@@ -8017,7 +8913,7 @@
       </p:sp>
       <p:sp>
         <p:nvSpPr>
-          <p:cNvPr id="8" name="Text 6"/>
+          <p:cNvPr id="12" name="Text 10"/>
           <p:cNvSpPr/>
           <p:nvPr/>
         </p:nvSpPr>
@@ -8056,7 +8952,7 @@
       </p:sp>
       <p:sp>
         <p:nvSpPr>
-          <p:cNvPr id="9" name="Text 7"/>
+          <p:cNvPr id="13" name="Text 11"/>
           <p:cNvSpPr/>
           <p:nvPr/>
         </p:nvSpPr>
@@ -8091,7 +8987,7 @@
                 <a:ea typeface="Calibri" pitchFamily="34" charset="-122"/>
                 <a:cs typeface="Calibri" pitchFamily="34" charset="-120"/>
               </a:rPr>
-              <a:t>Niveau jaune (modéré, 31.3/100), confiance moyenne.</a:t>
+              <a:t>Niveau orange (élevé, 36.8/100), confiance moyenne.</a:t>
             </a:r>
             <a:endParaRPr lang="en-US" sz="1200" dirty="0"/>
           </a:p>
@@ -8133,7 +9029,7 @@
                 <a:ea typeface="Calibri" pitchFamily="34" charset="-122"/>
                 <a:cs typeface="Calibri" pitchFamily="34" charset="-120"/>
               </a:rPr>
-              <a:t>Niveau en baisse de 1 cran depuis le 2026-09-12.</a:t>
+              <a:t>Niveau stable depuis le 2026-09-12.</a:t>
             </a:r>
             <a:endParaRPr lang="en-US" sz="1200" dirty="0"/>
           </a:p>
@@ -8162,7 +9058,7 @@
       </p:sp>
       <p:pic>
         <p:nvPicPr>
-          <p:cNvPr id="10" name="Image 0" descr="/home/runner/work/SentiqS/SentiqS/scripts/assets/grsci/logo-grsci.png">    </p:cNvPr>
+          <p:cNvPr id="14" name="Image 0" descr="/home/runner/work/SentiqS/SentiqS/scripts/assets/grsci/logo-grsci.png">    </p:cNvPr>
           <p:cNvPicPr>
             <a:picLocks noChangeAspect="1"/>
           </p:cNvPicPr>
@@ -8186,7 +9082,7 @@
       </p:pic>
       <p:sp>
         <p:nvSpPr>
-          <p:cNvPr id="11" name="Text 8"/>
+          <p:cNvPr id="15" name="Text 12"/>
           <p:cNvSpPr/>
           <p:nvPr/>
         </p:nvSpPr>
@@ -8355,7 +9251,7 @@
       </p:sp>
       <p:sp>
         <p:nvSpPr>
-          <p:cNvPr id="12" name="Text 9"/>
+          <p:cNvPr id="16" name="Text 13"/>
           <p:cNvSpPr/>
           <p:nvPr/>
         </p:nvSpPr>
@@ -8444,17 +9340,17 @@
               <a:buNone/>
             </a:pPr>
             <a:r>
-              <a:rPr lang="en-US" sz="2200" b="1" dirty="0">
+              <a:rPr lang="en-US" sz="2400" dirty="0">
                 <a:solidFill>
                   <a:srgbClr val="FFFFFF"/>
                 </a:solidFill>
-                <a:latin typeface="Calibri" pitchFamily="34" charset="0"/>
-                <a:ea typeface="Calibri" pitchFamily="34" charset="-122"/>
-                <a:cs typeface="Calibri" pitchFamily="34" charset="-120"/>
+                <a:latin typeface="Arial Narrow" pitchFamily="34" charset="0"/>
+                <a:ea typeface="Arial Narrow" pitchFamily="34" charset="-122"/>
+                <a:cs typeface="Arial Narrow" pitchFamily="34" charset="-120"/>
               </a:rPr>
               <a:t>V</a:t>
             </a:r>
-            <a:endParaRPr lang="en-US" sz="2200" dirty="0"/>
+            <a:endParaRPr lang="en-US" sz="2400" dirty="0"/>
           </a:p>
         </p:txBody>
       </p:sp>
@@ -8483,13 +9379,13 @@
               <a:buNone/>
             </a:pPr>
             <a:r>
-              <a:rPr lang="en-US" sz="2800" b="1" dirty="0">
+              <a:rPr lang="en-US" sz="2800" u="sng" dirty="0">
                 <a:solidFill>
                   <a:srgbClr val="1F6B5E"/>
                 </a:solidFill>
-                <a:latin typeface="Calibri" pitchFamily="34" charset="0"/>
-                <a:ea typeface="Calibri" pitchFamily="34" charset="-122"/>
-                <a:cs typeface="Calibri" pitchFamily="34" charset="-120"/>
+                <a:latin typeface="Arial Narrow" pitchFamily="34" charset="0"/>
+                <a:ea typeface="Arial Narrow" pitchFamily="34" charset="-122"/>
+                <a:cs typeface="Arial Narrow" pitchFamily="34" charset="-120"/>
               </a:rPr>
               <a:t>CE QUE NOUS NE SAVONS PAS</a:t>
             </a:r>
@@ -9075,17 +9971,17 @@
               <a:buNone/>
             </a:pPr>
             <a:r>
-              <a:rPr lang="en-US" sz="2200" b="1" dirty="0">
+              <a:rPr lang="en-US" sz="2400" dirty="0">
                 <a:solidFill>
                   <a:srgbClr val="FFFFFF"/>
                 </a:solidFill>
-                <a:latin typeface="Calibri" pitchFamily="34" charset="0"/>
-                <a:ea typeface="Calibri" pitchFamily="34" charset="-122"/>
-                <a:cs typeface="Calibri" pitchFamily="34" charset="-120"/>
+                <a:latin typeface="Arial Narrow" pitchFamily="34" charset="0"/>
+                <a:ea typeface="Arial Narrow" pitchFamily="34" charset="-122"/>
+                <a:cs typeface="Arial Narrow" pitchFamily="34" charset="-120"/>
               </a:rPr>
               <a:t>0</a:t>
             </a:r>
-            <a:endParaRPr lang="en-US" sz="2200" dirty="0"/>
+            <a:endParaRPr lang="en-US" sz="2400" dirty="0"/>
           </a:p>
         </p:txBody>
       </p:sp>
@@ -9114,13 +10010,13 @@
               <a:buNone/>
             </a:pPr>
             <a:r>
-              <a:rPr lang="en-US" sz="2800" b="1" dirty="0">
+              <a:rPr lang="en-US" sz="2800" u="sng" dirty="0">
                 <a:solidFill>
                   <a:srgbClr val="1F6B5E"/>
                 </a:solidFill>
-                <a:latin typeface="Calibri" pitchFamily="34" charset="0"/>
-                <a:ea typeface="Calibri" pitchFamily="34" charset="-122"/>
-                <a:cs typeface="Calibri" pitchFamily="34" charset="-120"/>
+                <a:latin typeface="Arial Narrow" pitchFamily="34" charset="0"/>
+                <a:ea typeface="Arial Narrow" pitchFamily="34" charset="-122"/>
+                <a:cs typeface="Arial Narrow" pitchFamily="34" charset="-120"/>
               </a:rPr>
               <a:t>TABLE DES MATIÈRES</a:t>
             </a:r>
@@ -9440,7 +10336,7 @@
                 <a:ea typeface="Calibri" pitchFamily="34" charset="-122"/>
                 <a:cs typeface="Calibri" pitchFamily="34" charset="-120"/>
               </a:rPr>
-              <a:t>ROUGE · confiance moyenne · 4 fait(s)</a:t>
+              <a:t>ROUGE · confiance moyenne · 7 fait(s)</a:t>
             </a:r>
             <a:endParaRPr lang="en-US" sz="1100" dirty="0"/>
           </a:p>
@@ -9481,7 +10377,7 @@
                 <a:ea typeface="Calibri" pitchFamily="34" charset="-122"/>
                 <a:cs typeface="Calibri" pitchFamily="34" charset="-120"/>
               </a:rPr>
-              <a:t>ROUGE · confiance moyenne · 12 fait(s)</a:t>
+              <a:t>ROUGE · confiance faible · 9 fait(s)</a:t>
             </a:r>
             <a:endParaRPr lang="en-US" sz="1100" dirty="0"/>
           </a:p>
@@ -9522,7 +10418,7 @@
                 <a:ea typeface="Calibri" pitchFamily="34" charset="-122"/>
                 <a:cs typeface="Calibri" pitchFamily="34" charset="-120"/>
               </a:rPr>
-              <a:t>MARRON · confiance moyenne · 2 fait(s)</a:t>
+              <a:t>MARRON · confiance moyenne · 1 fait(s)</a:t>
             </a:r>
             <a:endParaRPr lang="en-US" sz="1100" dirty="0"/>
           </a:p>
@@ -9563,7 +10459,7 @@
                 <a:ea typeface="Calibri" pitchFamily="34" charset="-122"/>
                 <a:cs typeface="Calibri" pitchFamily="34" charset="-120"/>
               </a:rPr>
-              <a:t>ORANGE · confiance faible · 1 fait(s)</a:t>
+              <a:t>ORANGE · confiance faible · 2 fait(s)</a:t>
             </a:r>
             <a:endParaRPr lang="en-US" sz="1100" dirty="0"/>
           </a:p>
@@ -9604,7 +10500,7 @@
                 <a:ea typeface="Calibri" pitchFamily="34" charset="-122"/>
                 <a:cs typeface="Calibri" pitchFamily="34" charset="-120"/>
               </a:rPr>
-              <a:t>ORANGE · confiance faible · 3 fait(s)</a:t>
+              <a:t>ORANGE · confiance faible · 5 fait(s)</a:t>
             </a:r>
             <a:endParaRPr lang="en-US" sz="1100" dirty="0"/>
           </a:p>
@@ -9686,7 +10582,7 @@
                 <a:ea typeface="Calibri" pitchFamily="34" charset="-122"/>
                 <a:cs typeface="Calibri" pitchFamily="34" charset="-120"/>
               </a:rPr>
-              <a:t>JAUNE · confiance faible · 5 fait(s)</a:t>
+              <a:t>JAUNE · confiance faible · 4 fait(s)</a:t>
             </a:r>
             <a:endParaRPr lang="en-US" sz="1100" dirty="0"/>
           </a:p>
@@ -9727,7 +10623,7 @@
                 <a:ea typeface="Calibri" pitchFamily="34" charset="-122"/>
                 <a:cs typeface="Calibri" pitchFamily="34" charset="-120"/>
               </a:rPr>
-              <a:t>JAUNE · confiance faible · 1 fait(s)</a:t>
+              <a:t>JAUNE · confiance faible · 0 fait(s)</a:t>
             </a:r>
             <a:endParaRPr lang="en-US" sz="1100" dirty="0"/>
           </a:p>
@@ -9768,7 +10664,7 @@
                 <a:ea typeface="Calibri" pitchFamily="34" charset="-122"/>
                 <a:cs typeface="Calibri" pitchFamily="34" charset="-120"/>
               </a:rPr>
-              <a:t>JAUNE · confiance moyenne · 12 fait(s)</a:t>
+              <a:t>ORANGE · confiance moyenne · 12 fait(s)</a:t>
             </a:r>
             <a:endParaRPr lang="en-US" sz="1100" dirty="0"/>
           </a:p>
@@ -10020,7 +10916,7 @@
     <p:bg>
       <p:bgPr>
         <a:solidFill>
-          <a:srgbClr val="CCCCCC"/>
+          <a:srgbClr val="CDCDCD"/>
         </a:solidFill>
       </p:bgPr>
     </p:bg>
@@ -10038,9 +10934,33 @@
           <a:chExt cx="0" cy="0"/>
         </a:xfrm>
       </p:grpSpPr>
-      <p:sp>
-        <p:nvSpPr>
-          <p:cNvPr id="2" name="Text 0"/>
+      <p:pic>
+        <p:nvPicPr>
+          <p:cNvPr id="2" name="Image 0" descr="/home/runner/work/SentiqS/SentiqS/scripts/assets/grsci/carte-ci.jpg">    </p:cNvPr>
+          <p:cNvPicPr>
+            <a:picLocks noChangeAspect="1"/>
+          </p:cNvPicPr>
+          <p:nvPr/>
+        </p:nvPicPr>
+        <p:blipFill>
+          <a:blip r:embed="rId1"/>
+          <a:stretch>
+            <a:fillRect/>
+          </a:stretch>
+        </p:blipFill>
+        <p:spPr>
+          <a:xfrm>
+            <a:off x="4754880" y="640080"/>
+            <a:ext cx="2926080" cy="2926080"/>
+          </a:xfrm>
+          <a:prstGeom prst="rect">
+            <a:avLst/>
+          </a:prstGeom>
+        </p:spPr>
+      </p:pic>
+      <p:sp>
+        <p:nvSpPr>
+          <p:cNvPr id="3" name="Text 0"/>
           <p:cNvSpPr/>
           <p:nvPr/>
         </p:nvSpPr>
@@ -10063,23 +10983,23 @@
               <a:buNone/>
             </a:pPr>
             <a:r>
-              <a:rPr lang="en-US" sz="4000" b="1" dirty="0">
+              <a:rPr lang="en-US" sz="4400" dirty="0">
                 <a:solidFill>
                   <a:srgbClr val="111111"/>
                 </a:solidFill>
-                <a:latin typeface="Calibri" pitchFamily="34" charset="0"/>
-                <a:ea typeface="Calibri" pitchFamily="34" charset="-122"/>
-                <a:cs typeface="Calibri" pitchFamily="34" charset="-120"/>
+                <a:latin typeface="Arial Narrow" pitchFamily="34" charset="0"/>
+                <a:ea typeface="Arial Narrow" pitchFamily="34" charset="-122"/>
+                <a:cs typeface="Arial Narrow" pitchFamily="34" charset="-120"/>
               </a:rPr>
               <a:t>FAITS MARQUANTS EN CÔTE D'IVOIRE</a:t>
             </a:r>
-            <a:endParaRPr lang="en-US" sz="4000" dirty="0"/>
+            <a:endParaRPr lang="en-US" sz="4400" dirty="0"/>
           </a:p>
         </p:txBody>
       </p:sp>
       <p:sp>
         <p:nvSpPr>
-          <p:cNvPr id="3" name="Shape 1"/>
+          <p:cNvPr id="4" name="Shape 1"/>
           <p:cNvSpPr/>
           <p:nvPr/>
         </p:nvSpPr>
@@ -10102,14 +11022,14 @@
       </p:sp>
       <p:pic>
         <p:nvPicPr>
-          <p:cNvPr id="4" name="Image 0" descr="/home/runner/work/SentiqS/SentiqS/scripts/assets/grsci/logo-grsci.png">    </p:cNvPr>
+          <p:cNvPr id="5" name="Image 1" descr="/home/runner/work/SentiqS/SentiqS/scripts/assets/grsci/logo-grsci.png">    </p:cNvPr>
           <p:cNvPicPr>
             <a:picLocks noChangeAspect="1"/>
           </p:cNvPicPr>
           <p:nvPr/>
         </p:nvPicPr>
         <p:blipFill>
-          <a:blip r:embed="rId1"/>
+          <a:blip r:embed="rId2"/>
           <a:stretch>
             <a:fillRect/>
           </a:stretch>
@@ -10126,7 +11046,7 @@
       </p:pic>
       <p:sp>
         <p:nvSpPr>
-          <p:cNvPr id="5" name="Text 2"/>
+          <p:cNvPr id="6" name="Text 2"/>
           <p:cNvSpPr/>
           <p:nvPr/>
         </p:nvSpPr>
@@ -10295,7 +11215,7 @@
       </p:sp>
       <p:sp>
         <p:nvSpPr>
-          <p:cNvPr id="6" name="Text 3"/>
+          <p:cNvPr id="7" name="Text 3"/>
           <p:cNvSpPr/>
           <p:nvPr/>
         </p:nvSpPr>
@@ -10384,17 +11304,17 @@
               <a:buNone/>
             </a:pPr>
             <a:r>
-              <a:rPr lang="en-US" sz="2200" b="1" dirty="0">
+              <a:rPr lang="en-US" sz="2400" dirty="0">
                 <a:solidFill>
                   <a:srgbClr val="FFFFFF"/>
                 </a:solidFill>
-                <a:latin typeface="Calibri" pitchFamily="34" charset="0"/>
-                <a:ea typeface="Calibri" pitchFamily="34" charset="-122"/>
-                <a:cs typeface="Calibri" pitchFamily="34" charset="-120"/>
+                <a:latin typeface="Arial Narrow" pitchFamily="34" charset="0"/>
+                <a:ea typeface="Arial Narrow" pitchFamily="34" charset="-122"/>
+                <a:cs typeface="Arial Narrow" pitchFamily="34" charset="-120"/>
               </a:rPr>
               <a:t>0</a:t>
             </a:r>
-            <a:endParaRPr lang="en-US" sz="2200" dirty="0"/>
+            <a:endParaRPr lang="en-US" sz="2400" dirty="0"/>
           </a:p>
         </p:txBody>
       </p:sp>
@@ -10423,13 +11343,13 @@
               <a:buNone/>
             </a:pPr>
             <a:r>
-              <a:rPr lang="en-US" sz="2800" b="1" dirty="0">
+              <a:rPr lang="en-US" sz="2800" u="sng" dirty="0">
                 <a:solidFill>
                   <a:srgbClr val="1F6B5E"/>
                 </a:solidFill>
-                <a:latin typeface="Calibri" pitchFamily="34" charset="0"/>
-                <a:ea typeface="Calibri" pitchFamily="34" charset="-122"/>
-                <a:cs typeface="Calibri" pitchFamily="34" charset="-120"/>
+                <a:latin typeface="Arial Narrow" pitchFamily="34" charset="0"/>
+                <a:ea typeface="Arial Narrow" pitchFamily="34" charset="-122"/>
+                <a:cs typeface="Arial Narrow" pitchFamily="34" charset="-120"/>
               </a:rPr>
               <a:t>EN BREF — CÔTE D'IVOIRE</a:t>
             </a:r>
@@ -10454,6 +11374,78 @@
           <a:solidFill>
             <a:srgbClr val="F77F00"/>
           </a:solidFill>
+          <a:ln w="12700">
+            <a:solidFill>
+              <a:srgbClr val="F77F00"/>
+            </a:solidFill>
+            <a:prstDash val="solid"/>
+          </a:ln>
+        </p:spPr>
+      </p:sp>
+      <p:sp>
+        <p:nvSpPr>
+          <p:cNvPr id="5" name="Shape 3"/>
+          <p:cNvSpPr/>
+          <p:nvPr/>
+        </p:nvSpPr>
+        <p:spPr>
+          <a:xfrm>
+            <a:off x="11183112" y="274320"/>
+            <a:ext cx="301752" cy="566928"/>
+          </a:xfrm>
+          <a:prstGeom prst="rect">
+            <a:avLst/>
+          </a:prstGeom>
+          <a:solidFill>
+            <a:srgbClr val="FFFFFF"/>
+          </a:solidFill>
+          <a:ln w="12700">
+            <a:solidFill>
+              <a:srgbClr val="FFFFFF"/>
+            </a:solidFill>
+            <a:prstDash val="solid"/>
+          </a:ln>
+        </p:spPr>
+      </p:sp>
+      <p:sp>
+        <p:nvSpPr>
+          <p:cNvPr id="6" name="Shape 4"/>
+          <p:cNvSpPr/>
+          <p:nvPr/>
+        </p:nvSpPr>
+        <p:spPr>
+          <a:xfrm>
+            <a:off x="11484864" y="274320"/>
+            <a:ext cx="301752" cy="566928"/>
+          </a:xfrm>
+          <a:prstGeom prst="rect">
+            <a:avLst/>
+          </a:prstGeom>
+          <a:solidFill>
+            <a:srgbClr val="009E60"/>
+          </a:solidFill>
+          <a:ln w="12700">
+            <a:solidFill>
+              <a:srgbClr val="009E60"/>
+            </a:solidFill>
+            <a:prstDash val="solid"/>
+          </a:ln>
+        </p:spPr>
+      </p:sp>
+      <p:sp>
+        <p:nvSpPr>
+          <p:cNvPr id="7" name="Shape 5"/>
+          <p:cNvSpPr/>
+          <p:nvPr/>
+        </p:nvSpPr>
+        <p:spPr>
+          <a:xfrm>
+            <a:off x="10881360" y="274320"/>
+            <a:ext cx="905256" cy="566928"/>
+          </a:xfrm>
+          <a:prstGeom prst="rect">
+            <a:avLst/>
+          </a:prstGeom>
           <a:ln w="6350">
             <a:solidFill>
               <a:srgbClr val="1F2937"/>
@@ -10464,57 +11456,7 @@
       </p:sp>
       <p:sp>
         <p:nvSpPr>
-          <p:cNvPr id="5" name="Shape 3"/>
-          <p:cNvSpPr/>
-          <p:nvPr/>
-        </p:nvSpPr>
-        <p:spPr>
-          <a:xfrm>
-            <a:off x="11183112" y="274320"/>
-            <a:ext cx="301752" cy="566928"/>
-          </a:xfrm>
-          <a:prstGeom prst="rect">
-            <a:avLst/>
-          </a:prstGeom>
-          <a:solidFill>
-            <a:srgbClr val="FFFFFF"/>
-          </a:solidFill>
-          <a:ln w="6350">
-            <a:solidFill>
-              <a:srgbClr val="1F2937"/>
-            </a:solidFill>
-            <a:prstDash val="solid"/>
-          </a:ln>
-        </p:spPr>
-      </p:sp>
-      <p:sp>
-        <p:nvSpPr>
-          <p:cNvPr id="6" name="Shape 4"/>
-          <p:cNvSpPr/>
-          <p:nvPr/>
-        </p:nvSpPr>
-        <p:spPr>
-          <a:xfrm>
-            <a:off x="11484864" y="274320"/>
-            <a:ext cx="301752" cy="566928"/>
-          </a:xfrm>
-          <a:prstGeom prst="rect">
-            <a:avLst/>
-          </a:prstGeom>
-          <a:solidFill>
-            <a:srgbClr val="009E60"/>
-          </a:solidFill>
-          <a:ln w="6350">
-            <a:solidFill>
-              <a:srgbClr val="1F2937"/>
-            </a:solidFill>
-            <a:prstDash val="solid"/>
-          </a:ln>
-        </p:spPr>
-      </p:sp>
-      <p:sp>
-        <p:nvSpPr>
-          <p:cNvPr id="7" name="Shape 5"/>
+          <p:cNvPr id="8" name="Shape 6"/>
           <p:cNvSpPr/>
           <p:nvPr/>
         </p:nvSpPr>
@@ -10537,7 +11479,7 @@
       </p:sp>
       <p:sp>
         <p:nvSpPr>
-          <p:cNvPr id="8" name="Text 6"/>
+          <p:cNvPr id="9" name="Text 7"/>
           <p:cNvSpPr/>
           <p:nvPr/>
         </p:nvSpPr>
@@ -10578,7 +11520,7 @@
       </p:sp>
       <p:sp>
         <p:nvSpPr>
-          <p:cNvPr id="9" name="Text 7"/>
+          <p:cNvPr id="10" name="Text 8"/>
           <p:cNvSpPr/>
           <p:nvPr/>
         </p:nvSpPr>
@@ -10609,7 +11551,7 @@
                 <a:ea typeface="Calibri" pitchFamily="34" charset="-122"/>
                 <a:cs typeface="Calibri" pitchFamily="34" charset="-120"/>
               </a:rPr>
-              <a:t>Niveau modéré · score 25.3/100</a:t>
+              <a:t>Niveau modéré · score 18.8/100</a:t>
             </a:r>
             <a:endParaRPr lang="en-US" sz="1600" dirty="0"/>
           </a:p>
@@ -10626,7 +11568,7 @@
                 <a:ea typeface="Calibri" pitchFamily="34" charset="-122"/>
                 <a:cs typeface="Calibri" pitchFamily="34" charset="-120"/>
               </a:rPr>
-              <a:t>Confiance moyenne — incident vérifié le plus récent : 113 jours ; 1 signal du jour</a:t>
+              <a:t>Confiance faible — incident vérifié le plus récent : 114 jours ; aucun signal du jour</a:t>
             </a:r>
             <a:endParaRPr lang="en-US" sz="1600" dirty="0"/>
           </a:p>
@@ -10651,7 +11593,7 @@
       </p:sp>
       <p:sp>
         <p:nvSpPr>
-          <p:cNvPr id="10" name="Text 8"/>
+          <p:cNvPr id="11" name="Text 9"/>
           <p:cNvSpPr/>
           <p:nvPr/>
         </p:nvSpPr>
@@ -10690,7 +11632,7 @@
       </p:sp>
       <p:sp>
         <p:nvSpPr>
-          <p:cNvPr id="11" name="Text 9"/>
+          <p:cNvPr id="12" name="Text 10"/>
           <p:cNvSpPr/>
           <p:nvPr/>
         </p:nvSpPr>
@@ -10725,7 +11667,7 @@
                 <a:ea typeface="Calibri" pitchFamily="34" charset="-122"/>
                 <a:cs typeface="Calibri" pitchFamily="34" charset="-120"/>
               </a:rPr>
-              <a:t>Renforcement securitaire preventif regions nord Hambol/Poro — 29/06/2026 06h00 (113 j)</a:t>
+              <a:t>Renforcement securitaire preventif regions nord Hambol/Poro — 29/06/2026 06h00 (114 j)</a:t>
             </a:r>
             <a:endParaRPr lang="en-US" sz="1200" dirty="0"/>
           </a:p>
@@ -10754,7 +11696,7 @@
       </p:sp>
       <p:sp>
         <p:nvSpPr>
-          <p:cNvPr id="12" name="Shape 10"/>
+          <p:cNvPr id="13" name="Shape 11"/>
           <p:cNvSpPr/>
           <p:nvPr/>
         </p:nvSpPr>
@@ -10779,7 +11721,7 @@
       </p:sp>
       <p:sp>
         <p:nvSpPr>
-          <p:cNvPr id="13" name="Text 11"/>
+          <p:cNvPr id="14" name="Text 12"/>
           <p:cNvSpPr/>
           <p:nvPr/>
         </p:nvSpPr>
@@ -10818,7 +11760,7 @@
       </p:sp>
       <p:sp>
         <p:nvSpPr>
-          <p:cNvPr id="14" name="Text 12"/>
+          <p:cNvPr id="15" name="Text 13"/>
           <p:cNvSpPr/>
           <p:nvPr/>
         </p:nvSpPr>
@@ -10853,7 +11795,7 @@
                 <a:ea typeface="Calibri" pitchFamily="34" charset="-122"/>
                 <a:cs typeface="Calibri" pitchFamily="34" charset="-120"/>
               </a:rPr>
-              <a:t>Niveau jaune (modéré, 25.3/100), confiance moyenne.</a:t>
+              <a:t>Niveau jaune (modéré, 18.8/100), confiance faible.</a:t>
             </a:r>
             <a:endParaRPr lang="en-US" sz="1200" dirty="0"/>
           </a:p>
@@ -10874,7 +11816,7 @@
                 <a:ea typeface="Calibri" pitchFamily="34" charset="-122"/>
                 <a:cs typeface="Calibri" pitchFamily="34" charset="-120"/>
               </a:rPr>
-              <a:t>Fondement : incident vérifié le plus récent : 113 jours ; 1 signal du jour.</a:t>
+              <a:t>Fondement : incident vérifié le plus récent : 114 jours ; aucun signal du jour.</a:t>
             </a:r>
             <a:endParaRPr lang="en-US" sz="1200" dirty="0"/>
           </a:p>
@@ -10924,7 +11866,7 @@
       </p:sp>
       <p:pic>
         <p:nvPicPr>
-          <p:cNvPr id="15" name="Image 0" descr="/home/runner/work/SentiqS/SentiqS/scripts/assets/grsci/logo-grsci.png">    </p:cNvPr>
+          <p:cNvPr id="16" name="Image 0" descr="/home/runner/work/SentiqS/SentiqS/scripts/assets/grsci/logo-grsci.png">    </p:cNvPr>
           <p:cNvPicPr>
             <a:picLocks noChangeAspect="1"/>
           </p:cNvPicPr>
@@ -10948,7 +11890,7 @@
       </p:pic>
       <p:sp>
         <p:nvSpPr>
-          <p:cNvPr id="16" name="Text 13"/>
+          <p:cNvPr id="17" name="Text 14"/>
           <p:cNvSpPr/>
           <p:nvPr/>
         </p:nvSpPr>
@@ -11117,7 +12059,7 @@
       </p:sp>
       <p:sp>
         <p:nvSpPr>
-          <p:cNvPr id="17" name="Text 14"/>
+          <p:cNvPr id="18" name="Text 15"/>
           <p:cNvSpPr/>
           <p:nvPr/>
         </p:nvSpPr>
@@ -11206,17 +12148,17 @@
               <a:buNone/>
             </a:pPr>
             <a:r>
-              <a:rPr lang="en-US" sz="2200" b="1" dirty="0">
+              <a:rPr lang="en-US" sz="2400" dirty="0">
                 <a:solidFill>
                   <a:srgbClr val="FFFFFF"/>
                 </a:solidFill>
-                <a:latin typeface="Calibri" pitchFamily="34" charset="0"/>
-                <a:ea typeface="Calibri" pitchFamily="34" charset="-122"/>
-                <a:cs typeface="Calibri" pitchFamily="34" charset="-120"/>
+                <a:latin typeface="Arial Narrow" pitchFamily="34" charset="0"/>
+                <a:ea typeface="Arial Narrow" pitchFamily="34" charset="-122"/>
+                <a:cs typeface="Arial Narrow" pitchFamily="34" charset="-120"/>
               </a:rPr>
               <a:t>I</a:t>
             </a:r>
-            <a:endParaRPr lang="en-US" sz="2200" dirty="0"/>
+            <a:endParaRPr lang="en-US" sz="2400" dirty="0"/>
           </a:p>
         </p:txBody>
       </p:sp>
@@ -11245,15 +12187,15 @@
               <a:buNone/>
             </a:pPr>
             <a:r>
-              <a:rPr lang="en-US" sz="2800" b="1" dirty="0">
+              <a:rPr lang="en-US" sz="2800" u="sng" dirty="0">
                 <a:solidFill>
                   <a:srgbClr val="1F6B5E"/>
                 </a:solidFill>
-                <a:latin typeface="Calibri" pitchFamily="34" charset="0"/>
-                <a:ea typeface="Calibri" pitchFamily="34" charset="-122"/>
-                <a:cs typeface="Calibri" pitchFamily="34" charset="-120"/>
-              </a:rPr>
-              <a:t>POLITIQUE</a:t>
+                <a:latin typeface="Arial Narrow" pitchFamily="34" charset="0"/>
+                <a:ea typeface="Arial Narrow" pitchFamily="34" charset="-122"/>
+                <a:cs typeface="Arial Narrow" pitchFamily="34" charset="-120"/>
+              </a:rPr>
+              <a:t>- POLITIQUE</a:t>
             </a:r>
             <a:endParaRPr lang="en-US" sz="2800" dirty="0"/>
           </a:p>
@@ -11276,6 +12218,78 @@
           <a:solidFill>
             <a:srgbClr val="F77F00"/>
           </a:solidFill>
+          <a:ln w="12700">
+            <a:solidFill>
+              <a:srgbClr val="F77F00"/>
+            </a:solidFill>
+            <a:prstDash val="solid"/>
+          </a:ln>
+        </p:spPr>
+      </p:sp>
+      <p:sp>
+        <p:nvSpPr>
+          <p:cNvPr id="5" name="Shape 3"/>
+          <p:cNvSpPr/>
+          <p:nvPr/>
+        </p:nvSpPr>
+        <p:spPr>
+          <a:xfrm>
+            <a:off x="11183112" y="274320"/>
+            <a:ext cx="301752" cy="566928"/>
+          </a:xfrm>
+          <a:prstGeom prst="rect">
+            <a:avLst/>
+          </a:prstGeom>
+          <a:solidFill>
+            <a:srgbClr val="FFFFFF"/>
+          </a:solidFill>
+          <a:ln w="12700">
+            <a:solidFill>
+              <a:srgbClr val="FFFFFF"/>
+            </a:solidFill>
+            <a:prstDash val="solid"/>
+          </a:ln>
+        </p:spPr>
+      </p:sp>
+      <p:sp>
+        <p:nvSpPr>
+          <p:cNvPr id="6" name="Shape 4"/>
+          <p:cNvSpPr/>
+          <p:nvPr/>
+        </p:nvSpPr>
+        <p:spPr>
+          <a:xfrm>
+            <a:off x="11484864" y="274320"/>
+            <a:ext cx="301752" cy="566928"/>
+          </a:xfrm>
+          <a:prstGeom prst="rect">
+            <a:avLst/>
+          </a:prstGeom>
+          <a:solidFill>
+            <a:srgbClr val="009E60"/>
+          </a:solidFill>
+          <a:ln w="12700">
+            <a:solidFill>
+              <a:srgbClr val="009E60"/>
+            </a:solidFill>
+            <a:prstDash val="solid"/>
+          </a:ln>
+        </p:spPr>
+      </p:sp>
+      <p:sp>
+        <p:nvSpPr>
+          <p:cNvPr id="7" name="Shape 5"/>
+          <p:cNvSpPr/>
+          <p:nvPr/>
+        </p:nvSpPr>
+        <p:spPr>
+          <a:xfrm>
+            <a:off x="10881360" y="274320"/>
+            <a:ext cx="905256" cy="566928"/>
+          </a:xfrm>
+          <a:prstGeom prst="rect">
+            <a:avLst/>
+          </a:prstGeom>
           <a:ln w="6350">
             <a:solidFill>
               <a:srgbClr val="1F2937"/>
@@ -11286,57 +12300,7 @@
       </p:sp>
       <p:sp>
         <p:nvSpPr>
-          <p:cNvPr id="5" name="Shape 3"/>
-          <p:cNvSpPr/>
-          <p:nvPr/>
-        </p:nvSpPr>
-        <p:spPr>
-          <a:xfrm>
-            <a:off x="11183112" y="274320"/>
-            <a:ext cx="301752" cy="566928"/>
-          </a:xfrm>
-          <a:prstGeom prst="rect">
-            <a:avLst/>
-          </a:prstGeom>
-          <a:solidFill>
-            <a:srgbClr val="FFFFFF"/>
-          </a:solidFill>
-          <a:ln w="6350">
-            <a:solidFill>
-              <a:srgbClr val="1F2937"/>
-            </a:solidFill>
-            <a:prstDash val="solid"/>
-          </a:ln>
-        </p:spPr>
-      </p:sp>
-      <p:sp>
-        <p:nvSpPr>
-          <p:cNvPr id="6" name="Shape 4"/>
-          <p:cNvSpPr/>
-          <p:nvPr/>
-        </p:nvSpPr>
-        <p:spPr>
-          <a:xfrm>
-            <a:off x="11484864" y="274320"/>
-            <a:ext cx="301752" cy="566928"/>
-          </a:xfrm>
-          <a:prstGeom prst="rect">
-            <a:avLst/>
-          </a:prstGeom>
-          <a:solidFill>
-            <a:srgbClr val="009E60"/>
-          </a:solidFill>
-          <a:ln w="6350">
-            <a:solidFill>
-              <a:srgbClr val="1F2937"/>
-            </a:solidFill>
-            <a:prstDash val="solid"/>
-          </a:ln>
-        </p:spPr>
-      </p:sp>
-      <p:sp>
-        <p:nvSpPr>
-          <p:cNvPr id="7" name="Shape 5"/>
+          <p:cNvPr id="8" name="Shape 6"/>
           <p:cNvSpPr/>
           <p:nvPr/>
         </p:nvSpPr>
@@ -11359,7 +12323,7 @@
       </p:sp>
       <p:sp>
         <p:nvSpPr>
-          <p:cNvPr id="8" name="Text 6"/>
+          <p:cNvPr id="9" name="Text 7"/>
           <p:cNvSpPr/>
           <p:nvPr/>
         </p:nvSpPr>
@@ -11398,7 +12362,7 @@
       </p:sp>
       <p:sp>
         <p:nvSpPr>
-          <p:cNvPr id="9" name="Text 7"/>
+          <p:cNvPr id="10" name="Text 8"/>
           <p:cNvSpPr/>
           <p:nvPr/>
         </p:nvSpPr>
@@ -11461,7 +12425,7 @@
       </p:sp>
       <p:pic>
         <p:nvPicPr>
-          <p:cNvPr id="10" name="Image 0" descr="/home/runner/work/SentiqS/SentiqS/scripts/assets/grsci/logo-grsci.png">    </p:cNvPr>
+          <p:cNvPr id="11" name="Image 0" descr="/home/runner/work/SentiqS/SentiqS/scripts/assets/grsci/logo-grsci.png">    </p:cNvPr>
           <p:cNvPicPr>
             <a:picLocks noChangeAspect="1"/>
           </p:cNvPicPr>
@@ -11485,7 +12449,7 @@
       </p:pic>
       <p:sp>
         <p:nvSpPr>
-          <p:cNvPr id="11" name="Text 8"/>
+          <p:cNvPr id="12" name="Text 9"/>
           <p:cNvSpPr/>
           <p:nvPr/>
         </p:nvSpPr>
@@ -11654,7 +12618,7 @@
       </p:sp>
       <p:sp>
         <p:nvSpPr>
-          <p:cNvPr id="12" name="Text 9"/>
+          <p:cNvPr id="13" name="Text 10"/>
           <p:cNvSpPr/>
           <p:nvPr/>
         </p:nvSpPr>
@@ -11743,17 +12707,17 @@
               <a:buNone/>
             </a:pPr>
             <a:r>
-              <a:rPr lang="en-US" sz="2200" b="1" dirty="0">
+              <a:rPr lang="en-US" sz="2400" dirty="0">
                 <a:solidFill>
                   <a:srgbClr val="FFFFFF"/>
                 </a:solidFill>
-                <a:latin typeface="Calibri" pitchFamily="34" charset="0"/>
-                <a:ea typeface="Calibri" pitchFamily="34" charset="-122"/>
-                <a:cs typeface="Calibri" pitchFamily="34" charset="-120"/>
+                <a:latin typeface="Arial Narrow" pitchFamily="34" charset="0"/>
+                <a:ea typeface="Arial Narrow" pitchFamily="34" charset="-122"/>
+                <a:cs typeface="Arial Narrow" pitchFamily="34" charset="-120"/>
               </a:rPr>
               <a:t>II</a:t>
             </a:r>
-            <a:endParaRPr lang="en-US" sz="2200" dirty="0"/>
+            <a:endParaRPr lang="en-US" sz="2400" dirty="0"/>
           </a:p>
         </p:txBody>
       </p:sp>
@@ -11782,15 +12746,15 @@
               <a:buNone/>
             </a:pPr>
             <a:r>
-              <a:rPr lang="en-US" sz="2800" b="1" dirty="0">
+              <a:rPr lang="en-US" sz="2800" u="sng" dirty="0">
                 <a:solidFill>
                   <a:srgbClr val="1F6B5E"/>
                 </a:solidFill>
-                <a:latin typeface="Calibri" pitchFamily="34" charset="0"/>
-                <a:ea typeface="Calibri" pitchFamily="34" charset="-122"/>
-                <a:cs typeface="Calibri" pitchFamily="34" charset="-120"/>
-              </a:rPr>
-              <a:t>SOCIAL ET HUMANITAIRE</a:t>
+                <a:latin typeface="Arial Narrow" pitchFamily="34" charset="0"/>
+                <a:ea typeface="Arial Narrow" pitchFamily="34" charset="-122"/>
+                <a:cs typeface="Arial Narrow" pitchFamily="34" charset="-120"/>
+              </a:rPr>
+              <a:t>- SOCIAL ET HUMANITAIRE</a:t>
             </a:r>
             <a:endParaRPr lang="en-US" sz="2800" dirty="0"/>
           </a:p>
@@ -11813,6 +12777,78 @@
           <a:solidFill>
             <a:srgbClr val="F77F00"/>
           </a:solidFill>
+          <a:ln w="12700">
+            <a:solidFill>
+              <a:srgbClr val="F77F00"/>
+            </a:solidFill>
+            <a:prstDash val="solid"/>
+          </a:ln>
+        </p:spPr>
+      </p:sp>
+      <p:sp>
+        <p:nvSpPr>
+          <p:cNvPr id="5" name="Shape 3"/>
+          <p:cNvSpPr/>
+          <p:nvPr/>
+        </p:nvSpPr>
+        <p:spPr>
+          <a:xfrm>
+            <a:off x="11183112" y="274320"/>
+            <a:ext cx="301752" cy="566928"/>
+          </a:xfrm>
+          <a:prstGeom prst="rect">
+            <a:avLst/>
+          </a:prstGeom>
+          <a:solidFill>
+            <a:srgbClr val="FFFFFF"/>
+          </a:solidFill>
+          <a:ln w="12700">
+            <a:solidFill>
+              <a:srgbClr val="FFFFFF"/>
+            </a:solidFill>
+            <a:prstDash val="solid"/>
+          </a:ln>
+        </p:spPr>
+      </p:sp>
+      <p:sp>
+        <p:nvSpPr>
+          <p:cNvPr id="6" name="Shape 4"/>
+          <p:cNvSpPr/>
+          <p:nvPr/>
+        </p:nvSpPr>
+        <p:spPr>
+          <a:xfrm>
+            <a:off x="11484864" y="274320"/>
+            <a:ext cx="301752" cy="566928"/>
+          </a:xfrm>
+          <a:prstGeom prst="rect">
+            <a:avLst/>
+          </a:prstGeom>
+          <a:solidFill>
+            <a:srgbClr val="009E60"/>
+          </a:solidFill>
+          <a:ln w="12700">
+            <a:solidFill>
+              <a:srgbClr val="009E60"/>
+            </a:solidFill>
+            <a:prstDash val="solid"/>
+          </a:ln>
+        </p:spPr>
+      </p:sp>
+      <p:sp>
+        <p:nvSpPr>
+          <p:cNvPr id="7" name="Shape 5"/>
+          <p:cNvSpPr/>
+          <p:nvPr/>
+        </p:nvSpPr>
+        <p:spPr>
+          <a:xfrm>
+            <a:off x="10881360" y="274320"/>
+            <a:ext cx="905256" cy="566928"/>
+          </a:xfrm>
+          <a:prstGeom prst="rect">
+            <a:avLst/>
+          </a:prstGeom>
           <a:ln w="6350">
             <a:solidFill>
               <a:srgbClr val="1F2937"/>
@@ -11823,57 +12859,7 @@
       </p:sp>
       <p:sp>
         <p:nvSpPr>
-          <p:cNvPr id="5" name="Shape 3"/>
-          <p:cNvSpPr/>
-          <p:nvPr/>
-        </p:nvSpPr>
-        <p:spPr>
-          <a:xfrm>
-            <a:off x="11183112" y="274320"/>
-            <a:ext cx="301752" cy="566928"/>
-          </a:xfrm>
-          <a:prstGeom prst="rect">
-            <a:avLst/>
-          </a:prstGeom>
-          <a:solidFill>
-            <a:srgbClr val="FFFFFF"/>
-          </a:solidFill>
-          <a:ln w="6350">
-            <a:solidFill>
-              <a:srgbClr val="1F2937"/>
-            </a:solidFill>
-            <a:prstDash val="solid"/>
-          </a:ln>
-        </p:spPr>
-      </p:sp>
-      <p:sp>
-        <p:nvSpPr>
-          <p:cNvPr id="6" name="Shape 4"/>
-          <p:cNvSpPr/>
-          <p:nvPr/>
-        </p:nvSpPr>
-        <p:spPr>
-          <a:xfrm>
-            <a:off x="11484864" y="274320"/>
-            <a:ext cx="301752" cy="566928"/>
-          </a:xfrm>
-          <a:prstGeom prst="rect">
-            <a:avLst/>
-          </a:prstGeom>
-          <a:solidFill>
-            <a:srgbClr val="009E60"/>
-          </a:solidFill>
-          <a:ln w="6350">
-            <a:solidFill>
-              <a:srgbClr val="1F2937"/>
-            </a:solidFill>
-            <a:prstDash val="solid"/>
-          </a:ln>
-        </p:spPr>
-      </p:sp>
-      <p:sp>
-        <p:nvSpPr>
-          <p:cNvPr id="7" name="Shape 5"/>
+          <p:cNvPr id="8" name="Shape 6"/>
           <p:cNvSpPr/>
           <p:nvPr/>
         </p:nvSpPr>
@@ -11896,7 +12882,7 @@
       </p:sp>
       <p:sp>
         <p:nvSpPr>
-          <p:cNvPr id="8" name="Text 6"/>
+          <p:cNvPr id="9" name="Text 7"/>
           <p:cNvSpPr/>
           <p:nvPr/>
         </p:nvSpPr>
@@ -11935,7 +12921,7 @@
       </p:sp>
       <p:sp>
         <p:nvSpPr>
-          <p:cNvPr id="9" name="Text 7"/>
+          <p:cNvPr id="10" name="Text 8"/>
           <p:cNvSpPr/>
           <p:nvPr/>
         </p:nvSpPr>
@@ -11998,7 +12984,7 @@
       </p:sp>
       <p:pic>
         <p:nvPicPr>
-          <p:cNvPr id="10" name="Image 0" descr="/home/runner/work/SentiqS/SentiqS/scripts/assets/grsci/logo-grsci.png">    </p:cNvPr>
+          <p:cNvPr id="11" name="Image 0" descr="/home/runner/work/SentiqS/SentiqS/scripts/assets/grsci/logo-grsci.png">    </p:cNvPr>
           <p:cNvPicPr>
             <a:picLocks noChangeAspect="1"/>
           </p:cNvPicPr>
@@ -12022,7 +13008,7 @@
       </p:pic>
       <p:sp>
         <p:nvSpPr>
-          <p:cNvPr id="11" name="Text 8"/>
+          <p:cNvPr id="12" name="Text 9"/>
           <p:cNvSpPr/>
           <p:nvPr/>
         </p:nvSpPr>
@@ -12191,7 +13177,7 @@
       </p:sp>
       <p:sp>
         <p:nvSpPr>
-          <p:cNvPr id="12" name="Text 9"/>
+          <p:cNvPr id="13" name="Text 10"/>
           <p:cNvSpPr/>
           <p:nvPr/>
         </p:nvSpPr>
@@ -12242,7 +13228,7 @@
     <p:bg>
       <p:bgPr>
         <a:solidFill>
-          <a:srgbClr val="CCCCCC"/>
+          <a:srgbClr val="CDCDCD"/>
         </a:solidFill>
       </p:bgPr>
     </p:bg>
@@ -12309,17 +13295,17 @@
               <a:buNone/>
             </a:pPr>
             <a:r>
-              <a:rPr lang="en-US" sz="4000" b="1" dirty="0">
+              <a:rPr lang="en-US" sz="4400" dirty="0">
                 <a:solidFill>
                   <a:srgbClr val="111111"/>
                 </a:solidFill>
-                <a:latin typeface="Calibri" pitchFamily="34" charset="0"/>
-                <a:ea typeface="Calibri" pitchFamily="34" charset="-122"/>
-                <a:cs typeface="Calibri" pitchFamily="34" charset="-120"/>
+                <a:latin typeface="Arial Narrow" pitchFamily="34" charset="0"/>
+                <a:ea typeface="Arial Narrow" pitchFamily="34" charset="-122"/>
+                <a:cs typeface="Arial Narrow" pitchFamily="34" charset="-120"/>
               </a:rPr>
               <a:t>DYNAMIQUES RÉGIONALES</a:t>
             </a:r>
-            <a:endParaRPr lang="en-US" sz="4000" dirty="0"/>
+            <a:endParaRPr lang="en-US" sz="4400" dirty="0"/>
           </a:p>
         </p:txBody>
       </p:sp>
@@ -12630,17 +13616,17 @@
               <a:buNone/>
             </a:pPr>
             <a:r>
-              <a:rPr lang="en-US" sz="2200" b="1" dirty="0">
+              <a:rPr lang="en-US" sz="2400" dirty="0">
                 <a:solidFill>
                   <a:srgbClr val="FFFFFF"/>
                 </a:solidFill>
-                <a:latin typeface="Calibri" pitchFamily="34" charset="0"/>
-                <a:ea typeface="Calibri" pitchFamily="34" charset="-122"/>
-                <a:cs typeface="Calibri" pitchFamily="34" charset="-120"/>
+                <a:latin typeface="Arial Narrow" pitchFamily="34" charset="0"/>
+                <a:ea typeface="Arial Narrow" pitchFamily="34" charset="-122"/>
+                <a:cs typeface="Arial Narrow" pitchFamily="34" charset="-120"/>
               </a:rPr>
               <a:t>I</a:t>
             </a:r>
-            <a:endParaRPr lang="en-US" sz="2200" dirty="0"/>
+            <a:endParaRPr lang="en-US" sz="2400" dirty="0"/>
           </a:p>
         </p:txBody>
       </p:sp>
@@ -12669,13 +13655,13 @@
               <a:buNone/>
             </a:pPr>
             <a:r>
-              <a:rPr lang="en-US" sz="2800" b="1" dirty="0">
+              <a:rPr lang="en-US" sz="2800" u="sng" dirty="0">
                 <a:solidFill>
                   <a:srgbClr val="1F6B5E"/>
                 </a:solidFill>
-                <a:latin typeface="Calibri" pitchFamily="34" charset="0"/>
-                <a:ea typeface="Calibri" pitchFamily="34" charset="-122"/>
-                <a:cs typeface="Calibri" pitchFamily="34" charset="-120"/>
+                <a:latin typeface="Arial Narrow" pitchFamily="34" charset="0"/>
+                <a:ea typeface="Arial Narrow" pitchFamily="34" charset="-122"/>
+                <a:cs typeface="Arial Narrow" pitchFamily="34" charset="-120"/>
               </a:rPr>
               <a:t>TABLEAU RÉGIONAL — NIVEAUX D'ALERTE</a:t>
             </a:r>
@@ -13297,7 +14283,7 @@
                           <a:ea typeface="Calibri" pitchFamily="34" charset="-122"/>
                           <a:cs typeface="Calibri" pitchFamily="34" charset="-120"/>
                         </a:rPr>
-                        <a:t>88.1</a:t>
+                        <a:t>89</a:t>
                       </a:r>
                       <a:endParaRPr lang="en-US" sz="1300" dirty="0">
                         <a:latin typeface="Calibri" charset="0"/>
@@ -13427,7 +14413,7 @@
                           <a:ea typeface="Calibri" pitchFamily="34" charset="-122"/>
                           <a:cs typeface="Calibri" pitchFamily="34" charset="-120"/>
                         </a:rPr>
-                        <a:t>4</a:t>
+                        <a:t>7</a:t>
                       </a:r>
                       <a:endParaRPr lang="en-US" sz="1300" dirty="0">
                         <a:latin typeface="Calibri" charset="0"/>
@@ -13757,7 +14743,7 @@
                           <a:ea typeface="Calibri" pitchFamily="34" charset="-122"/>
                           <a:cs typeface="Calibri" pitchFamily="34" charset="-120"/>
                         </a:rPr>
-                        <a:t>moyenne</a:t>
+                        <a:t>faible</a:t>
                       </a:r>
                       <a:endParaRPr lang="en-US" sz="1300" dirty="0">
                         <a:latin typeface="Calibri" charset="0"/>
@@ -13822,7 +14808,7 @@
                           <a:ea typeface="Calibri" pitchFamily="34" charset="-122"/>
                           <a:cs typeface="Calibri" pitchFamily="34" charset="-120"/>
                         </a:rPr>
-                        <a:t>12</a:t>
+                        <a:t>9</a:t>
                       </a:r>
                       <a:endParaRPr lang="en-US" sz="1300" dirty="0">
                         <a:latin typeface="Calibri" charset="0"/>
@@ -14217,7 +15203,7 @@
                           <a:ea typeface="Calibri" pitchFamily="34" charset="-122"/>
                           <a:cs typeface="Calibri" pitchFamily="34" charset="-120"/>
                         </a:rPr>
-                        <a:t>2</a:t>
+                        <a:t>1</a:t>
                       </a:r>
                       <a:endParaRPr lang="en-US" sz="1300" dirty="0">
                         <a:latin typeface="Calibri" charset="0"/>
@@ -14612,7 +15598,7 @@
                           <a:ea typeface="Calibri" pitchFamily="34" charset="-122"/>
                           <a:cs typeface="Calibri" pitchFamily="34" charset="-120"/>
                         </a:rPr>
-                        <a:t>1</a:t>
+                        <a:t>2</a:t>
                       </a:r>
                       <a:endParaRPr lang="en-US" sz="1300" dirty="0">
                         <a:latin typeface="Calibri" charset="0"/>
@@ -15007,7 +15993,7 @@
                           <a:ea typeface="Calibri" pitchFamily="34" charset="-122"/>
                           <a:cs typeface="Calibri" pitchFamily="34" charset="-120"/>
                         </a:rPr>
-                        <a:t>3</a:t>
+                        <a:t>5</a:t>
                       </a:r>
                       <a:endParaRPr lang="en-US" sz="1300" dirty="0">
                         <a:latin typeface="Calibri" charset="0"/>
@@ -15797,7 +16783,7 @@
                           <a:ea typeface="Calibri" pitchFamily="34" charset="-122"/>
                           <a:cs typeface="Calibri" pitchFamily="34" charset="-120"/>
                         </a:rPr>
-                        <a:t>5</a:t>
+                        <a:t>4</a:t>
                       </a:r>
                       <a:endParaRPr lang="en-US" sz="1300" dirty="0">
                         <a:latin typeface="Calibri" charset="0"/>
@@ -16192,7 +17178,7 @@
                           <a:ea typeface="Calibri" pitchFamily="34" charset="-122"/>
                           <a:cs typeface="Calibri" pitchFamily="34" charset="-120"/>
                         </a:rPr>
-                        <a:t>1</a:t>
+                        <a:t>0</a:t>
                       </a:r>
                       <a:endParaRPr lang="en-US" sz="1300" dirty="0">
                         <a:latin typeface="Calibri" charset="0"/>
@@ -16383,13 +17369,13 @@
                       <a:r>
                         <a:rPr lang="en-US" sz="1300" b="1" dirty="0">
                           <a:solidFill>
-                            <a:srgbClr val="1F2937"/>
+                            <a:srgbClr val="FFFFFF"/>
                           </a:solidFill>
                           <a:latin typeface="Calibri" pitchFamily="34" charset="0"/>
                           <a:ea typeface="Calibri" pitchFamily="34" charset="-122"/>
                           <a:cs typeface="Calibri" pitchFamily="34" charset="-120"/>
                         </a:rPr>
-                        <a:t>JAUNE</a:t>
+                        <a:t>ORANGE</a:t>
                       </a:r>
                       <a:endParaRPr lang="en-US" sz="1300" dirty="0">
                         <a:latin typeface="Calibri" charset="0"/>
@@ -16436,7 +17422,7 @@
                       <a:tailEnd type="none" w="med" len="med"/>
                     </a:lnB>
                     <a:solidFill>
-                      <a:srgbClr val="CA8A04"/>
+                      <a:srgbClr val="EA580C"/>
                     </a:solidFill>
                   </a:tcPr>
                 </a:tc>
@@ -16457,7 +17443,7 @@
                           <a:ea typeface="Calibri" pitchFamily="34" charset="-122"/>
                           <a:cs typeface="Calibri" pitchFamily="34" charset="-120"/>
                         </a:rPr>
-                        <a:t>31.3</a:t>
+                        <a:t>36.8</a:t>
                       </a:r>
                       <a:endParaRPr lang="en-US" sz="1300" dirty="0">
                         <a:latin typeface="Calibri" charset="0"/>
@@ -16652,7 +17638,7 @@
                           <a:ea typeface="Calibri" pitchFamily="34" charset="-122"/>
                           <a:cs typeface="Calibri" pitchFamily="34" charset="-120"/>
                         </a:rPr>
-                        <a:t>↓</a:t>
+                        <a:t>=</a:t>
                       </a:r>
                       <a:endParaRPr lang="en-US" sz="1300" dirty="0">
                         <a:latin typeface="Calibri" charset="0"/>
@@ -17028,17 +18014,17 @@
               <a:buNone/>
             </a:pPr>
             <a:r>
-              <a:rPr lang="en-US" sz="2200" b="1" dirty="0">
+              <a:rPr lang="en-US" sz="2400" dirty="0">
                 <a:solidFill>
                   <a:srgbClr val="FFFFFF"/>
                 </a:solidFill>
-                <a:latin typeface="Calibri" pitchFamily="34" charset="0"/>
-                <a:ea typeface="Calibri" pitchFamily="34" charset="-122"/>
-                <a:cs typeface="Calibri" pitchFamily="34" charset="-120"/>
+                <a:latin typeface="Arial Narrow" pitchFamily="34" charset="0"/>
+                <a:ea typeface="Arial Narrow" pitchFamily="34" charset="-122"/>
+                <a:cs typeface="Arial Narrow" pitchFamily="34" charset="-120"/>
               </a:rPr>
               <a:t>I</a:t>
             </a:r>
-            <a:endParaRPr lang="en-US" sz="2200" dirty="0"/>
+            <a:endParaRPr lang="en-US" sz="2400" dirty="0"/>
           </a:p>
         </p:txBody>
       </p:sp>
@@ -17067,13 +18053,13 @@
               <a:buNone/>
             </a:pPr>
             <a:r>
-              <a:rPr lang="en-US" sz="2800" b="1" dirty="0">
+              <a:rPr lang="en-US" sz="2800" u="sng" dirty="0">
                 <a:solidFill>
                   <a:srgbClr val="1F6B5E"/>
                 </a:solidFill>
-                <a:latin typeface="Calibri" pitchFamily="34" charset="0"/>
-                <a:ea typeface="Calibri" pitchFamily="34" charset="-122"/>
-                <a:cs typeface="Calibri" pitchFamily="34" charset="-120"/>
+                <a:latin typeface="Arial Narrow" pitchFamily="34" charset="0"/>
+                <a:ea typeface="Arial Narrow" pitchFamily="34" charset="-122"/>
+                <a:cs typeface="Arial Narrow" pitchFamily="34" charset="-120"/>
               </a:rPr>
               <a:t>Burkina Faso : situation au 21/10/26</a:t>
             </a:r>
@@ -17084,6 +18070,78 @@
       <p:sp>
         <p:nvSpPr>
           <p:cNvPr id="4" name="Shape 2"/>
+          <p:cNvSpPr/>
+          <p:nvPr/>
+        </p:nvSpPr>
+        <p:spPr>
+          <a:xfrm>
+            <a:off x="10881360" y="274320"/>
+            <a:ext cx="905256" cy="283464"/>
+          </a:xfrm>
+          <a:prstGeom prst="rect">
+            <a:avLst/>
+          </a:prstGeom>
+          <a:solidFill>
+            <a:srgbClr val="EF2B2D"/>
+          </a:solidFill>
+          <a:ln w="12700">
+            <a:solidFill>
+              <a:srgbClr val="EF2B2D"/>
+            </a:solidFill>
+            <a:prstDash val="solid"/>
+          </a:ln>
+        </p:spPr>
+      </p:sp>
+      <p:sp>
+        <p:nvSpPr>
+          <p:cNvPr id="5" name="Shape 3"/>
+          <p:cNvSpPr/>
+          <p:nvPr/>
+        </p:nvSpPr>
+        <p:spPr>
+          <a:xfrm>
+            <a:off x="10881360" y="557784"/>
+            <a:ext cx="905256" cy="283464"/>
+          </a:xfrm>
+          <a:prstGeom prst="rect">
+            <a:avLst/>
+          </a:prstGeom>
+          <a:solidFill>
+            <a:srgbClr val="009E49"/>
+          </a:solidFill>
+          <a:ln w="12700">
+            <a:solidFill>
+              <a:srgbClr val="009E49"/>
+            </a:solidFill>
+            <a:prstDash val="solid"/>
+          </a:ln>
+        </p:spPr>
+      </p:sp>
+      <p:sp>
+        <p:nvSpPr>
+          <p:cNvPr id="6" name="Shape 4"/>
+          <p:cNvSpPr/>
+          <p:nvPr/>
+        </p:nvSpPr>
+        <p:spPr>
+          <a:xfrm>
+            <a:off x="10881360" y="274320"/>
+            <a:ext cx="905256" cy="566928"/>
+          </a:xfrm>
+          <a:prstGeom prst="rect">
+            <a:avLst/>
+          </a:prstGeom>
+          <a:ln w="6350">
+            <a:solidFill>
+              <a:srgbClr val="1F2937"/>
+            </a:solidFill>
+            <a:prstDash val="solid"/>
+          </a:ln>
+        </p:spPr>
+      </p:sp>
+      <p:sp>
+        <p:nvSpPr>
+          <p:cNvPr id="7" name="Shape 5"/>
           <p:cNvSpPr/>
           <p:nvPr/>
         </p:nvSpPr>
@@ -17106,7 +18164,7 @@
       </p:sp>
       <p:sp>
         <p:nvSpPr>
-          <p:cNvPr id="5" name="Text 3"/>
+          <p:cNvPr id="8" name="Text 6"/>
           <p:cNvSpPr/>
           <p:nvPr/>
         </p:nvSpPr>
@@ -17147,7 +18205,7 @@
       </p:sp>
       <p:sp>
         <p:nvSpPr>
-          <p:cNvPr id="6" name="Text 4"/>
+          <p:cNvPr id="9" name="Text 7"/>
           <p:cNvSpPr/>
           <p:nvPr/>
         </p:nvSpPr>
@@ -17182,7 +18240,7 @@
                 <a:ea typeface="Calibri" pitchFamily="34" charset="-122"/>
                 <a:cs typeface="Calibri" pitchFamily="34" charset="-120"/>
               </a:rPr>
-              <a:t>Burkina Faso: la junte au pouvoir rétablit la peine de mort</a:t>
+              <a:t>« Le sentimentalisme, c’est fini » : au Burkina Faso, Ibrahim Traoré rétablit la peine de mort</a:t>
             </a:r>
             <a:endParaRPr lang="en-US" sz="1300" dirty="0"/>
           </a:p>
@@ -17202,7 +18260,7 @@
                 <a:ea typeface="Calibri" pitchFamily="34" charset="-122"/>
                 <a:cs typeface="Calibri" pitchFamily="34" charset="-120"/>
               </a:rPr>
-              <a:t>RFI Afrique · 21/10 03h UTC · niveau critique · Probable</a:t>
+              <a:t>Jeune Afrique · 21/10 09h UTC · niveau critique · Probable</a:t>
             </a:r>
             <a:endParaRPr lang="en-US" sz="1300" dirty="0"/>
           </a:p>
@@ -17223,7 +18281,7 @@
                 <a:ea typeface="Calibri" pitchFamily="34" charset="-122"/>
                 <a:cs typeface="Calibri" pitchFamily="34" charset="-120"/>
               </a:rPr>
-              <a:t>Burkina Faso : la peine de mort réintroduite dans le Code pénal</a:t>
+              <a:t>Burkina Faso : la peine de mort rétablie dans le nouveau Code pénal</a:t>
             </a:r>
             <a:endParaRPr lang="en-US" sz="1300" dirty="0"/>
           </a:p>
@@ -17243,7 +18301,7 @@
                 <a:ea typeface="Calibri" pitchFamily="34" charset="-122"/>
                 <a:cs typeface="Calibri" pitchFamily="34" charset="-120"/>
               </a:rPr>
-              <a:t>Guineematin.com · 20/10 22h UTC · niveau critique · Non confirmé</a:t>
+              <a:t>Maliactu · 21/10 08h UTC · niveau critique · Probable</a:t>
             </a:r>
             <a:endParaRPr lang="en-US" sz="1300" dirty="0"/>
           </a:p>
@@ -17264,7 +18322,7 @@
                 <a:ea typeface="Calibri" pitchFamily="34" charset="-122"/>
                 <a:cs typeface="Calibri" pitchFamily="34" charset="-120"/>
               </a:rPr>
-              <a:t>Sécurité alimentaire : le Burkina Faso développe 8 nouvelles variétés de riz grâce à la technologie nucléaire</a:t>
+              <a:t>Burkina Faso : le parlement vote le rétablissement de la peine de mort</a:t>
             </a:r>
             <a:endParaRPr lang="en-US" sz="1300" dirty="0"/>
           </a:p>
@@ -17284,7 +18342,7 @@
                 <a:ea typeface="Calibri" pitchFamily="34" charset="-122"/>
                 <a:cs typeface="Calibri" pitchFamily="34" charset="-120"/>
               </a:rPr>
-              <a:t>Actu Cameroun · 20/10 15h UTC · niveau élevé · Non confirmé</a:t>
+              <a:t>Africanews — Chaine panafricaine · 21/10 07h UTC · niveau critique · Probable</a:t>
             </a:r>
             <a:endParaRPr lang="en-US" sz="1300" dirty="0"/>
           </a:p>
@@ -17305,7 +18363,7 @@
                 <a:ea typeface="Calibri" pitchFamily="34" charset="-122"/>
                 <a:cs typeface="Calibri" pitchFamily="34" charset="-120"/>
               </a:rPr>
-              <a:t>Offensive agropastorale : le Premier ministre appelle les éleveurs à tirer pleinement profit des mesures d’accompagnement de l’État</a:t>
+              <a:t>Burkina Faso: la junte au pouvoir rétablit la peine de mort</a:t>
             </a:r>
             <a:endParaRPr lang="en-US" sz="1300" dirty="0"/>
           </a:p>
@@ -17325,7 +18383,7 @@
                 <a:ea typeface="Calibri" pitchFamily="34" charset="-122"/>
                 <a:cs typeface="Calibri" pitchFamily="34" charset="-120"/>
               </a:rPr>
-              <a:t>Gouvernement de transition Burkina Faso · 20/10 15h UTC · niveau élevé · Probable</a:t>
+              <a:t>RFI Afrique · 21/10 03h UTC · niveau critique · Confirmé</a:t>
             </a:r>
             <a:endParaRPr lang="en-US" sz="1300" dirty="0"/>
           </a:p>
@@ -17333,7 +18391,7 @@
       </p:sp>
       <p:sp>
         <p:nvSpPr>
-          <p:cNvPr id="7" name="Shape 5"/>
+          <p:cNvPr id="10" name="Shape 8"/>
           <p:cNvSpPr/>
           <p:nvPr/>
         </p:nvSpPr>
@@ -17358,7 +18416,7 @@
       </p:sp>
       <p:sp>
         <p:nvSpPr>
-          <p:cNvPr id="8" name="Text 6"/>
+          <p:cNvPr id="11" name="Text 9"/>
           <p:cNvSpPr/>
           <p:nvPr/>
         </p:nvSpPr>
@@ -17397,7 +18455,7 @@
       </p:sp>
       <p:sp>
         <p:nvSpPr>
-          <p:cNvPr id="9" name="Text 7"/>
+          <p:cNvPr id="12" name="Text 10"/>
           <p:cNvSpPr/>
           <p:nvPr/>
         </p:nvSpPr>
@@ -17432,7 +18490,7 @@
                 <a:ea typeface="Calibri" pitchFamily="34" charset="-122"/>
                 <a:cs typeface="Calibri" pitchFamily="34" charset="-120"/>
               </a:rPr>
-              <a:t>Niveau rouge (grave, 88.1/100), confiance moyenne.</a:t>
+              <a:t>Niveau rouge (grave, 89/100), confiance moyenne.</a:t>
             </a:r>
             <a:endParaRPr lang="en-US" sz="1200" dirty="0"/>
           </a:p>
@@ -17453,7 +18511,7 @@
                 <a:ea typeface="Calibri" pitchFamily="34" charset="-122"/>
                 <a:cs typeface="Calibri" pitchFamily="34" charset="-120"/>
               </a:rPr>
-              <a:t>Fondement : incident vérifié le plus récent : 113 jours ; 1 signal du jour.</a:t>
+              <a:t>Fondement : incident vérifié le plus récent : 114 jours ; 2 signaux du jour.</a:t>
             </a:r>
             <a:endParaRPr lang="en-US" sz="1200" dirty="0"/>
           </a:p>
@@ -17495,7 +18553,7 @@
                 <a:ea typeface="Calibri" pitchFamily="34" charset="-122"/>
                 <a:cs typeface="Calibri" pitchFamily="34" charset="-120"/>
               </a:rPr>
-              <a:t>4 fait(s) au-dessus du normal dans les 36 dernières heures.</a:t>
+              <a:t>7 fait(s) au-dessus du normal dans les 36 dernières heures.</a:t>
             </a:r>
             <a:endParaRPr lang="en-US" sz="1200" dirty="0"/>
           </a:p>
@@ -17503,7 +18561,7 @@
       </p:sp>
       <p:pic>
         <p:nvPicPr>
-          <p:cNvPr id="10" name="Image 0" descr="/home/runner/work/SentiqS/SentiqS/scripts/assets/grsci/logo-grsci.png">    </p:cNvPr>
+          <p:cNvPr id="13" name="Image 0" descr="/home/runner/work/SentiqS/SentiqS/scripts/assets/grsci/logo-grsci.png">    </p:cNvPr>
           <p:cNvPicPr>
             <a:picLocks noChangeAspect="1"/>
           </p:cNvPicPr>
@@ -17527,7 +18585,7 @@
       </p:pic>
       <p:sp>
         <p:nvSpPr>
-          <p:cNvPr id="11" name="Text 8"/>
+          <p:cNvPr id="14" name="Text 11"/>
           <p:cNvSpPr/>
           <p:nvPr/>
         </p:nvSpPr>
@@ -17696,7 +18754,7 @@
       </p:sp>
       <p:sp>
         <p:nvSpPr>
-          <p:cNvPr id="12" name="Text 9"/>
+          <p:cNvPr id="15" name="Text 12"/>
           <p:cNvSpPr/>
           <p:nvPr/>
         </p:nvSpPr>

--- a/web/rapports/GRSCI/dernier.pptx
+++ b/web/rapports/GRSCI/dernier.pptx
@@ -21,13 +21,9 @@
     <p:sldId id="269" r:id="rId15"/>
     <p:sldId id="270" r:id="rId16"/>
     <p:sldId id="271" r:id="rId17"/>
-    <p:sldId id="272" r:id="rId18"/>
-    <p:sldId id="273" r:id="rId19"/>
-    <p:sldId id="274" r:id="rId20"/>
-    <p:sldId id="275" r:id="rId21"/>
   </p:sldIdLst>
   <p:notesMasterIdLst>
-    <p:notesMasterId r:id="rId22"/>
+    <p:notesMasterId r:id="rId18"/>
   </p:notesMasterIdLst>
   <p:sldSz cx="12192000" cy="6858000"/>
   <p:notesSz cx="6858000" cy="12192000"/>
@@ -1179,270 +1175,6 @@
 </p:notes>
 </file>
 
-<file path=ppt/notesSlides/notesSlide17.xml><?xml version="1.0" encoding="utf-8"?>
-<p:notes xmlns:a="http://schemas.openxmlformats.org/drawingml/2006/main" xmlns:r="http://schemas.openxmlformats.org/officeDocument/2006/relationships" xmlns:p="http://schemas.openxmlformats.org/presentationml/2006/main">
-  <p:cSld>
-    <p:spTree>
-      <p:nvGrpSpPr>
-        <p:cNvPr id="1" name=""/>
-        <p:cNvGrpSpPr/>
-        <p:nvPr/>
-      </p:nvGrpSpPr>
-      <p:grpSpPr>
-        <a:xfrm>
-          <a:off x="0" y="0"/>
-          <a:ext cx="0" cy="0"/>
-          <a:chOff x="0" y="0"/>
-          <a:chExt cx="0" cy="0"/>
-        </a:xfrm>
-      </p:grpSpPr>
-      <p:sp>
-        <p:nvSpPr>
-          <p:cNvPr id="2" name="Slide Image Placeholder 1"/>
-          <p:cNvSpPr>
-            <a:spLocks noGrp="1" noRot="1" noChangeAspect="1"/>
-          </p:cNvSpPr>
-          <p:nvPr>
-            <p:ph type="sldImg"/>
-          </p:nvPr>
-        </p:nvSpPr>
-        <p:spPr/>
-      </p:sp>
-      <p:sp>
-        <p:nvSpPr>
-          <p:cNvPr id="3" name="Notes Placeholder 2"/>
-          <p:cNvSpPr>
-            <a:spLocks noGrp="1"/>
-          </p:cNvSpPr>
-          <p:nvPr>
-            <p:ph type="body" idx="1"/>
-          </p:nvPr>
-        </p:nvSpPr>
-        <p:spPr/>
-        <p:txBody>
-          <a:bodyPr/>
-          <a:lstStyle/>
-          <a:p>
-            <a:r>
-              <a:rPr lang="en-US" dirty="0"/>
-              <a:t/>
-            </a:r>
-            <a:endParaRPr lang="en-US" dirty="0"/>
-          </a:p>
-        </p:txBody>
-      </p:sp>
-      <p:sp>
-        <p:nvSpPr>
-          <p:cNvPr id="4" name="Slide Number Placeholder 3"/>
-          <p:cNvSpPr>
-            <a:spLocks noGrp="1"/>
-          </p:cNvSpPr>
-          <p:nvPr>
-            <p:ph type="sldNum" sz="quarter" idx="10"/>
-          </p:nvPr>
-        </p:nvSpPr>
-        <p:spPr/>
-        <p:txBody>
-          <a:bodyPr/>
-          <a:lstStyle/>
-          <a:p>
-            <a:fld id="{F7021451-1387-4CA6-816F-3879F97B5CBC}" type="slidenum">
-              <a:rPr lang="en-US"/>
-              <a:t>17</a:t>
-            </a:fld>
-            <a:endParaRPr lang="en-US"/>
-          </a:p>
-        </p:txBody>
-      </p:sp>
-    </p:spTree>
-    <p:extLst>
-      <p:ext uri="{BB962C8B-B14F-4D97-AF65-F5344CB8AC3E}">
-        <p14:creationId xmlns:p14="http://schemas.microsoft.com/office/powerpoint/2010/main" val="1024086991"/>
-      </p:ext>
-    </p:extLst>
-  </p:cSld>
-  <p:clrMapOvr>
-    <a:masterClrMapping/>
-  </p:clrMapOvr>
-</p:notes>
-</file>
-
-<file path=ppt/notesSlides/notesSlide18.xml><?xml version="1.0" encoding="utf-8"?>
-<p:notes xmlns:a="http://schemas.openxmlformats.org/drawingml/2006/main" xmlns:r="http://schemas.openxmlformats.org/officeDocument/2006/relationships" xmlns:p="http://schemas.openxmlformats.org/presentationml/2006/main">
-  <p:cSld>
-    <p:spTree>
-      <p:nvGrpSpPr>
-        <p:cNvPr id="1" name=""/>
-        <p:cNvGrpSpPr/>
-        <p:nvPr/>
-      </p:nvGrpSpPr>
-      <p:grpSpPr>
-        <a:xfrm>
-          <a:off x="0" y="0"/>
-          <a:ext cx="0" cy="0"/>
-          <a:chOff x="0" y="0"/>
-          <a:chExt cx="0" cy="0"/>
-        </a:xfrm>
-      </p:grpSpPr>
-      <p:sp>
-        <p:nvSpPr>
-          <p:cNvPr id="2" name="Slide Image Placeholder 1"/>
-          <p:cNvSpPr>
-            <a:spLocks noGrp="1" noRot="1" noChangeAspect="1"/>
-          </p:cNvSpPr>
-          <p:nvPr>
-            <p:ph type="sldImg"/>
-          </p:nvPr>
-        </p:nvSpPr>
-        <p:spPr/>
-      </p:sp>
-      <p:sp>
-        <p:nvSpPr>
-          <p:cNvPr id="3" name="Notes Placeholder 2"/>
-          <p:cNvSpPr>
-            <a:spLocks noGrp="1"/>
-          </p:cNvSpPr>
-          <p:nvPr>
-            <p:ph type="body" idx="1"/>
-          </p:nvPr>
-        </p:nvSpPr>
-        <p:spPr/>
-        <p:txBody>
-          <a:bodyPr/>
-          <a:lstStyle/>
-          <a:p>
-            <a:r>
-              <a:rPr lang="en-US" dirty="0"/>
-              <a:t/>
-            </a:r>
-            <a:endParaRPr lang="en-US" dirty="0"/>
-          </a:p>
-        </p:txBody>
-      </p:sp>
-      <p:sp>
-        <p:nvSpPr>
-          <p:cNvPr id="4" name="Slide Number Placeholder 3"/>
-          <p:cNvSpPr>
-            <a:spLocks noGrp="1"/>
-          </p:cNvSpPr>
-          <p:nvPr>
-            <p:ph type="sldNum" sz="quarter" idx="10"/>
-          </p:nvPr>
-        </p:nvSpPr>
-        <p:spPr/>
-        <p:txBody>
-          <a:bodyPr/>
-          <a:lstStyle/>
-          <a:p>
-            <a:fld id="{F7021451-1387-4CA6-816F-3879F97B5CBC}" type="slidenum">
-              <a:rPr lang="en-US"/>
-              <a:t>18</a:t>
-            </a:fld>
-            <a:endParaRPr lang="en-US"/>
-          </a:p>
-        </p:txBody>
-      </p:sp>
-    </p:spTree>
-    <p:extLst>
-      <p:ext uri="{BB962C8B-B14F-4D97-AF65-F5344CB8AC3E}">
-        <p14:creationId xmlns:p14="http://schemas.microsoft.com/office/powerpoint/2010/main" val="1024086991"/>
-      </p:ext>
-    </p:extLst>
-  </p:cSld>
-  <p:clrMapOvr>
-    <a:masterClrMapping/>
-  </p:clrMapOvr>
-</p:notes>
-</file>
-
-<file path=ppt/notesSlides/notesSlide19.xml><?xml version="1.0" encoding="utf-8"?>
-<p:notes xmlns:a="http://schemas.openxmlformats.org/drawingml/2006/main" xmlns:r="http://schemas.openxmlformats.org/officeDocument/2006/relationships" xmlns:p="http://schemas.openxmlformats.org/presentationml/2006/main">
-  <p:cSld>
-    <p:spTree>
-      <p:nvGrpSpPr>
-        <p:cNvPr id="1" name=""/>
-        <p:cNvGrpSpPr/>
-        <p:nvPr/>
-      </p:nvGrpSpPr>
-      <p:grpSpPr>
-        <a:xfrm>
-          <a:off x="0" y="0"/>
-          <a:ext cx="0" cy="0"/>
-          <a:chOff x="0" y="0"/>
-          <a:chExt cx="0" cy="0"/>
-        </a:xfrm>
-      </p:grpSpPr>
-      <p:sp>
-        <p:nvSpPr>
-          <p:cNvPr id="2" name="Slide Image Placeholder 1"/>
-          <p:cNvSpPr>
-            <a:spLocks noGrp="1" noRot="1" noChangeAspect="1"/>
-          </p:cNvSpPr>
-          <p:nvPr>
-            <p:ph type="sldImg"/>
-          </p:nvPr>
-        </p:nvSpPr>
-        <p:spPr/>
-      </p:sp>
-      <p:sp>
-        <p:nvSpPr>
-          <p:cNvPr id="3" name="Notes Placeholder 2"/>
-          <p:cNvSpPr>
-            <a:spLocks noGrp="1"/>
-          </p:cNvSpPr>
-          <p:nvPr>
-            <p:ph type="body" idx="1"/>
-          </p:nvPr>
-        </p:nvSpPr>
-        <p:spPr/>
-        <p:txBody>
-          <a:bodyPr/>
-          <a:lstStyle/>
-          <a:p>
-            <a:r>
-              <a:rPr lang="en-US" dirty="0"/>
-              <a:t/>
-            </a:r>
-            <a:endParaRPr lang="en-US" dirty="0"/>
-          </a:p>
-        </p:txBody>
-      </p:sp>
-      <p:sp>
-        <p:nvSpPr>
-          <p:cNvPr id="4" name="Slide Number Placeholder 3"/>
-          <p:cNvSpPr>
-            <a:spLocks noGrp="1"/>
-          </p:cNvSpPr>
-          <p:nvPr>
-            <p:ph type="sldNum" sz="quarter" idx="10"/>
-          </p:nvPr>
-        </p:nvSpPr>
-        <p:spPr/>
-        <p:txBody>
-          <a:bodyPr/>
-          <a:lstStyle/>
-          <a:p>
-            <a:fld id="{F7021451-1387-4CA6-816F-3879F97B5CBC}" type="slidenum">
-              <a:rPr lang="en-US"/>
-              <a:t>19</a:t>
-            </a:fld>
-            <a:endParaRPr lang="en-US"/>
-          </a:p>
-        </p:txBody>
-      </p:sp>
-    </p:spTree>
-    <p:extLst>
-      <p:ext uri="{BB962C8B-B14F-4D97-AF65-F5344CB8AC3E}">
-        <p14:creationId xmlns:p14="http://schemas.microsoft.com/office/powerpoint/2010/main" val="1024086991"/>
-      </p:ext>
-    </p:extLst>
-  </p:cSld>
-  <p:clrMapOvr>
-    <a:masterClrMapping/>
-  </p:clrMapOvr>
-</p:notes>
-</file>
-
 <file path=ppt/notesSlides/notesSlide2.xml><?xml version="1.0" encoding="utf-8"?>
 <p:notes xmlns:a="http://schemas.openxmlformats.org/drawingml/2006/main" xmlns:r="http://schemas.openxmlformats.org/officeDocument/2006/relationships" xmlns:p="http://schemas.openxmlformats.org/presentationml/2006/main">
   <p:cSld>
@@ -1513,94 +1245,6 @@
             <a:fld id="{F7021451-1387-4CA6-816F-3879F97B5CBC}" type="slidenum">
               <a:rPr lang="en-US"/>
               <a:t>2</a:t>
-            </a:fld>
-            <a:endParaRPr lang="en-US"/>
-          </a:p>
-        </p:txBody>
-      </p:sp>
-    </p:spTree>
-    <p:extLst>
-      <p:ext uri="{BB962C8B-B14F-4D97-AF65-F5344CB8AC3E}">
-        <p14:creationId xmlns:p14="http://schemas.microsoft.com/office/powerpoint/2010/main" val="1024086991"/>
-      </p:ext>
-    </p:extLst>
-  </p:cSld>
-  <p:clrMapOvr>
-    <a:masterClrMapping/>
-  </p:clrMapOvr>
-</p:notes>
-</file>
-
-<file path=ppt/notesSlides/notesSlide20.xml><?xml version="1.0" encoding="utf-8"?>
-<p:notes xmlns:a="http://schemas.openxmlformats.org/drawingml/2006/main" xmlns:r="http://schemas.openxmlformats.org/officeDocument/2006/relationships" xmlns:p="http://schemas.openxmlformats.org/presentationml/2006/main">
-  <p:cSld>
-    <p:spTree>
-      <p:nvGrpSpPr>
-        <p:cNvPr id="1" name=""/>
-        <p:cNvGrpSpPr/>
-        <p:nvPr/>
-      </p:nvGrpSpPr>
-      <p:grpSpPr>
-        <a:xfrm>
-          <a:off x="0" y="0"/>
-          <a:ext cx="0" cy="0"/>
-          <a:chOff x="0" y="0"/>
-          <a:chExt cx="0" cy="0"/>
-        </a:xfrm>
-      </p:grpSpPr>
-      <p:sp>
-        <p:nvSpPr>
-          <p:cNvPr id="2" name="Slide Image Placeholder 1"/>
-          <p:cNvSpPr>
-            <a:spLocks noGrp="1" noRot="1" noChangeAspect="1"/>
-          </p:cNvSpPr>
-          <p:nvPr>
-            <p:ph type="sldImg"/>
-          </p:nvPr>
-        </p:nvSpPr>
-        <p:spPr/>
-      </p:sp>
-      <p:sp>
-        <p:nvSpPr>
-          <p:cNvPr id="3" name="Notes Placeholder 2"/>
-          <p:cNvSpPr>
-            <a:spLocks noGrp="1"/>
-          </p:cNvSpPr>
-          <p:nvPr>
-            <p:ph type="body" idx="1"/>
-          </p:nvPr>
-        </p:nvSpPr>
-        <p:spPr/>
-        <p:txBody>
-          <a:bodyPr/>
-          <a:lstStyle/>
-          <a:p>
-            <a:r>
-              <a:rPr lang="en-US" dirty="0"/>
-              <a:t/>
-            </a:r>
-            <a:endParaRPr lang="en-US" dirty="0"/>
-          </a:p>
-        </p:txBody>
-      </p:sp>
-      <p:sp>
-        <p:nvSpPr>
-          <p:cNvPr id="4" name="Slide Number Placeholder 3"/>
-          <p:cNvSpPr>
-            <a:spLocks noGrp="1"/>
-          </p:cNvSpPr>
-          <p:nvPr>
-            <p:ph type="sldNum" sz="quarter" idx="10"/>
-          </p:nvPr>
-        </p:nvSpPr>
-        <p:spPr/>
-        <p:txBody>
-          <a:bodyPr/>
-          <a:lstStyle/>
-          <a:p>
-            <a:fld id="{F7021451-1387-4CA6-816F-3879F97B5CBC}" type="slidenum">
-              <a:rPr lang="en-US"/>
-              <a:t>20</a:t>
             </a:fld>
             <a:endParaRPr lang="en-US"/>
           </a:p>
@@ -2702,7 +2346,7 @@
                 <a:ea typeface="Calibri" pitchFamily="34" charset="-122"/>
                 <a:cs typeface="Calibri" pitchFamily="34" charset="-120"/>
               </a:rPr>
-              <a:t>21 OCTOBRE 2026</a:t>
+              <a:t>23 OCTOBRE 2026</a:t>
             </a:r>
             <a:endParaRPr lang="en-US" sz="2000" dirty="0"/>
           </a:p>
@@ -2958,7 +2602,7 @@
                 <a:ea typeface="Calibri" pitchFamily="34" charset="-122"/>
                 <a:cs typeface="Calibri" pitchFamily="34" charset="-120"/>
               </a:rPr>
-              <a:t>|  21/10/26   |   1</a:t>
+              <a:t>|  23/10/26   |   1</a:t>
             </a:r>
             <a:endParaRPr lang="en-US" sz="1000" dirty="0"/>
           </a:p>
@@ -3024,7 +2668,7 @@
                 <a:ea typeface="Arial Narrow" pitchFamily="34" charset="-122"/>
                 <a:cs typeface="Arial Narrow" pitchFamily="34" charset="-120"/>
               </a:rPr>
-              <a:t>II</a:t>
+              <a:t>V</a:t>
             </a:r>
             <a:endParaRPr lang="en-US" sz="2400" dirty="0"/>
           </a:p>
@@ -3063,7 +2707,7 @@
                 <a:ea typeface="Arial Narrow" pitchFamily="34" charset="-122"/>
                 <a:cs typeface="Arial Narrow" pitchFamily="34" charset="-120"/>
               </a:rPr>
-              <a:t>Mali</a:t>
+              <a:t>Togo</a:t>
             </a:r>
             <a:endParaRPr lang="en-US" sz="2800" dirty="0"/>
           </a:p>
@@ -3078,17 +2722,17 @@
         <p:spPr>
           <a:xfrm>
             <a:off x="10881360" y="274320"/>
-            <a:ext cx="301752" cy="566928"/>
+            <a:ext cx="905256" cy="113386"/>
           </a:xfrm>
           <a:prstGeom prst="rect">
             <a:avLst/>
           </a:prstGeom>
           <a:solidFill>
-            <a:srgbClr val="14B53A"/>
+            <a:srgbClr val="006A4E"/>
           </a:solidFill>
           <a:ln w="12700">
             <a:solidFill>
-              <a:srgbClr val="14B53A"/>
+              <a:srgbClr val="006A4E"/>
             </a:solidFill>
             <a:prstDash val="solid"/>
           </a:ln>
@@ -3102,18 +2746,18 @@
         </p:nvSpPr>
         <p:spPr>
           <a:xfrm>
-            <a:off x="11183112" y="274320"/>
-            <a:ext cx="301752" cy="566928"/>
+            <a:off x="10881360" y="387706"/>
+            <a:ext cx="905256" cy="113386"/>
           </a:xfrm>
           <a:prstGeom prst="rect">
             <a:avLst/>
           </a:prstGeom>
           <a:solidFill>
-            <a:srgbClr val="FCD116"/>
+            <a:srgbClr val="FFCE00"/>
           </a:solidFill>
           <a:ln w="12700">
             <a:solidFill>
-              <a:srgbClr val="FCD116"/>
+              <a:srgbClr val="FFCE00"/>
             </a:solidFill>
             <a:prstDash val="solid"/>
           </a:ln>
@@ -3127,18 +2771,18 @@
         </p:nvSpPr>
         <p:spPr>
           <a:xfrm>
-            <a:off x="11484864" y="274320"/>
-            <a:ext cx="301752" cy="566928"/>
+            <a:off x="10881360" y="501091"/>
+            <a:ext cx="905256" cy="113386"/>
           </a:xfrm>
           <a:prstGeom prst="rect">
             <a:avLst/>
           </a:prstGeom>
           <a:solidFill>
-            <a:srgbClr val="CE1126"/>
+            <a:srgbClr val="006A4E"/>
           </a:solidFill>
           <a:ln w="12700">
             <a:solidFill>
-              <a:srgbClr val="CE1126"/>
+              <a:srgbClr val="006A4E"/>
             </a:solidFill>
             <a:prstDash val="solid"/>
           </a:ln>
@@ -3147,6 +2791,56 @@
       <p:sp>
         <p:nvSpPr>
           <p:cNvPr id="7" name="Shape 5"/>
+          <p:cNvSpPr/>
+          <p:nvPr/>
+        </p:nvSpPr>
+        <p:spPr>
+          <a:xfrm>
+            <a:off x="10881360" y="614477"/>
+            <a:ext cx="905256" cy="113386"/>
+          </a:xfrm>
+          <a:prstGeom prst="rect">
+            <a:avLst/>
+          </a:prstGeom>
+          <a:solidFill>
+            <a:srgbClr val="FFCE00"/>
+          </a:solidFill>
+          <a:ln w="12700">
+            <a:solidFill>
+              <a:srgbClr val="FFCE00"/>
+            </a:solidFill>
+            <a:prstDash val="solid"/>
+          </a:ln>
+        </p:spPr>
+      </p:sp>
+      <p:sp>
+        <p:nvSpPr>
+          <p:cNvPr id="8" name="Shape 6"/>
+          <p:cNvSpPr/>
+          <p:nvPr/>
+        </p:nvSpPr>
+        <p:spPr>
+          <a:xfrm>
+            <a:off x="10881360" y="727862"/>
+            <a:ext cx="905256" cy="113386"/>
+          </a:xfrm>
+          <a:prstGeom prst="rect">
+            <a:avLst/>
+          </a:prstGeom>
+          <a:solidFill>
+            <a:srgbClr val="006A4E"/>
+          </a:solidFill>
+          <a:ln w="12700">
+            <a:solidFill>
+              <a:srgbClr val="006A4E"/>
+            </a:solidFill>
+            <a:prstDash val="solid"/>
+          </a:ln>
+        </p:spPr>
+      </p:sp>
+      <p:sp>
+        <p:nvSpPr>
+          <p:cNvPr id="9" name="Shape 7"/>
           <p:cNvSpPr/>
           <p:nvPr/>
         </p:nvSpPr>
@@ -3168,7 +2862,7 @@
       </p:sp>
       <p:sp>
         <p:nvSpPr>
-          <p:cNvPr id="8" name="Shape 6"/>
+          <p:cNvPr id="10" name="Shape 8"/>
           <p:cNvSpPr/>
           <p:nvPr/>
         </p:nvSpPr>
@@ -3191,7 +2885,7 @@
       </p:sp>
       <p:sp>
         <p:nvSpPr>
-          <p:cNvPr id="9" name="Text 7"/>
+          <p:cNvPr id="11" name="Text 9"/>
           <p:cNvSpPr/>
           <p:nvPr/>
         </p:nvSpPr>
@@ -3229,7 +2923,7 @@
                 <a:ea typeface="Calibri" pitchFamily="34" charset="-122"/>
                 <a:cs typeface="Calibri" pitchFamily="34" charset="-120"/>
               </a:rPr>
-              <a:t>OFFENSIVE AGROPASTORALE : LE PREMIER MINISTRE LANCE L’AMÉNAGEMENT DE 50000 HECTARES IRRIGUÉS</a:t>
+              <a:t>TOGO- 31, 7 MILLIARDS FCFA POUR DÉSENCLAVER LES SAVANES : DES TRAVAUX ABANDONNÉS OU MAL FAITS</a:t>
             </a:r>
             <a:endParaRPr lang="en-US" sz="1300" dirty="0"/>
           </a:p>
@@ -3274,7 +2968,7 @@
                   </a:extLst>
                 </a:hlinkClick>
               </a:rPr>
-              <a:t>Mali 24</a:t>
+              <a:t>Togo Actualite</a:t>
             </a:r>
             <a:pPr indent="0" marL="0">
               <a:spcAft>
@@ -3291,7 +2985,7 @@
                 <a:ea typeface="Calibri" pitchFamily="34" charset="-122"/>
                 <a:cs typeface="Calibri" pitchFamily="34" charset="-120"/>
               </a:rPr>
-              <a:t> — 21 octobre 2026, 10 h UTC</a:t>
+              <a:t> — 22 octobre 2026, 12 h UTC</a:t>
             </a:r>
             <a:endParaRPr lang="en-US" sz="1300" dirty="0"/>
           </a:p>
@@ -3315,7 +3009,7 @@
                 <a:ea typeface="Calibri" pitchFamily="34" charset="-122"/>
                 <a:cs typeface="Calibri" pitchFamily="34" charset="-120"/>
               </a:rPr>
-              <a:t>MALI : 20 AGENTS DU CECOGEC FORMÉS À LA SÉCURISATION DES COMMUNICATIONS</a:t>
+              <a:t>TOGO : 407 PERSONNES OPÉRÉES GRATUITEMENT DE LA CATARACTE À LOMÉ, CAP SUR KARA</a:t>
             </a:r>
             <a:endParaRPr lang="en-US" sz="1300" dirty="0"/>
           </a:p>
@@ -3360,7 +3054,7 @@
                   </a:extLst>
                 </a:hlinkClick>
               </a:rPr>
-              <a:t>Malijet</a:t>
+              <a:t>24heureinfo.com</a:t>
             </a:r>
             <a:pPr indent="0" marL="0">
               <a:spcAft>
@@ -3377,265 +3071,7 @@
                 <a:ea typeface="Calibri" pitchFamily="34" charset="-122"/>
                 <a:cs typeface="Calibri" pitchFamily="34" charset="-120"/>
               </a:rPr>
-              <a:t> — 21 octobre 2026, 11 h UTC</a:t>
-            </a:r>
-            <a:endParaRPr lang="en-US" sz="1300" dirty="0"/>
-          </a:p>
-          <a:p>
-            <a:pPr marL="342900" indent="-342900">
-              <a:spcBef>
-                <a:spcPts val="800"/>
-              </a:spcBef>
-              <a:spcAft>
-                <a:spcPts val="200"/>
-              </a:spcAft>
-              <a:buSzPct val="100000"/>
-              <a:buChar char="❑"/>
-            </a:pPr>
-            <a:r>
-              <a:rPr lang="en-US" sz="1400" b="1" u="sng" dirty="0">
-                <a:solidFill>
-                  <a:srgbClr val="1F6B5E"/>
-                </a:solidFill>
-                <a:latin typeface="Calibri" pitchFamily="34" charset="0"/>
-                <a:ea typeface="Calibri" pitchFamily="34" charset="-122"/>
-                <a:cs typeface="Calibri" pitchFamily="34" charset="-120"/>
-              </a:rPr>
-              <a:t>MALI : UN COLLOQUE INTERNATIONAL SUR LE RÔLE DU JUGE CONSTITUTIONNEL DANS LA REFONDATION DE L’ÉTAT</a:t>
-            </a:r>
-            <a:endParaRPr lang="en-US" sz="1300" dirty="0"/>
-          </a:p>
-          <a:p>
-            <a:pPr lvl="1" marL="685800" indent="-342900">
-              <a:spcAft>
-                <a:spcPts val="200"/>
-              </a:spcAft>
-              <a:buSzPct val="100000"/>
-              <a:buChar char="▪"/>
-            </a:pPr>
-            <a:r>
-              <a:rPr lang="en-US" sz="1300" dirty="0">
-                <a:solidFill>
-                  <a:srgbClr val="1F2937"/>
-                </a:solidFill>
-                <a:latin typeface="Calibri" pitchFamily="34" charset="0"/>
-                <a:ea typeface="Calibri" pitchFamily="34" charset="-122"/>
-                <a:cs typeface="Calibri" pitchFamily="34" charset="-120"/>
-              </a:rPr>
-              <a:t>Source : </a:t>
-            </a:r>
-            <a:pPr indent="0" marL="0">
-              <a:spcAft>
-                <a:spcPts val="200"/>
-              </a:spcAft>
-              <a:buNone/>
-            </a:pPr>
-            <a:r>
-              <a:rPr lang="en-US" sz="1300" u="sng" dirty="0">
-                <a:solidFill>
-                  <a:srgbClr val="1F6B5E"/>
-                </a:solidFill>
-                <a:latin typeface="Calibri" pitchFamily="34" charset="0"/>
-                <a:ea typeface="Calibri" pitchFamily="34" charset="-122"/>
-                <a:cs typeface="Calibri" pitchFamily="34" charset="-120"/>
-                <a:hlinkClick r:id="rId3" invalidUrl="" action="" tgtFrame="" tooltip="" history="1" highlightClick="0" endSnd="0">
-                  <a:extLst>
-                    <a:ext uri="{A12FA001-AC4F-418D-AE19-62706E023703}">
-                      <ahyp:hlinkClr xmlns:ahyp="http://schemas.microsoft.com/office/drawing/2018/hyperlinkcolor" val="tx"/>
-                    </a:ext>
-                  </a:extLst>
-                </a:hlinkClick>
-              </a:rPr>
-              <a:t>Malijet</a:t>
-            </a:r>
-            <a:pPr indent="0" marL="0">
-              <a:spcAft>
-                <a:spcPts val="200"/>
-              </a:spcAft>
-              <a:buNone/>
-            </a:pPr>
-            <a:r>
-              <a:rPr lang="en-US" sz="1300" dirty="0">
-                <a:solidFill>
-                  <a:srgbClr val="1F2937"/>
-                </a:solidFill>
-                <a:latin typeface="Calibri" pitchFamily="34" charset="0"/>
-                <a:ea typeface="Calibri" pitchFamily="34" charset="-122"/>
-                <a:cs typeface="Calibri" pitchFamily="34" charset="-120"/>
-              </a:rPr>
-              <a:t> — 20 octobre 2026, 20 h UTC</a:t>
-            </a:r>
-            <a:endParaRPr lang="en-US" sz="1300" dirty="0"/>
-          </a:p>
-          <a:p>
-            <a:pPr marL="342900" indent="-342900">
-              <a:spcBef>
-                <a:spcPts val="800"/>
-              </a:spcBef>
-              <a:spcAft>
-                <a:spcPts val="200"/>
-              </a:spcAft>
-              <a:buSzPct val="100000"/>
-              <a:buChar char="❑"/>
-            </a:pPr>
-            <a:r>
-              <a:rPr lang="en-US" sz="1400" b="1" u="sng" dirty="0">
-                <a:solidFill>
-                  <a:srgbClr val="1F6B5E"/>
-                </a:solidFill>
-                <a:latin typeface="Calibri" pitchFamily="34" charset="0"/>
-                <a:ea typeface="Calibri" pitchFamily="34" charset="-122"/>
-                <a:cs typeface="Calibri" pitchFamily="34" charset="-120"/>
-              </a:rPr>
-              <a:t>CESEC : LA 6ᵉ MANDATURE EXAMINE LE BILAN QUINQUENNAL</a:t>
-            </a:r>
-            <a:endParaRPr lang="en-US" sz="1300" dirty="0"/>
-          </a:p>
-          <a:p>
-            <a:pPr lvl="1" marL="685800" indent="-342900">
-              <a:spcAft>
-                <a:spcPts val="200"/>
-              </a:spcAft>
-              <a:buSzPct val="100000"/>
-              <a:buChar char="▪"/>
-            </a:pPr>
-            <a:r>
-              <a:rPr lang="en-US" sz="1300" dirty="0">
-                <a:solidFill>
-                  <a:srgbClr val="1F2937"/>
-                </a:solidFill>
-                <a:latin typeface="Calibri" pitchFamily="34" charset="0"/>
-                <a:ea typeface="Calibri" pitchFamily="34" charset="-122"/>
-                <a:cs typeface="Calibri" pitchFamily="34" charset="-120"/>
-              </a:rPr>
-              <a:t>Source : </a:t>
-            </a:r>
-            <a:pPr indent="0" marL="0">
-              <a:spcAft>
-                <a:spcPts val="200"/>
-              </a:spcAft>
-              <a:buNone/>
-            </a:pPr>
-            <a:r>
-              <a:rPr lang="en-US" sz="1300" u="sng" dirty="0">
-                <a:solidFill>
-                  <a:srgbClr val="1F6B5E"/>
-                </a:solidFill>
-                <a:latin typeface="Calibri" pitchFamily="34" charset="0"/>
-                <a:ea typeface="Calibri" pitchFamily="34" charset="-122"/>
-                <a:cs typeface="Calibri" pitchFamily="34" charset="-120"/>
-                <a:hlinkClick r:id="rId4" invalidUrl="" action="" tgtFrame="" tooltip="" history="1" highlightClick="0" endSnd="0">
-                  <a:extLst>
-                    <a:ext uri="{A12FA001-AC4F-418D-AE19-62706E023703}">
-                      <ahyp:hlinkClr xmlns:ahyp="http://schemas.microsoft.com/office/drawing/2018/hyperlinkcolor" val="tx"/>
-                    </a:ext>
-                  </a:extLst>
-                </a:hlinkClick>
-              </a:rPr>
-              <a:t>AMAP — Agence Malienne Presse</a:t>
-            </a:r>
-            <a:pPr indent="0" marL="0">
-              <a:spcAft>
-                <a:spcPts val="200"/>
-              </a:spcAft>
-              <a:buNone/>
-            </a:pPr>
-            <a:r>
-              <a:rPr lang="en-US" sz="1300" dirty="0">
-                <a:solidFill>
-                  <a:srgbClr val="1F2937"/>
-                </a:solidFill>
-                <a:latin typeface="Calibri" pitchFamily="34" charset="0"/>
-                <a:ea typeface="Calibri" pitchFamily="34" charset="-122"/>
-                <a:cs typeface="Calibri" pitchFamily="34" charset="-120"/>
-              </a:rPr>
-              <a:t> — 20 octobre 2026, 19 h UTC</a:t>
-            </a:r>
-            <a:endParaRPr lang="en-US" sz="1300" dirty="0"/>
-          </a:p>
-          <a:p>
-            <a:pPr marL="342900" indent="-342900">
-              <a:spcBef>
-                <a:spcPts val="800"/>
-              </a:spcBef>
-              <a:spcAft>
-                <a:spcPts val="200"/>
-              </a:spcAft>
-              <a:buSzPct val="100000"/>
-              <a:buChar char="❑"/>
-            </a:pPr>
-            <a:r>
-              <a:rPr lang="en-US" sz="1400" b="1" u="sng" dirty="0">
-                <a:solidFill>
-                  <a:srgbClr val="1F6B5E"/>
-                </a:solidFill>
-                <a:latin typeface="Calibri" pitchFamily="34" charset="0"/>
-                <a:ea typeface="Calibri" pitchFamily="34" charset="-122"/>
-                <a:cs typeface="Calibri" pitchFamily="34" charset="-120"/>
-              </a:rPr>
-              <a:t>VIOLENCES DANS LE CENTRE DU PAYS - « NOUS AVONS FUI EN PIROGUE AU MILIEU DE LA NUIT »</a:t>
-            </a:r>
-            <a:endParaRPr lang="en-US" sz="1300" dirty="0"/>
-          </a:p>
-          <a:p>
-            <a:pPr lvl="1" marL="685800" indent="-342900">
-              <a:spcAft>
-                <a:spcPts val="200"/>
-              </a:spcAft>
-              <a:buSzPct val="100000"/>
-              <a:buChar char="▪"/>
-            </a:pPr>
-            <a:r>
-              <a:rPr lang="en-US" sz="1300" dirty="0">
-                <a:solidFill>
-                  <a:srgbClr val="1F2937"/>
-                </a:solidFill>
-                <a:latin typeface="Calibri" pitchFamily="34" charset="0"/>
-                <a:ea typeface="Calibri" pitchFamily="34" charset="-122"/>
-                <a:cs typeface="Calibri" pitchFamily="34" charset="-120"/>
-              </a:rPr>
-              <a:t>Source : </a:t>
-            </a:r>
-            <a:pPr indent="0" marL="0">
-              <a:spcAft>
-                <a:spcPts val="200"/>
-              </a:spcAft>
-              <a:buNone/>
-            </a:pPr>
-            <a:r>
-              <a:rPr lang="en-US" sz="1300" u="sng" dirty="0">
-                <a:solidFill>
-                  <a:srgbClr val="1F6B5E"/>
-                </a:solidFill>
-                <a:latin typeface="Calibri" pitchFamily="34" charset="0"/>
-                <a:ea typeface="Calibri" pitchFamily="34" charset="-122"/>
-                <a:cs typeface="Calibri" pitchFamily="34" charset="-120"/>
-                <a:hlinkClick r:id="rId5" invalidUrl="" action="" tgtFrame="" tooltip="" history="1" highlightClick="0" endSnd="0">
-                  <a:extLst>
-                    <a:ext uri="{A12FA001-AC4F-418D-AE19-62706E023703}">
-                      <ahyp:hlinkClr xmlns:ahyp="http://schemas.microsoft.com/office/drawing/2018/hyperlinkcolor" val="tx"/>
-                    </a:ext>
-                  </a:extLst>
-                </a:hlinkClick>
-              </a:rPr>
-              <a:t>AllAfrica (ML)</a:t>
-            </a:r>
-            <a:pPr indent="0" marL="0">
-              <a:spcAft>
-                <a:spcPts val="200"/>
-              </a:spcAft>
-              <a:buNone/>
-            </a:pPr>
-            <a:r>
-              <a:rPr lang="en-US" sz="1300" dirty="0">
-                <a:solidFill>
-                  <a:srgbClr val="1F2937"/>
-                </a:solidFill>
-                <a:latin typeface="Calibri" pitchFamily="34" charset="0"/>
-                <a:ea typeface="Calibri" pitchFamily="34" charset="-122"/>
-                <a:cs typeface="Calibri" pitchFamily="34" charset="-120"/>
-              </a:rPr>
-              <a:t> — 20 octobre 2026, 15 h UTC</a:t>
+              <a:t> — 22 octobre 2026, 7 h UTC</a:t>
             </a:r>
             <a:endParaRPr lang="en-US" sz="1300" dirty="0"/>
           </a:p>
@@ -3643,14 +3079,14 @@
       </p:sp>
       <p:pic>
         <p:nvPicPr>
-          <p:cNvPr id="10" name="Image 0" descr="/home/runner/work/SentiqS/SentiqS/scripts/assets/grsci/logo-grsci.png">    </p:cNvPr>
+          <p:cNvPr id="12" name="Image 0" descr="/home/runner/work/SentiqS/SentiqS/scripts/assets/grsci/logo-grsci.png">    </p:cNvPr>
           <p:cNvPicPr>
             <a:picLocks noChangeAspect="1"/>
           </p:cNvPicPr>
           <p:nvPr/>
         </p:nvPicPr>
         <p:blipFill>
-          <a:blip r:embed="rId6"/>
+          <a:blip r:embed="rId3"/>
           <a:stretch>
             <a:fillRect/>
           </a:stretch>
@@ -3667,7 +3103,7 @@
       </p:pic>
       <p:sp>
         <p:nvSpPr>
-          <p:cNvPr id="11" name="Text 8"/>
+          <p:cNvPr id="13" name="Text 10"/>
           <p:cNvSpPr/>
           <p:nvPr/>
         </p:nvSpPr>
@@ -3836,7 +3272,7 @@
       </p:sp>
       <p:sp>
         <p:nvSpPr>
-          <p:cNvPr id="12" name="Text 9"/>
+          <p:cNvPr id="14" name="Text 11"/>
           <p:cNvSpPr/>
           <p:nvPr/>
         </p:nvSpPr>
@@ -3867,7 +3303,7 @@
                 <a:ea typeface="Calibri" pitchFamily="34" charset="-122"/>
                 <a:cs typeface="Calibri" pitchFamily="34" charset="-120"/>
               </a:rPr>
-              <a:t>|  21/10/26   |   10</a:t>
+              <a:t>|  23/10/26   |   10</a:t>
             </a:r>
             <a:endParaRPr lang="en-US" sz="1000" dirty="0"/>
           </a:p>
@@ -3933,7 +3369,7 @@
                 <a:ea typeface="Arial Narrow" pitchFamily="34" charset="-122"/>
                 <a:cs typeface="Arial Narrow" pitchFamily="34" charset="-120"/>
               </a:rPr>
-              <a:t>III</a:t>
+              <a:t>VI</a:t>
             </a:r>
             <a:endParaRPr lang="en-US" sz="2400" dirty="0"/>
           </a:p>
@@ -3972,7 +3408,7 @@
                 <a:ea typeface="Arial Narrow" pitchFamily="34" charset="-122"/>
                 <a:cs typeface="Arial Narrow" pitchFamily="34" charset="-120"/>
               </a:rPr>
-              <a:t>Niger</a:t>
+              <a:t>Bénin</a:t>
             </a:r>
             <a:endParaRPr lang="en-US" sz="2800" dirty="0"/>
           </a:p>
@@ -3987,17 +3423,17 @@
         <p:spPr>
           <a:xfrm>
             <a:off x="10881360" y="274320"/>
-            <a:ext cx="905256" cy="188976"/>
+            <a:ext cx="362102" cy="566928"/>
           </a:xfrm>
           <a:prstGeom prst="rect">
             <a:avLst/>
           </a:prstGeom>
           <a:solidFill>
-            <a:srgbClr val="E05206"/>
+            <a:srgbClr val="008751"/>
           </a:solidFill>
           <a:ln w="12700">
             <a:solidFill>
-              <a:srgbClr val="E05206"/>
+              <a:srgbClr val="008751"/>
             </a:solidFill>
             <a:prstDash val="solid"/>
           </a:ln>
@@ -4011,18 +3447,18 @@
         </p:nvSpPr>
         <p:spPr>
           <a:xfrm>
-            <a:off x="10881360" y="463296"/>
-            <a:ext cx="905256" cy="188976"/>
+            <a:off x="11243462" y="274320"/>
+            <a:ext cx="543154" cy="283464"/>
           </a:xfrm>
           <a:prstGeom prst="rect">
             <a:avLst/>
           </a:prstGeom>
           <a:solidFill>
-            <a:srgbClr val="FFFFFF"/>
+            <a:srgbClr val="FCD116"/>
           </a:solidFill>
           <a:ln w="12700">
             <a:solidFill>
-              <a:srgbClr val="FFFFFF"/>
+              <a:srgbClr val="FCD116"/>
             </a:solidFill>
             <a:prstDash val="solid"/>
           </a:ln>
@@ -4036,18 +3472,18 @@
         </p:nvSpPr>
         <p:spPr>
           <a:xfrm>
-            <a:off x="10881360" y="652272"/>
-            <a:ext cx="905256" cy="188976"/>
+            <a:off x="11243462" y="557784"/>
+            <a:ext cx="543154" cy="283464"/>
           </a:xfrm>
           <a:prstGeom prst="rect">
             <a:avLst/>
           </a:prstGeom>
           <a:solidFill>
-            <a:srgbClr val="0DB02B"/>
+            <a:srgbClr val="E8112D"/>
           </a:solidFill>
           <a:ln w="12700">
             <a:solidFill>
-              <a:srgbClr val="0DB02B"/>
+              <a:srgbClr val="E8112D"/>
             </a:solidFill>
             <a:prstDash val="solid"/>
           </a:ln>
@@ -4138,7 +3574,7 @@
                 <a:ea typeface="Calibri" pitchFamily="34" charset="-122"/>
                 <a:cs typeface="Calibri" pitchFamily="34" charset="-120"/>
               </a:rPr>
-              <a:t>DIFFA : VND/NUR, DES RIVES DU LAC TCHAD À L’ACTION HUMANITAIRE, LA RÉSILIENCE, LA PAIX ET LE DÉVELOPPEMENT.</a:t>
+              <a:t>PORT DE COTONOU : L’ENLÈVEMENT DES MARCHANDISES DÉSORMAIS POSSIBLE LES WEEK-ENDS</a:t>
             </a:r>
             <a:endParaRPr lang="en-US" sz="1300" dirty="0"/>
           </a:p>
@@ -4183,7 +3619,7 @@
                   </a:extLst>
                 </a:hlinkClick>
               </a:rPr>
-              <a:t>ANP — Agence Nigérienne Presse</a:t>
+              <a:t>24heureinfo.com</a:t>
             </a:r>
             <a:pPr indent="0" marL="0">
               <a:spcAft>
@@ -4200,7 +3636,7 @@
                 <a:ea typeface="Calibri" pitchFamily="34" charset="-122"/>
                 <a:cs typeface="Calibri" pitchFamily="34" charset="-120"/>
               </a:rPr>
-              <a:t> — 20 octobre 2026, 22 h UTC</a:t>
+              <a:t> — 22 octobre 2026, 17 h UTC</a:t>
             </a:r>
             <a:endParaRPr lang="en-US" sz="1300" dirty="0"/>
           </a:p>
@@ -4432,7 +3868,7 @@
                 <a:ea typeface="Calibri" pitchFamily="34" charset="-122"/>
                 <a:cs typeface="Calibri" pitchFamily="34" charset="-120"/>
               </a:rPr>
-              <a:t>|  21/10/26   |   11</a:t>
+              <a:t>|  23/10/26   |   11</a:t>
             </a:r>
             <a:endParaRPr lang="en-US" sz="1000" dirty="0"/>
           </a:p>
@@ -4498,7 +3934,7 @@
                 <a:ea typeface="Arial Narrow" pitchFamily="34" charset="-122"/>
                 <a:cs typeface="Arial Narrow" pitchFamily="34" charset="-120"/>
               </a:rPr>
-              <a:t>IV</a:t>
+              <a:t>VII</a:t>
             </a:r>
             <a:endParaRPr lang="en-US" sz="2400" dirty="0"/>
           </a:p>
@@ -4537,7 +3973,7 @@
                 <a:ea typeface="Arial Narrow" pitchFamily="34" charset="-122"/>
                 <a:cs typeface="Arial Narrow" pitchFamily="34" charset="-120"/>
               </a:rPr>
-              <a:t>Ghana</a:t>
+              <a:t>Guinée</a:t>
             </a:r>
             <a:endParaRPr lang="en-US" sz="2800" dirty="0"/>
           </a:p>
@@ -4552,7 +3988,7 @@
         <p:spPr>
           <a:xfrm>
             <a:off x="10881360" y="274320"/>
-            <a:ext cx="905256" cy="188976"/>
+            <a:ext cx="301752" cy="566928"/>
           </a:xfrm>
           <a:prstGeom prst="rect">
             <a:avLst/>
@@ -4576,8 +4012,8 @@
         </p:nvSpPr>
         <p:spPr>
           <a:xfrm>
-            <a:off x="10881360" y="463296"/>
-            <a:ext cx="905256" cy="188976"/>
+            <a:off x="11183112" y="274320"/>
+            <a:ext cx="301752" cy="566928"/>
           </a:xfrm>
           <a:prstGeom prst="rect">
             <a:avLst/>
@@ -4601,18 +4037,18 @@
         </p:nvSpPr>
         <p:spPr>
           <a:xfrm>
-            <a:off x="10881360" y="652272"/>
-            <a:ext cx="905256" cy="188976"/>
+            <a:off x="11484864" y="274320"/>
+            <a:ext cx="301752" cy="566928"/>
           </a:xfrm>
           <a:prstGeom prst="rect">
             <a:avLst/>
           </a:prstGeom>
           <a:solidFill>
-            <a:srgbClr val="006B3F"/>
+            <a:srgbClr val="009460"/>
           </a:solidFill>
           <a:ln w="12700">
             <a:solidFill>
-              <a:srgbClr val="006B3F"/>
+              <a:srgbClr val="009460"/>
             </a:solidFill>
             <a:prstDash val="solid"/>
           </a:ln>
@@ -4703,7 +4139,7 @@
                 <a:ea typeface="Calibri" pitchFamily="34" charset="-122"/>
                 <a:cs typeface="Calibri" pitchFamily="34" charset="-120"/>
               </a:rPr>
-              <a:t>GOVERNANCE BY PROTEST, REGULATION BY SILENCE: INSIDE THE MANUFACTURED WATER CRISIS</a:t>
+              <a:t>KINDIA : UNE DISPUTE AUTOUR D’UN SUPPOSÉ RIVAL VIRE AU MEURTRE, LE SUSPECT RACONTE</a:t>
             </a:r>
             <a:endParaRPr lang="en-US" sz="1300" dirty="0"/>
           </a:p>
@@ -4748,7 +4184,7 @@
                   </a:extLst>
                 </a:hlinkClick>
               </a:rPr>
-              <a:t>Ghana Business News</a:t>
+              <a:t>Guinee7.com</a:t>
             </a:r>
             <a:pPr indent="0" marL="0">
               <a:spcAft>
@@ -4765,7 +4201,7 @@
                 <a:ea typeface="Calibri" pitchFamily="34" charset="-122"/>
                 <a:cs typeface="Calibri" pitchFamily="34" charset="-120"/>
               </a:rPr>
-              <a:t> — 21 octobre 2026, 6 h UTC</a:t>
+              <a:t> — 22 octobre 2026, 11 h UTC</a:t>
             </a:r>
             <a:endParaRPr lang="en-US" sz="1300" dirty="0"/>
           </a:p>
@@ -4789,7 +4225,7 @@
                 <a:ea typeface="Calibri" pitchFamily="34" charset="-122"/>
                 <a:cs typeface="Calibri" pitchFamily="34" charset="-120"/>
               </a:rPr>
-              <a:t>OBUASI SHTS CLOSURE LEAVES FINAL-YEAR STUDENTS FACING UNCERTAINTY AHEAD OF WASSCE</a:t>
+              <a:t>TÉLIMÉLÉ : LE PRÉFET MOBILISE LES CADRES AUTOUR DE LA SÉCURITÉ ET DE LA GESTION DES BIENS PUBLICS</a:t>
             </a:r>
             <a:endParaRPr lang="en-US" sz="1300" dirty="0"/>
           </a:p>
@@ -4834,7 +4270,7 @@
                   </a:extLst>
                 </a:hlinkClick>
               </a:rPr>
-              <a:t>JoyOnline</a:t>
+              <a:t>Guineematin.com</a:t>
             </a:r>
             <a:pPr indent="0" marL="0">
               <a:spcAft>
@@ -4851,7 +4287,7 @@
                 <a:ea typeface="Calibri" pitchFamily="34" charset="-122"/>
                 <a:cs typeface="Calibri" pitchFamily="34" charset="-120"/>
               </a:rPr>
-              <a:t> — 21 octobre 2026, 12 h UTC</a:t>
+              <a:t> — 23 octobre 2026, 6 h UTC</a:t>
             </a:r>
             <a:endParaRPr lang="en-US" sz="1300" dirty="0"/>
           </a:p>
@@ -4875,7 +4311,7 @@
                 <a:ea typeface="Calibri" pitchFamily="34" charset="-122"/>
                 <a:cs typeface="Calibri" pitchFamily="34" charset="-120"/>
               </a:rPr>
-              <a:t>WOMEN GROUPS CONDEMN OBUASI SHTS SEXUAL ABUSE SCANDAL</a:t>
+              <a:t>L’AGRASC ANNONCE DES VENTES AUX ENCHÈRES PUBLIQUES DE VÉHICULES, DES MOTOS ET DE TÉLÉPHONES LE 11 NOVEMBRE 2026</a:t>
             </a:r>
             <a:endParaRPr lang="en-US" sz="1300" dirty="0"/>
           </a:p>
@@ -4920,7 +4356,7 @@
                   </a:extLst>
                 </a:hlinkClick>
               </a:rPr>
-              <a:t>Ghana Business News</a:t>
+              <a:t>Guineelive</a:t>
             </a:r>
             <a:pPr indent="0" marL="0">
               <a:spcAft>
@@ -4937,7 +4373,93 @@
                 <a:ea typeface="Calibri" pitchFamily="34" charset="-122"/>
                 <a:cs typeface="Calibri" pitchFamily="34" charset="-120"/>
               </a:rPr>
-              <a:t> — 21 octobre 2026, 6 h UTC</a:t>
+              <a:t> — 22 octobre 2026, 17 h UTC</a:t>
+            </a:r>
+            <a:endParaRPr lang="en-US" sz="1300" dirty="0"/>
+          </a:p>
+          <a:p>
+            <a:pPr marL="342900" indent="-342900">
+              <a:spcBef>
+                <a:spcPts val="800"/>
+              </a:spcBef>
+              <a:spcAft>
+                <a:spcPts val="200"/>
+              </a:spcAft>
+              <a:buSzPct val="100000"/>
+              <a:buChar char="❑"/>
+            </a:pPr>
+            <a:r>
+              <a:rPr lang="en-US" sz="1400" b="1" u="sng" dirty="0">
+                <a:solidFill>
+                  <a:srgbClr val="1F6B5E"/>
+                </a:solidFill>
+                <a:latin typeface="Calibri" pitchFamily="34" charset="0"/>
+                <a:ea typeface="Calibri" pitchFamily="34" charset="-122"/>
+                <a:cs typeface="Calibri" pitchFamily="34" charset="-120"/>
+              </a:rPr>
+              <a:t>CRIEF : MAMADOU SALIOU DIAKITÉ SUCCÈDE À FRANCIS KOVA ZOUMANIGUI AU POSTE DE PRÉSIDENT</a:t>
+            </a:r>
+            <a:endParaRPr lang="en-US" sz="1300" dirty="0"/>
+          </a:p>
+          <a:p>
+            <a:pPr lvl="1" marL="685800" indent="-342900">
+              <a:spcAft>
+                <a:spcPts val="200"/>
+              </a:spcAft>
+              <a:buSzPct val="100000"/>
+              <a:buChar char="▪"/>
+            </a:pPr>
+            <a:r>
+              <a:rPr lang="en-US" sz="1300" dirty="0">
+                <a:solidFill>
+                  <a:srgbClr val="1F2937"/>
+                </a:solidFill>
+                <a:latin typeface="Calibri" pitchFamily="34" charset="0"/>
+                <a:ea typeface="Calibri" pitchFamily="34" charset="-122"/>
+                <a:cs typeface="Calibri" pitchFamily="34" charset="-120"/>
+              </a:rPr>
+              <a:t>Source : </a:t>
+            </a:r>
+            <a:pPr indent="0" marL="0">
+              <a:spcAft>
+                <a:spcPts val="200"/>
+              </a:spcAft>
+              <a:buNone/>
+            </a:pPr>
+            <a:r>
+              <a:rPr lang="en-US" sz="1300" u="sng" dirty="0">
+                <a:solidFill>
+                  <a:srgbClr val="1F6B5E"/>
+                </a:solidFill>
+                <a:latin typeface="Calibri" pitchFamily="34" charset="0"/>
+                <a:ea typeface="Calibri" pitchFamily="34" charset="-122"/>
+                <a:cs typeface="Calibri" pitchFamily="34" charset="-120"/>
+                <a:hlinkClick r:id="rId4" invalidUrl="" action="" tgtFrame="" tooltip="" history="1" highlightClick="0" endSnd="0">
+                  <a:extLst>
+                    <a:ext uri="{A12FA001-AC4F-418D-AE19-62706E023703}">
+                      <ahyp:hlinkClr xmlns:ahyp="http://schemas.microsoft.com/office/drawing/2018/hyperlinkcolor" val="tx"/>
+                    </a:ext>
+                  </a:extLst>
+                </a:hlinkClick>
+              </a:rPr>
+              <a:t>Guineelive</a:t>
+            </a:r>
+            <a:pPr indent="0" marL="0">
+              <a:spcAft>
+                <a:spcPts val="200"/>
+              </a:spcAft>
+              <a:buNone/>
+            </a:pPr>
+            <a:r>
+              <a:rPr lang="en-US" sz="1300" dirty="0">
+                <a:solidFill>
+                  <a:srgbClr val="1F2937"/>
+                </a:solidFill>
+                <a:latin typeface="Calibri" pitchFamily="34" charset="0"/>
+                <a:ea typeface="Calibri" pitchFamily="34" charset="-122"/>
+                <a:cs typeface="Calibri" pitchFamily="34" charset="-120"/>
+              </a:rPr>
+              <a:t> — 22 octobre 2026, 0 h UTC</a:t>
             </a:r>
             <a:endParaRPr lang="en-US" sz="1300" dirty="0"/>
           </a:p>
@@ -4952,7 +4474,7 @@
           <p:nvPr/>
         </p:nvPicPr>
         <p:blipFill>
-          <a:blip r:embed="rId4"/>
+          <a:blip r:embed="rId5"/>
           <a:stretch>
             <a:fillRect/>
           </a:stretch>
@@ -5169,7 +4691,7 @@
                 <a:ea typeface="Calibri" pitchFamily="34" charset="-122"/>
                 <a:cs typeface="Calibri" pitchFamily="34" charset="-120"/>
               </a:rPr>
-              <a:t>|  21/10/26   |   12</a:t>
+              <a:t>|  23/10/26   |   12</a:t>
             </a:r>
             <a:endParaRPr lang="en-US" sz="1000" dirty="0"/>
           </a:p>
@@ -5235,7 +4757,7 @@
                 <a:ea typeface="Arial Narrow" pitchFamily="34" charset="-122"/>
                 <a:cs typeface="Arial Narrow" pitchFamily="34" charset="-120"/>
               </a:rPr>
-              <a:t>V</a:t>
+              <a:t>VIII</a:t>
             </a:r>
             <a:endParaRPr lang="en-US" sz="2400" dirty="0"/>
           </a:p>
@@ -5274,7 +4796,7 @@
                 <a:ea typeface="Arial Narrow" pitchFamily="34" charset="-122"/>
                 <a:cs typeface="Arial Narrow" pitchFamily="34" charset="-120"/>
               </a:rPr>
-              <a:t>Togo</a:t>
+              <a:t>Liberia</a:t>
             </a:r>
             <a:endParaRPr lang="en-US" sz="2800" dirty="0"/>
           </a:p>
@@ -5295,11 +4817,11 @@
             <a:avLst/>
           </a:prstGeom>
           <a:solidFill>
-            <a:srgbClr val="006A4E"/>
+            <a:srgbClr val="BF0A30"/>
           </a:solidFill>
           <a:ln w="12700">
             <a:solidFill>
-              <a:srgbClr val="006A4E"/>
+              <a:srgbClr val="BF0A30"/>
             </a:solidFill>
             <a:prstDash val="solid"/>
           </a:ln>
@@ -5320,11 +4842,11 @@
             <a:avLst/>
           </a:prstGeom>
           <a:solidFill>
-            <a:srgbClr val="FFCE00"/>
+            <a:srgbClr val="FFFFFF"/>
           </a:solidFill>
           <a:ln w="12700">
             <a:solidFill>
-              <a:srgbClr val="FFCE00"/>
+              <a:srgbClr val="FFFFFF"/>
             </a:solidFill>
             <a:prstDash val="solid"/>
           </a:ln>
@@ -5345,11 +4867,11 @@
             <a:avLst/>
           </a:prstGeom>
           <a:solidFill>
-            <a:srgbClr val="006A4E"/>
+            <a:srgbClr val="BF0A30"/>
           </a:solidFill>
           <a:ln w="12700">
             <a:solidFill>
-              <a:srgbClr val="006A4E"/>
+              <a:srgbClr val="BF0A30"/>
             </a:solidFill>
             <a:prstDash val="solid"/>
           </a:ln>
@@ -5370,11 +4892,11 @@
             <a:avLst/>
           </a:prstGeom>
           <a:solidFill>
-            <a:srgbClr val="FFCE00"/>
+            <a:srgbClr val="FFFFFF"/>
           </a:solidFill>
           <a:ln w="12700">
             <a:solidFill>
-              <a:srgbClr val="FFCE00"/>
+              <a:srgbClr val="FFFFFF"/>
             </a:solidFill>
             <a:prstDash val="solid"/>
           </a:ln>
@@ -5395,11 +4917,11 @@
             <a:avLst/>
           </a:prstGeom>
           <a:solidFill>
-            <a:srgbClr val="006A4E"/>
+            <a:srgbClr val="BF0A30"/>
           </a:solidFill>
           <a:ln w="12700">
             <a:solidFill>
-              <a:srgbClr val="006A4E"/>
+              <a:srgbClr val="BF0A30"/>
             </a:solidFill>
             <a:prstDash val="solid"/>
           </a:ln>
@@ -5490,7 +5012,7 @@
                 <a:ea typeface="Calibri" pitchFamily="34" charset="-122"/>
                 <a:cs typeface="Calibri" pitchFamily="34" charset="-120"/>
               </a:rPr>
-              <a:t>KLOTO : L’UE ET LE LUXEMBOURG AUX CÔTÉS DU TOGO POUR LA CONSTRUCTION DU SIÈGE DE L’ONAP</a:t>
+              <a:t>LIBERIA: WAR VICTIMS, SURVIVORS PROTEST AT COURT OFFICE, CAPITOL AS HOUSE CHAIRMAN PLEDGES TO PUT COURT BILL BEFORE PLENARY TUESDAY.</a:t>
             </a:r>
             <a:endParaRPr lang="en-US" sz="1300" dirty="0"/>
           </a:p>
@@ -5535,7 +5057,7 @@
                   </a:extLst>
                 </a:hlinkClick>
               </a:rPr>
-              <a:t>ATOP — Agence Togolaise Presse</a:t>
+              <a:t>FrontPageAfrica — Liberia</a:t>
             </a:r>
             <a:pPr indent="0" marL="0">
               <a:spcAft>
@@ -5552,7 +5074,7 @@
                 <a:ea typeface="Calibri" pitchFamily="34" charset="-122"/>
                 <a:cs typeface="Calibri" pitchFamily="34" charset="-120"/>
               </a:rPr>
-              <a:t> — 21 octobre 2026, 12 h UTC</a:t>
+              <a:t> — 23 octobre 2026, 5 h UTC</a:t>
             </a:r>
             <a:endParaRPr lang="en-US" sz="1300" dirty="0"/>
           </a:p>
@@ -5576,7 +5098,7 @@
                 <a:ea typeface="Calibri" pitchFamily="34" charset="-122"/>
                 <a:cs typeface="Calibri" pitchFamily="34" charset="-120"/>
               </a:rPr>
-              <a:t>TOGO : UN VIOLENT INCENDIE RAVAGE UN BAR À TOKOIN RAMCO</a:t>
+              <a:t>AFL FIRES TWO SOLDIERS OVER ASSAULT</a:t>
             </a:r>
             <a:endParaRPr lang="en-US" sz="1300" dirty="0"/>
           </a:p>
@@ -5621,7 +5143,7 @@
                   </a:extLst>
                 </a:hlinkClick>
               </a:rPr>
-              <a:t>24heureinfo.com</a:t>
+              <a:t>Global News Network Liberia</a:t>
             </a:r>
             <a:pPr indent="0" marL="0">
               <a:spcAft>
@@ -5638,265 +5160,7 @@
                 <a:ea typeface="Calibri" pitchFamily="34" charset="-122"/>
                 <a:cs typeface="Calibri" pitchFamily="34" charset="-120"/>
               </a:rPr>
-              <a:t> — 21 octobre 2026, 0 h UTC</a:t>
-            </a:r>
-            <a:endParaRPr lang="en-US" sz="1300" dirty="0"/>
-          </a:p>
-          <a:p>
-            <a:pPr marL="342900" indent="-342900">
-              <a:spcBef>
-                <a:spcPts val="800"/>
-              </a:spcBef>
-              <a:spcAft>
-                <a:spcPts val="200"/>
-              </a:spcAft>
-              <a:buSzPct val="100000"/>
-              <a:buChar char="❑"/>
-            </a:pPr>
-            <a:r>
-              <a:rPr lang="en-US" sz="1400" b="1" u="sng" dirty="0">
-                <a:solidFill>
-                  <a:srgbClr val="1F6B5E"/>
-                </a:solidFill>
-                <a:latin typeface="Calibri" pitchFamily="34" charset="0"/>
-                <a:ea typeface="Calibri" pitchFamily="34" charset="-122"/>
-                <a:cs typeface="Calibri" pitchFamily="34" charset="-120"/>
-              </a:rPr>
-              <a:t>TOGO : ENTRE DEUX SOURDS : L’IMPASSE TOGOLAISE EN GRAND FORMAT</a:t>
-            </a:r>
-            <a:endParaRPr lang="en-US" sz="1300" dirty="0"/>
-          </a:p>
-          <a:p>
-            <a:pPr lvl="1" marL="685800" indent="-342900">
-              <a:spcAft>
-                <a:spcPts val="200"/>
-              </a:spcAft>
-              <a:buSzPct val="100000"/>
-              <a:buChar char="▪"/>
-            </a:pPr>
-            <a:r>
-              <a:rPr lang="en-US" sz="1300" dirty="0">
-                <a:solidFill>
-                  <a:srgbClr val="1F2937"/>
-                </a:solidFill>
-                <a:latin typeface="Calibri" pitchFamily="34" charset="0"/>
-                <a:ea typeface="Calibri" pitchFamily="34" charset="-122"/>
-                <a:cs typeface="Calibri" pitchFamily="34" charset="-120"/>
-              </a:rPr>
-              <a:t>Source : </a:t>
-            </a:r>
-            <a:pPr indent="0" marL="0">
-              <a:spcAft>
-                <a:spcPts val="200"/>
-              </a:spcAft>
-              <a:buNone/>
-            </a:pPr>
-            <a:r>
-              <a:rPr lang="en-US" sz="1300" u="sng" dirty="0">
-                <a:solidFill>
-                  <a:srgbClr val="1F6B5E"/>
-                </a:solidFill>
-                <a:latin typeface="Calibri" pitchFamily="34" charset="0"/>
-                <a:ea typeface="Calibri" pitchFamily="34" charset="-122"/>
-                <a:cs typeface="Calibri" pitchFamily="34" charset="-120"/>
-                <a:hlinkClick r:id="rId3" invalidUrl="" action="" tgtFrame="" tooltip="" history="1" highlightClick="0" endSnd="0">
-                  <a:extLst>
-                    <a:ext uri="{A12FA001-AC4F-418D-AE19-62706E023703}">
-                      <ahyp:hlinkClr xmlns:ahyp="http://schemas.microsoft.com/office/drawing/2018/hyperlinkcolor" val="tx"/>
-                    </a:ext>
-                  </a:extLst>
-                </a:hlinkClick>
-              </a:rPr>
-              <a:t>Togo Actualite</a:t>
-            </a:r>
-            <a:pPr indent="0" marL="0">
-              <a:spcAft>
-                <a:spcPts val="200"/>
-              </a:spcAft>
-              <a:buNone/>
-            </a:pPr>
-            <a:r>
-              <a:rPr lang="en-US" sz="1300" dirty="0">
-                <a:solidFill>
-                  <a:srgbClr val="1F2937"/>
-                </a:solidFill>
-                <a:latin typeface="Calibri" pitchFamily="34" charset="0"/>
-                <a:ea typeface="Calibri" pitchFamily="34" charset="-122"/>
-                <a:cs typeface="Calibri" pitchFamily="34" charset="-120"/>
-              </a:rPr>
-              <a:t> — 20 octobre 2026, 15 h UTC</a:t>
-            </a:r>
-            <a:endParaRPr lang="en-US" sz="1300" dirty="0"/>
-          </a:p>
-          <a:p>
-            <a:pPr marL="342900" indent="-342900">
-              <a:spcBef>
-                <a:spcPts val="800"/>
-              </a:spcBef>
-              <a:spcAft>
-                <a:spcPts val="200"/>
-              </a:spcAft>
-              <a:buSzPct val="100000"/>
-              <a:buChar char="❑"/>
-            </a:pPr>
-            <a:r>
-              <a:rPr lang="en-US" sz="1400" b="1" u="sng" dirty="0">
-                <a:solidFill>
-                  <a:srgbClr val="1F6B5E"/>
-                </a:solidFill>
-                <a:latin typeface="Calibri" pitchFamily="34" charset="0"/>
-                <a:ea typeface="Calibri" pitchFamily="34" charset="-122"/>
-                <a:cs typeface="Calibri" pitchFamily="34" charset="-120"/>
-              </a:rPr>
-              <a:t>RECRUDESCENCE DES ACCIDENTS DE LA ROUTE : UN FACTEUR IMPORTANT IGNORÉ</a:t>
-            </a:r>
-            <a:endParaRPr lang="en-US" sz="1300" dirty="0"/>
-          </a:p>
-          <a:p>
-            <a:pPr lvl="1" marL="685800" indent="-342900">
-              <a:spcAft>
-                <a:spcPts val="200"/>
-              </a:spcAft>
-              <a:buSzPct val="100000"/>
-              <a:buChar char="▪"/>
-            </a:pPr>
-            <a:r>
-              <a:rPr lang="en-US" sz="1300" dirty="0">
-                <a:solidFill>
-                  <a:srgbClr val="1F2937"/>
-                </a:solidFill>
-                <a:latin typeface="Calibri" pitchFamily="34" charset="0"/>
-                <a:ea typeface="Calibri" pitchFamily="34" charset="-122"/>
-                <a:cs typeface="Calibri" pitchFamily="34" charset="-120"/>
-              </a:rPr>
-              <a:t>Source : </a:t>
-            </a:r>
-            <a:pPr indent="0" marL="0">
-              <a:spcAft>
-                <a:spcPts val="200"/>
-              </a:spcAft>
-              <a:buNone/>
-            </a:pPr>
-            <a:r>
-              <a:rPr lang="en-US" sz="1300" u="sng" dirty="0">
-                <a:solidFill>
-                  <a:srgbClr val="1F6B5E"/>
-                </a:solidFill>
-                <a:latin typeface="Calibri" pitchFamily="34" charset="0"/>
-                <a:ea typeface="Calibri" pitchFamily="34" charset="-122"/>
-                <a:cs typeface="Calibri" pitchFamily="34" charset="-120"/>
-                <a:hlinkClick r:id="rId4" invalidUrl="" action="" tgtFrame="" tooltip="" history="1" highlightClick="0" endSnd="0">
-                  <a:extLst>
-                    <a:ext uri="{A12FA001-AC4F-418D-AE19-62706E023703}">
-                      <ahyp:hlinkClr xmlns:ahyp="http://schemas.microsoft.com/office/drawing/2018/hyperlinkcolor" val="tx"/>
-                    </a:ext>
-                  </a:extLst>
-                </a:hlinkClick>
-              </a:rPr>
-              <a:t>Icilome</a:t>
-            </a:r>
-            <a:pPr indent="0" marL="0">
-              <a:spcAft>
-                <a:spcPts val="200"/>
-              </a:spcAft>
-              <a:buNone/>
-            </a:pPr>
-            <a:r>
-              <a:rPr lang="en-US" sz="1300" dirty="0">
-                <a:solidFill>
-                  <a:srgbClr val="1F2937"/>
-                </a:solidFill>
-                <a:latin typeface="Calibri" pitchFamily="34" charset="0"/>
-                <a:ea typeface="Calibri" pitchFamily="34" charset="-122"/>
-                <a:cs typeface="Calibri" pitchFamily="34" charset="-120"/>
-              </a:rPr>
-              <a:t> — 21 octobre 2026, 11 h UTC</a:t>
-            </a:r>
-            <a:endParaRPr lang="en-US" sz="1300" dirty="0"/>
-          </a:p>
-          <a:p>
-            <a:pPr marL="342900" indent="-342900">
-              <a:spcBef>
-                <a:spcPts val="800"/>
-              </a:spcBef>
-              <a:spcAft>
-                <a:spcPts val="200"/>
-              </a:spcAft>
-              <a:buSzPct val="100000"/>
-              <a:buChar char="❑"/>
-            </a:pPr>
-            <a:r>
-              <a:rPr lang="en-US" sz="1400" b="1" u="sng" dirty="0">
-                <a:solidFill>
-                  <a:srgbClr val="1F6B5E"/>
-                </a:solidFill>
-                <a:latin typeface="Calibri" pitchFamily="34" charset="0"/>
-                <a:ea typeface="Calibri" pitchFamily="34" charset="-122"/>
-                <a:cs typeface="Calibri" pitchFamily="34" charset="-120"/>
-              </a:rPr>
-              <a:t>TOGO- LES LEADERS DU CNCC INVITÉS À REPORTER LEUR MEETING</a:t>
-            </a:r>
-            <a:endParaRPr lang="en-US" sz="1300" dirty="0"/>
-          </a:p>
-          <a:p>
-            <a:pPr lvl="1" marL="685800" indent="-342900">
-              <a:spcAft>
-                <a:spcPts val="200"/>
-              </a:spcAft>
-              <a:buSzPct val="100000"/>
-              <a:buChar char="▪"/>
-            </a:pPr>
-            <a:r>
-              <a:rPr lang="en-US" sz="1300" dirty="0">
-                <a:solidFill>
-                  <a:srgbClr val="1F2937"/>
-                </a:solidFill>
-                <a:latin typeface="Calibri" pitchFamily="34" charset="0"/>
-                <a:ea typeface="Calibri" pitchFamily="34" charset="-122"/>
-                <a:cs typeface="Calibri" pitchFamily="34" charset="-120"/>
-              </a:rPr>
-              <a:t>Source : </a:t>
-            </a:r>
-            <a:pPr indent="0" marL="0">
-              <a:spcAft>
-                <a:spcPts val="200"/>
-              </a:spcAft>
-              <a:buNone/>
-            </a:pPr>
-            <a:r>
-              <a:rPr lang="en-US" sz="1300" u="sng" dirty="0">
-                <a:solidFill>
-                  <a:srgbClr val="1F6B5E"/>
-                </a:solidFill>
-                <a:latin typeface="Calibri" pitchFamily="34" charset="0"/>
-                <a:ea typeface="Calibri" pitchFamily="34" charset="-122"/>
-                <a:cs typeface="Calibri" pitchFamily="34" charset="-120"/>
-                <a:hlinkClick r:id="rId5" invalidUrl="" action="" tgtFrame="" tooltip="" history="1" highlightClick="0" endSnd="0">
-                  <a:extLst>
-                    <a:ext uri="{A12FA001-AC4F-418D-AE19-62706E023703}">
-                      <ahyp:hlinkClr xmlns:ahyp="http://schemas.microsoft.com/office/drawing/2018/hyperlinkcolor" val="tx"/>
-                    </a:ext>
-                  </a:extLst>
-                </a:hlinkClick>
-              </a:rPr>
-              <a:t>Icilome</a:t>
-            </a:r>
-            <a:pPr indent="0" marL="0">
-              <a:spcAft>
-                <a:spcPts val="200"/>
-              </a:spcAft>
-              <a:buNone/>
-            </a:pPr>
-            <a:r>
-              <a:rPr lang="en-US" sz="1300" dirty="0">
-                <a:solidFill>
-                  <a:srgbClr val="1F2937"/>
-                </a:solidFill>
-                <a:latin typeface="Calibri" pitchFamily="34" charset="0"/>
-                <a:ea typeface="Calibri" pitchFamily="34" charset="-122"/>
-                <a:cs typeface="Calibri" pitchFamily="34" charset="-120"/>
-              </a:rPr>
-              <a:t> — 21 octobre 2026, 6 h UTC</a:t>
+              <a:t> — 22 octobre 2026, 17 h UTC</a:t>
             </a:r>
             <a:endParaRPr lang="en-US" sz="1300" dirty="0"/>
           </a:p>
@@ -5911,7 +5175,7 @@
           <p:nvPr/>
         </p:nvPicPr>
         <p:blipFill>
-          <a:blip r:embed="rId6"/>
+          <a:blip r:embed="rId3"/>
           <a:stretch>
             <a:fillRect/>
           </a:stretch>
@@ -6128,7 +5392,7 @@
                 <a:ea typeface="Calibri" pitchFamily="34" charset="-122"/>
                 <a:cs typeface="Calibri" pitchFamily="34" charset="-120"/>
               </a:rPr>
-              <a:t>|  21/10/26   |   13</a:t>
+              <a:t>|  23/10/26   |   13</a:t>
             </a:r>
             <a:endParaRPr lang="en-US" sz="1000" dirty="0"/>
           </a:p>
@@ -6194,7 +5458,7 @@
                 <a:ea typeface="Arial Narrow" pitchFamily="34" charset="-122"/>
                 <a:cs typeface="Arial Narrow" pitchFamily="34" charset="-120"/>
               </a:rPr>
-              <a:t>V</a:t>
+              <a:t>IX</a:t>
             </a:r>
             <a:endParaRPr lang="en-US" sz="2400" dirty="0"/>
           </a:p>
@@ -6233,7 +5497,7 @@
                 <a:ea typeface="Arial Narrow" pitchFamily="34" charset="-122"/>
                 <a:cs typeface="Arial Narrow" pitchFamily="34" charset="-120"/>
               </a:rPr>
-              <a:t>Togo</a:t>
+              <a:t>Sénégal</a:t>
             </a:r>
             <a:endParaRPr lang="en-US" sz="2800" dirty="0"/>
           </a:p>
@@ -6248,17 +5512,17 @@
         <p:spPr>
           <a:xfrm>
             <a:off x="10881360" y="274320"/>
-            <a:ext cx="905256" cy="113386"/>
+            <a:ext cx="301752" cy="566928"/>
           </a:xfrm>
           <a:prstGeom prst="rect">
             <a:avLst/>
           </a:prstGeom>
           <a:solidFill>
-            <a:srgbClr val="006A4E"/>
+            <a:srgbClr val="00853F"/>
           </a:solidFill>
           <a:ln w="12700">
             <a:solidFill>
-              <a:srgbClr val="006A4E"/>
+              <a:srgbClr val="00853F"/>
             </a:solidFill>
             <a:prstDash val="solid"/>
           </a:ln>
@@ -6272,18 +5536,18 @@
         </p:nvSpPr>
         <p:spPr>
           <a:xfrm>
-            <a:off x="10881360" y="387706"/>
-            <a:ext cx="905256" cy="113386"/>
+            <a:off x="11183112" y="274320"/>
+            <a:ext cx="301752" cy="566928"/>
           </a:xfrm>
           <a:prstGeom prst="rect">
             <a:avLst/>
           </a:prstGeom>
           <a:solidFill>
-            <a:srgbClr val="FFCE00"/>
+            <a:srgbClr val="FDEF42"/>
           </a:solidFill>
           <a:ln w="12700">
             <a:solidFill>
-              <a:srgbClr val="FFCE00"/>
+              <a:srgbClr val="FDEF42"/>
             </a:solidFill>
             <a:prstDash val="solid"/>
           </a:ln>
@@ -6297,18 +5561,18 @@
         </p:nvSpPr>
         <p:spPr>
           <a:xfrm>
-            <a:off x="10881360" y="501091"/>
-            <a:ext cx="905256" cy="113386"/>
+            <a:off x="11484864" y="274320"/>
+            <a:ext cx="301752" cy="566928"/>
           </a:xfrm>
           <a:prstGeom prst="rect">
             <a:avLst/>
           </a:prstGeom>
           <a:solidFill>
-            <a:srgbClr val="006A4E"/>
+            <a:srgbClr val="E31B23"/>
           </a:solidFill>
           <a:ln w="12700">
             <a:solidFill>
-              <a:srgbClr val="006A4E"/>
+              <a:srgbClr val="E31B23"/>
             </a:solidFill>
             <a:prstDash val="solid"/>
           </a:ln>
@@ -6317,56 +5581,6 @@
       <p:sp>
         <p:nvSpPr>
           <p:cNvPr id="7" name="Shape 5"/>
-          <p:cNvSpPr/>
-          <p:nvPr/>
-        </p:nvSpPr>
-        <p:spPr>
-          <a:xfrm>
-            <a:off x="10881360" y="614477"/>
-            <a:ext cx="905256" cy="113386"/>
-          </a:xfrm>
-          <a:prstGeom prst="rect">
-            <a:avLst/>
-          </a:prstGeom>
-          <a:solidFill>
-            <a:srgbClr val="FFCE00"/>
-          </a:solidFill>
-          <a:ln w="12700">
-            <a:solidFill>
-              <a:srgbClr val="FFCE00"/>
-            </a:solidFill>
-            <a:prstDash val="solid"/>
-          </a:ln>
-        </p:spPr>
-      </p:sp>
-      <p:sp>
-        <p:nvSpPr>
-          <p:cNvPr id="8" name="Shape 6"/>
-          <p:cNvSpPr/>
-          <p:nvPr/>
-        </p:nvSpPr>
-        <p:spPr>
-          <a:xfrm>
-            <a:off x="10881360" y="727862"/>
-            <a:ext cx="905256" cy="113386"/>
-          </a:xfrm>
-          <a:prstGeom prst="rect">
-            <a:avLst/>
-          </a:prstGeom>
-          <a:solidFill>
-            <a:srgbClr val="006A4E"/>
-          </a:solidFill>
-          <a:ln w="12700">
-            <a:solidFill>
-              <a:srgbClr val="006A4E"/>
-            </a:solidFill>
-            <a:prstDash val="solid"/>
-          </a:ln>
-        </p:spPr>
-      </p:sp>
-      <p:sp>
-        <p:nvSpPr>
-          <p:cNvPr id="9" name="Shape 7"/>
           <p:cNvSpPr/>
           <p:nvPr/>
         </p:nvSpPr>
@@ -6388,7 +5602,7 @@
       </p:sp>
       <p:sp>
         <p:nvSpPr>
-          <p:cNvPr id="10" name="Shape 8"/>
+          <p:cNvPr id="8" name="Shape 6"/>
           <p:cNvSpPr/>
           <p:nvPr/>
         </p:nvSpPr>
@@ -6411,7 +5625,7 @@
       </p:sp>
       <p:sp>
         <p:nvSpPr>
-          <p:cNvPr id="11" name="Text 9"/>
+          <p:cNvPr id="9" name="Text 7"/>
           <p:cNvSpPr/>
           <p:nvPr/>
         </p:nvSpPr>
@@ -6449,7 +5663,7 @@
                 <a:ea typeface="Calibri" pitchFamily="34" charset="-122"/>
                 <a:cs typeface="Calibri" pitchFamily="34" charset="-120"/>
               </a:rPr>
-              <a:t>SYSTÈMES AGROALIMENTAIRES : LE TOGO ENGAGÉ À TRADUIRE LA DÉCLARATION DE KAMPALA EN ACTIONS CONCRÈTES</a:t>
+              <a:t>MAMADOU GUÈYE ANCIEN DIRECTEUR DES DOMAINES RESTE LIBRE : COUP D'ARRÊT DE LA COUR SUPRÊME AU RECOURS CONTRE SA LIBERTÉ PROVISOIRE</a:t>
             </a:r>
             <a:endParaRPr lang="en-US" sz="1300" dirty="0"/>
           </a:p>
@@ -6494,7 +5708,7 @@
                   </a:extLst>
                 </a:hlinkClick>
               </a:rPr>
-              <a:t>Togo-Presse</a:t>
+              <a:t>Dakar Actu</a:t>
             </a:r>
             <a:pPr indent="0" marL="0">
               <a:spcAft>
@@ -6511,7 +5725,7 @@
                 <a:ea typeface="Calibri" pitchFamily="34" charset="-122"/>
                 <a:cs typeface="Calibri" pitchFamily="34" charset="-120"/>
               </a:rPr>
-              <a:t> — 20 octobre 2026, 20 h UTC</a:t>
+              <a:t> — 22 octobre 2026, 19 h UTC</a:t>
             </a:r>
             <a:endParaRPr lang="en-US" sz="1300" dirty="0"/>
           </a:p>
@@ -6535,7 +5749,7 @@
                 <a:ea typeface="Calibri" pitchFamily="34" charset="-122"/>
                 <a:cs typeface="Calibri" pitchFamily="34" charset="-120"/>
               </a:rPr>
-              <a:t>LOMÉ : UNE FLÈCHE VERTE AUX FEUX TRICOLORES POUR FLUIDIFIER LA CIRCULATION ET SÉCURISER LES CARREFOURS</a:t>
+              <a:t>SÉNÉGAL: 14 MORTS ET 368 CAS DE DIPHTÉRIE DANS 13 RÉGIONS</a:t>
             </a:r>
             <a:endParaRPr lang="en-US" sz="1300" dirty="0"/>
           </a:p>
@@ -6580,7 +5794,7 @@
                   </a:extLst>
                 </a:hlinkClick>
               </a:rPr>
-              <a:t>Le Nouveau Reporter</a:t>
+              <a:t>Wakat Sera</a:t>
             </a:r>
             <a:pPr indent="0" marL="0">
               <a:spcAft>
@@ -6597,7 +5811,7 @@
                 <a:ea typeface="Calibri" pitchFamily="34" charset="-122"/>
                 <a:cs typeface="Calibri" pitchFamily="34" charset="-120"/>
               </a:rPr>
-              <a:t> — 20 octobre 2026, 16 h UTC</a:t>
+              <a:t> — 22 octobre 2026, 15 h UTC</a:t>
             </a:r>
             <a:endParaRPr lang="en-US" sz="1300" dirty="0"/>
           </a:p>
@@ -6621,7 +5835,7 @@
                 <a:ea typeface="Calibri" pitchFamily="34" charset="-122"/>
                 <a:cs typeface="Calibri" pitchFamily="34" charset="-120"/>
               </a:rPr>
-              <a:t>PINTADE, SÉCURITÉ ALIMENTAIRE ET REVENUS</a:t>
+              <a:t>EN GARDE À VUE : L’AVOCAT DE DIODIO GLOW SKIN ALERTE SUR SON ÉTAT DE SANTÉ</a:t>
             </a:r>
             <a:endParaRPr lang="en-US" sz="1300" dirty="0"/>
           </a:p>
@@ -6666,7 +5880,7 @@
                   </a:extLst>
                 </a:hlinkClick>
               </a:rPr>
-              <a:t>AllAfrica (TG)</a:t>
+              <a:t>Seneweb</a:t>
             </a:r>
             <a:pPr indent="0" marL="0">
               <a:spcAft>
@@ -6683,7 +5897,179 @@
                 <a:ea typeface="Calibri" pitchFamily="34" charset="-122"/>
                 <a:cs typeface="Calibri" pitchFamily="34" charset="-120"/>
               </a:rPr>
-              <a:t> — 20 octobre 2026, 9 h UTC</a:t>
+              <a:t> — 23 octobre 2026, 0 h UTC</a:t>
+            </a:r>
+            <a:endParaRPr lang="en-US" sz="1300" dirty="0"/>
+          </a:p>
+          <a:p>
+            <a:pPr marL="342900" indent="-342900">
+              <a:spcBef>
+                <a:spcPts val="800"/>
+              </a:spcBef>
+              <a:spcAft>
+                <a:spcPts val="200"/>
+              </a:spcAft>
+              <a:buSzPct val="100000"/>
+              <a:buChar char="❑"/>
+            </a:pPr>
+            <a:r>
+              <a:rPr lang="en-US" sz="1400" b="1" u="sng" dirty="0">
+                <a:solidFill>
+                  <a:srgbClr val="1F6B5E"/>
+                </a:solidFill>
+                <a:latin typeface="Calibri" pitchFamily="34" charset="0"/>
+                <a:ea typeface="Calibri" pitchFamily="34" charset="-122"/>
+                <a:cs typeface="Calibri" pitchFamily="34" charset="-120"/>
+              </a:rPr>
+              <a:t>ALERTE AUX UTILISATEURS : VOICI LA NOUVELLE VAGUE DE TENTATIVES D’ARNAQUES SUR LA MESSAGERIE WHATSAPP</a:t>
+            </a:r>
+            <a:endParaRPr lang="en-US" sz="1300" dirty="0"/>
+          </a:p>
+          <a:p>
+            <a:pPr lvl="1" marL="685800" indent="-342900">
+              <a:spcAft>
+                <a:spcPts val="200"/>
+              </a:spcAft>
+              <a:buSzPct val="100000"/>
+              <a:buChar char="▪"/>
+            </a:pPr>
+            <a:r>
+              <a:rPr lang="en-US" sz="1300" dirty="0">
+                <a:solidFill>
+                  <a:srgbClr val="1F2937"/>
+                </a:solidFill>
+                <a:latin typeface="Calibri" pitchFamily="34" charset="0"/>
+                <a:ea typeface="Calibri" pitchFamily="34" charset="-122"/>
+                <a:cs typeface="Calibri" pitchFamily="34" charset="-120"/>
+              </a:rPr>
+              <a:t>Source : </a:t>
+            </a:r>
+            <a:pPr indent="0" marL="0">
+              <a:spcAft>
+                <a:spcPts val="200"/>
+              </a:spcAft>
+              <a:buNone/>
+            </a:pPr>
+            <a:r>
+              <a:rPr lang="en-US" sz="1300" u="sng" dirty="0">
+                <a:solidFill>
+                  <a:srgbClr val="1F6B5E"/>
+                </a:solidFill>
+                <a:latin typeface="Calibri" pitchFamily="34" charset="0"/>
+                <a:ea typeface="Calibri" pitchFamily="34" charset="-122"/>
+                <a:cs typeface="Calibri" pitchFamily="34" charset="-120"/>
+                <a:hlinkClick r:id="rId4" invalidUrl="" action="" tgtFrame="" tooltip="" history="1" highlightClick="0" endSnd="0">
+                  <a:extLst>
+                    <a:ext uri="{A12FA001-AC4F-418D-AE19-62706E023703}">
+                      <ahyp:hlinkClr xmlns:ahyp="http://schemas.microsoft.com/office/drawing/2018/hyperlinkcolor" val="tx"/>
+                    </a:ext>
+                  </a:extLst>
+                </a:hlinkClick>
+              </a:rPr>
+              <a:t>SeneNews</a:t>
+            </a:r>
+            <a:pPr indent="0" marL="0">
+              <a:spcAft>
+                <a:spcPts val="200"/>
+              </a:spcAft>
+              <a:buNone/>
+            </a:pPr>
+            <a:r>
+              <a:rPr lang="en-US" sz="1300" dirty="0">
+                <a:solidFill>
+                  <a:srgbClr val="1F2937"/>
+                </a:solidFill>
+                <a:latin typeface="Calibri" pitchFamily="34" charset="0"/>
+                <a:ea typeface="Calibri" pitchFamily="34" charset="-122"/>
+                <a:cs typeface="Calibri" pitchFamily="34" charset="-120"/>
+              </a:rPr>
+              <a:t> — 22 octobre 2026, 21 h UTC</a:t>
+            </a:r>
+            <a:endParaRPr lang="en-US" sz="1300" dirty="0"/>
+          </a:p>
+          <a:p>
+            <a:pPr marL="342900" indent="-342900">
+              <a:spcBef>
+                <a:spcPts val="800"/>
+              </a:spcBef>
+              <a:spcAft>
+                <a:spcPts val="200"/>
+              </a:spcAft>
+              <a:buSzPct val="100000"/>
+              <a:buChar char="❑"/>
+            </a:pPr>
+            <a:r>
+              <a:rPr lang="en-US" sz="1400" b="1" u="sng" dirty="0">
+                <a:solidFill>
+                  <a:srgbClr val="1F6B5E"/>
+                </a:solidFill>
+                <a:latin typeface="Calibri" pitchFamily="34" charset="0"/>
+                <a:ea typeface="Calibri" pitchFamily="34" charset="-122"/>
+                <a:cs typeface="Calibri" pitchFamily="34" charset="-120"/>
+              </a:rPr>
+              <a:t>MBOUR : «J’AI L’HABITUDE DE COUCHER AVEC LES FEMMES DE MES FRÈRES»</a:t>
+            </a:r>
+            <a:endParaRPr lang="en-US" sz="1300" dirty="0"/>
+          </a:p>
+          <a:p>
+            <a:pPr lvl="1" marL="685800" indent="-342900">
+              <a:spcAft>
+                <a:spcPts val="200"/>
+              </a:spcAft>
+              <a:buSzPct val="100000"/>
+              <a:buChar char="▪"/>
+            </a:pPr>
+            <a:r>
+              <a:rPr lang="en-US" sz="1300" dirty="0">
+                <a:solidFill>
+                  <a:srgbClr val="1F2937"/>
+                </a:solidFill>
+                <a:latin typeface="Calibri" pitchFamily="34" charset="0"/>
+                <a:ea typeface="Calibri" pitchFamily="34" charset="-122"/>
+                <a:cs typeface="Calibri" pitchFamily="34" charset="-120"/>
+              </a:rPr>
+              <a:t>Source : </a:t>
+            </a:r>
+            <a:pPr indent="0" marL="0">
+              <a:spcAft>
+                <a:spcPts val="200"/>
+              </a:spcAft>
+              <a:buNone/>
+            </a:pPr>
+            <a:r>
+              <a:rPr lang="en-US" sz="1300" u="sng" dirty="0">
+                <a:solidFill>
+                  <a:srgbClr val="1F6B5E"/>
+                </a:solidFill>
+                <a:latin typeface="Calibri" pitchFamily="34" charset="0"/>
+                <a:ea typeface="Calibri" pitchFamily="34" charset="-122"/>
+                <a:cs typeface="Calibri" pitchFamily="34" charset="-120"/>
+                <a:hlinkClick r:id="rId5" invalidUrl="" action="" tgtFrame="" tooltip="" history="1" highlightClick="0" endSnd="0">
+                  <a:extLst>
+                    <a:ext uri="{A12FA001-AC4F-418D-AE19-62706E023703}">
+                      <ahyp:hlinkClr xmlns:ahyp="http://schemas.microsoft.com/office/drawing/2018/hyperlinkcolor" val="tx"/>
+                    </a:ext>
+                  </a:extLst>
+                </a:hlinkClick>
+              </a:rPr>
+              <a:t>Seneweb</a:t>
+            </a:r>
+            <a:pPr indent="0" marL="0">
+              <a:spcAft>
+                <a:spcPts val="200"/>
+              </a:spcAft>
+              <a:buNone/>
+            </a:pPr>
+            <a:r>
+              <a:rPr lang="en-US" sz="1300" dirty="0">
+                <a:solidFill>
+                  <a:srgbClr val="1F2937"/>
+                </a:solidFill>
+                <a:latin typeface="Calibri" pitchFamily="34" charset="0"/>
+                <a:ea typeface="Calibri" pitchFamily="34" charset="-122"/>
+                <a:cs typeface="Calibri" pitchFamily="34" charset="-120"/>
+              </a:rPr>
+              <a:t> — 23 octobre 2026, 5 h UTC</a:t>
             </a:r>
             <a:endParaRPr lang="en-US" sz="1300" dirty="0"/>
           </a:p>
@@ -6691,14 +6077,14 @@
       </p:sp>
       <p:pic>
         <p:nvPicPr>
-          <p:cNvPr id="12" name="Image 0" descr="/home/runner/work/SentiqS/SentiqS/scripts/assets/grsci/logo-grsci.png">    </p:cNvPr>
+          <p:cNvPr id="10" name="Image 0" descr="/home/runner/work/SentiqS/SentiqS/scripts/assets/grsci/logo-grsci.png">    </p:cNvPr>
           <p:cNvPicPr>
             <a:picLocks noChangeAspect="1"/>
           </p:cNvPicPr>
           <p:nvPr/>
         </p:nvPicPr>
         <p:blipFill>
-          <a:blip r:embed="rId4"/>
+          <a:blip r:embed="rId6"/>
           <a:stretch>
             <a:fillRect/>
           </a:stretch>
@@ -6715,7 +6101,7 @@
       </p:pic>
       <p:sp>
         <p:nvSpPr>
-          <p:cNvPr id="13" name="Text 10"/>
+          <p:cNvPr id="11" name="Text 8"/>
           <p:cNvSpPr/>
           <p:nvPr/>
         </p:nvSpPr>
@@ -6884,7 +6270,7 @@
       </p:sp>
       <p:sp>
         <p:nvSpPr>
-          <p:cNvPr id="14" name="Text 11"/>
+          <p:cNvPr id="12" name="Text 9"/>
           <p:cNvSpPr/>
           <p:nvPr/>
         </p:nvSpPr>
@@ -6915,7 +6301,7 @@
                 <a:ea typeface="Calibri" pitchFamily="34" charset="-122"/>
                 <a:cs typeface="Calibri" pitchFamily="34" charset="-120"/>
               </a:rPr>
-              <a:t>|  21/10/26   |   14</a:t>
+              <a:t>|  23/10/26   |   14</a:t>
             </a:r>
             <a:endParaRPr lang="en-US" sz="1000" dirty="0"/>
           </a:p>
@@ -6981,7 +6367,7 @@
                 <a:ea typeface="Arial Narrow" pitchFamily="34" charset="-122"/>
                 <a:cs typeface="Arial Narrow" pitchFamily="34" charset="-120"/>
               </a:rPr>
-              <a:t>VI</a:t>
+              <a:t>IX</a:t>
             </a:r>
             <a:endParaRPr lang="en-US" sz="2400" dirty="0"/>
           </a:p>
@@ -7020,7 +6406,7 @@
                 <a:ea typeface="Arial Narrow" pitchFamily="34" charset="-122"/>
                 <a:cs typeface="Arial Narrow" pitchFamily="34" charset="-120"/>
               </a:rPr>
-              <a:t>Bénin</a:t>
+              <a:t>Sénégal</a:t>
             </a:r>
             <a:endParaRPr lang="en-US" sz="2800" dirty="0"/>
           </a:p>
@@ -7035,17 +6421,17 @@
         <p:spPr>
           <a:xfrm>
             <a:off x="10881360" y="274320"/>
-            <a:ext cx="362102" cy="566928"/>
+            <a:ext cx="301752" cy="566928"/>
           </a:xfrm>
           <a:prstGeom prst="rect">
             <a:avLst/>
           </a:prstGeom>
           <a:solidFill>
-            <a:srgbClr val="008751"/>
+            <a:srgbClr val="00853F"/>
           </a:solidFill>
           <a:ln w="12700">
             <a:solidFill>
-              <a:srgbClr val="008751"/>
+              <a:srgbClr val="00853F"/>
             </a:solidFill>
             <a:prstDash val="solid"/>
           </a:ln>
@@ -7059,18 +6445,18 @@
         </p:nvSpPr>
         <p:spPr>
           <a:xfrm>
-            <a:off x="11243462" y="274320"/>
-            <a:ext cx="543154" cy="283464"/>
+            <a:off x="11183112" y="274320"/>
+            <a:ext cx="301752" cy="566928"/>
           </a:xfrm>
           <a:prstGeom prst="rect">
             <a:avLst/>
           </a:prstGeom>
           <a:solidFill>
-            <a:srgbClr val="FCD116"/>
+            <a:srgbClr val="FDEF42"/>
           </a:solidFill>
           <a:ln w="12700">
             <a:solidFill>
-              <a:srgbClr val="FCD116"/>
+              <a:srgbClr val="FDEF42"/>
             </a:solidFill>
             <a:prstDash val="solid"/>
           </a:ln>
@@ -7084,18 +6470,18 @@
         </p:nvSpPr>
         <p:spPr>
           <a:xfrm>
-            <a:off x="11243462" y="557784"/>
-            <a:ext cx="543154" cy="283464"/>
+            <a:off x="11484864" y="274320"/>
+            <a:ext cx="301752" cy="566928"/>
           </a:xfrm>
           <a:prstGeom prst="rect">
             <a:avLst/>
           </a:prstGeom>
           <a:solidFill>
-            <a:srgbClr val="E8112D"/>
+            <a:srgbClr val="E31B23"/>
           </a:solidFill>
           <a:ln w="12700">
             <a:solidFill>
-              <a:srgbClr val="E8112D"/>
+              <a:srgbClr val="E31B23"/>
             </a:solidFill>
             <a:prstDash val="solid"/>
           </a:ln>
@@ -7167,6 +6553,48 @@
           <a:bodyPr wrap="square" rtlCol="0" anchor="t"/>
           <a:lstStyle/>
           <a:p>
+            <a:pPr marL="342900" indent="-342900">
+              <a:spcBef>
+                <a:spcPts val="800"/>
+              </a:spcBef>
+              <a:spcAft>
+                <a:spcPts val="200"/>
+              </a:spcAft>
+              <a:buSzPct val="100000"/>
+              <a:buChar char="❑"/>
+            </a:pPr>
+            <a:r>
+              <a:rPr lang="en-US" sz="1400" b="1" u="sng" dirty="0">
+                <a:solidFill>
+                  <a:srgbClr val="1F6B5E"/>
+                </a:solidFill>
+                <a:latin typeface="Calibri" pitchFamily="34" charset="0"/>
+                <a:ea typeface="Calibri" pitchFamily="34" charset="-122"/>
+                <a:cs typeface="Calibri" pitchFamily="34" charset="-120"/>
+              </a:rPr>
+              <a:t>CROUS SINE SALOUM - LES SYNDICALISTES DÉNONCENT LE RECOURS À LA RÉQUISITION !</a:t>
+            </a:r>
+            <a:endParaRPr lang="en-US" sz="1300" dirty="0"/>
+          </a:p>
+          <a:p>
+            <a:pPr lvl="1" marL="685800" indent="-342900">
+              <a:spcAft>
+                <a:spcPts val="200"/>
+              </a:spcAft>
+              <a:buSzPct val="100000"/>
+              <a:buChar char="▪"/>
+            </a:pPr>
+            <a:r>
+              <a:rPr lang="en-US" sz="1300" dirty="0">
+                <a:solidFill>
+                  <a:srgbClr val="1F2937"/>
+                </a:solidFill>
+                <a:latin typeface="Calibri" pitchFamily="34" charset="0"/>
+                <a:ea typeface="Calibri" pitchFamily="34" charset="-122"/>
+                <a:cs typeface="Calibri" pitchFamily="34" charset="-120"/>
+              </a:rPr>
+              <a:t>Source : </a:t>
+            </a:r>
             <a:pPr indent="0" marL="0">
               <a:spcAft>
                 <a:spcPts val="200"/>
@@ -7174,15 +6602,211 @@
               <a:buNone/>
             </a:pPr>
             <a:r>
-              <a:rPr lang="en-US" sz="1300" i="1" dirty="0">
-                <a:solidFill>
-                  <a:srgbClr val="6B7280"/>
-                </a:solidFill>
-                <a:latin typeface="Calibri" pitchFamily="34" charset="0"/>
-                <a:ea typeface="Calibri" pitchFamily="34" charset="-122"/>
-                <a:cs typeface="Calibri" pitchFamily="34" charset="-120"/>
-              </a:rPr>
-              <a:t>Aucun fait marquant relevé sur la période.</a:t>
+              <a:rPr lang="en-US" sz="1300" u="sng" dirty="0">
+                <a:solidFill>
+                  <a:srgbClr val="1F6B5E"/>
+                </a:solidFill>
+                <a:latin typeface="Calibri" pitchFamily="34" charset="0"/>
+                <a:ea typeface="Calibri" pitchFamily="34" charset="-122"/>
+                <a:cs typeface="Calibri" pitchFamily="34" charset="-120"/>
+                <a:hlinkClick r:id="rId1" invalidUrl="" action="" tgtFrame="" tooltip="" history="1" highlightClick="0" endSnd="0">
+                  <a:extLst>
+                    <a:ext uri="{A12FA001-AC4F-418D-AE19-62706E023703}">
+                      <ahyp:hlinkClr xmlns:ahyp="http://schemas.microsoft.com/office/drawing/2018/hyperlinkcolor" val="tx"/>
+                    </a:ext>
+                  </a:extLst>
+                </a:hlinkClick>
+              </a:rPr>
+              <a:t>AllAfrica (SN)</a:t>
+            </a:r>
+            <a:pPr indent="0" marL="0">
+              <a:spcAft>
+                <a:spcPts val="200"/>
+              </a:spcAft>
+              <a:buNone/>
+            </a:pPr>
+            <a:r>
+              <a:rPr lang="en-US" sz="1300" dirty="0">
+                <a:solidFill>
+                  <a:srgbClr val="1F2937"/>
+                </a:solidFill>
+                <a:latin typeface="Calibri" pitchFamily="34" charset="0"/>
+                <a:ea typeface="Calibri" pitchFamily="34" charset="-122"/>
+                <a:cs typeface="Calibri" pitchFamily="34" charset="-120"/>
+              </a:rPr>
+              <a:t> — 22 octobre 2026, 22 h UTC</a:t>
+            </a:r>
+            <a:endParaRPr lang="en-US" sz="1300" dirty="0"/>
+          </a:p>
+          <a:p>
+            <a:pPr marL="342900" indent="-342900">
+              <a:spcBef>
+                <a:spcPts val="800"/>
+              </a:spcBef>
+              <a:spcAft>
+                <a:spcPts val="200"/>
+              </a:spcAft>
+              <a:buSzPct val="100000"/>
+              <a:buChar char="❑"/>
+            </a:pPr>
+            <a:r>
+              <a:rPr lang="en-US" sz="1400" b="1" u="sng" dirty="0">
+                <a:solidFill>
+                  <a:srgbClr val="1F6B5E"/>
+                </a:solidFill>
+                <a:latin typeface="Calibri" pitchFamily="34" charset="0"/>
+                <a:ea typeface="Calibri" pitchFamily="34" charset="-122"/>
+                <a:cs typeface="Calibri" pitchFamily="34" charset="-120"/>
+              </a:rPr>
+              <a:t>DÉBAT TÉLÉVISÉ SUR LA LFR : LA RÉPONSE DU PREMIER MINISTRE AL AMINOU LO À OUSMANE SONKO</a:t>
+            </a:r>
+            <a:endParaRPr lang="en-US" sz="1300" dirty="0"/>
+          </a:p>
+          <a:p>
+            <a:pPr lvl="1" marL="685800" indent="-342900">
+              <a:spcAft>
+                <a:spcPts val="200"/>
+              </a:spcAft>
+              <a:buSzPct val="100000"/>
+              <a:buChar char="▪"/>
+            </a:pPr>
+            <a:r>
+              <a:rPr lang="en-US" sz="1300" dirty="0">
+                <a:solidFill>
+                  <a:srgbClr val="1F2937"/>
+                </a:solidFill>
+                <a:latin typeface="Calibri" pitchFamily="34" charset="0"/>
+                <a:ea typeface="Calibri" pitchFamily="34" charset="-122"/>
+                <a:cs typeface="Calibri" pitchFamily="34" charset="-120"/>
+              </a:rPr>
+              <a:t>Source : </a:t>
+            </a:r>
+            <a:pPr indent="0" marL="0">
+              <a:spcAft>
+                <a:spcPts val="200"/>
+              </a:spcAft>
+              <a:buNone/>
+            </a:pPr>
+            <a:r>
+              <a:rPr lang="en-US" sz="1300" u="sng" dirty="0">
+                <a:solidFill>
+                  <a:srgbClr val="1F6B5E"/>
+                </a:solidFill>
+                <a:latin typeface="Calibri" pitchFamily="34" charset="0"/>
+                <a:ea typeface="Calibri" pitchFamily="34" charset="-122"/>
+                <a:cs typeface="Calibri" pitchFamily="34" charset="-120"/>
+                <a:hlinkClick r:id="rId2" invalidUrl="" action="" tgtFrame="" tooltip="" history="1" highlightClick="0" endSnd="0">
+                  <a:extLst>
+                    <a:ext uri="{A12FA001-AC4F-418D-AE19-62706E023703}">
+                      <ahyp:hlinkClr xmlns:ahyp="http://schemas.microsoft.com/office/drawing/2018/hyperlinkcolor" val="tx"/>
+                    </a:ext>
+                  </a:extLst>
+                </a:hlinkClick>
+              </a:rPr>
+              <a:t>SeneNews</a:t>
+            </a:r>
+            <a:pPr indent="0" marL="0">
+              <a:spcAft>
+                <a:spcPts val="200"/>
+              </a:spcAft>
+              <a:buNone/>
+            </a:pPr>
+            <a:r>
+              <a:rPr lang="en-US" sz="1300" dirty="0">
+                <a:solidFill>
+                  <a:srgbClr val="1F2937"/>
+                </a:solidFill>
+                <a:latin typeface="Calibri" pitchFamily="34" charset="0"/>
+                <a:ea typeface="Calibri" pitchFamily="34" charset="-122"/>
+                <a:cs typeface="Calibri" pitchFamily="34" charset="-120"/>
+              </a:rPr>
+              <a:t> — 22 octobre 2026, 21 h UTC</a:t>
+            </a:r>
+            <a:endParaRPr lang="en-US" sz="1300" dirty="0"/>
+          </a:p>
+          <a:p>
+            <a:pPr marL="342900" indent="-342900">
+              <a:spcBef>
+                <a:spcPts val="800"/>
+              </a:spcBef>
+              <a:spcAft>
+                <a:spcPts val="200"/>
+              </a:spcAft>
+              <a:buSzPct val="100000"/>
+              <a:buChar char="❑"/>
+            </a:pPr>
+            <a:r>
+              <a:rPr lang="en-US" sz="1400" b="1" u="sng" dirty="0">
+                <a:solidFill>
+                  <a:srgbClr val="1F6B5E"/>
+                </a:solidFill>
+                <a:latin typeface="Calibri" pitchFamily="34" charset="0"/>
+                <a:ea typeface="Calibri" pitchFamily="34" charset="-122"/>
+                <a:cs typeface="Calibri" pitchFamily="34" charset="-120"/>
+              </a:rPr>
+              <a:t>SENEGALESE WORKERS MARCH AGAINST RISING LIVING COSTS AHEAD OF GENERAL STRIKE</a:t>
+            </a:r>
+            <a:endParaRPr lang="en-US" sz="1300" dirty="0"/>
+          </a:p>
+          <a:p>
+            <a:pPr lvl="1" marL="685800" indent="-342900">
+              <a:spcAft>
+                <a:spcPts val="200"/>
+              </a:spcAft>
+              <a:buSzPct val="100000"/>
+              <a:buChar char="▪"/>
+            </a:pPr>
+            <a:r>
+              <a:rPr lang="en-US" sz="1300" dirty="0">
+                <a:solidFill>
+                  <a:srgbClr val="1F2937"/>
+                </a:solidFill>
+                <a:latin typeface="Calibri" pitchFamily="34" charset="0"/>
+                <a:ea typeface="Calibri" pitchFamily="34" charset="-122"/>
+                <a:cs typeface="Calibri" pitchFamily="34" charset="-120"/>
+              </a:rPr>
+              <a:t>Source : </a:t>
+            </a:r>
+            <a:pPr indent="0" marL="0">
+              <a:spcAft>
+                <a:spcPts val="200"/>
+              </a:spcAft>
+              <a:buNone/>
+            </a:pPr>
+            <a:r>
+              <a:rPr lang="en-US" sz="1300" u="sng" dirty="0">
+                <a:solidFill>
+                  <a:srgbClr val="1F6B5E"/>
+                </a:solidFill>
+                <a:latin typeface="Calibri" pitchFamily="34" charset="0"/>
+                <a:ea typeface="Calibri" pitchFamily="34" charset="-122"/>
+                <a:cs typeface="Calibri" pitchFamily="34" charset="-120"/>
+                <a:hlinkClick r:id="rId3" invalidUrl="" action="" tgtFrame="" tooltip="" history="1" highlightClick="0" endSnd="0">
+                  <a:extLst>
+                    <a:ext uri="{A12FA001-AC4F-418D-AE19-62706E023703}">
+                      <ahyp:hlinkClr xmlns:ahyp="http://schemas.microsoft.com/office/drawing/2018/hyperlinkcolor" val="tx"/>
+                    </a:ext>
+                  </a:extLst>
+                </a:hlinkClick>
+              </a:rPr>
+              <a:t>Gambia News - The Point</a:t>
+            </a:r>
+            <a:pPr indent="0" marL="0">
+              <a:spcAft>
+                <a:spcPts val="200"/>
+              </a:spcAft>
+              <a:buNone/>
+            </a:pPr>
+            <a:r>
+              <a:rPr lang="en-US" sz="1300" dirty="0">
+                <a:solidFill>
+                  <a:srgbClr val="1F2937"/>
+                </a:solidFill>
+                <a:latin typeface="Calibri" pitchFamily="34" charset="0"/>
+                <a:ea typeface="Calibri" pitchFamily="34" charset="-122"/>
+                <a:cs typeface="Calibri" pitchFamily="34" charset="-120"/>
+              </a:rPr>
+              <a:t> — 22 octobre 2026, 10 h UTC</a:t>
             </a:r>
             <a:endParaRPr lang="en-US" sz="1300" dirty="0"/>
           </a:p>
@@ -7197,7 +6821,7 @@
           <p:nvPr/>
         </p:nvPicPr>
         <p:blipFill>
-          <a:blip r:embed="rId1"/>
+          <a:blip r:embed="rId4"/>
           <a:stretch>
             <a:fillRect/>
           </a:stretch>
@@ -7414,7 +7038,7 @@
                 <a:ea typeface="Calibri" pitchFamily="34" charset="-122"/>
                 <a:cs typeface="Calibri" pitchFamily="34" charset="-120"/>
               </a:rPr>
-              <a:t>|  21/10/26   |   15</a:t>
+              <a:t>|  23/10/26   |   15</a:t>
             </a:r>
             <a:endParaRPr lang="en-US" sz="1000" dirty="0"/>
           </a:p>
@@ -7431,6 +7055,13 @@
 <file path=ppt/slides/slide16.xml><?xml version="1.0" encoding="utf-8"?>
 <p:sld xmlns:a="http://schemas.openxmlformats.org/drawingml/2006/main" xmlns:r="http://schemas.openxmlformats.org/officeDocument/2006/relationships" xmlns:p="http://schemas.openxmlformats.org/presentationml/2006/main">
   <p:cSld name="Slide 16">
+    <p:bg>
+      <p:bgPr>
+        <a:solidFill>
+          <a:srgbClr val="CDCDCD"/>
+        </a:solidFill>
+      </p:bgPr>
+    </p:bg>
     <p:spTree>
       <p:nvGrpSpPr>
         <p:cNvPr id="1" name=""/>
@@ -7453,15 +7084,13 @@
         </p:nvSpPr>
         <p:spPr>
           <a:xfrm>
-            <a:off x="457200" y="274320"/>
-            <a:ext cx="640080" cy="548640"/>
-          </a:xfrm>
-          <a:prstGeom prst="rect">
-            <a:avLst/>
-          </a:prstGeom>
-          <a:solidFill>
-            <a:srgbClr val="1F6B5E"/>
-          </a:solidFill>
+            <a:off x="457200" y="2377440"/>
+            <a:ext cx="11247120" cy="1097280"/>
+          </a:xfrm>
+          <a:prstGeom prst="rect">
+            <a:avLst/>
+          </a:prstGeom>
+          <a:noFill/>
           <a:ln/>
         </p:spPr>
         <p:txBody>
@@ -7472,1097 +7101,23 @@
               <a:buNone/>
             </a:pPr>
             <a:r>
-              <a:rPr lang="en-US" sz="2400" dirty="0">
-                <a:solidFill>
-                  <a:srgbClr val="FFFFFF"/>
+              <a:rPr lang="en-US" sz="6000" dirty="0">
+                <a:solidFill>
+                  <a:srgbClr val="111111"/>
                 </a:solidFill>
                 <a:latin typeface="Arial Narrow" pitchFamily="34" charset="0"/>
                 <a:ea typeface="Arial Narrow" pitchFamily="34" charset="-122"/>
                 <a:cs typeface="Arial Narrow" pitchFamily="34" charset="-120"/>
               </a:rPr>
-              <a:t>VII</a:t>
-            </a:r>
-            <a:endParaRPr lang="en-US" sz="2400" dirty="0"/>
-          </a:p>
-        </p:txBody>
-      </p:sp>
-      <p:sp>
-        <p:nvSpPr>
-          <p:cNvPr id="3" name="Text 1"/>
-          <p:cNvSpPr/>
-          <p:nvPr/>
-        </p:nvSpPr>
-        <p:spPr>
-          <a:xfrm>
-            <a:off x="1234440" y="274320"/>
-            <a:ext cx="8961120" cy="548640"/>
-          </a:xfrm>
-          <a:prstGeom prst="rect">
-            <a:avLst/>
-          </a:prstGeom>
-          <a:noFill/>
-          <a:ln/>
-        </p:spPr>
-        <p:txBody>
-          <a:bodyPr wrap="square" rtlCol="0" anchor="ctr"/>
-          <a:lstStyle/>
-          <a:p>
-            <a:pPr indent="0" marL="0">
-              <a:buNone/>
-            </a:pPr>
-            <a:r>
-              <a:rPr lang="en-US" sz="2800" dirty="0">
-                <a:solidFill>
-                  <a:srgbClr val="1F6B5E"/>
-                </a:solidFill>
-                <a:latin typeface="Arial Narrow" pitchFamily="34" charset="0"/>
-                <a:ea typeface="Arial Narrow" pitchFamily="34" charset="-122"/>
-                <a:cs typeface="Arial Narrow" pitchFamily="34" charset="-120"/>
-              </a:rPr>
-              <a:t>Guinée</a:t>
-            </a:r>
-            <a:endParaRPr lang="en-US" sz="2800" dirty="0"/>
-          </a:p>
-        </p:txBody>
-      </p:sp>
-      <p:sp>
-        <p:nvSpPr>
-          <p:cNvPr id="4" name="Shape 2"/>
-          <p:cNvSpPr/>
-          <p:nvPr/>
-        </p:nvSpPr>
-        <p:spPr>
-          <a:xfrm>
-            <a:off x="10881360" y="274320"/>
-            <a:ext cx="301752" cy="566928"/>
-          </a:xfrm>
-          <a:prstGeom prst="rect">
-            <a:avLst/>
-          </a:prstGeom>
-          <a:solidFill>
-            <a:srgbClr val="CE1126"/>
-          </a:solidFill>
-          <a:ln w="12700">
-            <a:solidFill>
-              <a:srgbClr val="CE1126"/>
-            </a:solidFill>
-            <a:prstDash val="solid"/>
-          </a:ln>
-        </p:spPr>
-      </p:sp>
-      <p:sp>
-        <p:nvSpPr>
-          <p:cNvPr id="5" name="Shape 3"/>
-          <p:cNvSpPr/>
-          <p:nvPr/>
-        </p:nvSpPr>
-        <p:spPr>
-          <a:xfrm>
-            <a:off x="11183112" y="274320"/>
-            <a:ext cx="301752" cy="566928"/>
-          </a:xfrm>
-          <a:prstGeom prst="rect">
-            <a:avLst/>
-          </a:prstGeom>
-          <a:solidFill>
-            <a:srgbClr val="FCD116"/>
-          </a:solidFill>
-          <a:ln w="12700">
-            <a:solidFill>
-              <a:srgbClr val="FCD116"/>
-            </a:solidFill>
-            <a:prstDash val="solid"/>
-          </a:ln>
-        </p:spPr>
-      </p:sp>
-      <p:sp>
-        <p:nvSpPr>
-          <p:cNvPr id="6" name="Shape 4"/>
-          <p:cNvSpPr/>
-          <p:nvPr/>
-        </p:nvSpPr>
-        <p:spPr>
-          <a:xfrm>
-            <a:off x="11484864" y="274320"/>
-            <a:ext cx="301752" cy="566928"/>
-          </a:xfrm>
-          <a:prstGeom prst="rect">
-            <a:avLst/>
-          </a:prstGeom>
-          <a:solidFill>
-            <a:srgbClr val="009460"/>
-          </a:solidFill>
-          <a:ln w="12700">
-            <a:solidFill>
-              <a:srgbClr val="009460"/>
-            </a:solidFill>
-            <a:prstDash val="solid"/>
-          </a:ln>
-        </p:spPr>
-      </p:sp>
-      <p:sp>
-        <p:nvSpPr>
-          <p:cNvPr id="7" name="Shape 5"/>
-          <p:cNvSpPr/>
-          <p:nvPr/>
-        </p:nvSpPr>
-        <p:spPr>
-          <a:xfrm>
-            <a:off x="10881360" y="274320"/>
-            <a:ext cx="905256" cy="566928"/>
-          </a:xfrm>
-          <a:prstGeom prst="rect">
-            <a:avLst/>
-          </a:prstGeom>
-          <a:ln w="6350">
-            <a:solidFill>
-              <a:srgbClr val="1F2937"/>
-            </a:solidFill>
-            <a:prstDash val="solid"/>
-          </a:ln>
-        </p:spPr>
-      </p:sp>
-      <p:sp>
-        <p:nvSpPr>
-          <p:cNvPr id="8" name="Shape 6"/>
-          <p:cNvSpPr/>
-          <p:nvPr/>
-        </p:nvSpPr>
-        <p:spPr>
-          <a:xfrm>
-            <a:off x="457200" y="960120"/>
-            <a:ext cx="11292840" cy="0"/>
-          </a:xfrm>
-          <a:prstGeom prst="line">
-            <a:avLst/>
-          </a:prstGeom>
-          <a:noFill/>
-          <a:ln w="6350">
-            <a:solidFill>
-              <a:srgbClr val="A3A3A3"/>
-            </a:solidFill>
-            <a:prstDash val="solid"/>
-          </a:ln>
-        </p:spPr>
-      </p:sp>
-      <p:sp>
-        <p:nvSpPr>
-          <p:cNvPr id="9" name="Text 7"/>
-          <p:cNvSpPr/>
-          <p:nvPr/>
-        </p:nvSpPr>
-        <p:spPr>
-          <a:xfrm>
-            <a:off x="640080" y="1188720"/>
-            <a:ext cx="10972800" cy="4663440"/>
-          </a:xfrm>
-          <a:prstGeom prst="rect">
-            <a:avLst/>
-          </a:prstGeom>
-          <a:noFill/>
-          <a:ln/>
-        </p:spPr>
-        <p:txBody>
-          <a:bodyPr wrap="square" rtlCol="0" anchor="t"/>
-          <a:lstStyle/>
-          <a:p>
-            <a:pPr marL="342900" indent="-342900">
-              <a:spcBef>
-                <a:spcPts val="800"/>
-              </a:spcBef>
-              <a:spcAft>
-                <a:spcPts val="200"/>
-              </a:spcAft>
-              <a:buSzPct val="100000"/>
-              <a:buChar char="❑"/>
-            </a:pPr>
-            <a:r>
-              <a:rPr lang="en-US" sz="1400" b="1" u="sng" dirty="0">
-                <a:solidFill>
-                  <a:srgbClr val="1F6B5E"/>
-                </a:solidFill>
-                <a:latin typeface="Calibri" pitchFamily="34" charset="0"/>
-                <a:ea typeface="Calibri" pitchFamily="34" charset="-122"/>
-                <a:cs typeface="Calibri" pitchFamily="34" charset="-120"/>
-              </a:rPr>
-              <a:t>GUINÉE : LA HAC S’ATTAQUE À LA PROLIFÉRATION ILLÉGALE DES WEB TV</a:t>
-            </a:r>
-            <a:endParaRPr lang="en-US" sz="1300" dirty="0"/>
-          </a:p>
-          <a:p>
-            <a:pPr lvl="1" marL="685800" indent="-342900">
-              <a:spcAft>
-                <a:spcPts val="200"/>
-              </a:spcAft>
-              <a:buSzPct val="100000"/>
-              <a:buChar char="▪"/>
-            </a:pPr>
-            <a:r>
-              <a:rPr lang="en-US" sz="1300" dirty="0">
-                <a:solidFill>
-                  <a:srgbClr val="1F2937"/>
-                </a:solidFill>
-                <a:latin typeface="Calibri" pitchFamily="34" charset="0"/>
-                <a:ea typeface="Calibri" pitchFamily="34" charset="-122"/>
-                <a:cs typeface="Calibri" pitchFamily="34" charset="-120"/>
-              </a:rPr>
-              <a:t>Source : </a:t>
-            </a:r>
-            <a:pPr indent="0" marL="0">
-              <a:spcAft>
-                <a:spcPts val="200"/>
-              </a:spcAft>
-              <a:buNone/>
-            </a:pPr>
-            <a:r>
-              <a:rPr lang="en-US" sz="1300" u="sng" dirty="0">
-                <a:solidFill>
-                  <a:srgbClr val="1F6B5E"/>
-                </a:solidFill>
-                <a:latin typeface="Calibri" pitchFamily="34" charset="0"/>
-                <a:ea typeface="Calibri" pitchFamily="34" charset="-122"/>
-                <a:cs typeface="Calibri" pitchFamily="34" charset="-120"/>
-                <a:hlinkClick r:id="rId1" invalidUrl="" action="" tgtFrame="" tooltip="" history="1" highlightClick="0" endSnd="0">
-                  <a:extLst>
-                    <a:ext uri="{A12FA001-AC4F-418D-AE19-62706E023703}">
-                      <ahyp:hlinkClr xmlns:ahyp="http://schemas.microsoft.com/office/drawing/2018/hyperlinkcolor" val="tx"/>
-                    </a:ext>
-                  </a:extLst>
-                </a:hlinkClick>
-              </a:rPr>
-              <a:t>Mali 24</a:t>
-            </a:r>
-            <a:pPr indent="0" marL="0">
-              <a:spcAft>
-                <a:spcPts val="200"/>
-              </a:spcAft>
-              <a:buNone/>
-            </a:pPr>
-            <a:r>
-              <a:rPr lang="en-US" sz="1300" dirty="0">
-                <a:solidFill>
-                  <a:srgbClr val="1F2937"/>
-                </a:solidFill>
-                <a:latin typeface="Calibri" pitchFamily="34" charset="0"/>
-                <a:ea typeface="Calibri" pitchFamily="34" charset="-122"/>
-                <a:cs typeface="Calibri" pitchFamily="34" charset="-120"/>
-              </a:rPr>
-              <a:t> — 20 octobre 2026, 13 h UTC</a:t>
-            </a:r>
-            <a:endParaRPr lang="en-US" sz="1300" dirty="0"/>
-          </a:p>
-          <a:p>
-            <a:pPr marL="342900" indent="-342900">
-              <a:spcBef>
-                <a:spcPts val="800"/>
-              </a:spcBef>
-              <a:spcAft>
-                <a:spcPts val="200"/>
-              </a:spcAft>
-              <a:buSzPct val="100000"/>
-              <a:buChar char="❑"/>
-            </a:pPr>
-            <a:r>
-              <a:rPr lang="en-US" sz="1400" b="1" u="sng" dirty="0">
-                <a:solidFill>
-                  <a:srgbClr val="1F6B5E"/>
-                </a:solidFill>
-                <a:latin typeface="Calibri" pitchFamily="34" charset="0"/>
-                <a:ea typeface="Calibri" pitchFamily="34" charset="-122"/>
-                <a:cs typeface="Calibri" pitchFamily="34" charset="-120"/>
-              </a:rPr>
-              <a:t>IBRO DIABATÉ ÉVACUÉ À L’ÉTRANGER POUR UN MOIS DE SOINS PRIS EN CHARGE PAR L’ÉTAT</a:t>
-            </a:r>
-            <a:endParaRPr lang="en-US" sz="1300" dirty="0"/>
-          </a:p>
-          <a:p>
-            <a:pPr lvl="1" marL="685800" indent="-342900">
-              <a:spcAft>
-                <a:spcPts val="200"/>
-              </a:spcAft>
-              <a:buSzPct val="100000"/>
-              <a:buChar char="▪"/>
-            </a:pPr>
-            <a:r>
-              <a:rPr lang="en-US" sz="1300" dirty="0">
-                <a:solidFill>
-                  <a:srgbClr val="1F2937"/>
-                </a:solidFill>
-                <a:latin typeface="Calibri" pitchFamily="34" charset="0"/>
-                <a:ea typeface="Calibri" pitchFamily="34" charset="-122"/>
-                <a:cs typeface="Calibri" pitchFamily="34" charset="-120"/>
-              </a:rPr>
-              <a:t>Source : </a:t>
-            </a:r>
-            <a:pPr indent="0" marL="0">
-              <a:spcAft>
-                <a:spcPts val="200"/>
-              </a:spcAft>
-              <a:buNone/>
-            </a:pPr>
-            <a:r>
-              <a:rPr lang="en-US" sz="1300" u="sng" dirty="0">
-                <a:solidFill>
-                  <a:srgbClr val="1F6B5E"/>
-                </a:solidFill>
-                <a:latin typeface="Calibri" pitchFamily="34" charset="0"/>
-                <a:ea typeface="Calibri" pitchFamily="34" charset="-122"/>
-                <a:cs typeface="Calibri" pitchFamily="34" charset="-120"/>
-                <a:hlinkClick r:id="rId2" invalidUrl="" action="" tgtFrame="" tooltip="" history="1" highlightClick="0" endSnd="0">
-                  <a:extLst>
-                    <a:ext uri="{A12FA001-AC4F-418D-AE19-62706E023703}">
-                      <ahyp:hlinkClr xmlns:ahyp="http://schemas.microsoft.com/office/drawing/2018/hyperlinkcolor" val="tx"/>
-                    </a:ext>
-                  </a:extLst>
-                </a:hlinkClick>
-              </a:rPr>
-              <a:t>Guinee7.com</a:t>
-            </a:r>
-            <a:pPr indent="0" marL="0">
-              <a:spcAft>
-                <a:spcPts val="200"/>
-              </a:spcAft>
-              <a:buNone/>
-            </a:pPr>
-            <a:r>
-              <a:rPr lang="en-US" sz="1300" dirty="0">
-                <a:solidFill>
-                  <a:srgbClr val="1F2937"/>
-                </a:solidFill>
-                <a:latin typeface="Calibri" pitchFamily="34" charset="0"/>
-                <a:ea typeface="Calibri" pitchFamily="34" charset="-122"/>
-                <a:cs typeface="Calibri" pitchFamily="34" charset="-120"/>
-              </a:rPr>
-              <a:t> — 21 octobre 2026, 10 h UTC</a:t>
-            </a:r>
-            <a:endParaRPr lang="en-US" sz="1300" dirty="0"/>
-          </a:p>
-          <a:p>
-            <a:pPr marL="342900" indent="-342900">
-              <a:spcBef>
-                <a:spcPts val="800"/>
-              </a:spcBef>
-              <a:spcAft>
-                <a:spcPts val="200"/>
-              </a:spcAft>
-              <a:buSzPct val="100000"/>
-              <a:buChar char="❑"/>
-            </a:pPr>
-            <a:r>
-              <a:rPr lang="en-US" sz="1400" b="1" u="sng" dirty="0">
-                <a:solidFill>
-                  <a:srgbClr val="1F6B5E"/>
-                </a:solidFill>
-                <a:latin typeface="Calibri" pitchFamily="34" charset="0"/>
-                <a:ea typeface="Calibri" pitchFamily="34" charset="-122"/>
-                <a:cs typeface="Calibri" pitchFamily="34" charset="-120"/>
-              </a:rPr>
-              <a:t>LE PROCUREUR GÉNÉRAL PRÈS LA COUR SUPRÊME DÉFEND LA PROCÉDURE VISANT L'EX-MAGISTRAT ALGASSIMOU DIALLO</a:t>
-            </a:r>
-            <a:endParaRPr lang="en-US" sz="1300" dirty="0"/>
-          </a:p>
-          <a:p>
-            <a:pPr lvl="1" marL="685800" indent="-342900">
-              <a:spcAft>
-                <a:spcPts val="200"/>
-              </a:spcAft>
-              <a:buSzPct val="100000"/>
-              <a:buChar char="▪"/>
-            </a:pPr>
-            <a:r>
-              <a:rPr lang="en-US" sz="1300" dirty="0">
-                <a:solidFill>
-                  <a:srgbClr val="1F2937"/>
-                </a:solidFill>
-                <a:latin typeface="Calibri" pitchFamily="34" charset="0"/>
-                <a:ea typeface="Calibri" pitchFamily="34" charset="-122"/>
-                <a:cs typeface="Calibri" pitchFamily="34" charset="-120"/>
-              </a:rPr>
-              <a:t>Source : </a:t>
-            </a:r>
-            <a:pPr indent="0" marL="0">
-              <a:spcAft>
-                <a:spcPts val="200"/>
-              </a:spcAft>
-              <a:buNone/>
-            </a:pPr>
-            <a:r>
-              <a:rPr lang="en-US" sz="1300" u="sng" dirty="0">
-                <a:solidFill>
-                  <a:srgbClr val="1F6B5E"/>
-                </a:solidFill>
-                <a:latin typeface="Calibri" pitchFamily="34" charset="0"/>
-                <a:ea typeface="Calibri" pitchFamily="34" charset="-122"/>
-                <a:cs typeface="Calibri" pitchFamily="34" charset="-120"/>
-                <a:hlinkClick r:id="rId3" invalidUrl="" action="" tgtFrame="" tooltip="" history="1" highlightClick="0" endSnd="0">
-                  <a:extLst>
-                    <a:ext uri="{A12FA001-AC4F-418D-AE19-62706E023703}">
-                      <ahyp:hlinkClr xmlns:ahyp="http://schemas.microsoft.com/office/drawing/2018/hyperlinkcolor" val="tx"/>
-                    </a:ext>
-                  </a:extLst>
-                </a:hlinkClick>
-              </a:rPr>
-              <a:t>AllAfrica (GN)</a:t>
-            </a:r>
-            <a:pPr indent="0" marL="0">
-              <a:spcAft>
-                <a:spcPts val="200"/>
-              </a:spcAft>
-              <a:buNone/>
-            </a:pPr>
-            <a:r>
-              <a:rPr lang="en-US" sz="1300" dirty="0">
-                <a:solidFill>
-                  <a:srgbClr val="1F2937"/>
-                </a:solidFill>
-                <a:latin typeface="Calibri" pitchFamily="34" charset="0"/>
-                <a:ea typeface="Calibri" pitchFamily="34" charset="-122"/>
-                <a:cs typeface="Calibri" pitchFamily="34" charset="-120"/>
-              </a:rPr>
-              <a:t> — 21 octobre 2026, 10 h UTC</a:t>
-            </a:r>
-            <a:endParaRPr lang="en-US" sz="1300" dirty="0"/>
-          </a:p>
-          <a:p>
-            <a:pPr marL="342900" indent="-342900">
-              <a:spcBef>
-                <a:spcPts val="800"/>
-              </a:spcBef>
-              <a:spcAft>
-                <a:spcPts val="200"/>
-              </a:spcAft>
-              <a:buSzPct val="100000"/>
-              <a:buChar char="❑"/>
-            </a:pPr>
-            <a:r>
-              <a:rPr lang="en-US" sz="1400" b="1" u="sng" dirty="0">
-                <a:solidFill>
-                  <a:srgbClr val="1F6B5E"/>
-                </a:solidFill>
-                <a:latin typeface="Calibri" pitchFamily="34" charset="0"/>
-                <a:ea typeface="Calibri" pitchFamily="34" charset="-122"/>
-                <a:cs typeface="Calibri" pitchFamily="34" charset="-120"/>
-              </a:rPr>
-              <a:t>LÉLOUMA : DES ÉCOLES FERMÉES PAR MANQUE D’ENSEIGNANTS, PLUS DE 500 ÉLÈVES PRIVÉS DE SCOLARITÉ</a:t>
-            </a:r>
-            <a:endParaRPr lang="en-US" sz="1300" dirty="0"/>
-          </a:p>
-          <a:p>
-            <a:pPr lvl="1" marL="685800" indent="-342900">
-              <a:spcAft>
-                <a:spcPts val="200"/>
-              </a:spcAft>
-              <a:buSzPct val="100000"/>
-              <a:buChar char="▪"/>
-            </a:pPr>
-            <a:r>
-              <a:rPr lang="en-US" sz="1300" dirty="0">
-                <a:solidFill>
-                  <a:srgbClr val="1F2937"/>
-                </a:solidFill>
-                <a:latin typeface="Calibri" pitchFamily="34" charset="0"/>
-                <a:ea typeface="Calibri" pitchFamily="34" charset="-122"/>
-                <a:cs typeface="Calibri" pitchFamily="34" charset="-120"/>
-              </a:rPr>
-              <a:t>Source : </a:t>
-            </a:r>
-            <a:pPr indent="0" marL="0">
-              <a:spcAft>
-                <a:spcPts val="200"/>
-              </a:spcAft>
-              <a:buNone/>
-            </a:pPr>
-            <a:r>
-              <a:rPr lang="en-US" sz="1300" u="sng" dirty="0">
-                <a:solidFill>
-                  <a:srgbClr val="1F6B5E"/>
-                </a:solidFill>
-                <a:latin typeface="Calibri" pitchFamily="34" charset="0"/>
-                <a:ea typeface="Calibri" pitchFamily="34" charset="-122"/>
-                <a:cs typeface="Calibri" pitchFamily="34" charset="-120"/>
-                <a:hlinkClick r:id="rId4" invalidUrl="" action="" tgtFrame="" tooltip="" history="1" highlightClick="0" endSnd="0">
-                  <a:extLst>
-                    <a:ext uri="{A12FA001-AC4F-418D-AE19-62706E023703}">
-                      <ahyp:hlinkClr xmlns:ahyp="http://schemas.microsoft.com/office/drawing/2018/hyperlinkcolor" val="tx"/>
-                    </a:ext>
-                  </a:extLst>
-                </a:hlinkClick>
-              </a:rPr>
-              <a:t>Guineematin.com</a:t>
-            </a:r>
-            <a:pPr indent="0" marL="0">
-              <a:spcAft>
-                <a:spcPts val="200"/>
-              </a:spcAft>
-              <a:buNone/>
-            </a:pPr>
-            <a:r>
-              <a:rPr lang="en-US" sz="1300" dirty="0">
-                <a:solidFill>
-                  <a:srgbClr val="1F2937"/>
-                </a:solidFill>
-                <a:latin typeface="Calibri" pitchFamily="34" charset="0"/>
-                <a:ea typeface="Calibri" pitchFamily="34" charset="-122"/>
-                <a:cs typeface="Calibri" pitchFamily="34" charset="-120"/>
-              </a:rPr>
-              <a:t> — 20 octobre 2026, 22 h UTC</a:t>
-            </a:r>
-            <a:endParaRPr lang="en-US" sz="1300" dirty="0"/>
+              <a:t>MERCI</a:t>
+            </a:r>
+            <a:endParaRPr lang="en-US" sz="6000" dirty="0"/>
           </a:p>
         </p:txBody>
       </p:sp>
       <p:pic>
         <p:nvPicPr>
-          <p:cNvPr id="10" name="Image 0" descr="/home/runner/work/SentiqS/SentiqS/scripts/assets/grsci/logo-grsci.png">    </p:cNvPr>
-          <p:cNvPicPr>
-            <a:picLocks noChangeAspect="1"/>
-          </p:cNvPicPr>
-          <p:nvPr/>
-        </p:nvPicPr>
-        <p:blipFill>
-          <a:blip r:embed="rId5"/>
-          <a:stretch>
-            <a:fillRect/>
-          </a:stretch>
-        </p:blipFill>
-        <p:spPr>
-          <a:xfrm>
-            <a:off x="411480" y="5989320"/>
-            <a:ext cx="548640" cy="630936"/>
-          </a:xfrm>
-          <a:prstGeom prst="rect">
-            <a:avLst/>
-          </a:prstGeom>
-        </p:spPr>
-      </p:pic>
-      <p:sp>
-        <p:nvSpPr>
-          <p:cNvPr id="11" name="Text 8"/>
-          <p:cNvSpPr/>
-          <p:nvPr/>
-        </p:nvSpPr>
-        <p:spPr>
-          <a:xfrm>
-            <a:off x="3108960" y="6217920"/>
-            <a:ext cx="4206240" cy="329184"/>
-          </a:xfrm>
-          <a:prstGeom prst="rect">
-            <a:avLst/>
-          </a:prstGeom>
-          <a:noFill/>
-          <a:ln w="9525">
-            <a:solidFill>
-              <a:srgbClr val="1F6B5E"/>
-            </a:solidFill>
-          </a:ln>
-        </p:spPr>
-        <p:txBody>
-          <a:bodyPr wrap="square" rtlCol="0" anchor="ctr"/>
-          <a:lstStyle/>
-          <a:p>
-            <a:pPr algn="ctr" indent="0" marL="0">
-              <a:buNone/>
-            </a:pPr>
-            <a:r>
-              <a:rPr lang="en-US" sz="1200" b="1" dirty="0">
-                <a:solidFill>
-                  <a:srgbClr val="1F2937"/>
-                </a:solidFill>
-                <a:latin typeface="Calibri" pitchFamily="34" charset="0"/>
-                <a:ea typeface="Calibri" pitchFamily="34" charset="-122"/>
-                <a:cs typeface="Calibri" pitchFamily="34" charset="-120"/>
-              </a:rPr>
-              <a:t>G</a:t>
-            </a:r>
-            <a:pPr algn="ctr" indent="0" marL="0">
-              <a:buNone/>
-            </a:pPr>
-            <a:r>
-              <a:rPr lang="en-US" sz="1200" dirty="0">
-                <a:solidFill>
-                  <a:srgbClr val="1F2937"/>
-                </a:solidFill>
-                <a:latin typeface="Calibri" pitchFamily="34" charset="0"/>
-                <a:ea typeface="Calibri" pitchFamily="34" charset="-122"/>
-                <a:cs typeface="Calibri" pitchFamily="34" charset="-120"/>
-              </a:rPr>
-              <a:t>roupe des </a:t>
-            </a:r>
-            <a:pPr algn="ctr" indent="0" marL="0">
-              <a:buNone/>
-            </a:pPr>
-            <a:r>
-              <a:rPr lang="en-US" sz="1200" b="1" dirty="0">
-                <a:solidFill>
-                  <a:srgbClr val="1F2937"/>
-                </a:solidFill>
-                <a:latin typeface="Calibri" pitchFamily="34" charset="0"/>
-                <a:ea typeface="Calibri" pitchFamily="34" charset="-122"/>
-                <a:cs typeface="Calibri" pitchFamily="34" charset="-120"/>
-              </a:rPr>
-              <a:t>R</a:t>
-            </a:r>
-            <a:pPr algn="ctr" indent="0" marL="0">
-              <a:buNone/>
-            </a:pPr>
-            <a:r>
-              <a:rPr lang="en-US" sz="1200" dirty="0">
-                <a:solidFill>
-                  <a:srgbClr val="1F2937"/>
-                </a:solidFill>
-                <a:latin typeface="Calibri" pitchFamily="34" charset="0"/>
-                <a:ea typeface="Calibri" pitchFamily="34" charset="-122"/>
-                <a:cs typeface="Calibri" pitchFamily="34" charset="-120"/>
-              </a:rPr>
-              <a:t>esponsables </a:t>
-            </a:r>
-            <a:pPr algn="ctr" indent="0" marL="0">
-              <a:buNone/>
-            </a:pPr>
-            <a:r>
-              <a:rPr lang="en-US" sz="1200" b="1" dirty="0">
-                <a:solidFill>
-                  <a:srgbClr val="1F2937"/>
-                </a:solidFill>
-                <a:latin typeface="Calibri" pitchFamily="34" charset="0"/>
-                <a:ea typeface="Calibri" pitchFamily="34" charset="-122"/>
-                <a:cs typeface="Calibri" pitchFamily="34" charset="-120"/>
-              </a:rPr>
-              <a:t>S</a:t>
-            </a:r>
-            <a:pPr algn="ctr" indent="0" marL="0">
-              <a:buNone/>
-            </a:pPr>
-            <a:r>
-              <a:rPr lang="en-US" sz="1200" dirty="0">
-                <a:solidFill>
-                  <a:srgbClr val="1F2937"/>
-                </a:solidFill>
-                <a:latin typeface="Calibri" pitchFamily="34" charset="0"/>
-                <a:ea typeface="Calibri" pitchFamily="34" charset="-122"/>
-                <a:cs typeface="Calibri" pitchFamily="34" charset="-120"/>
-              </a:rPr>
-              <a:t>ûreté de </a:t>
-            </a:r>
-            <a:pPr algn="ctr" indent="0" marL="0">
-              <a:buNone/>
-            </a:pPr>
-            <a:r>
-              <a:rPr lang="en-US" sz="1200" b="1" dirty="0">
-                <a:solidFill>
-                  <a:srgbClr val="1F2937"/>
-                </a:solidFill>
-                <a:latin typeface="Calibri" pitchFamily="34" charset="0"/>
-                <a:ea typeface="Calibri" pitchFamily="34" charset="-122"/>
-                <a:cs typeface="Calibri" pitchFamily="34" charset="-120"/>
-              </a:rPr>
-              <a:t>C</a:t>
-            </a:r>
-            <a:pPr algn="ctr" indent="0" marL="0">
-              <a:buNone/>
-            </a:pPr>
-            <a:r>
-              <a:rPr lang="en-US" sz="1200" dirty="0">
-                <a:solidFill>
-                  <a:srgbClr val="1F2937"/>
-                </a:solidFill>
-                <a:latin typeface="Calibri" pitchFamily="34" charset="0"/>
-                <a:ea typeface="Calibri" pitchFamily="34" charset="-122"/>
-                <a:cs typeface="Calibri" pitchFamily="34" charset="-120"/>
-              </a:rPr>
-              <a:t>ôte d'</a:t>
-            </a:r>
-            <a:pPr algn="ctr" indent="0" marL="0">
-              <a:buNone/>
-            </a:pPr>
-            <a:r>
-              <a:rPr lang="en-US" sz="1200" b="1" dirty="0">
-                <a:solidFill>
-                  <a:srgbClr val="1F2937"/>
-                </a:solidFill>
-                <a:latin typeface="Calibri" pitchFamily="34" charset="0"/>
-                <a:ea typeface="Calibri" pitchFamily="34" charset="-122"/>
-                <a:cs typeface="Calibri" pitchFamily="34" charset="-120"/>
-              </a:rPr>
-              <a:t>I</a:t>
-            </a:r>
-            <a:pPr algn="ctr" indent="0" marL="0">
-              <a:buNone/>
-            </a:pPr>
-            <a:r>
-              <a:rPr lang="en-US" sz="1200" dirty="0">
-                <a:solidFill>
-                  <a:srgbClr val="1F2937"/>
-                </a:solidFill>
-                <a:latin typeface="Calibri" pitchFamily="34" charset="0"/>
-                <a:ea typeface="Calibri" pitchFamily="34" charset="-122"/>
-                <a:cs typeface="Calibri" pitchFamily="34" charset="-120"/>
-              </a:rPr>
-              <a:t>voire</a:t>
-            </a:r>
-            <a:endParaRPr lang="en-US" sz="1200" dirty="0"/>
-          </a:p>
-        </p:txBody>
-      </p:sp>
-      <p:sp>
-        <p:nvSpPr>
-          <p:cNvPr id="12" name="Text 9"/>
-          <p:cNvSpPr/>
-          <p:nvPr/>
-        </p:nvSpPr>
-        <p:spPr>
-          <a:xfrm>
-            <a:off x="9418320" y="6309360"/>
-            <a:ext cx="2468880" cy="274320"/>
-          </a:xfrm>
-          <a:prstGeom prst="rect">
-            <a:avLst/>
-          </a:prstGeom>
-          <a:noFill/>
-          <a:ln/>
-        </p:spPr>
-        <p:txBody>
-          <a:bodyPr wrap="square" rtlCol="0" anchor="ctr"/>
-          <a:lstStyle/>
-          <a:p>
-            <a:pPr algn="r" indent="0" marL="0">
-              <a:buNone/>
-            </a:pPr>
-            <a:r>
-              <a:rPr lang="en-US" sz="1000" dirty="0">
-                <a:solidFill>
-                  <a:srgbClr val="1F2937"/>
-                </a:solidFill>
-                <a:latin typeface="Calibri" pitchFamily="34" charset="0"/>
-                <a:ea typeface="Calibri" pitchFamily="34" charset="-122"/>
-                <a:cs typeface="Calibri" pitchFamily="34" charset="-120"/>
-              </a:rPr>
-              <a:t>|  21/10/26   |   16</a:t>
-            </a:r>
-            <a:endParaRPr lang="en-US" sz="1000" dirty="0"/>
-          </a:p>
-        </p:txBody>
-      </p:sp>
-    </p:spTree>
-  </p:cSld>
-  <p:clrMapOvr>
-    <a:masterClrMapping/>
-  </p:clrMapOvr>
-</p:sld>
-</file>
-
-<file path=ppt/slides/slide17.xml><?xml version="1.0" encoding="utf-8"?>
-<p:sld xmlns:a="http://schemas.openxmlformats.org/drawingml/2006/main" xmlns:r="http://schemas.openxmlformats.org/officeDocument/2006/relationships" xmlns:p="http://schemas.openxmlformats.org/presentationml/2006/main">
-  <p:cSld name="Slide 17">
-    <p:spTree>
-      <p:nvGrpSpPr>
-        <p:cNvPr id="1" name=""/>
-        <p:cNvGrpSpPr/>
-        <p:nvPr/>
-      </p:nvGrpSpPr>
-      <p:grpSpPr>
-        <a:xfrm>
-          <a:off x="0" y="0"/>
-          <a:ext cx="0" cy="0"/>
-          <a:chOff x="0" y="0"/>
-          <a:chExt cx="0" cy="0"/>
-        </a:xfrm>
-      </p:grpSpPr>
-      <p:sp>
-        <p:nvSpPr>
-          <p:cNvPr id="2" name="Text 0"/>
-          <p:cNvSpPr/>
-          <p:nvPr/>
-        </p:nvSpPr>
-        <p:spPr>
-          <a:xfrm>
-            <a:off x="457200" y="274320"/>
-            <a:ext cx="640080" cy="548640"/>
-          </a:xfrm>
-          <a:prstGeom prst="rect">
-            <a:avLst/>
-          </a:prstGeom>
-          <a:solidFill>
-            <a:srgbClr val="1F6B5E"/>
-          </a:solidFill>
-          <a:ln/>
-        </p:spPr>
-        <p:txBody>
-          <a:bodyPr wrap="square" rtlCol="0" anchor="ctr"/>
-          <a:lstStyle/>
-          <a:p>
-            <a:pPr algn="ctr" indent="0" marL="0">
-              <a:buNone/>
-            </a:pPr>
-            <a:r>
-              <a:rPr lang="en-US" sz="2400" dirty="0">
-                <a:solidFill>
-                  <a:srgbClr val="FFFFFF"/>
-                </a:solidFill>
-                <a:latin typeface="Arial Narrow" pitchFamily="34" charset="0"/>
-                <a:ea typeface="Arial Narrow" pitchFamily="34" charset="-122"/>
-                <a:cs typeface="Arial Narrow" pitchFamily="34" charset="-120"/>
-              </a:rPr>
-              <a:t>VIII</a:t>
-            </a:r>
-            <a:endParaRPr lang="en-US" sz="2400" dirty="0"/>
-          </a:p>
-        </p:txBody>
-      </p:sp>
-      <p:sp>
-        <p:nvSpPr>
-          <p:cNvPr id="3" name="Text 1"/>
-          <p:cNvSpPr/>
-          <p:nvPr/>
-        </p:nvSpPr>
-        <p:spPr>
-          <a:xfrm>
-            <a:off x="1234440" y="274320"/>
-            <a:ext cx="8961120" cy="548640"/>
-          </a:xfrm>
-          <a:prstGeom prst="rect">
-            <a:avLst/>
-          </a:prstGeom>
-          <a:noFill/>
-          <a:ln/>
-        </p:spPr>
-        <p:txBody>
-          <a:bodyPr wrap="square" rtlCol="0" anchor="ctr"/>
-          <a:lstStyle/>
-          <a:p>
-            <a:pPr indent="0" marL="0">
-              <a:buNone/>
-            </a:pPr>
-            <a:r>
-              <a:rPr lang="en-US" sz="2800" dirty="0">
-                <a:solidFill>
-                  <a:srgbClr val="1F6B5E"/>
-                </a:solidFill>
-                <a:latin typeface="Arial Narrow" pitchFamily="34" charset="0"/>
-                <a:ea typeface="Arial Narrow" pitchFamily="34" charset="-122"/>
-                <a:cs typeface="Arial Narrow" pitchFamily="34" charset="-120"/>
-              </a:rPr>
-              <a:t>Liberia</a:t>
-            </a:r>
-            <a:endParaRPr lang="en-US" sz="2800" dirty="0"/>
-          </a:p>
-        </p:txBody>
-      </p:sp>
-      <p:sp>
-        <p:nvSpPr>
-          <p:cNvPr id="4" name="Shape 2"/>
-          <p:cNvSpPr/>
-          <p:nvPr/>
-        </p:nvSpPr>
-        <p:spPr>
-          <a:xfrm>
-            <a:off x="10881360" y="274320"/>
-            <a:ext cx="905256" cy="113386"/>
-          </a:xfrm>
-          <a:prstGeom prst="rect">
-            <a:avLst/>
-          </a:prstGeom>
-          <a:solidFill>
-            <a:srgbClr val="BF0A30"/>
-          </a:solidFill>
-          <a:ln w="12700">
-            <a:solidFill>
-              <a:srgbClr val="BF0A30"/>
-            </a:solidFill>
-            <a:prstDash val="solid"/>
-          </a:ln>
-        </p:spPr>
-      </p:sp>
-      <p:sp>
-        <p:nvSpPr>
-          <p:cNvPr id="5" name="Shape 3"/>
-          <p:cNvSpPr/>
-          <p:nvPr/>
-        </p:nvSpPr>
-        <p:spPr>
-          <a:xfrm>
-            <a:off x="10881360" y="387706"/>
-            <a:ext cx="905256" cy="113386"/>
-          </a:xfrm>
-          <a:prstGeom prst="rect">
-            <a:avLst/>
-          </a:prstGeom>
-          <a:solidFill>
-            <a:srgbClr val="FFFFFF"/>
-          </a:solidFill>
-          <a:ln w="12700">
-            <a:solidFill>
-              <a:srgbClr val="FFFFFF"/>
-            </a:solidFill>
-            <a:prstDash val="solid"/>
-          </a:ln>
-        </p:spPr>
-      </p:sp>
-      <p:sp>
-        <p:nvSpPr>
-          <p:cNvPr id="6" name="Shape 4"/>
-          <p:cNvSpPr/>
-          <p:nvPr/>
-        </p:nvSpPr>
-        <p:spPr>
-          <a:xfrm>
-            <a:off x="10881360" y="501091"/>
-            <a:ext cx="905256" cy="113386"/>
-          </a:xfrm>
-          <a:prstGeom prst="rect">
-            <a:avLst/>
-          </a:prstGeom>
-          <a:solidFill>
-            <a:srgbClr val="BF0A30"/>
-          </a:solidFill>
-          <a:ln w="12700">
-            <a:solidFill>
-              <a:srgbClr val="BF0A30"/>
-            </a:solidFill>
-            <a:prstDash val="solid"/>
-          </a:ln>
-        </p:spPr>
-      </p:sp>
-      <p:sp>
-        <p:nvSpPr>
-          <p:cNvPr id="7" name="Shape 5"/>
-          <p:cNvSpPr/>
-          <p:nvPr/>
-        </p:nvSpPr>
-        <p:spPr>
-          <a:xfrm>
-            <a:off x="10881360" y="614477"/>
-            <a:ext cx="905256" cy="113386"/>
-          </a:xfrm>
-          <a:prstGeom prst="rect">
-            <a:avLst/>
-          </a:prstGeom>
-          <a:solidFill>
-            <a:srgbClr val="FFFFFF"/>
-          </a:solidFill>
-          <a:ln w="12700">
-            <a:solidFill>
-              <a:srgbClr val="FFFFFF"/>
-            </a:solidFill>
-            <a:prstDash val="solid"/>
-          </a:ln>
-        </p:spPr>
-      </p:sp>
-      <p:sp>
-        <p:nvSpPr>
-          <p:cNvPr id="8" name="Shape 6"/>
-          <p:cNvSpPr/>
-          <p:nvPr/>
-        </p:nvSpPr>
-        <p:spPr>
-          <a:xfrm>
-            <a:off x="10881360" y="727862"/>
-            <a:ext cx="905256" cy="113386"/>
-          </a:xfrm>
-          <a:prstGeom prst="rect">
-            <a:avLst/>
-          </a:prstGeom>
-          <a:solidFill>
-            <a:srgbClr val="BF0A30"/>
-          </a:solidFill>
-          <a:ln w="12700">
-            <a:solidFill>
-              <a:srgbClr val="BF0A30"/>
-            </a:solidFill>
-            <a:prstDash val="solid"/>
-          </a:ln>
-        </p:spPr>
-      </p:sp>
-      <p:sp>
-        <p:nvSpPr>
-          <p:cNvPr id="9" name="Shape 7"/>
-          <p:cNvSpPr/>
-          <p:nvPr/>
-        </p:nvSpPr>
-        <p:spPr>
-          <a:xfrm>
-            <a:off x="10881360" y="274320"/>
-            <a:ext cx="905256" cy="566928"/>
-          </a:xfrm>
-          <a:prstGeom prst="rect">
-            <a:avLst/>
-          </a:prstGeom>
-          <a:ln w="6350">
-            <a:solidFill>
-              <a:srgbClr val="1F2937"/>
-            </a:solidFill>
-            <a:prstDash val="solid"/>
-          </a:ln>
-        </p:spPr>
-      </p:sp>
-      <p:sp>
-        <p:nvSpPr>
-          <p:cNvPr id="10" name="Shape 8"/>
-          <p:cNvSpPr/>
-          <p:nvPr/>
-        </p:nvSpPr>
-        <p:spPr>
-          <a:xfrm>
-            <a:off x="457200" y="960120"/>
-            <a:ext cx="11292840" cy="0"/>
-          </a:xfrm>
-          <a:prstGeom prst="line">
-            <a:avLst/>
-          </a:prstGeom>
-          <a:noFill/>
-          <a:ln w="6350">
-            <a:solidFill>
-              <a:srgbClr val="A3A3A3"/>
-            </a:solidFill>
-            <a:prstDash val="solid"/>
-          </a:ln>
-        </p:spPr>
-      </p:sp>
-      <p:sp>
-        <p:nvSpPr>
-          <p:cNvPr id="11" name="Text 9"/>
-          <p:cNvSpPr/>
-          <p:nvPr/>
-        </p:nvSpPr>
-        <p:spPr>
-          <a:xfrm>
-            <a:off x="640080" y="1188720"/>
-            <a:ext cx="10972800" cy="4663440"/>
-          </a:xfrm>
-          <a:prstGeom prst="rect">
-            <a:avLst/>
-          </a:prstGeom>
-          <a:noFill/>
-          <a:ln/>
-        </p:spPr>
-        <p:txBody>
-          <a:bodyPr wrap="square" rtlCol="0" anchor="t"/>
-          <a:lstStyle/>
-          <a:p>
-            <a:pPr indent="0" marL="0">
-              <a:spcAft>
-                <a:spcPts val="200"/>
-              </a:spcAft>
-              <a:buNone/>
-            </a:pPr>
-            <a:r>
-              <a:rPr lang="en-US" sz="1300" i="1" dirty="0">
-                <a:solidFill>
-                  <a:srgbClr val="6B7280"/>
-                </a:solidFill>
-                <a:latin typeface="Calibri" pitchFamily="34" charset="0"/>
-                <a:ea typeface="Calibri" pitchFamily="34" charset="-122"/>
-                <a:cs typeface="Calibri" pitchFamily="34" charset="-120"/>
-              </a:rPr>
-              <a:t>Aucun fait marquant relevé sur la période.</a:t>
-            </a:r>
-            <a:endParaRPr lang="en-US" sz="1300" dirty="0"/>
-          </a:p>
-        </p:txBody>
-      </p:sp>
-      <p:pic>
-        <p:nvPicPr>
-          <p:cNvPr id="12" name="Image 0" descr="/home/runner/work/SentiqS/SentiqS/scripts/assets/grsci/logo-grsci.png">    </p:cNvPr>
+          <p:cNvPr id="3" name="Image 0" descr="/home/runner/work/SentiqS/SentiqS/scripts/assets/grsci/logo-grsci.png">    </p:cNvPr>
           <p:cNvPicPr>
             <a:picLocks noChangeAspect="1"/>
           </p:cNvPicPr>
@@ -8586,7 +7141,7 @@
       </p:pic>
       <p:sp>
         <p:nvSpPr>
-          <p:cNvPr id="13" name="Text 10"/>
+          <p:cNvPr id="4" name="Text 1"/>
           <p:cNvSpPr/>
           <p:nvPr/>
         </p:nvSpPr>
@@ -8755,7 +7310,7 @@
       </p:sp>
       <p:sp>
         <p:nvSpPr>
-          <p:cNvPr id="14" name="Text 11"/>
+          <p:cNvPr id="5" name="Text 2"/>
           <p:cNvSpPr/>
           <p:nvPr/>
         </p:nvSpPr>
@@ -8786,1825 +7341,7 @@
                 <a:ea typeface="Calibri" pitchFamily="34" charset="-122"/>
                 <a:cs typeface="Calibri" pitchFamily="34" charset="-120"/>
               </a:rPr>
-              <a:t>|  21/10/26   |   17</a:t>
-            </a:r>
-            <a:endParaRPr lang="en-US" sz="1000" dirty="0"/>
-          </a:p>
-        </p:txBody>
-      </p:sp>
-    </p:spTree>
-  </p:cSld>
-  <p:clrMapOvr>
-    <a:masterClrMapping/>
-  </p:clrMapOvr>
-</p:sld>
-</file>
-
-<file path=ppt/slides/slide18.xml><?xml version="1.0" encoding="utf-8"?>
-<p:sld xmlns:a="http://schemas.openxmlformats.org/drawingml/2006/main" xmlns:r="http://schemas.openxmlformats.org/officeDocument/2006/relationships" xmlns:p="http://schemas.openxmlformats.org/presentationml/2006/main">
-  <p:cSld name="Slide 18">
-    <p:spTree>
-      <p:nvGrpSpPr>
-        <p:cNvPr id="1" name=""/>
-        <p:cNvGrpSpPr/>
-        <p:nvPr/>
-      </p:nvGrpSpPr>
-      <p:grpSpPr>
-        <a:xfrm>
-          <a:off x="0" y="0"/>
-          <a:ext cx="0" cy="0"/>
-          <a:chOff x="0" y="0"/>
-          <a:chExt cx="0" cy="0"/>
-        </a:xfrm>
-      </p:grpSpPr>
-      <p:sp>
-        <p:nvSpPr>
-          <p:cNvPr id="2" name="Text 0"/>
-          <p:cNvSpPr/>
-          <p:nvPr/>
-        </p:nvSpPr>
-        <p:spPr>
-          <a:xfrm>
-            <a:off x="457200" y="274320"/>
-            <a:ext cx="640080" cy="548640"/>
-          </a:xfrm>
-          <a:prstGeom prst="rect">
-            <a:avLst/>
-          </a:prstGeom>
-          <a:solidFill>
-            <a:srgbClr val="1F6B5E"/>
-          </a:solidFill>
-          <a:ln/>
-        </p:spPr>
-        <p:txBody>
-          <a:bodyPr wrap="square" rtlCol="0" anchor="ctr"/>
-          <a:lstStyle/>
-          <a:p>
-            <a:pPr algn="ctr" indent="0" marL="0">
-              <a:buNone/>
-            </a:pPr>
-            <a:r>
-              <a:rPr lang="en-US" sz="2400" dirty="0">
-                <a:solidFill>
-                  <a:srgbClr val="FFFFFF"/>
-                </a:solidFill>
-                <a:latin typeface="Arial Narrow" pitchFamily="34" charset="0"/>
-                <a:ea typeface="Arial Narrow" pitchFamily="34" charset="-122"/>
-                <a:cs typeface="Arial Narrow" pitchFamily="34" charset="-120"/>
-              </a:rPr>
-              <a:t>IX</a:t>
-            </a:r>
-            <a:endParaRPr lang="en-US" sz="2400" dirty="0"/>
-          </a:p>
-        </p:txBody>
-      </p:sp>
-      <p:sp>
-        <p:nvSpPr>
-          <p:cNvPr id="3" name="Text 1"/>
-          <p:cNvSpPr/>
-          <p:nvPr/>
-        </p:nvSpPr>
-        <p:spPr>
-          <a:xfrm>
-            <a:off x="1234440" y="274320"/>
-            <a:ext cx="8961120" cy="548640"/>
-          </a:xfrm>
-          <a:prstGeom prst="rect">
-            <a:avLst/>
-          </a:prstGeom>
-          <a:noFill/>
-          <a:ln/>
-        </p:spPr>
-        <p:txBody>
-          <a:bodyPr wrap="square" rtlCol="0" anchor="ctr"/>
-          <a:lstStyle/>
-          <a:p>
-            <a:pPr indent="0" marL="0">
-              <a:buNone/>
-            </a:pPr>
-            <a:r>
-              <a:rPr lang="en-US" sz="2800" dirty="0">
-                <a:solidFill>
-                  <a:srgbClr val="1F6B5E"/>
-                </a:solidFill>
-                <a:latin typeface="Arial Narrow" pitchFamily="34" charset="0"/>
-                <a:ea typeface="Arial Narrow" pitchFamily="34" charset="-122"/>
-                <a:cs typeface="Arial Narrow" pitchFamily="34" charset="-120"/>
-              </a:rPr>
-              <a:t>Sénégal</a:t>
-            </a:r>
-            <a:endParaRPr lang="en-US" sz="2800" dirty="0"/>
-          </a:p>
-        </p:txBody>
-      </p:sp>
-      <p:sp>
-        <p:nvSpPr>
-          <p:cNvPr id="4" name="Shape 2"/>
-          <p:cNvSpPr/>
-          <p:nvPr/>
-        </p:nvSpPr>
-        <p:spPr>
-          <a:xfrm>
-            <a:off x="10881360" y="274320"/>
-            <a:ext cx="301752" cy="566928"/>
-          </a:xfrm>
-          <a:prstGeom prst="rect">
-            <a:avLst/>
-          </a:prstGeom>
-          <a:solidFill>
-            <a:srgbClr val="00853F"/>
-          </a:solidFill>
-          <a:ln w="12700">
-            <a:solidFill>
-              <a:srgbClr val="00853F"/>
-            </a:solidFill>
-            <a:prstDash val="solid"/>
-          </a:ln>
-        </p:spPr>
-      </p:sp>
-      <p:sp>
-        <p:nvSpPr>
-          <p:cNvPr id="5" name="Shape 3"/>
-          <p:cNvSpPr/>
-          <p:nvPr/>
-        </p:nvSpPr>
-        <p:spPr>
-          <a:xfrm>
-            <a:off x="11183112" y="274320"/>
-            <a:ext cx="301752" cy="566928"/>
-          </a:xfrm>
-          <a:prstGeom prst="rect">
-            <a:avLst/>
-          </a:prstGeom>
-          <a:solidFill>
-            <a:srgbClr val="FDEF42"/>
-          </a:solidFill>
-          <a:ln w="12700">
-            <a:solidFill>
-              <a:srgbClr val="FDEF42"/>
-            </a:solidFill>
-            <a:prstDash val="solid"/>
-          </a:ln>
-        </p:spPr>
-      </p:sp>
-      <p:sp>
-        <p:nvSpPr>
-          <p:cNvPr id="6" name="Shape 4"/>
-          <p:cNvSpPr/>
-          <p:nvPr/>
-        </p:nvSpPr>
-        <p:spPr>
-          <a:xfrm>
-            <a:off x="11484864" y="274320"/>
-            <a:ext cx="301752" cy="566928"/>
-          </a:xfrm>
-          <a:prstGeom prst="rect">
-            <a:avLst/>
-          </a:prstGeom>
-          <a:solidFill>
-            <a:srgbClr val="E31B23"/>
-          </a:solidFill>
-          <a:ln w="12700">
-            <a:solidFill>
-              <a:srgbClr val="E31B23"/>
-            </a:solidFill>
-            <a:prstDash val="solid"/>
-          </a:ln>
-        </p:spPr>
-      </p:sp>
-      <p:sp>
-        <p:nvSpPr>
-          <p:cNvPr id="7" name="Shape 5"/>
-          <p:cNvSpPr/>
-          <p:nvPr/>
-        </p:nvSpPr>
-        <p:spPr>
-          <a:xfrm>
-            <a:off x="10881360" y="274320"/>
-            <a:ext cx="905256" cy="566928"/>
-          </a:xfrm>
-          <a:prstGeom prst="rect">
-            <a:avLst/>
-          </a:prstGeom>
-          <a:ln w="6350">
-            <a:solidFill>
-              <a:srgbClr val="1F2937"/>
-            </a:solidFill>
-            <a:prstDash val="solid"/>
-          </a:ln>
-        </p:spPr>
-      </p:sp>
-      <p:sp>
-        <p:nvSpPr>
-          <p:cNvPr id="8" name="Shape 6"/>
-          <p:cNvSpPr/>
-          <p:nvPr/>
-        </p:nvSpPr>
-        <p:spPr>
-          <a:xfrm>
-            <a:off x="457200" y="960120"/>
-            <a:ext cx="11292840" cy="0"/>
-          </a:xfrm>
-          <a:prstGeom prst="line">
-            <a:avLst/>
-          </a:prstGeom>
-          <a:noFill/>
-          <a:ln w="6350">
-            <a:solidFill>
-              <a:srgbClr val="A3A3A3"/>
-            </a:solidFill>
-            <a:prstDash val="solid"/>
-          </a:ln>
-        </p:spPr>
-      </p:sp>
-      <p:sp>
-        <p:nvSpPr>
-          <p:cNvPr id="9" name="Text 7"/>
-          <p:cNvSpPr/>
-          <p:nvPr/>
-        </p:nvSpPr>
-        <p:spPr>
-          <a:xfrm>
-            <a:off x="640080" y="1188720"/>
-            <a:ext cx="10972800" cy="4663440"/>
-          </a:xfrm>
-          <a:prstGeom prst="rect">
-            <a:avLst/>
-          </a:prstGeom>
-          <a:noFill/>
-          <a:ln/>
-        </p:spPr>
-        <p:txBody>
-          <a:bodyPr wrap="square" rtlCol="0" anchor="t"/>
-          <a:lstStyle/>
-          <a:p>
-            <a:pPr marL="342900" indent="-342900">
-              <a:spcBef>
-                <a:spcPts val="800"/>
-              </a:spcBef>
-              <a:spcAft>
-                <a:spcPts val="200"/>
-              </a:spcAft>
-              <a:buSzPct val="100000"/>
-              <a:buChar char="❑"/>
-            </a:pPr>
-            <a:r>
-              <a:rPr lang="en-US" sz="1400" b="1" u="sng" dirty="0">
-                <a:solidFill>
-                  <a:srgbClr val="1F6B5E"/>
-                </a:solidFill>
-                <a:latin typeface="Calibri" pitchFamily="34" charset="0"/>
-                <a:ea typeface="Calibri" pitchFamily="34" charset="-122"/>
-                <a:cs typeface="Calibri" pitchFamily="34" charset="-120"/>
-              </a:rPr>
-              <a:t>8 MILLIONS VOLÉS ET ATTAQUE À LA MACHETTE : DEUX BRAQUEURS DU POINT WAVE DE DAHRA TOMBENT À TOUBA</a:t>
-            </a:r>
-            <a:endParaRPr lang="en-US" sz="1300" dirty="0"/>
-          </a:p>
-          <a:p>
-            <a:pPr lvl="1" marL="685800" indent="-342900">
-              <a:spcAft>
-                <a:spcPts val="200"/>
-              </a:spcAft>
-              <a:buSzPct val="100000"/>
-              <a:buChar char="▪"/>
-            </a:pPr>
-            <a:r>
-              <a:rPr lang="en-US" sz="1300" dirty="0">
-                <a:solidFill>
-                  <a:srgbClr val="1F2937"/>
-                </a:solidFill>
-                <a:latin typeface="Calibri" pitchFamily="34" charset="0"/>
-                <a:ea typeface="Calibri" pitchFamily="34" charset="-122"/>
-                <a:cs typeface="Calibri" pitchFamily="34" charset="-120"/>
-              </a:rPr>
-              <a:t>Source : </a:t>
-            </a:r>
-            <a:pPr indent="0" marL="0">
-              <a:spcAft>
-                <a:spcPts val="200"/>
-              </a:spcAft>
-              <a:buNone/>
-            </a:pPr>
-            <a:r>
-              <a:rPr lang="en-US" sz="1300" u="sng" dirty="0">
-                <a:solidFill>
-                  <a:srgbClr val="1F6B5E"/>
-                </a:solidFill>
-                <a:latin typeface="Calibri" pitchFamily="34" charset="0"/>
-                <a:ea typeface="Calibri" pitchFamily="34" charset="-122"/>
-                <a:cs typeface="Calibri" pitchFamily="34" charset="-120"/>
-                <a:hlinkClick r:id="rId1" invalidUrl="" action="" tgtFrame="" tooltip="" history="1" highlightClick="0" endSnd="0">
-                  <a:extLst>
-                    <a:ext uri="{A12FA001-AC4F-418D-AE19-62706E023703}">
-                      <ahyp:hlinkClr xmlns:ahyp="http://schemas.microsoft.com/office/drawing/2018/hyperlinkcolor" val="tx"/>
-                    </a:ext>
-                  </a:extLst>
-                </a:hlinkClick>
-              </a:rPr>
-              <a:t>Seneweb</a:t>
-            </a:r>
-            <a:pPr indent="0" marL="0">
-              <a:spcAft>
-                <a:spcPts val="200"/>
-              </a:spcAft>
-              <a:buNone/>
-            </a:pPr>
-            <a:r>
-              <a:rPr lang="en-US" sz="1300" dirty="0">
-                <a:solidFill>
-                  <a:srgbClr val="1F2937"/>
-                </a:solidFill>
-                <a:latin typeface="Calibri" pitchFamily="34" charset="0"/>
-                <a:ea typeface="Calibri" pitchFamily="34" charset="-122"/>
-                <a:cs typeface="Calibri" pitchFamily="34" charset="-120"/>
-              </a:rPr>
-              <a:t> — 21 octobre 2026, 11 h UTC</a:t>
-            </a:r>
-            <a:endParaRPr lang="en-US" sz="1300" dirty="0"/>
-          </a:p>
-          <a:p>
-            <a:pPr marL="342900" indent="-342900">
-              <a:spcBef>
-                <a:spcPts val="800"/>
-              </a:spcBef>
-              <a:spcAft>
-                <a:spcPts val="200"/>
-              </a:spcAft>
-              <a:buSzPct val="100000"/>
-              <a:buChar char="❑"/>
-            </a:pPr>
-            <a:r>
-              <a:rPr lang="en-US" sz="1400" b="1" u="sng" dirty="0">
-                <a:solidFill>
-                  <a:srgbClr val="1F6B5E"/>
-                </a:solidFill>
-                <a:latin typeface="Calibri" pitchFamily="34" charset="0"/>
-                <a:ea typeface="Calibri" pitchFamily="34" charset="-122"/>
-                <a:cs typeface="Calibri" pitchFamily="34" charset="-120"/>
-              </a:rPr>
-              <a:t>SÉNÉGAL: UN DÉBUT DE GRÈVE GÉNÉRALE DANS UN CONTEXTE DE BRAS DE FER AVEC LE GOUVERNEMENT</a:t>
-            </a:r>
-            <a:endParaRPr lang="en-US" sz="1300" dirty="0"/>
-          </a:p>
-          <a:p>
-            <a:pPr lvl="1" marL="685800" indent="-342900">
-              <a:spcAft>
-                <a:spcPts val="200"/>
-              </a:spcAft>
-              <a:buSzPct val="100000"/>
-              <a:buChar char="▪"/>
-            </a:pPr>
-            <a:r>
-              <a:rPr lang="en-US" sz="1300" dirty="0">
-                <a:solidFill>
-                  <a:srgbClr val="1F2937"/>
-                </a:solidFill>
-                <a:latin typeface="Calibri" pitchFamily="34" charset="0"/>
-                <a:ea typeface="Calibri" pitchFamily="34" charset="-122"/>
-                <a:cs typeface="Calibri" pitchFamily="34" charset="-120"/>
-              </a:rPr>
-              <a:t>Source : </a:t>
-            </a:r>
-            <a:pPr indent="0" marL="0">
-              <a:spcAft>
-                <a:spcPts val="200"/>
-              </a:spcAft>
-              <a:buNone/>
-            </a:pPr>
-            <a:r>
-              <a:rPr lang="en-US" sz="1300" u="sng" dirty="0">
-                <a:solidFill>
-                  <a:srgbClr val="1F6B5E"/>
-                </a:solidFill>
-                <a:latin typeface="Calibri" pitchFamily="34" charset="0"/>
-                <a:ea typeface="Calibri" pitchFamily="34" charset="-122"/>
-                <a:cs typeface="Calibri" pitchFamily="34" charset="-120"/>
-                <a:hlinkClick r:id="rId2" invalidUrl="" action="" tgtFrame="" tooltip="" history="1" highlightClick="0" endSnd="0">
-                  <a:extLst>
-                    <a:ext uri="{A12FA001-AC4F-418D-AE19-62706E023703}">
-                      <ahyp:hlinkClr xmlns:ahyp="http://schemas.microsoft.com/office/drawing/2018/hyperlinkcolor" val="tx"/>
-                    </a:ext>
-                  </a:extLst>
-                </a:hlinkClick>
-              </a:rPr>
-              <a:t>RFI Afrique</a:t>
-            </a:r>
-            <a:pPr indent="0" marL="0">
-              <a:spcAft>
-                <a:spcPts val="200"/>
-              </a:spcAft>
-              <a:buNone/>
-            </a:pPr>
-            <a:r>
-              <a:rPr lang="en-US" sz="1300" dirty="0">
-                <a:solidFill>
-                  <a:srgbClr val="1F2937"/>
-                </a:solidFill>
-                <a:latin typeface="Calibri" pitchFamily="34" charset="0"/>
-                <a:ea typeface="Calibri" pitchFamily="34" charset="-122"/>
-                <a:cs typeface="Calibri" pitchFamily="34" charset="-120"/>
-              </a:rPr>
-              <a:t> — 21 octobre 2026, 12 h UTC</a:t>
-            </a:r>
-            <a:endParaRPr lang="en-US" sz="1300" dirty="0"/>
-          </a:p>
-          <a:p>
-            <a:pPr marL="342900" indent="-342900">
-              <a:spcBef>
-                <a:spcPts val="800"/>
-              </a:spcBef>
-              <a:spcAft>
-                <a:spcPts val="200"/>
-              </a:spcAft>
-              <a:buSzPct val="100000"/>
-              <a:buChar char="❑"/>
-            </a:pPr>
-            <a:r>
-              <a:rPr lang="en-US" sz="1400" b="1" u="sng" dirty="0">
-                <a:solidFill>
-                  <a:srgbClr val="1F6B5E"/>
-                </a:solidFill>
-                <a:latin typeface="Calibri" pitchFamily="34" charset="0"/>
-                <a:ea typeface="Calibri" pitchFamily="34" charset="-122"/>
-                <a:cs typeface="Calibri" pitchFamily="34" charset="-120"/>
-              </a:rPr>
-              <a:t>MATAM : LE MOT D’ORDRE DE GRÈVE GÉNÉRALE LARGEMENT SUIVI À L’HÔPITAL DE OUROSSOGUI (SYNDICALISTE)</a:t>
-            </a:r>
-            <a:endParaRPr lang="en-US" sz="1300" dirty="0"/>
-          </a:p>
-          <a:p>
-            <a:pPr lvl="1" marL="685800" indent="-342900">
-              <a:spcAft>
-                <a:spcPts val="200"/>
-              </a:spcAft>
-              <a:buSzPct val="100000"/>
-              <a:buChar char="▪"/>
-            </a:pPr>
-            <a:r>
-              <a:rPr lang="en-US" sz="1300" dirty="0">
-                <a:solidFill>
-                  <a:srgbClr val="1F2937"/>
-                </a:solidFill>
-                <a:latin typeface="Calibri" pitchFamily="34" charset="0"/>
-                <a:ea typeface="Calibri" pitchFamily="34" charset="-122"/>
-                <a:cs typeface="Calibri" pitchFamily="34" charset="-120"/>
-              </a:rPr>
-              <a:t>Source : </a:t>
-            </a:r>
-            <a:pPr indent="0" marL="0">
-              <a:spcAft>
-                <a:spcPts val="200"/>
-              </a:spcAft>
-              <a:buNone/>
-            </a:pPr>
-            <a:r>
-              <a:rPr lang="en-US" sz="1300" u="sng" dirty="0">
-                <a:solidFill>
-                  <a:srgbClr val="1F6B5E"/>
-                </a:solidFill>
-                <a:latin typeface="Calibri" pitchFamily="34" charset="0"/>
-                <a:ea typeface="Calibri" pitchFamily="34" charset="-122"/>
-                <a:cs typeface="Calibri" pitchFamily="34" charset="-120"/>
-                <a:hlinkClick r:id="rId3" invalidUrl="" action="" tgtFrame="" tooltip="" history="1" highlightClick="0" endSnd="0">
-                  <a:extLst>
-                    <a:ext uri="{A12FA001-AC4F-418D-AE19-62706E023703}">
-                      <ahyp:hlinkClr xmlns:ahyp="http://schemas.microsoft.com/office/drawing/2018/hyperlinkcolor" val="tx"/>
-                    </a:ext>
-                  </a:extLst>
-                </a:hlinkClick>
-              </a:rPr>
-              <a:t>APS — Agence Sénégalaise Presse</a:t>
-            </a:r>
-            <a:pPr indent="0" marL="0">
-              <a:spcAft>
-                <a:spcPts val="200"/>
-              </a:spcAft>
-              <a:buNone/>
-            </a:pPr>
-            <a:r>
-              <a:rPr lang="en-US" sz="1300" dirty="0">
-                <a:solidFill>
-                  <a:srgbClr val="1F2937"/>
-                </a:solidFill>
-                <a:latin typeface="Calibri" pitchFamily="34" charset="0"/>
-                <a:ea typeface="Calibri" pitchFamily="34" charset="-122"/>
-                <a:cs typeface="Calibri" pitchFamily="34" charset="-120"/>
-              </a:rPr>
-              <a:t> — 21 octobre 2026, 12 h UTC</a:t>
-            </a:r>
-            <a:endParaRPr lang="en-US" sz="1300" dirty="0"/>
-          </a:p>
-          <a:p>
-            <a:pPr marL="342900" indent="-342900">
-              <a:spcBef>
-                <a:spcPts val="800"/>
-              </a:spcBef>
-              <a:spcAft>
-                <a:spcPts val="200"/>
-              </a:spcAft>
-              <a:buSzPct val="100000"/>
-              <a:buChar char="❑"/>
-            </a:pPr>
-            <a:r>
-              <a:rPr lang="en-US" sz="1400" b="1" u="sng" dirty="0">
-                <a:solidFill>
-                  <a:srgbClr val="1F6B5E"/>
-                </a:solidFill>
-                <a:latin typeface="Calibri" pitchFamily="34" charset="0"/>
-                <a:ea typeface="Calibri" pitchFamily="34" charset="-122"/>
-                <a:cs typeface="Calibri" pitchFamily="34" charset="-120"/>
-              </a:rPr>
-              <a:t>CONSEIL DE SÉCURITÉ : QUATRE-VINGTS ANS APRÈS, L’AFRIQUE N’A TOUJOURS PAS DE SIÈGE À LA TABLE</a:t>
-            </a:r>
-            <a:endParaRPr lang="en-US" sz="1300" dirty="0"/>
-          </a:p>
-          <a:p>
-            <a:pPr lvl="1" marL="685800" indent="-342900">
-              <a:spcAft>
-                <a:spcPts val="200"/>
-              </a:spcAft>
-              <a:buSzPct val="100000"/>
-              <a:buChar char="▪"/>
-            </a:pPr>
-            <a:r>
-              <a:rPr lang="en-US" sz="1300" dirty="0">
-                <a:solidFill>
-                  <a:srgbClr val="1F2937"/>
-                </a:solidFill>
-                <a:latin typeface="Calibri" pitchFamily="34" charset="0"/>
-                <a:ea typeface="Calibri" pitchFamily="34" charset="-122"/>
-                <a:cs typeface="Calibri" pitchFamily="34" charset="-120"/>
-              </a:rPr>
-              <a:t>Source : </a:t>
-            </a:r>
-            <a:pPr indent="0" marL="0">
-              <a:spcAft>
-                <a:spcPts val="200"/>
-              </a:spcAft>
-              <a:buNone/>
-            </a:pPr>
-            <a:r>
-              <a:rPr lang="en-US" sz="1300" u="sng" dirty="0">
-                <a:solidFill>
-                  <a:srgbClr val="1F6B5E"/>
-                </a:solidFill>
-                <a:latin typeface="Calibri" pitchFamily="34" charset="0"/>
-                <a:ea typeface="Calibri" pitchFamily="34" charset="-122"/>
-                <a:cs typeface="Calibri" pitchFamily="34" charset="-120"/>
-                <a:hlinkClick r:id="rId4" invalidUrl="" action="" tgtFrame="" tooltip="" history="1" highlightClick="0" endSnd="0">
-                  <a:extLst>
-                    <a:ext uri="{A12FA001-AC4F-418D-AE19-62706E023703}">
-                      <ahyp:hlinkClr xmlns:ahyp="http://schemas.microsoft.com/office/drawing/2018/hyperlinkcolor" val="tx"/>
-                    </a:ext>
-                  </a:extLst>
-                </a:hlinkClick>
-              </a:rPr>
-              <a:t>Seneweb</a:t>
-            </a:r>
-            <a:pPr indent="0" marL="0">
-              <a:spcAft>
-                <a:spcPts val="200"/>
-              </a:spcAft>
-              <a:buNone/>
-            </a:pPr>
-            <a:r>
-              <a:rPr lang="en-US" sz="1300" dirty="0">
-                <a:solidFill>
-                  <a:srgbClr val="1F2937"/>
-                </a:solidFill>
-                <a:latin typeface="Calibri" pitchFamily="34" charset="0"/>
-                <a:ea typeface="Calibri" pitchFamily="34" charset="-122"/>
-                <a:cs typeface="Calibri" pitchFamily="34" charset="-120"/>
-              </a:rPr>
-              <a:t> — 21 octobre 2026, 11 h UTC</a:t>
-            </a:r>
-            <a:endParaRPr lang="en-US" sz="1300" dirty="0"/>
-          </a:p>
-          <a:p>
-            <a:pPr marL="342900" indent="-342900">
-              <a:spcBef>
-                <a:spcPts val="800"/>
-              </a:spcBef>
-              <a:spcAft>
-                <a:spcPts val="200"/>
-              </a:spcAft>
-              <a:buSzPct val="100000"/>
-              <a:buChar char="❑"/>
-            </a:pPr>
-            <a:r>
-              <a:rPr lang="en-US" sz="1400" b="1" u="sng" dirty="0">
-                <a:solidFill>
-                  <a:srgbClr val="1F6B5E"/>
-                </a:solidFill>
-                <a:latin typeface="Calibri" pitchFamily="34" charset="0"/>
-                <a:ea typeface="Calibri" pitchFamily="34" charset="-122"/>
-                <a:cs typeface="Calibri" pitchFamily="34" charset="-120"/>
-              </a:rPr>
-              <a:t>PROTECTION DES LANCEURS D'ALERTE : RÉCOMPENSE DE 10 %, ANONYMAT ET GARDE-FOUS JURIDIQUES DÉTAILLÉS PAR MOUSSA SARR</a:t>
-            </a:r>
-            <a:endParaRPr lang="en-US" sz="1300" dirty="0"/>
-          </a:p>
-          <a:p>
-            <a:pPr lvl="1" marL="685800" indent="-342900">
-              <a:spcAft>
-                <a:spcPts val="200"/>
-              </a:spcAft>
-              <a:buSzPct val="100000"/>
-              <a:buChar char="▪"/>
-            </a:pPr>
-            <a:r>
-              <a:rPr lang="en-US" sz="1300" dirty="0">
-                <a:solidFill>
-                  <a:srgbClr val="1F2937"/>
-                </a:solidFill>
-                <a:latin typeface="Calibri" pitchFamily="34" charset="0"/>
-                <a:ea typeface="Calibri" pitchFamily="34" charset="-122"/>
-                <a:cs typeface="Calibri" pitchFamily="34" charset="-120"/>
-              </a:rPr>
-              <a:t>Source : </a:t>
-            </a:r>
-            <a:pPr indent="0" marL="0">
-              <a:spcAft>
-                <a:spcPts val="200"/>
-              </a:spcAft>
-              <a:buNone/>
-            </a:pPr>
-            <a:r>
-              <a:rPr lang="en-US" sz="1300" u="sng" dirty="0">
-                <a:solidFill>
-                  <a:srgbClr val="1F6B5E"/>
-                </a:solidFill>
-                <a:latin typeface="Calibri" pitchFamily="34" charset="0"/>
-                <a:ea typeface="Calibri" pitchFamily="34" charset="-122"/>
-                <a:cs typeface="Calibri" pitchFamily="34" charset="-120"/>
-                <a:hlinkClick r:id="rId5" invalidUrl="" action="" tgtFrame="" tooltip="" history="1" highlightClick="0" endSnd="0">
-                  <a:extLst>
-                    <a:ext uri="{A12FA001-AC4F-418D-AE19-62706E023703}">
-                      <ahyp:hlinkClr xmlns:ahyp="http://schemas.microsoft.com/office/drawing/2018/hyperlinkcolor" val="tx"/>
-                    </a:ext>
-                  </a:extLst>
-                </a:hlinkClick>
-              </a:rPr>
-              <a:t>Seneweb</a:t>
-            </a:r>
-            <a:pPr indent="0" marL="0">
-              <a:spcAft>
-                <a:spcPts val="200"/>
-              </a:spcAft>
-              <a:buNone/>
-            </a:pPr>
-            <a:r>
-              <a:rPr lang="en-US" sz="1300" dirty="0">
-                <a:solidFill>
-                  <a:srgbClr val="1F2937"/>
-                </a:solidFill>
-                <a:latin typeface="Calibri" pitchFamily="34" charset="0"/>
-                <a:ea typeface="Calibri" pitchFamily="34" charset="-122"/>
-                <a:cs typeface="Calibri" pitchFamily="34" charset="-120"/>
-              </a:rPr>
-              <a:t> — 21 octobre 2026, 11 h UTC</a:t>
-            </a:r>
-            <a:endParaRPr lang="en-US" sz="1300" dirty="0"/>
-          </a:p>
-        </p:txBody>
-      </p:sp>
-      <p:pic>
-        <p:nvPicPr>
-          <p:cNvPr id="10" name="Image 0" descr="/home/runner/work/SentiqS/SentiqS/scripts/assets/grsci/logo-grsci.png">    </p:cNvPr>
-          <p:cNvPicPr>
-            <a:picLocks noChangeAspect="1"/>
-          </p:cNvPicPr>
-          <p:nvPr/>
-        </p:nvPicPr>
-        <p:blipFill>
-          <a:blip r:embed="rId6"/>
-          <a:stretch>
-            <a:fillRect/>
-          </a:stretch>
-        </p:blipFill>
-        <p:spPr>
-          <a:xfrm>
-            <a:off x="411480" y="5989320"/>
-            <a:ext cx="548640" cy="630936"/>
-          </a:xfrm>
-          <a:prstGeom prst="rect">
-            <a:avLst/>
-          </a:prstGeom>
-        </p:spPr>
-      </p:pic>
-      <p:sp>
-        <p:nvSpPr>
-          <p:cNvPr id="11" name="Text 8"/>
-          <p:cNvSpPr/>
-          <p:nvPr/>
-        </p:nvSpPr>
-        <p:spPr>
-          <a:xfrm>
-            <a:off x="3108960" y="6217920"/>
-            <a:ext cx="4206240" cy="329184"/>
-          </a:xfrm>
-          <a:prstGeom prst="rect">
-            <a:avLst/>
-          </a:prstGeom>
-          <a:noFill/>
-          <a:ln w="9525">
-            <a:solidFill>
-              <a:srgbClr val="1F6B5E"/>
-            </a:solidFill>
-          </a:ln>
-        </p:spPr>
-        <p:txBody>
-          <a:bodyPr wrap="square" rtlCol="0" anchor="ctr"/>
-          <a:lstStyle/>
-          <a:p>
-            <a:pPr algn="ctr" indent="0" marL="0">
-              <a:buNone/>
-            </a:pPr>
-            <a:r>
-              <a:rPr lang="en-US" sz="1200" b="1" dirty="0">
-                <a:solidFill>
-                  <a:srgbClr val="1F2937"/>
-                </a:solidFill>
-                <a:latin typeface="Calibri" pitchFamily="34" charset="0"/>
-                <a:ea typeface="Calibri" pitchFamily="34" charset="-122"/>
-                <a:cs typeface="Calibri" pitchFamily="34" charset="-120"/>
-              </a:rPr>
-              <a:t>G</a:t>
-            </a:r>
-            <a:pPr algn="ctr" indent="0" marL="0">
-              <a:buNone/>
-            </a:pPr>
-            <a:r>
-              <a:rPr lang="en-US" sz="1200" dirty="0">
-                <a:solidFill>
-                  <a:srgbClr val="1F2937"/>
-                </a:solidFill>
-                <a:latin typeface="Calibri" pitchFamily="34" charset="0"/>
-                <a:ea typeface="Calibri" pitchFamily="34" charset="-122"/>
-                <a:cs typeface="Calibri" pitchFamily="34" charset="-120"/>
-              </a:rPr>
-              <a:t>roupe des </a:t>
-            </a:r>
-            <a:pPr algn="ctr" indent="0" marL="0">
-              <a:buNone/>
-            </a:pPr>
-            <a:r>
-              <a:rPr lang="en-US" sz="1200" b="1" dirty="0">
-                <a:solidFill>
-                  <a:srgbClr val="1F2937"/>
-                </a:solidFill>
-                <a:latin typeface="Calibri" pitchFamily="34" charset="0"/>
-                <a:ea typeface="Calibri" pitchFamily="34" charset="-122"/>
-                <a:cs typeface="Calibri" pitchFamily="34" charset="-120"/>
-              </a:rPr>
-              <a:t>R</a:t>
-            </a:r>
-            <a:pPr algn="ctr" indent="0" marL="0">
-              <a:buNone/>
-            </a:pPr>
-            <a:r>
-              <a:rPr lang="en-US" sz="1200" dirty="0">
-                <a:solidFill>
-                  <a:srgbClr val="1F2937"/>
-                </a:solidFill>
-                <a:latin typeface="Calibri" pitchFamily="34" charset="0"/>
-                <a:ea typeface="Calibri" pitchFamily="34" charset="-122"/>
-                <a:cs typeface="Calibri" pitchFamily="34" charset="-120"/>
-              </a:rPr>
-              <a:t>esponsables </a:t>
-            </a:r>
-            <a:pPr algn="ctr" indent="0" marL="0">
-              <a:buNone/>
-            </a:pPr>
-            <a:r>
-              <a:rPr lang="en-US" sz="1200" b="1" dirty="0">
-                <a:solidFill>
-                  <a:srgbClr val="1F2937"/>
-                </a:solidFill>
-                <a:latin typeface="Calibri" pitchFamily="34" charset="0"/>
-                <a:ea typeface="Calibri" pitchFamily="34" charset="-122"/>
-                <a:cs typeface="Calibri" pitchFamily="34" charset="-120"/>
-              </a:rPr>
-              <a:t>S</a:t>
-            </a:r>
-            <a:pPr algn="ctr" indent="0" marL="0">
-              <a:buNone/>
-            </a:pPr>
-            <a:r>
-              <a:rPr lang="en-US" sz="1200" dirty="0">
-                <a:solidFill>
-                  <a:srgbClr val="1F2937"/>
-                </a:solidFill>
-                <a:latin typeface="Calibri" pitchFamily="34" charset="0"/>
-                <a:ea typeface="Calibri" pitchFamily="34" charset="-122"/>
-                <a:cs typeface="Calibri" pitchFamily="34" charset="-120"/>
-              </a:rPr>
-              <a:t>ûreté de </a:t>
-            </a:r>
-            <a:pPr algn="ctr" indent="0" marL="0">
-              <a:buNone/>
-            </a:pPr>
-            <a:r>
-              <a:rPr lang="en-US" sz="1200" b="1" dirty="0">
-                <a:solidFill>
-                  <a:srgbClr val="1F2937"/>
-                </a:solidFill>
-                <a:latin typeface="Calibri" pitchFamily="34" charset="0"/>
-                <a:ea typeface="Calibri" pitchFamily="34" charset="-122"/>
-                <a:cs typeface="Calibri" pitchFamily="34" charset="-120"/>
-              </a:rPr>
-              <a:t>C</a:t>
-            </a:r>
-            <a:pPr algn="ctr" indent="0" marL="0">
-              <a:buNone/>
-            </a:pPr>
-            <a:r>
-              <a:rPr lang="en-US" sz="1200" dirty="0">
-                <a:solidFill>
-                  <a:srgbClr val="1F2937"/>
-                </a:solidFill>
-                <a:latin typeface="Calibri" pitchFamily="34" charset="0"/>
-                <a:ea typeface="Calibri" pitchFamily="34" charset="-122"/>
-                <a:cs typeface="Calibri" pitchFamily="34" charset="-120"/>
-              </a:rPr>
-              <a:t>ôte d'</a:t>
-            </a:r>
-            <a:pPr algn="ctr" indent="0" marL="0">
-              <a:buNone/>
-            </a:pPr>
-            <a:r>
-              <a:rPr lang="en-US" sz="1200" b="1" dirty="0">
-                <a:solidFill>
-                  <a:srgbClr val="1F2937"/>
-                </a:solidFill>
-                <a:latin typeface="Calibri" pitchFamily="34" charset="0"/>
-                <a:ea typeface="Calibri" pitchFamily="34" charset="-122"/>
-                <a:cs typeface="Calibri" pitchFamily="34" charset="-120"/>
-              </a:rPr>
-              <a:t>I</a:t>
-            </a:r>
-            <a:pPr algn="ctr" indent="0" marL="0">
-              <a:buNone/>
-            </a:pPr>
-            <a:r>
-              <a:rPr lang="en-US" sz="1200" dirty="0">
-                <a:solidFill>
-                  <a:srgbClr val="1F2937"/>
-                </a:solidFill>
-                <a:latin typeface="Calibri" pitchFamily="34" charset="0"/>
-                <a:ea typeface="Calibri" pitchFamily="34" charset="-122"/>
-                <a:cs typeface="Calibri" pitchFamily="34" charset="-120"/>
-              </a:rPr>
-              <a:t>voire</a:t>
-            </a:r>
-            <a:endParaRPr lang="en-US" sz="1200" dirty="0"/>
-          </a:p>
-        </p:txBody>
-      </p:sp>
-      <p:sp>
-        <p:nvSpPr>
-          <p:cNvPr id="12" name="Text 9"/>
-          <p:cNvSpPr/>
-          <p:nvPr/>
-        </p:nvSpPr>
-        <p:spPr>
-          <a:xfrm>
-            <a:off x="9418320" y="6309360"/>
-            <a:ext cx="2468880" cy="274320"/>
-          </a:xfrm>
-          <a:prstGeom prst="rect">
-            <a:avLst/>
-          </a:prstGeom>
-          <a:noFill/>
-          <a:ln/>
-        </p:spPr>
-        <p:txBody>
-          <a:bodyPr wrap="square" rtlCol="0" anchor="ctr"/>
-          <a:lstStyle/>
-          <a:p>
-            <a:pPr algn="r" indent="0" marL="0">
-              <a:buNone/>
-            </a:pPr>
-            <a:r>
-              <a:rPr lang="en-US" sz="1000" dirty="0">
-                <a:solidFill>
-                  <a:srgbClr val="1F2937"/>
-                </a:solidFill>
-                <a:latin typeface="Calibri" pitchFamily="34" charset="0"/>
-                <a:ea typeface="Calibri" pitchFamily="34" charset="-122"/>
-                <a:cs typeface="Calibri" pitchFamily="34" charset="-120"/>
-              </a:rPr>
-              <a:t>|  21/10/26   |   18</a:t>
-            </a:r>
-            <a:endParaRPr lang="en-US" sz="1000" dirty="0"/>
-          </a:p>
-        </p:txBody>
-      </p:sp>
-    </p:spTree>
-  </p:cSld>
-  <p:clrMapOvr>
-    <a:masterClrMapping/>
-  </p:clrMapOvr>
-</p:sld>
-</file>
-
-<file path=ppt/slides/slide19.xml><?xml version="1.0" encoding="utf-8"?>
-<p:sld xmlns:a="http://schemas.openxmlformats.org/drawingml/2006/main" xmlns:r="http://schemas.openxmlformats.org/officeDocument/2006/relationships" xmlns:p="http://schemas.openxmlformats.org/presentationml/2006/main">
-  <p:cSld name="Slide 19">
-    <p:spTree>
-      <p:nvGrpSpPr>
-        <p:cNvPr id="1" name=""/>
-        <p:cNvGrpSpPr/>
-        <p:nvPr/>
-      </p:nvGrpSpPr>
-      <p:grpSpPr>
-        <a:xfrm>
-          <a:off x="0" y="0"/>
-          <a:ext cx="0" cy="0"/>
-          <a:chOff x="0" y="0"/>
-          <a:chExt cx="0" cy="0"/>
-        </a:xfrm>
-      </p:grpSpPr>
-      <p:sp>
-        <p:nvSpPr>
-          <p:cNvPr id="2" name="Text 0"/>
-          <p:cNvSpPr/>
-          <p:nvPr/>
-        </p:nvSpPr>
-        <p:spPr>
-          <a:xfrm>
-            <a:off x="457200" y="274320"/>
-            <a:ext cx="640080" cy="548640"/>
-          </a:xfrm>
-          <a:prstGeom prst="rect">
-            <a:avLst/>
-          </a:prstGeom>
-          <a:solidFill>
-            <a:srgbClr val="1F6B5E"/>
-          </a:solidFill>
-          <a:ln/>
-        </p:spPr>
-        <p:txBody>
-          <a:bodyPr wrap="square" rtlCol="0" anchor="ctr"/>
-          <a:lstStyle/>
-          <a:p>
-            <a:pPr algn="ctr" indent="0" marL="0">
-              <a:buNone/>
-            </a:pPr>
-            <a:r>
-              <a:rPr lang="en-US" sz="2400" dirty="0">
-                <a:solidFill>
-                  <a:srgbClr val="FFFFFF"/>
-                </a:solidFill>
-                <a:latin typeface="Arial Narrow" pitchFamily="34" charset="0"/>
-                <a:ea typeface="Arial Narrow" pitchFamily="34" charset="-122"/>
-                <a:cs typeface="Arial Narrow" pitchFamily="34" charset="-120"/>
-              </a:rPr>
-              <a:t>IX</a:t>
-            </a:r>
-            <a:endParaRPr lang="en-US" sz="2400" dirty="0"/>
-          </a:p>
-        </p:txBody>
-      </p:sp>
-      <p:sp>
-        <p:nvSpPr>
-          <p:cNvPr id="3" name="Text 1"/>
-          <p:cNvSpPr/>
-          <p:nvPr/>
-        </p:nvSpPr>
-        <p:spPr>
-          <a:xfrm>
-            <a:off x="1234440" y="274320"/>
-            <a:ext cx="8961120" cy="548640"/>
-          </a:xfrm>
-          <a:prstGeom prst="rect">
-            <a:avLst/>
-          </a:prstGeom>
-          <a:noFill/>
-          <a:ln/>
-        </p:spPr>
-        <p:txBody>
-          <a:bodyPr wrap="square" rtlCol="0" anchor="ctr"/>
-          <a:lstStyle/>
-          <a:p>
-            <a:pPr indent="0" marL="0">
-              <a:buNone/>
-            </a:pPr>
-            <a:r>
-              <a:rPr lang="en-US" sz="2800" dirty="0">
-                <a:solidFill>
-                  <a:srgbClr val="1F6B5E"/>
-                </a:solidFill>
-                <a:latin typeface="Arial Narrow" pitchFamily="34" charset="0"/>
-                <a:ea typeface="Arial Narrow" pitchFamily="34" charset="-122"/>
-                <a:cs typeface="Arial Narrow" pitchFamily="34" charset="-120"/>
-              </a:rPr>
-              <a:t>Sénégal</a:t>
-            </a:r>
-            <a:endParaRPr lang="en-US" sz="2800" dirty="0"/>
-          </a:p>
-        </p:txBody>
-      </p:sp>
-      <p:sp>
-        <p:nvSpPr>
-          <p:cNvPr id="4" name="Shape 2"/>
-          <p:cNvSpPr/>
-          <p:nvPr/>
-        </p:nvSpPr>
-        <p:spPr>
-          <a:xfrm>
-            <a:off x="10881360" y="274320"/>
-            <a:ext cx="301752" cy="566928"/>
-          </a:xfrm>
-          <a:prstGeom prst="rect">
-            <a:avLst/>
-          </a:prstGeom>
-          <a:solidFill>
-            <a:srgbClr val="00853F"/>
-          </a:solidFill>
-          <a:ln w="12700">
-            <a:solidFill>
-              <a:srgbClr val="00853F"/>
-            </a:solidFill>
-            <a:prstDash val="solid"/>
-          </a:ln>
-        </p:spPr>
-      </p:sp>
-      <p:sp>
-        <p:nvSpPr>
-          <p:cNvPr id="5" name="Shape 3"/>
-          <p:cNvSpPr/>
-          <p:nvPr/>
-        </p:nvSpPr>
-        <p:spPr>
-          <a:xfrm>
-            <a:off x="11183112" y="274320"/>
-            <a:ext cx="301752" cy="566928"/>
-          </a:xfrm>
-          <a:prstGeom prst="rect">
-            <a:avLst/>
-          </a:prstGeom>
-          <a:solidFill>
-            <a:srgbClr val="FDEF42"/>
-          </a:solidFill>
-          <a:ln w="12700">
-            <a:solidFill>
-              <a:srgbClr val="FDEF42"/>
-            </a:solidFill>
-            <a:prstDash val="solid"/>
-          </a:ln>
-        </p:spPr>
-      </p:sp>
-      <p:sp>
-        <p:nvSpPr>
-          <p:cNvPr id="6" name="Shape 4"/>
-          <p:cNvSpPr/>
-          <p:nvPr/>
-        </p:nvSpPr>
-        <p:spPr>
-          <a:xfrm>
-            <a:off x="11484864" y="274320"/>
-            <a:ext cx="301752" cy="566928"/>
-          </a:xfrm>
-          <a:prstGeom prst="rect">
-            <a:avLst/>
-          </a:prstGeom>
-          <a:solidFill>
-            <a:srgbClr val="E31B23"/>
-          </a:solidFill>
-          <a:ln w="12700">
-            <a:solidFill>
-              <a:srgbClr val="E31B23"/>
-            </a:solidFill>
-            <a:prstDash val="solid"/>
-          </a:ln>
-        </p:spPr>
-      </p:sp>
-      <p:sp>
-        <p:nvSpPr>
-          <p:cNvPr id="7" name="Shape 5"/>
-          <p:cNvSpPr/>
-          <p:nvPr/>
-        </p:nvSpPr>
-        <p:spPr>
-          <a:xfrm>
-            <a:off x="10881360" y="274320"/>
-            <a:ext cx="905256" cy="566928"/>
-          </a:xfrm>
-          <a:prstGeom prst="rect">
-            <a:avLst/>
-          </a:prstGeom>
-          <a:ln w="6350">
-            <a:solidFill>
-              <a:srgbClr val="1F2937"/>
-            </a:solidFill>
-            <a:prstDash val="solid"/>
-          </a:ln>
-        </p:spPr>
-      </p:sp>
-      <p:sp>
-        <p:nvSpPr>
-          <p:cNvPr id="8" name="Shape 6"/>
-          <p:cNvSpPr/>
-          <p:nvPr/>
-        </p:nvSpPr>
-        <p:spPr>
-          <a:xfrm>
-            <a:off x="457200" y="960120"/>
-            <a:ext cx="11292840" cy="0"/>
-          </a:xfrm>
-          <a:prstGeom prst="line">
-            <a:avLst/>
-          </a:prstGeom>
-          <a:noFill/>
-          <a:ln w="6350">
-            <a:solidFill>
-              <a:srgbClr val="A3A3A3"/>
-            </a:solidFill>
-            <a:prstDash val="solid"/>
-          </a:ln>
-        </p:spPr>
-      </p:sp>
-      <p:sp>
-        <p:nvSpPr>
-          <p:cNvPr id="9" name="Text 7"/>
-          <p:cNvSpPr/>
-          <p:nvPr/>
-        </p:nvSpPr>
-        <p:spPr>
-          <a:xfrm>
-            <a:off x="640080" y="1188720"/>
-            <a:ext cx="10972800" cy="4663440"/>
-          </a:xfrm>
-          <a:prstGeom prst="rect">
-            <a:avLst/>
-          </a:prstGeom>
-          <a:noFill/>
-          <a:ln/>
-        </p:spPr>
-        <p:txBody>
-          <a:bodyPr wrap="square" rtlCol="0" anchor="t"/>
-          <a:lstStyle/>
-          <a:p>
-            <a:pPr marL="342900" indent="-342900">
-              <a:spcBef>
-                <a:spcPts val="800"/>
-              </a:spcBef>
-              <a:spcAft>
-                <a:spcPts val="200"/>
-              </a:spcAft>
-              <a:buSzPct val="100000"/>
-              <a:buChar char="❑"/>
-            </a:pPr>
-            <a:r>
-              <a:rPr lang="en-US" sz="1400" b="1" u="sng" dirty="0">
-                <a:solidFill>
-                  <a:srgbClr val="1F6B5E"/>
-                </a:solidFill>
-                <a:latin typeface="Calibri" pitchFamily="34" charset="0"/>
-                <a:ea typeface="Calibri" pitchFamily="34" charset="-122"/>
-                <a:cs typeface="Calibri" pitchFamily="34" charset="-120"/>
-              </a:rPr>
-              <a:t>​GRÈVE DU FSDT : LES MILITAIRES ET LES GENDARMES MOBILISÉS POUR ASSURER LA CONTINUITÉ DU TRANSPORT PUBLIC</a:t>
-            </a:r>
-            <a:endParaRPr lang="en-US" sz="1300" dirty="0"/>
-          </a:p>
-          <a:p>
-            <a:pPr lvl="1" marL="685800" indent="-342900">
-              <a:spcAft>
-                <a:spcPts val="200"/>
-              </a:spcAft>
-              <a:buSzPct val="100000"/>
-              <a:buChar char="▪"/>
-            </a:pPr>
-            <a:r>
-              <a:rPr lang="en-US" sz="1300" dirty="0">
-                <a:solidFill>
-                  <a:srgbClr val="1F2937"/>
-                </a:solidFill>
-                <a:latin typeface="Calibri" pitchFamily="34" charset="0"/>
-                <a:ea typeface="Calibri" pitchFamily="34" charset="-122"/>
-                <a:cs typeface="Calibri" pitchFamily="34" charset="-120"/>
-              </a:rPr>
-              <a:t>Source : </a:t>
-            </a:r>
-            <a:pPr indent="0" marL="0">
-              <a:spcAft>
-                <a:spcPts val="200"/>
-              </a:spcAft>
-              <a:buNone/>
-            </a:pPr>
-            <a:r>
-              <a:rPr lang="en-US" sz="1300" u="sng" dirty="0">
-                <a:solidFill>
-                  <a:srgbClr val="1F6B5E"/>
-                </a:solidFill>
-                <a:latin typeface="Calibri" pitchFamily="34" charset="0"/>
-                <a:ea typeface="Calibri" pitchFamily="34" charset="-122"/>
-                <a:cs typeface="Calibri" pitchFamily="34" charset="-120"/>
-                <a:hlinkClick r:id="rId1" invalidUrl="" action="" tgtFrame="" tooltip="" history="1" highlightClick="0" endSnd="0">
-                  <a:extLst>
-                    <a:ext uri="{A12FA001-AC4F-418D-AE19-62706E023703}">
-                      <ahyp:hlinkClr xmlns:ahyp="http://schemas.microsoft.com/office/drawing/2018/hyperlinkcolor" val="tx"/>
-                    </a:ext>
-                  </a:extLst>
-                </a:hlinkClick>
-              </a:rPr>
-              <a:t>Pressafrik</a:t>
-            </a:r>
-            <a:pPr indent="0" marL="0">
-              <a:spcAft>
-                <a:spcPts val="200"/>
-              </a:spcAft>
-              <a:buNone/>
-            </a:pPr>
-            <a:r>
-              <a:rPr lang="en-US" sz="1300" dirty="0">
-                <a:solidFill>
-                  <a:srgbClr val="1F2937"/>
-                </a:solidFill>
-                <a:latin typeface="Calibri" pitchFamily="34" charset="0"/>
-                <a:ea typeface="Calibri" pitchFamily="34" charset="-122"/>
-                <a:cs typeface="Calibri" pitchFamily="34" charset="-120"/>
-              </a:rPr>
-              <a:t> — 21 octobre 2026, 11 h UTC</a:t>
-            </a:r>
-            <a:endParaRPr lang="en-US" sz="1300" dirty="0"/>
-          </a:p>
-          <a:p>
-            <a:pPr marL="342900" indent="-342900">
-              <a:spcBef>
-                <a:spcPts val="800"/>
-              </a:spcBef>
-              <a:spcAft>
-                <a:spcPts val="200"/>
-              </a:spcAft>
-              <a:buSzPct val="100000"/>
-              <a:buChar char="❑"/>
-            </a:pPr>
-            <a:r>
-              <a:rPr lang="en-US" sz="1400" b="1" u="sng" dirty="0">
-                <a:solidFill>
-                  <a:srgbClr val="1F6B5E"/>
-                </a:solidFill>
-                <a:latin typeface="Calibri" pitchFamily="34" charset="0"/>
-                <a:ea typeface="Calibri" pitchFamily="34" charset="-122"/>
-                <a:cs typeface="Calibri" pitchFamily="34" charset="-120"/>
-              </a:rPr>
-              <a:t>ÉTHIQUE POLITIQUE : LES DANGERS DU CUMUL DE FONCTIONS EN PÉRIODE DE CRISE ÉCONOMIQUE</a:t>
-            </a:r>
-            <a:endParaRPr lang="en-US" sz="1300" dirty="0"/>
-          </a:p>
-          <a:p>
-            <a:pPr lvl="1" marL="685800" indent="-342900">
-              <a:spcAft>
-                <a:spcPts val="200"/>
-              </a:spcAft>
-              <a:buSzPct val="100000"/>
-              <a:buChar char="▪"/>
-            </a:pPr>
-            <a:r>
-              <a:rPr lang="en-US" sz="1300" dirty="0">
-                <a:solidFill>
-                  <a:srgbClr val="1F2937"/>
-                </a:solidFill>
-                <a:latin typeface="Calibri" pitchFamily="34" charset="0"/>
-                <a:ea typeface="Calibri" pitchFamily="34" charset="-122"/>
-                <a:cs typeface="Calibri" pitchFamily="34" charset="-120"/>
-              </a:rPr>
-              <a:t>Source : </a:t>
-            </a:r>
-            <a:pPr indent="0" marL="0">
-              <a:spcAft>
-                <a:spcPts val="200"/>
-              </a:spcAft>
-              <a:buNone/>
-            </a:pPr>
-            <a:r>
-              <a:rPr lang="en-US" sz="1300" u="sng" dirty="0">
-                <a:solidFill>
-                  <a:srgbClr val="1F6B5E"/>
-                </a:solidFill>
-                <a:latin typeface="Calibri" pitchFamily="34" charset="0"/>
-                <a:ea typeface="Calibri" pitchFamily="34" charset="-122"/>
-                <a:cs typeface="Calibri" pitchFamily="34" charset="-120"/>
-                <a:hlinkClick r:id="rId2" invalidUrl="" action="" tgtFrame="" tooltip="" history="1" highlightClick="0" endSnd="0">
-                  <a:extLst>
-                    <a:ext uri="{A12FA001-AC4F-418D-AE19-62706E023703}">
-                      <ahyp:hlinkClr xmlns:ahyp="http://schemas.microsoft.com/office/drawing/2018/hyperlinkcolor" val="tx"/>
-                    </a:ext>
-                  </a:extLst>
-                </a:hlinkClick>
-              </a:rPr>
-              <a:t>SeneNews</a:t>
-            </a:r>
-            <a:pPr indent="0" marL="0">
-              <a:spcAft>
-                <a:spcPts val="200"/>
-              </a:spcAft>
-              <a:buNone/>
-            </a:pPr>
-            <a:r>
-              <a:rPr lang="en-US" sz="1300" dirty="0">
-                <a:solidFill>
-                  <a:srgbClr val="1F2937"/>
-                </a:solidFill>
-                <a:latin typeface="Calibri" pitchFamily="34" charset="0"/>
-                <a:ea typeface="Calibri" pitchFamily="34" charset="-122"/>
-                <a:cs typeface="Calibri" pitchFamily="34" charset="-120"/>
-              </a:rPr>
-              <a:t> — 21 octobre 2026, 11 h UTC</a:t>
-            </a:r>
-            <a:endParaRPr lang="en-US" sz="1300" dirty="0"/>
-          </a:p>
-          <a:p>
-            <a:pPr marL="342900" indent="-342900">
-              <a:spcBef>
-                <a:spcPts val="800"/>
-              </a:spcBef>
-              <a:spcAft>
-                <a:spcPts val="200"/>
-              </a:spcAft>
-              <a:buSzPct val="100000"/>
-              <a:buChar char="❑"/>
-            </a:pPr>
-            <a:r>
-              <a:rPr lang="en-US" sz="1400" b="1" u="sng" dirty="0">
-                <a:solidFill>
-                  <a:srgbClr val="1F6B5E"/>
-                </a:solidFill>
-                <a:latin typeface="Calibri" pitchFamily="34" charset="0"/>
-                <a:ea typeface="Calibri" pitchFamily="34" charset="-122"/>
-                <a:cs typeface="Calibri" pitchFamily="34" charset="-120"/>
-              </a:rPr>
-              <a:t>​GRÈVE DE 72 HEURES DU FSDT : MAMADOU LAMINE DIANTÉ RECONNAÎT DES ENGAGEMENTS NON RÉALISÉS</a:t>
-            </a:r>
-            <a:endParaRPr lang="en-US" sz="1300" dirty="0"/>
-          </a:p>
-          <a:p>
-            <a:pPr lvl="1" marL="685800" indent="-342900">
-              <a:spcAft>
-                <a:spcPts val="200"/>
-              </a:spcAft>
-              <a:buSzPct val="100000"/>
-              <a:buChar char="▪"/>
-            </a:pPr>
-            <a:r>
-              <a:rPr lang="en-US" sz="1300" dirty="0">
-                <a:solidFill>
-                  <a:srgbClr val="1F2937"/>
-                </a:solidFill>
-                <a:latin typeface="Calibri" pitchFamily="34" charset="0"/>
-                <a:ea typeface="Calibri" pitchFamily="34" charset="-122"/>
-                <a:cs typeface="Calibri" pitchFamily="34" charset="-120"/>
-              </a:rPr>
-              <a:t>Source : </a:t>
-            </a:r>
-            <a:pPr indent="0" marL="0">
-              <a:spcAft>
-                <a:spcPts val="200"/>
-              </a:spcAft>
-              <a:buNone/>
-            </a:pPr>
-            <a:r>
-              <a:rPr lang="en-US" sz="1300" u="sng" dirty="0">
-                <a:solidFill>
-                  <a:srgbClr val="1F6B5E"/>
-                </a:solidFill>
-                <a:latin typeface="Calibri" pitchFamily="34" charset="0"/>
-                <a:ea typeface="Calibri" pitchFamily="34" charset="-122"/>
-                <a:cs typeface="Calibri" pitchFamily="34" charset="-120"/>
-                <a:hlinkClick r:id="rId3" invalidUrl="" action="" tgtFrame="" tooltip="" history="1" highlightClick="0" endSnd="0">
-                  <a:extLst>
-                    <a:ext uri="{A12FA001-AC4F-418D-AE19-62706E023703}">
-                      <ahyp:hlinkClr xmlns:ahyp="http://schemas.microsoft.com/office/drawing/2018/hyperlinkcolor" val="tx"/>
-                    </a:ext>
-                  </a:extLst>
-                </a:hlinkClick>
-              </a:rPr>
-              <a:t>Pressafrik</a:t>
-            </a:r>
-            <a:pPr indent="0" marL="0">
-              <a:spcAft>
-                <a:spcPts val="200"/>
-              </a:spcAft>
-              <a:buNone/>
-            </a:pPr>
-            <a:r>
-              <a:rPr lang="en-US" sz="1300" dirty="0">
-                <a:solidFill>
-                  <a:srgbClr val="1F2937"/>
-                </a:solidFill>
-                <a:latin typeface="Calibri" pitchFamily="34" charset="0"/>
-                <a:ea typeface="Calibri" pitchFamily="34" charset="-122"/>
-                <a:cs typeface="Calibri" pitchFamily="34" charset="-120"/>
-              </a:rPr>
-              <a:t> — 21 octobre 2026, 10 h UTC</a:t>
-            </a:r>
-            <a:endParaRPr lang="en-US" sz="1300" dirty="0"/>
-          </a:p>
-          <a:p>
-            <a:pPr marL="342900" indent="-342900">
-              <a:spcBef>
-                <a:spcPts val="800"/>
-              </a:spcBef>
-              <a:spcAft>
-                <a:spcPts val="200"/>
-              </a:spcAft>
-              <a:buSzPct val="100000"/>
-              <a:buChar char="❑"/>
-            </a:pPr>
-            <a:r>
-              <a:rPr lang="en-US" sz="1400" b="1" u="sng" dirty="0">
-                <a:solidFill>
-                  <a:srgbClr val="1F6B5E"/>
-                </a:solidFill>
-                <a:latin typeface="Calibri" pitchFamily="34" charset="0"/>
-                <a:ea typeface="Calibri" pitchFamily="34" charset="-122"/>
-                <a:cs typeface="Calibri" pitchFamily="34" charset="-120"/>
-              </a:rPr>
-              <a:t>«GRÈVE GÉNÉRALE» DU FSDT : UN INSPECTEUR DU TRAVAIL EXPLIQUE CE «QUI PEUT METTRE À L’ABRI LES TRAVAILLEURS»</a:t>
-            </a:r>
-            <a:endParaRPr lang="en-US" sz="1300" dirty="0"/>
-          </a:p>
-          <a:p>
-            <a:pPr lvl="1" marL="685800" indent="-342900">
-              <a:spcAft>
-                <a:spcPts val="200"/>
-              </a:spcAft>
-              <a:buSzPct val="100000"/>
-              <a:buChar char="▪"/>
-            </a:pPr>
-            <a:r>
-              <a:rPr lang="en-US" sz="1300" dirty="0">
-                <a:solidFill>
-                  <a:srgbClr val="1F2937"/>
-                </a:solidFill>
-                <a:latin typeface="Calibri" pitchFamily="34" charset="0"/>
-                <a:ea typeface="Calibri" pitchFamily="34" charset="-122"/>
-                <a:cs typeface="Calibri" pitchFamily="34" charset="-120"/>
-              </a:rPr>
-              <a:t>Source : </a:t>
-            </a:r>
-            <a:pPr indent="0" marL="0">
-              <a:spcAft>
-                <a:spcPts val="200"/>
-              </a:spcAft>
-              <a:buNone/>
-            </a:pPr>
-            <a:r>
-              <a:rPr lang="en-US" sz="1300" u="sng" dirty="0">
-                <a:solidFill>
-                  <a:srgbClr val="1F6B5E"/>
-                </a:solidFill>
-                <a:latin typeface="Calibri" pitchFamily="34" charset="0"/>
-                <a:ea typeface="Calibri" pitchFamily="34" charset="-122"/>
-                <a:cs typeface="Calibri" pitchFamily="34" charset="-120"/>
-                <a:hlinkClick r:id="rId4" invalidUrl="" action="" tgtFrame="" tooltip="" history="1" highlightClick="0" endSnd="0">
-                  <a:extLst>
-                    <a:ext uri="{A12FA001-AC4F-418D-AE19-62706E023703}">
-                      <ahyp:hlinkClr xmlns:ahyp="http://schemas.microsoft.com/office/drawing/2018/hyperlinkcolor" val="tx"/>
-                    </a:ext>
-                  </a:extLst>
-                </a:hlinkClick>
-              </a:rPr>
-              <a:t>Pressafrik</a:t>
-            </a:r>
-            <a:pPr indent="0" marL="0">
-              <a:spcAft>
-                <a:spcPts val="200"/>
-              </a:spcAft>
-              <a:buNone/>
-            </a:pPr>
-            <a:r>
-              <a:rPr lang="en-US" sz="1300" dirty="0">
-                <a:solidFill>
-                  <a:srgbClr val="1F2937"/>
-                </a:solidFill>
-                <a:latin typeface="Calibri" pitchFamily="34" charset="0"/>
-                <a:ea typeface="Calibri" pitchFamily="34" charset="-122"/>
-                <a:cs typeface="Calibri" pitchFamily="34" charset="-120"/>
-              </a:rPr>
-              <a:t> — 21 octobre 2026, 10 h UTC</a:t>
-            </a:r>
-            <a:endParaRPr lang="en-US" sz="1300" dirty="0"/>
-          </a:p>
-          <a:p>
-            <a:pPr marL="342900" indent="-342900">
-              <a:spcBef>
-                <a:spcPts val="800"/>
-              </a:spcBef>
-              <a:spcAft>
-                <a:spcPts val="200"/>
-              </a:spcAft>
-              <a:buSzPct val="100000"/>
-              <a:buChar char="❑"/>
-            </a:pPr>
-            <a:r>
-              <a:rPr lang="en-US" sz="1400" b="1" u="sng" dirty="0">
-                <a:solidFill>
-                  <a:srgbClr val="1F6B5E"/>
-                </a:solidFill>
-                <a:latin typeface="Calibri" pitchFamily="34" charset="0"/>
-                <a:ea typeface="Calibri" pitchFamily="34" charset="-122"/>
-                <a:cs typeface="Calibri" pitchFamily="34" charset="-120"/>
-              </a:rPr>
-              <a:t>UNE GRÈVE GÉNÉRALE DE 72 HEURES ANNONCÉE SUR FOND DE CONTESTATION DES NOUVEAUX CODES DU TRAVAIL</a:t>
-            </a:r>
-            <a:endParaRPr lang="en-US" sz="1300" dirty="0"/>
-          </a:p>
-          <a:p>
-            <a:pPr lvl="1" marL="685800" indent="-342900">
-              <a:spcAft>
-                <a:spcPts val="200"/>
-              </a:spcAft>
-              <a:buSzPct val="100000"/>
-              <a:buChar char="▪"/>
-            </a:pPr>
-            <a:r>
-              <a:rPr lang="en-US" sz="1300" dirty="0">
-                <a:solidFill>
-                  <a:srgbClr val="1F2937"/>
-                </a:solidFill>
-                <a:latin typeface="Calibri" pitchFamily="34" charset="0"/>
-                <a:ea typeface="Calibri" pitchFamily="34" charset="-122"/>
-                <a:cs typeface="Calibri" pitchFamily="34" charset="-120"/>
-              </a:rPr>
-              <a:t>Source : </a:t>
-            </a:r>
-            <a:pPr indent="0" marL="0">
-              <a:spcAft>
-                <a:spcPts val="200"/>
-              </a:spcAft>
-              <a:buNone/>
-            </a:pPr>
-            <a:r>
-              <a:rPr lang="en-US" sz="1300" u="sng" dirty="0">
-                <a:solidFill>
-                  <a:srgbClr val="1F6B5E"/>
-                </a:solidFill>
-                <a:latin typeface="Calibri" pitchFamily="34" charset="0"/>
-                <a:ea typeface="Calibri" pitchFamily="34" charset="-122"/>
-                <a:cs typeface="Calibri" pitchFamily="34" charset="-120"/>
-                <a:hlinkClick r:id="rId5" invalidUrl="" action="" tgtFrame="" tooltip="" history="1" highlightClick="0" endSnd="0">
-                  <a:extLst>
-                    <a:ext uri="{A12FA001-AC4F-418D-AE19-62706E023703}">
-                      <ahyp:hlinkClr xmlns:ahyp="http://schemas.microsoft.com/office/drawing/2018/hyperlinkcolor" val="tx"/>
-                    </a:ext>
-                  </a:extLst>
-                </a:hlinkClick>
-              </a:rPr>
-              <a:t>AllAfrica (SN)</a:t>
-            </a:r>
-            <a:pPr indent="0" marL="0">
-              <a:spcAft>
-                <a:spcPts val="200"/>
-              </a:spcAft>
-              <a:buNone/>
-            </a:pPr>
-            <a:r>
-              <a:rPr lang="en-US" sz="1300" dirty="0">
-                <a:solidFill>
-                  <a:srgbClr val="1F2937"/>
-                </a:solidFill>
-                <a:latin typeface="Calibri" pitchFamily="34" charset="0"/>
-                <a:ea typeface="Calibri" pitchFamily="34" charset="-122"/>
-                <a:cs typeface="Calibri" pitchFamily="34" charset="-120"/>
-              </a:rPr>
-              <a:t> — 21 octobre 2026, 9 h UTC</a:t>
-            </a:r>
-            <a:endParaRPr lang="en-US" sz="1300" dirty="0"/>
-          </a:p>
-        </p:txBody>
-      </p:sp>
-      <p:pic>
-        <p:nvPicPr>
-          <p:cNvPr id="10" name="Image 0" descr="/home/runner/work/SentiqS/SentiqS/scripts/assets/grsci/logo-grsci.png">    </p:cNvPr>
-          <p:cNvPicPr>
-            <a:picLocks noChangeAspect="1"/>
-          </p:cNvPicPr>
-          <p:nvPr/>
-        </p:nvPicPr>
-        <p:blipFill>
-          <a:blip r:embed="rId6"/>
-          <a:stretch>
-            <a:fillRect/>
-          </a:stretch>
-        </p:blipFill>
-        <p:spPr>
-          <a:xfrm>
-            <a:off x="411480" y="5989320"/>
-            <a:ext cx="548640" cy="630936"/>
-          </a:xfrm>
-          <a:prstGeom prst="rect">
-            <a:avLst/>
-          </a:prstGeom>
-        </p:spPr>
-      </p:pic>
-      <p:sp>
-        <p:nvSpPr>
-          <p:cNvPr id="11" name="Text 8"/>
-          <p:cNvSpPr/>
-          <p:nvPr/>
-        </p:nvSpPr>
-        <p:spPr>
-          <a:xfrm>
-            <a:off x="3108960" y="6217920"/>
-            <a:ext cx="4206240" cy="329184"/>
-          </a:xfrm>
-          <a:prstGeom prst="rect">
-            <a:avLst/>
-          </a:prstGeom>
-          <a:noFill/>
-          <a:ln w="9525">
-            <a:solidFill>
-              <a:srgbClr val="1F6B5E"/>
-            </a:solidFill>
-          </a:ln>
-        </p:spPr>
-        <p:txBody>
-          <a:bodyPr wrap="square" rtlCol="0" anchor="ctr"/>
-          <a:lstStyle/>
-          <a:p>
-            <a:pPr algn="ctr" indent="0" marL="0">
-              <a:buNone/>
-            </a:pPr>
-            <a:r>
-              <a:rPr lang="en-US" sz="1200" b="1" dirty="0">
-                <a:solidFill>
-                  <a:srgbClr val="1F2937"/>
-                </a:solidFill>
-                <a:latin typeface="Calibri" pitchFamily="34" charset="0"/>
-                <a:ea typeface="Calibri" pitchFamily="34" charset="-122"/>
-                <a:cs typeface="Calibri" pitchFamily="34" charset="-120"/>
-              </a:rPr>
-              <a:t>G</a:t>
-            </a:r>
-            <a:pPr algn="ctr" indent="0" marL="0">
-              <a:buNone/>
-            </a:pPr>
-            <a:r>
-              <a:rPr lang="en-US" sz="1200" dirty="0">
-                <a:solidFill>
-                  <a:srgbClr val="1F2937"/>
-                </a:solidFill>
-                <a:latin typeface="Calibri" pitchFamily="34" charset="0"/>
-                <a:ea typeface="Calibri" pitchFamily="34" charset="-122"/>
-                <a:cs typeface="Calibri" pitchFamily="34" charset="-120"/>
-              </a:rPr>
-              <a:t>roupe des </a:t>
-            </a:r>
-            <a:pPr algn="ctr" indent="0" marL="0">
-              <a:buNone/>
-            </a:pPr>
-            <a:r>
-              <a:rPr lang="en-US" sz="1200" b="1" dirty="0">
-                <a:solidFill>
-                  <a:srgbClr val="1F2937"/>
-                </a:solidFill>
-                <a:latin typeface="Calibri" pitchFamily="34" charset="0"/>
-                <a:ea typeface="Calibri" pitchFamily="34" charset="-122"/>
-                <a:cs typeface="Calibri" pitchFamily="34" charset="-120"/>
-              </a:rPr>
-              <a:t>R</a:t>
-            </a:r>
-            <a:pPr algn="ctr" indent="0" marL="0">
-              <a:buNone/>
-            </a:pPr>
-            <a:r>
-              <a:rPr lang="en-US" sz="1200" dirty="0">
-                <a:solidFill>
-                  <a:srgbClr val="1F2937"/>
-                </a:solidFill>
-                <a:latin typeface="Calibri" pitchFamily="34" charset="0"/>
-                <a:ea typeface="Calibri" pitchFamily="34" charset="-122"/>
-                <a:cs typeface="Calibri" pitchFamily="34" charset="-120"/>
-              </a:rPr>
-              <a:t>esponsables </a:t>
-            </a:r>
-            <a:pPr algn="ctr" indent="0" marL="0">
-              <a:buNone/>
-            </a:pPr>
-            <a:r>
-              <a:rPr lang="en-US" sz="1200" b="1" dirty="0">
-                <a:solidFill>
-                  <a:srgbClr val="1F2937"/>
-                </a:solidFill>
-                <a:latin typeface="Calibri" pitchFamily="34" charset="0"/>
-                <a:ea typeface="Calibri" pitchFamily="34" charset="-122"/>
-                <a:cs typeface="Calibri" pitchFamily="34" charset="-120"/>
-              </a:rPr>
-              <a:t>S</a:t>
-            </a:r>
-            <a:pPr algn="ctr" indent="0" marL="0">
-              <a:buNone/>
-            </a:pPr>
-            <a:r>
-              <a:rPr lang="en-US" sz="1200" dirty="0">
-                <a:solidFill>
-                  <a:srgbClr val="1F2937"/>
-                </a:solidFill>
-                <a:latin typeface="Calibri" pitchFamily="34" charset="0"/>
-                <a:ea typeface="Calibri" pitchFamily="34" charset="-122"/>
-                <a:cs typeface="Calibri" pitchFamily="34" charset="-120"/>
-              </a:rPr>
-              <a:t>ûreté de </a:t>
-            </a:r>
-            <a:pPr algn="ctr" indent="0" marL="0">
-              <a:buNone/>
-            </a:pPr>
-            <a:r>
-              <a:rPr lang="en-US" sz="1200" b="1" dirty="0">
-                <a:solidFill>
-                  <a:srgbClr val="1F2937"/>
-                </a:solidFill>
-                <a:latin typeface="Calibri" pitchFamily="34" charset="0"/>
-                <a:ea typeface="Calibri" pitchFamily="34" charset="-122"/>
-                <a:cs typeface="Calibri" pitchFamily="34" charset="-120"/>
-              </a:rPr>
-              <a:t>C</a:t>
-            </a:r>
-            <a:pPr algn="ctr" indent="0" marL="0">
-              <a:buNone/>
-            </a:pPr>
-            <a:r>
-              <a:rPr lang="en-US" sz="1200" dirty="0">
-                <a:solidFill>
-                  <a:srgbClr val="1F2937"/>
-                </a:solidFill>
-                <a:latin typeface="Calibri" pitchFamily="34" charset="0"/>
-                <a:ea typeface="Calibri" pitchFamily="34" charset="-122"/>
-                <a:cs typeface="Calibri" pitchFamily="34" charset="-120"/>
-              </a:rPr>
-              <a:t>ôte d'</a:t>
-            </a:r>
-            <a:pPr algn="ctr" indent="0" marL="0">
-              <a:buNone/>
-            </a:pPr>
-            <a:r>
-              <a:rPr lang="en-US" sz="1200" b="1" dirty="0">
-                <a:solidFill>
-                  <a:srgbClr val="1F2937"/>
-                </a:solidFill>
-                <a:latin typeface="Calibri" pitchFamily="34" charset="0"/>
-                <a:ea typeface="Calibri" pitchFamily="34" charset="-122"/>
-                <a:cs typeface="Calibri" pitchFamily="34" charset="-120"/>
-              </a:rPr>
-              <a:t>I</a:t>
-            </a:r>
-            <a:pPr algn="ctr" indent="0" marL="0">
-              <a:buNone/>
-            </a:pPr>
-            <a:r>
-              <a:rPr lang="en-US" sz="1200" dirty="0">
-                <a:solidFill>
-                  <a:srgbClr val="1F2937"/>
-                </a:solidFill>
-                <a:latin typeface="Calibri" pitchFamily="34" charset="0"/>
-                <a:ea typeface="Calibri" pitchFamily="34" charset="-122"/>
-                <a:cs typeface="Calibri" pitchFamily="34" charset="-120"/>
-              </a:rPr>
-              <a:t>voire</a:t>
-            </a:r>
-            <a:endParaRPr lang="en-US" sz="1200" dirty="0"/>
-          </a:p>
-        </p:txBody>
-      </p:sp>
-      <p:sp>
-        <p:nvSpPr>
-          <p:cNvPr id="12" name="Text 9"/>
-          <p:cNvSpPr/>
-          <p:nvPr/>
-        </p:nvSpPr>
-        <p:spPr>
-          <a:xfrm>
-            <a:off x="9418320" y="6309360"/>
-            <a:ext cx="2468880" cy="274320"/>
-          </a:xfrm>
-          <a:prstGeom prst="rect">
-            <a:avLst/>
-          </a:prstGeom>
-          <a:noFill/>
-          <a:ln/>
-        </p:spPr>
-        <p:txBody>
-          <a:bodyPr wrap="square" rtlCol="0" anchor="ctr"/>
-          <a:lstStyle/>
-          <a:p>
-            <a:pPr algn="r" indent="0" marL="0">
-              <a:buNone/>
-            </a:pPr>
-            <a:r>
-              <a:rPr lang="en-US" sz="1000" dirty="0">
-                <a:solidFill>
-                  <a:srgbClr val="1F2937"/>
-                </a:solidFill>
-                <a:latin typeface="Calibri" pitchFamily="34" charset="0"/>
-                <a:ea typeface="Calibri" pitchFamily="34" charset="-122"/>
-                <a:cs typeface="Calibri" pitchFamily="34" charset="-120"/>
-              </a:rPr>
-              <a:t>|  21/10/26   |   19</a:t>
+              <a:t>|  23/10/26   |   16</a:t>
             </a:r>
             <a:endParaRPr lang="en-US" sz="1000" dirty="0"/>
           </a:p>
@@ -10841,7 +7578,7 @@
                 <a:ea typeface="Calibri" pitchFamily="34" charset="-122"/>
                 <a:cs typeface="Calibri" pitchFamily="34" charset="-120"/>
               </a:rPr>
-              <a:t>POLITIQUE</a:t>
+              <a:t>SÉCURITÉ</a:t>
             </a:r>
             <a:endParaRPr lang="en-US" sz="900" dirty="0"/>
           </a:p>
@@ -10862,30 +7599,7 @@
                 <a:ea typeface="Calibri" pitchFamily="34" charset="-122"/>
                 <a:cs typeface="Calibri" pitchFamily="34" charset="-120"/>
               </a:rPr>
-              <a:t>CÔTE D’IVOIRE: DOUZE PERSONNES INCULPÉES DANS L'AFFAIRE DE L'ASSASSINAT D'UN GEND…</a:t>
-            </a:r>
-            <a:endParaRPr lang="en-US" sz="900" dirty="0"/>
-          </a:p>
-          <a:p>
-            <a:pPr indent="0" marL="0">
-              <a:spcBef>
-                <a:spcPts val="600"/>
-              </a:spcBef>
-              <a:spcAft>
-                <a:spcPts val="200"/>
-              </a:spcAft>
-              <a:buNone/>
-            </a:pPr>
-            <a:r>
-              <a:rPr lang="en-US" sz="900" b="1" dirty="0">
-                <a:solidFill>
-                  <a:srgbClr val="1F6B5E"/>
-                </a:solidFill>
-                <a:latin typeface="Calibri" pitchFamily="34" charset="0"/>
-                <a:ea typeface="Calibri" pitchFamily="34" charset="-122"/>
-                <a:cs typeface="Calibri" pitchFamily="34" charset="-120"/>
-              </a:rPr>
-              <a:t>SOCIAL</a:t>
+              <a:t>AGRO-INDUSTRIE/BRUNO KONÉ - « LA TRANSFORMATION NE SE FERA PAS SANS LES ACTEURS D…</a:t>
             </a:r>
             <a:endParaRPr lang="en-US" sz="900" dirty="0"/>
           </a:p>
@@ -10906,7 +7620,7 @@
                 <a:ea typeface="Calibri" pitchFamily="34" charset="-122"/>
                 <a:cs typeface="Calibri" pitchFamily="34" charset="-120"/>
               </a:rPr>
-              <a:t>DALOA : LES COMMERÇANTES MANIFESTENT CONTRE LA HAUSSE DU PRIX DU POISSON, LE PRÉF…</a:t>
+              <a:t>AUDIENCE ATTENDUE SUR L'ÉLECTION DE TIDJANE THIAM À LA TÊTE DU PARTI D'OPPOSITION…</a:t>
             </a:r>
             <a:endParaRPr lang="en-US" sz="900" dirty="0"/>
           </a:p>
@@ -11036,7 +7750,7 @@
                 <a:ea typeface="Calibri" pitchFamily="34" charset="-122"/>
                 <a:cs typeface="Calibri" pitchFamily="34" charset="-120"/>
               </a:rPr>
-              <a:t>LE BURKINA FASO RÉTABLIT LA PEINE DE MORT, ABOLIE EN 2018 !</a:t>
+              <a:t>LE PAYS RÉTABLIT LA PEINE DE MORT</a:t>
             </a:r>
             <a:endParaRPr lang="en-US" sz="900" dirty="0"/>
           </a:p>
@@ -11080,7 +7794,7 @@
                 <a:ea typeface="Calibri" pitchFamily="34" charset="-122"/>
                 <a:cs typeface="Calibri" pitchFamily="34" charset="-120"/>
               </a:rPr>
-              <a:t>MASSACRE IN MALI: ISLAMIC STATE MILITANTS KILL AT LEAST 48 CIVILIANS IN MÉNAKA</a:t>
+              <a:t>GRÈVE JUGÉE HORS-CADRE À KOLOKANI : L’ADMINISTRATION SCOLAIRE FIXE UN ULTIMATUM A…</a:t>
             </a:r>
             <a:endParaRPr lang="en-US" sz="900" dirty="0"/>
           </a:p>
@@ -11124,7 +7838,7 @@
                 <a:ea typeface="Calibri" pitchFamily="34" charset="-122"/>
                 <a:cs typeface="Calibri" pitchFamily="34" charset="-120"/>
               </a:rPr>
-              <a:t>DIFFA : VND/NUR, DES RIVES DU LAC TCHAD À L’ACTION HUMANITAIRE, LA RÉSILIENCE, LA…</a:t>
+              <a:t>SWISS AND AUSTRIAN WOMEN IN LIBYA AFTER RELEASE FROM NIGER KIDNAP ORDEAL</a:t>
             </a:r>
             <a:endParaRPr lang="en-US" sz="900" dirty="0"/>
           </a:p>
@@ -11168,7 +7882,7 @@
                 <a:ea typeface="Calibri" pitchFamily="34" charset="-122"/>
                 <a:cs typeface="Calibri" pitchFamily="34" charset="-120"/>
               </a:rPr>
-              <a:t>GOVERNANCE BY PROTEST, REGULATION BY SILENCE: INSIDE THE MANUFACTURED WATER CRISIS</a:t>
+              <a:t>KPANDAI: ONE REPORTEDLY KILLED IN KUMDI FARMLAND DISPUTE</a:t>
             </a:r>
             <a:endParaRPr lang="en-US" sz="900" dirty="0"/>
           </a:p>
@@ -11212,7 +7926,7 @@
                 <a:ea typeface="Calibri" pitchFamily="34" charset="-122"/>
                 <a:cs typeface="Calibri" pitchFamily="34" charset="-120"/>
               </a:rPr>
-              <a:t>KLOTO : L’UE ET LE LUXEMBOURG AUX CÔTÉS DU TOGO POUR LA CONSTRUCTION DU SIÈGE DE …</a:t>
+              <a:t>TOGO- 31, 7 MILLIARDS FCFA POUR DÉSENCLAVER LES SAVANES : DES TRAVAUX ABANDONNÉS …</a:t>
             </a:r>
             <a:endParaRPr lang="en-US" sz="900" dirty="0"/>
           </a:p>
@@ -11240,6 +7954,27 @@
             <a:endParaRPr lang="en-US" sz="900" dirty="0"/>
           </a:p>
           <a:p>
+            <a:pPr marL="342900" indent="-342900">
+              <a:spcAft>
+                <a:spcPts val="200"/>
+              </a:spcAft>
+              <a:buSzPct val="100000"/>
+              <a:buChar char="❑"/>
+            </a:pPr>
+            <a:r>
+              <a:rPr lang="en-US" sz="900" dirty="0">
+                <a:solidFill>
+                  <a:srgbClr val="1F2937"/>
+                </a:solidFill>
+                <a:latin typeface="Calibri" pitchFamily="34" charset="0"/>
+                <a:ea typeface="Calibri" pitchFamily="34" charset="-122"/>
+                <a:cs typeface="Calibri" pitchFamily="34" charset="-120"/>
+              </a:rPr>
+              <a:t>PORT DE COTONOU : L’ENLÈVEMENT DES MARCHANDISES DÉSORMAIS POSSIBLE LES WEEK-ENDS</a:t>
+            </a:r>
+            <a:endParaRPr lang="en-US" sz="900" dirty="0"/>
+          </a:p>
+          <a:p>
             <a:pPr indent="0" marL="0">
               <a:spcBef>
                 <a:spcPts val="600"/>
@@ -11279,7 +8014,7 @@
                 <a:ea typeface="Calibri" pitchFamily="34" charset="-122"/>
                 <a:cs typeface="Calibri" pitchFamily="34" charset="-120"/>
               </a:rPr>
-              <a:t>GUINÉE : LA HAC S’ATTAQUE À LA PROLIFÉRATION ILLÉGALE DES WEB TV</a:t>
+              <a:t>KINDIA : UNE DISPUTE AUTOUR D’UN SUPPOSÉ RIVAL VIRE AU MEURTRE, LE SUSPECT RACONTE</a:t>
             </a:r>
             <a:endParaRPr lang="en-US" sz="900" dirty="0"/>
           </a:p>
@@ -11307,6 +8042,27 @@
             <a:endParaRPr lang="en-US" sz="900" dirty="0"/>
           </a:p>
           <a:p>
+            <a:pPr marL="342900" indent="-342900">
+              <a:spcAft>
+                <a:spcPts val="200"/>
+              </a:spcAft>
+              <a:buSzPct val="100000"/>
+              <a:buChar char="❑"/>
+            </a:pPr>
+            <a:r>
+              <a:rPr lang="en-US" sz="900" dirty="0">
+                <a:solidFill>
+                  <a:srgbClr val="1F2937"/>
+                </a:solidFill>
+                <a:latin typeface="Calibri" pitchFamily="34" charset="0"/>
+                <a:ea typeface="Calibri" pitchFamily="34" charset="-122"/>
+                <a:cs typeface="Calibri" pitchFamily="34" charset="-120"/>
+              </a:rPr>
+              <a:t>LIBERIA: WAR VICTIMS, SURVIVORS PROTEST AT COURT OFFICE, CAPITOL AS HOUSE CHAIRMA…</a:t>
+            </a:r>
+            <a:endParaRPr lang="en-US" sz="900" dirty="0"/>
+          </a:p>
+          <a:p>
             <a:pPr indent="0" marL="0">
               <a:spcBef>
                 <a:spcPts val="600"/>
@@ -11346,7 +8102,7 @@
                 <a:ea typeface="Calibri" pitchFamily="34" charset="-122"/>
                 <a:cs typeface="Calibri" pitchFamily="34" charset="-120"/>
               </a:rPr>
-              <a:t>8 MILLIONS VOLÉS ET ATTAQUE À LA MACHETTE : DEUX BRAQUEURS DU POINT WAVE DE DAHRA…</a:t>
+              <a:t>MAMADOU GUÈYE ANCIEN DIRECTEUR DES DOMAINES RESTE LIBRE : COUP D'ARRÊT DE LA COUR…</a:t>
             </a:r>
             <a:endParaRPr lang="en-US" sz="900" dirty="0"/>
           </a:p>
@@ -11578,310 +8334,7 @@
                 <a:ea typeface="Calibri" pitchFamily="34" charset="-122"/>
                 <a:cs typeface="Calibri" pitchFamily="34" charset="-120"/>
               </a:rPr>
-              <a:t>|  21/10/26   |   2</a:t>
-            </a:r>
-            <a:endParaRPr lang="en-US" sz="1000" dirty="0"/>
-          </a:p>
-        </p:txBody>
-      </p:sp>
-    </p:spTree>
-  </p:cSld>
-  <p:clrMapOvr>
-    <a:masterClrMapping/>
-  </p:clrMapOvr>
-</p:sld>
-</file>
-
-<file path=ppt/slides/slide20.xml><?xml version="1.0" encoding="utf-8"?>
-<p:sld xmlns:a="http://schemas.openxmlformats.org/drawingml/2006/main" xmlns:r="http://schemas.openxmlformats.org/officeDocument/2006/relationships" xmlns:p="http://schemas.openxmlformats.org/presentationml/2006/main">
-  <p:cSld name="Slide 20">
-    <p:bg>
-      <p:bgPr>
-        <a:solidFill>
-          <a:srgbClr val="CDCDCD"/>
-        </a:solidFill>
-      </p:bgPr>
-    </p:bg>
-    <p:spTree>
-      <p:nvGrpSpPr>
-        <p:cNvPr id="1" name=""/>
-        <p:cNvGrpSpPr/>
-        <p:nvPr/>
-      </p:nvGrpSpPr>
-      <p:grpSpPr>
-        <a:xfrm>
-          <a:off x="0" y="0"/>
-          <a:ext cx="0" cy="0"/>
-          <a:chOff x="0" y="0"/>
-          <a:chExt cx="0" cy="0"/>
-        </a:xfrm>
-      </p:grpSpPr>
-      <p:sp>
-        <p:nvSpPr>
-          <p:cNvPr id="2" name="Text 0"/>
-          <p:cNvSpPr/>
-          <p:nvPr/>
-        </p:nvSpPr>
-        <p:spPr>
-          <a:xfrm>
-            <a:off x="457200" y="2377440"/>
-            <a:ext cx="11247120" cy="1097280"/>
-          </a:xfrm>
-          <a:prstGeom prst="rect">
-            <a:avLst/>
-          </a:prstGeom>
-          <a:noFill/>
-          <a:ln/>
-        </p:spPr>
-        <p:txBody>
-          <a:bodyPr wrap="square" rtlCol="0" anchor="ctr"/>
-          <a:lstStyle/>
-          <a:p>
-            <a:pPr algn="ctr" indent="0" marL="0">
-              <a:buNone/>
-            </a:pPr>
-            <a:r>
-              <a:rPr lang="en-US" sz="6000" dirty="0">
-                <a:solidFill>
-                  <a:srgbClr val="111111"/>
-                </a:solidFill>
-                <a:latin typeface="Arial Narrow" pitchFamily="34" charset="0"/>
-                <a:ea typeface="Arial Narrow" pitchFamily="34" charset="-122"/>
-                <a:cs typeface="Arial Narrow" pitchFamily="34" charset="-120"/>
-              </a:rPr>
-              <a:t>MERCI</a:t>
-            </a:r>
-            <a:endParaRPr lang="en-US" sz="6000" dirty="0"/>
-          </a:p>
-        </p:txBody>
-      </p:sp>
-      <p:pic>
-        <p:nvPicPr>
-          <p:cNvPr id="3" name="Image 0" descr="/home/runner/work/SentiqS/SentiqS/scripts/assets/grsci/logo-grsci.png">    </p:cNvPr>
-          <p:cNvPicPr>
-            <a:picLocks noChangeAspect="1"/>
-          </p:cNvPicPr>
-          <p:nvPr/>
-        </p:nvPicPr>
-        <p:blipFill>
-          <a:blip r:embed="rId1"/>
-          <a:stretch>
-            <a:fillRect/>
-          </a:stretch>
-        </p:blipFill>
-        <p:spPr>
-          <a:xfrm>
-            <a:off x="411480" y="5989320"/>
-            <a:ext cx="548640" cy="630936"/>
-          </a:xfrm>
-          <a:prstGeom prst="rect">
-            <a:avLst/>
-          </a:prstGeom>
-        </p:spPr>
-      </p:pic>
-      <p:sp>
-        <p:nvSpPr>
-          <p:cNvPr id="4" name="Text 1"/>
-          <p:cNvSpPr/>
-          <p:nvPr/>
-        </p:nvSpPr>
-        <p:spPr>
-          <a:xfrm>
-            <a:off x="3108960" y="6217920"/>
-            <a:ext cx="4206240" cy="329184"/>
-          </a:xfrm>
-          <a:prstGeom prst="rect">
-            <a:avLst/>
-          </a:prstGeom>
-          <a:noFill/>
-          <a:ln w="9525">
-            <a:solidFill>
-              <a:srgbClr val="1F6B5E"/>
-            </a:solidFill>
-          </a:ln>
-        </p:spPr>
-        <p:txBody>
-          <a:bodyPr wrap="square" rtlCol="0" anchor="ctr"/>
-          <a:lstStyle/>
-          <a:p>
-            <a:pPr algn="ctr" indent="0" marL="0">
-              <a:buNone/>
-            </a:pPr>
-            <a:r>
-              <a:rPr lang="en-US" sz="1200" b="1" dirty="0">
-                <a:solidFill>
-                  <a:srgbClr val="1F2937"/>
-                </a:solidFill>
-                <a:latin typeface="Calibri" pitchFamily="34" charset="0"/>
-                <a:ea typeface="Calibri" pitchFamily="34" charset="-122"/>
-                <a:cs typeface="Calibri" pitchFamily="34" charset="-120"/>
-              </a:rPr>
-              <a:t>G</a:t>
-            </a:r>
-            <a:pPr algn="ctr" indent="0" marL="0">
-              <a:buNone/>
-            </a:pPr>
-            <a:r>
-              <a:rPr lang="en-US" sz="1200" dirty="0">
-                <a:solidFill>
-                  <a:srgbClr val="1F2937"/>
-                </a:solidFill>
-                <a:latin typeface="Calibri" pitchFamily="34" charset="0"/>
-                <a:ea typeface="Calibri" pitchFamily="34" charset="-122"/>
-                <a:cs typeface="Calibri" pitchFamily="34" charset="-120"/>
-              </a:rPr>
-              <a:t>roupe des </a:t>
-            </a:r>
-            <a:pPr algn="ctr" indent="0" marL="0">
-              <a:buNone/>
-            </a:pPr>
-            <a:r>
-              <a:rPr lang="en-US" sz="1200" b="1" dirty="0">
-                <a:solidFill>
-                  <a:srgbClr val="1F2937"/>
-                </a:solidFill>
-                <a:latin typeface="Calibri" pitchFamily="34" charset="0"/>
-                <a:ea typeface="Calibri" pitchFamily="34" charset="-122"/>
-                <a:cs typeface="Calibri" pitchFamily="34" charset="-120"/>
-              </a:rPr>
-              <a:t>R</a:t>
-            </a:r>
-            <a:pPr algn="ctr" indent="0" marL="0">
-              <a:buNone/>
-            </a:pPr>
-            <a:r>
-              <a:rPr lang="en-US" sz="1200" dirty="0">
-                <a:solidFill>
-                  <a:srgbClr val="1F2937"/>
-                </a:solidFill>
-                <a:latin typeface="Calibri" pitchFamily="34" charset="0"/>
-                <a:ea typeface="Calibri" pitchFamily="34" charset="-122"/>
-                <a:cs typeface="Calibri" pitchFamily="34" charset="-120"/>
-              </a:rPr>
-              <a:t>esponsables </a:t>
-            </a:r>
-            <a:pPr algn="ctr" indent="0" marL="0">
-              <a:buNone/>
-            </a:pPr>
-            <a:r>
-              <a:rPr lang="en-US" sz="1200" b="1" dirty="0">
-                <a:solidFill>
-                  <a:srgbClr val="1F2937"/>
-                </a:solidFill>
-                <a:latin typeface="Calibri" pitchFamily="34" charset="0"/>
-                <a:ea typeface="Calibri" pitchFamily="34" charset="-122"/>
-                <a:cs typeface="Calibri" pitchFamily="34" charset="-120"/>
-              </a:rPr>
-              <a:t>S</a:t>
-            </a:r>
-            <a:pPr algn="ctr" indent="0" marL="0">
-              <a:buNone/>
-            </a:pPr>
-            <a:r>
-              <a:rPr lang="en-US" sz="1200" dirty="0">
-                <a:solidFill>
-                  <a:srgbClr val="1F2937"/>
-                </a:solidFill>
-                <a:latin typeface="Calibri" pitchFamily="34" charset="0"/>
-                <a:ea typeface="Calibri" pitchFamily="34" charset="-122"/>
-                <a:cs typeface="Calibri" pitchFamily="34" charset="-120"/>
-              </a:rPr>
-              <a:t>ûreté de </a:t>
-            </a:r>
-            <a:pPr algn="ctr" indent="0" marL="0">
-              <a:buNone/>
-            </a:pPr>
-            <a:r>
-              <a:rPr lang="en-US" sz="1200" b="1" dirty="0">
-                <a:solidFill>
-                  <a:srgbClr val="1F2937"/>
-                </a:solidFill>
-                <a:latin typeface="Calibri" pitchFamily="34" charset="0"/>
-                <a:ea typeface="Calibri" pitchFamily="34" charset="-122"/>
-                <a:cs typeface="Calibri" pitchFamily="34" charset="-120"/>
-              </a:rPr>
-              <a:t>C</a:t>
-            </a:r>
-            <a:pPr algn="ctr" indent="0" marL="0">
-              <a:buNone/>
-            </a:pPr>
-            <a:r>
-              <a:rPr lang="en-US" sz="1200" dirty="0">
-                <a:solidFill>
-                  <a:srgbClr val="1F2937"/>
-                </a:solidFill>
-                <a:latin typeface="Calibri" pitchFamily="34" charset="0"/>
-                <a:ea typeface="Calibri" pitchFamily="34" charset="-122"/>
-                <a:cs typeface="Calibri" pitchFamily="34" charset="-120"/>
-              </a:rPr>
-              <a:t>ôte d'</a:t>
-            </a:r>
-            <a:pPr algn="ctr" indent="0" marL="0">
-              <a:buNone/>
-            </a:pPr>
-            <a:r>
-              <a:rPr lang="en-US" sz="1200" b="1" dirty="0">
-                <a:solidFill>
-                  <a:srgbClr val="1F2937"/>
-                </a:solidFill>
-                <a:latin typeface="Calibri" pitchFamily="34" charset="0"/>
-                <a:ea typeface="Calibri" pitchFamily="34" charset="-122"/>
-                <a:cs typeface="Calibri" pitchFamily="34" charset="-120"/>
-              </a:rPr>
-              <a:t>I</a:t>
-            </a:r>
-            <a:pPr algn="ctr" indent="0" marL="0">
-              <a:buNone/>
-            </a:pPr>
-            <a:r>
-              <a:rPr lang="en-US" sz="1200" dirty="0">
-                <a:solidFill>
-                  <a:srgbClr val="1F2937"/>
-                </a:solidFill>
-                <a:latin typeface="Calibri" pitchFamily="34" charset="0"/>
-                <a:ea typeface="Calibri" pitchFamily="34" charset="-122"/>
-                <a:cs typeface="Calibri" pitchFamily="34" charset="-120"/>
-              </a:rPr>
-              <a:t>voire</a:t>
-            </a:r>
-            <a:endParaRPr lang="en-US" sz="1200" dirty="0"/>
-          </a:p>
-        </p:txBody>
-      </p:sp>
-      <p:sp>
-        <p:nvSpPr>
-          <p:cNvPr id="5" name="Text 2"/>
-          <p:cNvSpPr/>
-          <p:nvPr/>
-        </p:nvSpPr>
-        <p:spPr>
-          <a:xfrm>
-            <a:off x="9418320" y="6309360"/>
-            <a:ext cx="2468880" cy="274320"/>
-          </a:xfrm>
-          <a:prstGeom prst="rect">
-            <a:avLst/>
-          </a:prstGeom>
-          <a:noFill/>
-          <a:ln/>
-        </p:spPr>
-        <p:txBody>
-          <a:bodyPr wrap="square" rtlCol="0" anchor="ctr"/>
-          <a:lstStyle/>
-          <a:p>
-            <a:pPr algn="r" indent="0" marL="0">
-              <a:buNone/>
-            </a:pPr>
-            <a:r>
-              <a:rPr lang="en-US" sz="1000" dirty="0">
-                <a:solidFill>
-                  <a:srgbClr val="1F2937"/>
-                </a:solidFill>
-                <a:latin typeface="Calibri" pitchFamily="34" charset="0"/>
-                <a:ea typeface="Calibri" pitchFamily="34" charset="-122"/>
-                <a:cs typeface="Calibri" pitchFamily="34" charset="-120"/>
-              </a:rPr>
-              <a:t>|  21/10/26   |   20</a:t>
+              <a:t>|  23/10/26   |   2</a:t>
             </a:r>
             <a:endParaRPr lang="en-US" sz="1000" dirty="0"/>
           </a:p>
@@ -12231,7 +8684,7 @@
                 <a:ea typeface="Calibri" pitchFamily="34" charset="-122"/>
                 <a:cs typeface="Calibri" pitchFamily="34" charset="-120"/>
               </a:rPr>
-              <a:t>|  21/10/26   |   3</a:t>
+              <a:t>|  23/10/26   |   3</a:t>
             </a:r>
             <a:endParaRPr lang="en-US" sz="1000" dirty="0"/>
           </a:p>
@@ -12297,7 +8750,7 @@
                 <a:ea typeface="Arial Narrow" pitchFamily="34" charset="-122"/>
                 <a:cs typeface="Arial Narrow" pitchFamily="34" charset="-120"/>
               </a:rPr>
-              <a:t>I</a:t>
+              <a:t>III</a:t>
             </a:r>
             <a:endParaRPr lang="en-US" sz="2400" dirty="0"/>
           </a:p>
@@ -12336,7 +8789,7 @@
                 <a:ea typeface="Arial Narrow" pitchFamily="34" charset="-122"/>
                 <a:cs typeface="Arial Narrow" pitchFamily="34" charset="-120"/>
               </a:rPr>
-              <a:t>- POLITIQUE</a:t>
+              <a:t>- SÉCURITÉ</a:t>
             </a:r>
             <a:endParaRPr lang="en-US" sz="2800" dirty="0"/>
           </a:p>
@@ -12502,7 +8955,7 @@
                 <a:ea typeface="Calibri" pitchFamily="34" charset="-122"/>
                 <a:cs typeface="Calibri" pitchFamily="34" charset="-120"/>
               </a:rPr>
-              <a:t>CÔTE D’IVOIRE: DOUZE PERSONNES INCULPÉES DANS L'AFFAIRE DE L'ASSASSINAT D'UN GENDARME</a:t>
+              <a:t>AGRO-INDUSTRIE/BRUNO KONÉ - « LA TRANSFORMATION NE SE FERA PAS SANS LES ACTEURS DU SECTEUR INFORMEL »</a:t>
             </a:r>
             <a:endParaRPr lang="en-US" sz="1300" dirty="0"/>
           </a:p>
@@ -12547,7 +9000,7 @@
                   </a:extLst>
                 </a:hlinkClick>
               </a:rPr>
-              <a:t>RFI Afrique</a:t>
+              <a:t>AllAfrica (CI)</a:t>
             </a:r>
             <a:pPr indent="0" marL="0">
               <a:spcAft>
@@ -12564,7 +9017,93 @@
                 <a:ea typeface="Calibri" pitchFamily="34" charset="-122"/>
                 <a:cs typeface="Calibri" pitchFamily="34" charset="-120"/>
               </a:rPr>
-              <a:t> — 21 octobre 2026, 10 h UTC</a:t>
+              <a:t> — 22 octobre 2026, 22 h UTC</a:t>
+            </a:r>
+            <a:endParaRPr lang="en-US" sz="1300" dirty="0"/>
+          </a:p>
+          <a:p>
+            <a:pPr marL="342900" indent="-342900">
+              <a:spcBef>
+                <a:spcPts val="800"/>
+              </a:spcBef>
+              <a:spcAft>
+                <a:spcPts val="200"/>
+              </a:spcAft>
+              <a:buSzPct val="100000"/>
+              <a:buChar char="❑"/>
+            </a:pPr>
+            <a:r>
+              <a:rPr lang="en-US" sz="1400" b="1" u="sng" dirty="0">
+                <a:solidFill>
+                  <a:srgbClr val="1F6B5E"/>
+                </a:solidFill>
+                <a:latin typeface="Calibri" pitchFamily="34" charset="0"/>
+                <a:ea typeface="Calibri" pitchFamily="34" charset="-122"/>
+                <a:cs typeface="Calibri" pitchFamily="34" charset="-120"/>
+              </a:rPr>
+              <a:t>AUDIENCE ATTENDUE SUR L'ÉLECTION DE TIDJANE THIAM À LA TÊTE DU PARTI D'OPPOSITION PDCI</a:t>
+            </a:r>
+            <a:endParaRPr lang="en-US" sz="1300" dirty="0"/>
+          </a:p>
+          <a:p>
+            <a:pPr lvl="1" marL="685800" indent="-342900">
+              <a:spcAft>
+                <a:spcPts val="200"/>
+              </a:spcAft>
+              <a:buSzPct val="100000"/>
+              <a:buChar char="▪"/>
+            </a:pPr>
+            <a:r>
+              <a:rPr lang="en-US" sz="1300" dirty="0">
+                <a:solidFill>
+                  <a:srgbClr val="1F2937"/>
+                </a:solidFill>
+                <a:latin typeface="Calibri" pitchFamily="34" charset="0"/>
+                <a:ea typeface="Calibri" pitchFamily="34" charset="-122"/>
+                <a:cs typeface="Calibri" pitchFamily="34" charset="-120"/>
+              </a:rPr>
+              <a:t>Source : </a:t>
+            </a:r>
+            <a:pPr indent="0" marL="0">
+              <a:spcAft>
+                <a:spcPts val="200"/>
+              </a:spcAft>
+              <a:buNone/>
+            </a:pPr>
+            <a:r>
+              <a:rPr lang="en-US" sz="1300" u="sng" dirty="0">
+                <a:solidFill>
+                  <a:srgbClr val="1F6B5E"/>
+                </a:solidFill>
+                <a:latin typeface="Calibri" pitchFamily="34" charset="0"/>
+                <a:ea typeface="Calibri" pitchFamily="34" charset="-122"/>
+                <a:cs typeface="Calibri" pitchFamily="34" charset="-120"/>
+                <a:hlinkClick r:id="rId2" invalidUrl="" action="" tgtFrame="" tooltip="" history="1" highlightClick="0" endSnd="0">
+                  <a:extLst>
+                    <a:ext uri="{A12FA001-AC4F-418D-AE19-62706E023703}">
+                      <ahyp:hlinkClr xmlns:ahyp="http://schemas.microsoft.com/office/drawing/2018/hyperlinkcolor" val="tx"/>
+                    </a:ext>
+                  </a:extLst>
+                </a:hlinkClick>
+              </a:rPr>
+              <a:t>AllAfrica (CI)</a:t>
+            </a:r>
+            <a:pPr indent="0" marL="0">
+              <a:spcAft>
+                <a:spcPts val="200"/>
+              </a:spcAft>
+              <a:buNone/>
+            </a:pPr>
+            <a:r>
+              <a:rPr lang="en-US" sz="1300" dirty="0">
+                <a:solidFill>
+                  <a:srgbClr val="1F2937"/>
+                </a:solidFill>
+                <a:latin typeface="Calibri" pitchFamily="34" charset="0"/>
+                <a:ea typeface="Calibri" pitchFamily="34" charset="-122"/>
+                <a:cs typeface="Calibri" pitchFamily="34" charset="-120"/>
+              </a:rPr>
+              <a:t> — 22 octobre 2026, 8 h UTC</a:t>
             </a:r>
             <a:endParaRPr lang="en-US" sz="1300" dirty="0"/>
           </a:p>
@@ -12579,7 +9118,7 @@
           <p:nvPr/>
         </p:nvPicPr>
         <p:blipFill>
-          <a:blip r:embed="rId2"/>
+          <a:blip r:embed="rId3"/>
           <a:stretch>
             <a:fillRect/>
           </a:stretch>
@@ -12796,7 +9335,7 @@
                 <a:ea typeface="Calibri" pitchFamily="34" charset="-122"/>
                 <a:cs typeface="Calibri" pitchFamily="34" charset="-120"/>
               </a:rPr>
-              <a:t>|  21/10/26   |   4</a:t>
+              <a:t>|  23/10/26   |   4</a:t>
             </a:r>
             <a:endParaRPr lang="en-US" sz="1000" dirty="0"/>
           </a:p>
@@ -12813,571 +9352,6 @@
 <file path=ppt/slides/slide5.xml><?xml version="1.0" encoding="utf-8"?>
 <p:sld xmlns:a="http://schemas.openxmlformats.org/drawingml/2006/main" xmlns:r="http://schemas.openxmlformats.org/officeDocument/2006/relationships" xmlns:p="http://schemas.openxmlformats.org/presentationml/2006/main">
   <p:cSld name="Slide 5">
-    <p:spTree>
-      <p:nvGrpSpPr>
-        <p:cNvPr id="1" name=""/>
-        <p:cNvGrpSpPr/>
-        <p:nvPr/>
-      </p:nvGrpSpPr>
-      <p:grpSpPr>
-        <a:xfrm>
-          <a:off x="0" y="0"/>
-          <a:ext cx="0" cy="0"/>
-          <a:chOff x="0" y="0"/>
-          <a:chExt cx="0" cy="0"/>
-        </a:xfrm>
-      </p:grpSpPr>
-      <p:sp>
-        <p:nvSpPr>
-          <p:cNvPr id="2" name="Text 0"/>
-          <p:cNvSpPr/>
-          <p:nvPr/>
-        </p:nvSpPr>
-        <p:spPr>
-          <a:xfrm>
-            <a:off x="457200" y="274320"/>
-            <a:ext cx="640080" cy="548640"/>
-          </a:xfrm>
-          <a:prstGeom prst="rect">
-            <a:avLst/>
-          </a:prstGeom>
-          <a:solidFill>
-            <a:srgbClr val="1F6B5E"/>
-          </a:solidFill>
-          <a:ln/>
-        </p:spPr>
-        <p:txBody>
-          <a:bodyPr wrap="square" rtlCol="0" anchor="ctr"/>
-          <a:lstStyle/>
-          <a:p>
-            <a:pPr algn="ctr" indent="0" marL="0">
-              <a:buNone/>
-            </a:pPr>
-            <a:r>
-              <a:rPr lang="en-US" sz="2400" dirty="0">
-                <a:solidFill>
-                  <a:srgbClr val="FFFFFF"/>
-                </a:solidFill>
-                <a:latin typeface="Arial Narrow" pitchFamily="34" charset="0"/>
-                <a:ea typeface="Arial Narrow" pitchFamily="34" charset="-122"/>
-                <a:cs typeface="Arial Narrow" pitchFamily="34" charset="-120"/>
-              </a:rPr>
-              <a:t>II</a:t>
-            </a:r>
-            <a:endParaRPr lang="en-US" sz="2400" dirty="0"/>
-          </a:p>
-        </p:txBody>
-      </p:sp>
-      <p:sp>
-        <p:nvSpPr>
-          <p:cNvPr id="3" name="Text 1"/>
-          <p:cNvSpPr/>
-          <p:nvPr/>
-        </p:nvSpPr>
-        <p:spPr>
-          <a:xfrm>
-            <a:off x="1234440" y="274320"/>
-            <a:ext cx="8961120" cy="548640"/>
-          </a:xfrm>
-          <a:prstGeom prst="rect">
-            <a:avLst/>
-          </a:prstGeom>
-          <a:noFill/>
-          <a:ln/>
-        </p:spPr>
-        <p:txBody>
-          <a:bodyPr wrap="square" rtlCol="0" anchor="ctr"/>
-          <a:lstStyle/>
-          <a:p>
-            <a:pPr indent="0" marL="0">
-              <a:buNone/>
-            </a:pPr>
-            <a:r>
-              <a:rPr lang="en-US" sz="2800" u="sng" dirty="0">
-                <a:solidFill>
-                  <a:srgbClr val="1F6B5E"/>
-                </a:solidFill>
-                <a:latin typeface="Arial Narrow" pitchFamily="34" charset="0"/>
-                <a:ea typeface="Arial Narrow" pitchFamily="34" charset="-122"/>
-                <a:cs typeface="Arial Narrow" pitchFamily="34" charset="-120"/>
-              </a:rPr>
-              <a:t>- SOCIAL</a:t>
-            </a:r>
-            <a:endParaRPr lang="en-US" sz="2800" dirty="0"/>
-          </a:p>
-        </p:txBody>
-      </p:sp>
-      <p:sp>
-        <p:nvSpPr>
-          <p:cNvPr id="4" name="Shape 2"/>
-          <p:cNvSpPr/>
-          <p:nvPr/>
-        </p:nvSpPr>
-        <p:spPr>
-          <a:xfrm>
-            <a:off x="10881360" y="274320"/>
-            <a:ext cx="301752" cy="566928"/>
-          </a:xfrm>
-          <a:prstGeom prst="rect">
-            <a:avLst/>
-          </a:prstGeom>
-          <a:solidFill>
-            <a:srgbClr val="F77F00"/>
-          </a:solidFill>
-          <a:ln w="12700">
-            <a:solidFill>
-              <a:srgbClr val="F77F00"/>
-            </a:solidFill>
-            <a:prstDash val="solid"/>
-          </a:ln>
-        </p:spPr>
-      </p:sp>
-      <p:sp>
-        <p:nvSpPr>
-          <p:cNvPr id="5" name="Shape 3"/>
-          <p:cNvSpPr/>
-          <p:nvPr/>
-        </p:nvSpPr>
-        <p:spPr>
-          <a:xfrm>
-            <a:off x="11183112" y="274320"/>
-            <a:ext cx="301752" cy="566928"/>
-          </a:xfrm>
-          <a:prstGeom prst="rect">
-            <a:avLst/>
-          </a:prstGeom>
-          <a:solidFill>
-            <a:srgbClr val="FFFFFF"/>
-          </a:solidFill>
-          <a:ln w="12700">
-            <a:solidFill>
-              <a:srgbClr val="FFFFFF"/>
-            </a:solidFill>
-            <a:prstDash val="solid"/>
-          </a:ln>
-        </p:spPr>
-      </p:sp>
-      <p:sp>
-        <p:nvSpPr>
-          <p:cNvPr id="6" name="Shape 4"/>
-          <p:cNvSpPr/>
-          <p:nvPr/>
-        </p:nvSpPr>
-        <p:spPr>
-          <a:xfrm>
-            <a:off x="11484864" y="274320"/>
-            <a:ext cx="301752" cy="566928"/>
-          </a:xfrm>
-          <a:prstGeom prst="rect">
-            <a:avLst/>
-          </a:prstGeom>
-          <a:solidFill>
-            <a:srgbClr val="009E60"/>
-          </a:solidFill>
-          <a:ln w="12700">
-            <a:solidFill>
-              <a:srgbClr val="009E60"/>
-            </a:solidFill>
-            <a:prstDash val="solid"/>
-          </a:ln>
-        </p:spPr>
-      </p:sp>
-      <p:sp>
-        <p:nvSpPr>
-          <p:cNvPr id="7" name="Shape 5"/>
-          <p:cNvSpPr/>
-          <p:nvPr/>
-        </p:nvSpPr>
-        <p:spPr>
-          <a:xfrm>
-            <a:off x="10881360" y="274320"/>
-            <a:ext cx="905256" cy="566928"/>
-          </a:xfrm>
-          <a:prstGeom prst="rect">
-            <a:avLst/>
-          </a:prstGeom>
-          <a:ln w="6350">
-            <a:solidFill>
-              <a:srgbClr val="1F2937"/>
-            </a:solidFill>
-            <a:prstDash val="solid"/>
-          </a:ln>
-        </p:spPr>
-      </p:sp>
-      <p:sp>
-        <p:nvSpPr>
-          <p:cNvPr id="8" name="Shape 6"/>
-          <p:cNvSpPr/>
-          <p:nvPr/>
-        </p:nvSpPr>
-        <p:spPr>
-          <a:xfrm>
-            <a:off x="457200" y="960120"/>
-            <a:ext cx="11292840" cy="0"/>
-          </a:xfrm>
-          <a:prstGeom prst="line">
-            <a:avLst/>
-          </a:prstGeom>
-          <a:noFill/>
-          <a:ln w="6350">
-            <a:solidFill>
-              <a:srgbClr val="A3A3A3"/>
-            </a:solidFill>
-            <a:prstDash val="solid"/>
-          </a:ln>
-        </p:spPr>
-      </p:sp>
-      <p:sp>
-        <p:nvSpPr>
-          <p:cNvPr id="9" name="Text 7"/>
-          <p:cNvSpPr/>
-          <p:nvPr/>
-        </p:nvSpPr>
-        <p:spPr>
-          <a:xfrm>
-            <a:off x="640080" y="1188720"/>
-            <a:ext cx="10972800" cy="4663440"/>
-          </a:xfrm>
-          <a:prstGeom prst="rect">
-            <a:avLst/>
-          </a:prstGeom>
-          <a:noFill/>
-          <a:ln/>
-        </p:spPr>
-        <p:txBody>
-          <a:bodyPr wrap="square" rtlCol="0" anchor="t"/>
-          <a:lstStyle/>
-          <a:p>
-            <a:pPr marL="342900" indent="-342900">
-              <a:spcBef>
-                <a:spcPts val="800"/>
-              </a:spcBef>
-              <a:spcAft>
-                <a:spcPts val="200"/>
-              </a:spcAft>
-              <a:buSzPct val="100000"/>
-              <a:buChar char="❑"/>
-            </a:pPr>
-            <a:r>
-              <a:rPr lang="en-US" sz="1400" b="1" u="sng" dirty="0">
-                <a:solidFill>
-                  <a:srgbClr val="1F6B5E"/>
-                </a:solidFill>
-                <a:latin typeface="Calibri" pitchFamily="34" charset="0"/>
-                <a:ea typeface="Calibri" pitchFamily="34" charset="-122"/>
-                <a:cs typeface="Calibri" pitchFamily="34" charset="-120"/>
-              </a:rPr>
-              <a:t>DALOA : LES COMMERÇANTES MANIFESTENT CONTRE LA HAUSSE DU PRIX DU POISSON, LE PRÉFET APPELLE AU CALME</a:t>
-            </a:r>
-            <a:endParaRPr lang="en-US" sz="1300" dirty="0"/>
-          </a:p>
-          <a:p>
-            <a:pPr lvl="1" marL="685800" indent="-342900">
-              <a:spcAft>
-                <a:spcPts val="200"/>
-              </a:spcAft>
-              <a:buSzPct val="100000"/>
-              <a:buChar char="▪"/>
-            </a:pPr>
-            <a:r>
-              <a:rPr lang="en-US" sz="1300" dirty="0">
-                <a:solidFill>
-                  <a:srgbClr val="1F2937"/>
-                </a:solidFill>
-                <a:latin typeface="Calibri" pitchFamily="34" charset="0"/>
-                <a:ea typeface="Calibri" pitchFamily="34" charset="-122"/>
-                <a:cs typeface="Calibri" pitchFamily="34" charset="-120"/>
-              </a:rPr>
-              <a:t>Source : </a:t>
-            </a:r>
-            <a:pPr indent="0" marL="0">
-              <a:spcAft>
-                <a:spcPts val="200"/>
-              </a:spcAft>
-              <a:buNone/>
-            </a:pPr>
-            <a:r>
-              <a:rPr lang="en-US" sz="1300" u="sng" dirty="0">
-                <a:solidFill>
-                  <a:srgbClr val="1F6B5E"/>
-                </a:solidFill>
-                <a:latin typeface="Calibri" pitchFamily="34" charset="0"/>
-                <a:ea typeface="Calibri" pitchFamily="34" charset="-122"/>
-                <a:cs typeface="Calibri" pitchFamily="34" charset="-120"/>
-                <a:hlinkClick r:id="rId1" invalidUrl="" action="" tgtFrame="" tooltip="" history="1" highlightClick="0" endSnd="0">
-                  <a:extLst>
-                    <a:ext uri="{A12FA001-AC4F-418D-AE19-62706E023703}">
-                      <ahyp:hlinkClr xmlns:ahyp="http://schemas.microsoft.com/office/drawing/2018/hyperlinkcolor" val="tx"/>
-                    </a:ext>
-                  </a:extLst>
-                </a:hlinkClick>
-              </a:rPr>
-              <a:t>Linfodrome</a:t>
-            </a:r>
-            <a:pPr indent="0" marL="0">
-              <a:spcAft>
-                <a:spcPts val="200"/>
-              </a:spcAft>
-              <a:buNone/>
-            </a:pPr>
-            <a:r>
-              <a:rPr lang="en-US" sz="1300" dirty="0">
-                <a:solidFill>
-                  <a:srgbClr val="1F2937"/>
-                </a:solidFill>
-                <a:latin typeface="Calibri" pitchFamily="34" charset="0"/>
-                <a:ea typeface="Calibri" pitchFamily="34" charset="-122"/>
-                <a:cs typeface="Calibri" pitchFamily="34" charset="-120"/>
-              </a:rPr>
-              <a:t> — 21 octobre 2026, 12 h UTC</a:t>
-            </a:r>
-            <a:endParaRPr lang="en-US" sz="1300" dirty="0"/>
-          </a:p>
-        </p:txBody>
-      </p:sp>
-      <p:pic>
-        <p:nvPicPr>
-          <p:cNvPr id="10" name="Image 0" descr="/home/runner/work/SentiqS/SentiqS/scripts/assets/grsci/logo-grsci.png">    </p:cNvPr>
-          <p:cNvPicPr>
-            <a:picLocks noChangeAspect="1"/>
-          </p:cNvPicPr>
-          <p:nvPr/>
-        </p:nvPicPr>
-        <p:blipFill>
-          <a:blip r:embed="rId2"/>
-          <a:stretch>
-            <a:fillRect/>
-          </a:stretch>
-        </p:blipFill>
-        <p:spPr>
-          <a:xfrm>
-            <a:off x="411480" y="5989320"/>
-            <a:ext cx="548640" cy="630936"/>
-          </a:xfrm>
-          <a:prstGeom prst="rect">
-            <a:avLst/>
-          </a:prstGeom>
-        </p:spPr>
-      </p:pic>
-      <p:sp>
-        <p:nvSpPr>
-          <p:cNvPr id="11" name="Text 8"/>
-          <p:cNvSpPr/>
-          <p:nvPr/>
-        </p:nvSpPr>
-        <p:spPr>
-          <a:xfrm>
-            <a:off x="3108960" y="6217920"/>
-            <a:ext cx="4206240" cy="329184"/>
-          </a:xfrm>
-          <a:prstGeom prst="rect">
-            <a:avLst/>
-          </a:prstGeom>
-          <a:noFill/>
-          <a:ln w="9525">
-            <a:solidFill>
-              <a:srgbClr val="1F6B5E"/>
-            </a:solidFill>
-          </a:ln>
-        </p:spPr>
-        <p:txBody>
-          <a:bodyPr wrap="square" rtlCol="0" anchor="ctr"/>
-          <a:lstStyle/>
-          <a:p>
-            <a:pPr algn="ctr" indent="0" marL="0">
-              <a:buNone/>
-            </a:pPr>
-            <a:r>
-              <a:rPr lang="en-US" sz="1200" b="1" dirty="0">
-                <a:solidFill>
-                  <a:srgbClr val="1F2937"/>
-                </a:solidFill>
-                <a:latin typeface="Calibri" pitchFamily="34" charset="0"/>
-                <a:ea typeface="Calibri" pitchFamily="34" charset="-122"/>
-                <a:cs typeface="Calibri" pitchFamily="34" charset="-120"/>
-              </a:rPr>
-              <a:t>G</a:t>
-            </a:r>
-            <a:pPr algn="ctr" indent="0" marL="0">
-              <a:buNone/>
-            </a:pPr>
-            <a:r>
-              <a:rPr lang="en-US" sz="1200" dirty="0">
-                <a:solidFill>
-                  <a:srgbClr val="1F2937"/>
-                </a:solidFill>
-                <a:latin typeface="Calibri" pitchFamily="34" charset="0"/>
-                <a:ea typeface="Calibri" pitchFamily="34" charset="-122"/>
-                <a:cs typeface="Calibri" pitchFamily="34" charset="-120"/>
-              </a:rPr>
-              <a:t>roupe des </a:t>
-            </a:r>
-            <a:pPr algn="ctr" indent="0" marL="0">
-              <a:buNone/>
-            </a:pPr>
-            <a:r>
-              <a:rPr lang="en-US" sz="1200" b="1" dirty="0">
-                <a:solidFill>
-                  <a:srgbClr val="1F2937"/>
-                </a:solidFill>
-                <a:latin typeface="Calibri" pitchFamily="34" charset="0"/>
-                <a:ea typeface="Calibri" pitchFamily="34" charset="-122"/>
-                <a:cs typeface="Calibri" pitchFamily="34" charset="-120"/>
-              </a:rPr>
-              <a:t>R</a:t>
-            </a:r>
-            <a:pPr algn="ctr" indent="0" marL="0">
-              <a:buNone/>
-            </a:pPr>
-            <a:r>
-              <a:rPr lang="en-US" sz="1200" dirty="0">
-                <a:solidFill>
-                  <a:srgbClr val="1F2937"/>
-                </a:solidFill>
-                <a:latin typeface="Calibri" pitchFamily="34" charset="0"/>
-                <a:ea typeface="Calibri" pitchFamily="34" charset="-122"/>
-                <a:cs typeface="Calibri" pitchFamily="34" charset="-120"/>
-              </a:rPr>
-              <a:t>esponsables </a:t>
-            </a:r>
-            <a:pPr algn="ctr" indent="0" marL="0">
-              <a:buNone/>
-            </a:pPr>
-            <a:r>
-              <a:rPr lang="en-US" sz="1200" b="1" dirty="0">
-                <a:solidFill>
-                  <a:srgbClr val="1F2937"/>
-                </a:solidFill>
-                <a:latin typeface="Calibri" pitchFamily="34" charset="0"/>
-                <a:ea typeface="Calibri" pitchFamily="34" charset="-122"/>
-                <a:cs typeface="Calibri" pitchFamily="34" charset="-120"/>
-              </a:rPr>
-              <a:t>S</a:t>
-            </a:r>
-            <a:pPr algn="ctr" indent="0" marL="0">
-              <a:buNone/>
-            </a:pPr>
-            <a:r>
-              <a:rPr lang="en-US" sz="1200" dirty="0">
-                <a:solidFill>
-                  <a:srgbClr val="1F2937"/>
-                </a:solidFill>
-                <a:latin typeface="Calibri" pitchFamily="34" charset="0"/>
-                <a:ea typeface="Calibri" pitchFamily="34" charset="-122"/>
-                <a:cs typeface="Calibri" pitchFamily="34" charset="-120"/>
-              </a:rPr>
-              <a:t>ûreté de </a:t>
-            </a:r>
-            <a:pPr algn="ctr" indent="0" marL="0">
-              <a:buNone/>
-            </a:pPr>
-            <a:r>
-              <a:rPr lang="en-US" sz="1200" b="1" dirty="0">
-                <a:solidFill>
-                  <a:srgbClr val="1F2937"/>
-                </a:solidFill>
-                <a:latin typeface="Calibri" pitchFamily="34" charset="0"/>
-                <a:ea typeface="Calibri" pitchFamily="34" charset="-122"/>
-                <a:cs typeface="Calibri" pitchFamily="34" charset="-120"/>
-              </a:rPr>
-              <a:t>C</a:t>
-            </a:r>
-            <a:pPr algn="ctr" indent="0" marL="0">
-              <a:buNone/>
-            </a:pPr>
-            <a:r>
-              <a:rPr lang="en-US" sz="1200" dirty="0">
-                <a:solidFill>
-                  <a:srgbClr val="1F2937"/>
-                </a:solidFill>
-                <a:latin typeface="Calibri" pitchFamily="34" charset="0"/>
-                <a:ea typeface="Calibri" pitchFamily="34" charset="-122"/>
-                <a:cs typeface="Calibri" pitchFamily="34" charset="-120"/>
-              </a:rPr>
-              <a:t>ôte d'</a:t>
-            </a:r>
-            <a:pPr algn="ctr" indent="0" marL="0">
-              <a:buNone/>
-            </a:pPr>
-            <a:r>
-              <a:rPr lang="en-US" sz="1200" b="1" dirty="0">
-                <a:solidFill>
-                  <a:srgbClr val="1F2937"/>
-                </a:solidFill>
-                <a:latin typeface="Calibri" pitchFamily="34" charset="0"/>
-                <a:ea typeface="Calibri" pitchFamily="34" charset="-122"/>
-                <a:cs typeface="Calibri" pitchFamily="34" charset="-120"/>
-              </a:rPr>
-              <a:t>I</a:t>
-            </a:r>
-            <a:pPr algn="ctr" indent="0" marL="0">
-              <a:buNone/>
-            </a:pPr>
-            <a:r>
-              <a:rPr lang="en-US" sz="1200" dirty="0">
-                <a:solidFill>
-                  <a:srgbClr val="1F2937"/>
-                </a:solidFill>
-                <a:latin typeface="Calibri" pitchFamily="34" charset="0"/>
-                <a:ea typeface="Calibri" pitchFamily="34" charset="-122"/>
-                <a:cs typeface="Calibri" pitchFamily="34" charset="-120"/>
-              </a:rPr>
-              <a:t>voire</a:t>
-            </a:r>
-            <a:endParaRPr lang="en-US" sz="1200" dirty="0"/>
-          </a:p>
-        </p:txBody>
-      </p:sp>
-      <p:sp>
-        <p:nvSpPr>
-          <p:cNvPr id="12" name="Text 9"/>
-          <p:cNvSpPr/>
-          <p:nvPr/>
-        </p:nvSpPr>
-        <p:spPr>
-          <a:xfrm>
-            <a:off x="9418320" y="6309360"/>
-            <a:ext cx="2468880" cy="274320"/>
-          </a:xfrm>
-          <a:prstGeom prst="rect">
-            <a:avLst/>
-          </a:prstGeom>
-          <a:noFill/>
-          <a:ln/>
-        </p:spPr>
-        <p:txBody>
-          <a:bodyPr wrap="square" rtlCol="0" anchor="ctr"/>
-          <a:lstStyle/>
-          <a:p>
-            <a:pPr algn="r" indent="0" marL="0">
-              <a:buNone/>
-            </a:pPr>
-            <a:r>
-              <a:rPr lang="en-US" sz="1000" dirty="0">
-                <a:solidFill>
-                  <a:srgbClr val="1F2937"/>
-                </a:solidFill>
-                <a:latin typeface="Calibri" pitchFamily="34" charset="0"/>
-                <a:ea typeface="Calibri" pitchFamily="34" charset="-122"/>
-                <a:cs typeface="Calibri" pitchFamily="34" charset="-120"/>
-              </a:rPr>
-              <a:t>|  21/10/26   |   5</a:t>
-            </a:r>
-            <a:endParaRPr lang="en-US" sz="1000" dirty="0"/>
-          </a:p>
-        </p:txBody>
-      </p:sp>
-    </p:spTree>
-  </p:cSld>
-  <p:clrMapOvr>
-    <a:masterClrMapping/>
-  </p:clrMapOvr>
-</p:sld>
-</file>
-
-<file path=ppt/slides/slide6.xml><?xml version="1.0" encoding="utf-8"?>
-<p:sld xmlns:a="http://schemas.openxmlformats.org/drawingml/2006/main" xmlns:r="http://schemas.openxmlformats.org/officeDocument/2006/relationships" xmlns:p="http://schemas.openxmlformats.org/presentationml/2006/main">
-  <p:cSld name="Slide 6">
     <p:bg>
       <p:bgPr>
         <a:solidFill>
@@ -13711,7 +9685,633 @@
                 <a:ea typeface="Calibri" pitchFamily="34" charset="-122"/>
                 <a:cs typeface="Calibri" pitchFamily="34" charset="-120"/>
               </a:rPr>
-              <a:t>|  21/10/26   |   6</a:t>
+              <a:t>|  23/10/26   |   5</a:t>
+            </a:r>
+            <a:endParaRPr lang="en-US" sz="1000" dirty="0"/>
+          </a:p>
+        </p:txBody>
+      </p:sp>
+    </p:spTree>
+  </p:cSld>
+  <p:clrMapOvr>
+    <a:masterClrMapping/>
+  </p:clrMapOvr>
+</p:sld>
+</file>
+
+<file path=ppt/slides/slide6.xml><?xml version="1.0" encoding="utf-8"?>
+<p:sld xmlns:a="http://schemas.openxmlformats.org/drawingml/2006/main" xmlns:r="http://schemas.openxmlformats.org/officeDocument/2006/relationships" xmlns:p="http://schemas.openxmlformats.org/presentationml/2006/main">
+  <p:cSld name="Slide 6">
+    <p:spTree>
+      <p:nvGrpSpPr>
+        <p:cNvPr id="1" name=""/>
+        <p:cNvGrpSpPr/>
+        <p:nvPr/>
+      </p:nvGrpSpPr>
+      <p:grpSpPr>
+        <a:xfrm>
+          <a:off x="0" y="0"/>
+          <a:ext cx="0" cy="0"/>
+          <a:chOff x="0" y="0"/>
+          <a:chExt cx="0" cy="0"/>
+        </a:xfrm>
+      </p:grpSpPr>
+      <p:sp>
+        <p:nvSpPr>
+          <p:cNvPr id="2" name="Text 0"/>
+          <p:cNvSpPr/>
+          <p:nvPr/>
+        </p:nvSpPr>
+        <p:spPr>
+          <a:xfrm>
+            <a:off x="457200" y="274320"/>
+            <a:ext cx="640080" cy="548640"/>
+          </a:xfrm>
+          <a:prstGeom prst="rect">
+            <a:avLst/>
+          </a:prstGeom>
+          <a:solidFill>
+            <a:srgbClr val="1F6B5E"/>
+          </a:solidFill>
+          <a:ln/>
+        </p:spPr>
+        <p:txBody>
+          <a:bodyPr wrap="square" rtlCol="0" anchor="ctr"/>
+          <a:lstStyle/>
+          <a:p>
+            <a:pPr algn="ctr" indent="0" marL="0">
+              <a:buNone/>
+            </a:pPr>
+            <a:r>
+              <a:rPr lang="en-US" sz="2400" dirty="0">
+                <a:solidFill>
+                  <a:srgbClr val="FFFFFF"/>
+                </a:solidFill>
+                <a:latin typeface="Arial Narrow" pitchFamily="34" charset="0"/>
+                <a:ea typeface="Arial Narrow" pitchFamily="34" charset="-122"/>
+                <a:cs typeface="Arial Narrow" pitchFamily="34" charset="-120"/>
+              </a:rPr>
+              <a:t>I</a:t>
+            </a:r>
+            <a:endParaRPr lang="en-US" sz="2400" dirty="0"/>
+          </a:p>
+        </p:txBody>
+      </p:sp>
+      <p:sp>
+        <p:nvSpPr>
+          <p:cNvPr id="3" name="Text 1"/>
+          <p:cNvSpPr/>
+          <p:nvPr/>
+        </p:nvSpPr>
+        <p:spPr>
+          <a:xfrm>
+            <a:off x="1234440" y="274320"/>
+            <a:ext cx="8961120" cy="548640"/>
+          </a:xfrm>
+          <a:prstGeom prst="rect">
+            <a:avLst/>
+          </a:prstGeom>
+          <a:noFill/>
+          <a:ln/>
+        </p:spPr>
+        <p:txBody>
+          <a:bodyPr wrap="square" rtlCol="0" anchor="ctr"/>
+          <a:lstStyle/>
+          <a:p>
+            <a:pPr indent="0" marL="0">
+              <a:buNone/>
+            </a:pPr>
+            <a:r>
+              <a:rPr lang="en-US" sz="2800" dirty="0">
+                <a:solidFill>
+                  <a:srgbClr val="1F6B5E"/>
+                </a:solidFill>
+                <a:latin typeface="Arial Narrow" pitchFamily="34" charset="0"/>
+                <a:ea typeface="Arial Narrow" pitchFamily="34" charset="-122"/>
+                <a:cs typeface="Arial Narrow" pitchFamily="34" charset="-120"/>
+              </a:rPr>
+              <a:t>Burkina Faso : situation Fin octobre</a:t>
+            </a:r>
+            <a:endParaRPr lang="en-US" sz="2800" dirty="0"/>
+          </a:p>
+        </p:txBody>
+      </p:sp>
+      <p:sp>
+        <p:nvSpPr>
+          <p:cNvPr id="4" name="Shape 2"/>
+          <p:cNvSpPr/>
+          <p:nvPr/>
+        </p:nvSpPr>
+        <p:spPr>
+          <a:xfrm>
+            <a:off x="10881360" y="274320"/>
+            <a:ext cx="905256" cy="283464"/>
+          </a:xfrm>
+          <a:prstGeom prst="rect">
+            <a:avLst/>
+          </a:prstGeom>
+          <a:solidFill>
+            <a:srgbClr val="EF2B2D"/>
+          </a:solidFill>
+          <a:ln w="12700">
+            <a:solidFill>
+              <a:srgbClr val="EF2B2D"/>
+            </a:solidFill>
+            <a:prstDash val="solid"/>
+          </a:ln>
+        </p:spPr>
+      </p:sp>
+      <p:sp>
+        <p:nvSpPr>
+          <p:cNvPr id="5" name="Shape 3"/>
+          <p:cNvSpPr/>
+          <p:nvPr/>
+        </p:nvSpPr>
+        <p:spPr>
+          <a:xfrm>
+            <a:off x="10881360" y="557784"/>
+            <a:ext cx="905256" cy="283464"/>
+          </a:xfrm>
+          <a:prstGeom prst="rect">
+            <a:avLst/>
+          </a:prstGeom>
+          <a:solidFill>
+            <a:srgbClr val="009E49"/>
+          </a:solidFill>
+          <a:ln w="12700">
+            <a:solidFill>
+              <a:srgbClr val="009E49"/>
+            </a:solidFill>
+            <a:prstDash val="solid"/>
+          </a:ln>
+        </p:spPr>
+      </p:sp>
+      <p:sp>
+        <p:nvSpPr>
+          <p:cNvPr id="6" name="Shape 4"/>
+          <p:cNvSpPr/>
+          <p:nvPr/>
+        </p:nvSpPr>
+        <p:spPr>
+          <a:xfrm>
+            <a:off x="10881360" y="274320"/>
+            <a:ext cx="905256" cy="566928"/>
+          </a:xfrm>
+          <a:prstGeom prst="rect">
+            <a:avLst/>
+          </a:prstGeom>
+          <a:ln w="6350">
+            <a:solidFill>
+              <a:srgbClr val="1F2937"/>
+            </a:solidFill>
+            <a:prstDash val="solid"/>
+          </a:ln>
+        </p:spPr>
+      </p:sp>
+      <p:sp>
+        <p:nvSpPr>
+          <p:cNvPr id="7" name="Shape 5"/>
+          <p:cNvSpPr/>
+          <p:nvPr/>
+        </p:nvSpPr>
+        <p:spPr>
+          <a:xfrm>
+            <a:off x="457200" y="960120"/>
+            <a:ext cx="11292840" cy="0"/>
+          </a:xfrm>
+          <a:prstGeom prst="line">
+            <a:avLst/>
+          </a:prstGeom>
+          <a:noFill/>
+          <a:ln w="6350">
+            <a:solidFill>
+              <a:srgbClr val="A3A3A3"/>
+            </a:solidFill>
+            <a:prstDash val="solid"/>
+          </a:ln>
+        </p:spPr>
+      </p:sp>
+      <p:sp>
+        <p:nvSpPr>
+          <p:cNvPr id="8" name="Text 6"/>
+          <p:cNvSpPr/>
+          <p:nvPr/>
+        </p:nvSpPr>
+        <p:spPr>
+          <a:xfrm>
+            <a:off x="640080" y="1188720"/>
+            <a:ext cx="10972800" cy="4663440"/>
+          </a:xfrm>
+          <a:prstGeom prst="rect">
+            <a:avLst/>
+          </a:prstGeom>
+          <a:noFill/>
+          <a:ln/>
+        </p:spPr>
+        <p:txBody>
+          <a:bodyPr wrap="square" rtlCol="0" anchor="t"/>
+          <a:lstStyle/>
+          <a:p>
+            <a:pPr marL="342900" indent="-342900">
+              <a:spcBef>
+                <a:spcPts val="800"/>
+              </a:spcBef>
+              <a:spcAft>
+                <a:spcPts val="200"/>
+              </a:spcAft>
+              <a:buSzPct val="100000"/>
+              <a:buChar char="❑"/>
+            </a:pPr>
+            <a:r>
+              <a:rPr lang="en-US" sz="1400" b="1" u="sng" dirty="0">
+                <a:solidFill>
+                  <a:srgbClr val="1F6B5E"/>
+                </a:solidFill>
+                <a:latin typeface="Calibri" pitchFamily="34" charset="0"/>
+                <a:ea typeface="Calibri" pitchFamily="34" charset="-122"/>
+                <a:cs typeface="Calibri" pitchFamily="34" charset="-120"/>
+              </a:rPr>
+              <a:t>LE PAYS RÉTABLIT LA PEINE DE MORT</a:t>
+            </a:r>
+            <a:endParaRPr lang="en-US" sz="1300" dirty="0"/>
+          </a:p>
+          <a:p>
+            <a:pPr lvl="1" marL="685800" indent="-342900">
+              <a:spcAft>
+                <a:spcPts val="200"/>
+              </a:spcAft>
+              <a:buSzPct val="100000"/>
+              <a:buChar char="▪"/>
+            </a:pPr>
+            <a:r>
+              <a:rPr lang="en-US" sz="1300" dirty="0">
+                <a:solidFill>
+                  <a:srgbClr val="1F2937"/>
+                </a:solidFill>
+                <a:latin typeface="Calibri" pitchFamily="34" charset="0"/>
+                <a:ea typeface="Calibri" pitchFamily="34" charset="-122"/>
+                <a:cs typeface="Calibri" pitchFamily="34" charset="-120"/>
+              </a:rPr>
+              <a:t>Source : </a:t>
+            </a:r>
+            <a:pPr indent="0" marL="0">
+              <a:spcAft>
+                <a:spcPts val="200"/>
+              </a:spcAft>
+              <a:buNone/>
+            </a:pPr>
+            <a:r>
+              <a:rPr lang="en-US" sz="1300" u="sng" dirty="0">
+                <a:solidFill>
+                  <a:srgbClr val="1F6B5E"/>
+                </a:solidFill>
+                <a:latin typeface="Calibri" pitchFamily="34" charset="0"/>
+                <a:ea typeface="Calibri" pitchFamily="34" charset="-122"/>
+                <a:cs typeface="Calibri" pitchFamily="34" charset="-120"/>
+                <a:hlinkClick r:id="rId1" invalidUrl="" action="" tgtFrame="" tooltip="" history="1" highlightClick="0" endSnd="0">
+                  <a:extLst>
+                    <a:ext uri="{A12FA001-AC4F-418D-AE19-62706E023703}">
+                      <ahyp:hlinkClr xmlns:ahyp="http://schemas.microsoft.com/office/drawing/2018/hyperlinkcolor" val="tx"/>
+                    </a:ext>
+                  </a:extLst>
+                </a:hlinkClick>
+              </a:rPr>
+              <a:t>AllAfrica (BF)</a:t>
+            </a:r>
+            <a:pPr indent="0" marL="0">
+              <a:spcAft>
+                <a:spcPts val="200"/>
+              </a:spcAft>
+              <a:buNone/>
+            </a:pPr>
+            <a:r>
+              <a:rPr lang="en-US" sz="1300" dirty="0">
+                <a:solidFill>
+                  <a:srgbClr val="1F2937"/>
+                </a:solidFill>
+                <a:latin typeface="Calibri" pitchFamily="34" charset="0"/>
+                <a:ea typeface="Calibri" pitchFamily="34" charset="-122"/>
+                <a:cs typeface="Calibri" pitchFamily="34" charset="-120"/>
+              </a:rPr>
+              <a:t> — 22 octobre 2026, 15 h UTC</a:t>
+            </a:r>
+            <a:endParaRPr lang="en-US" sz="1300" dirty="0"/>
+          </a:p>
+          <a:p>
+            <a:pPr marL="342900" indent="-342900">
+              <a:spcBef>
+                <a:spcPts val="800"/>
+              </a:spcBef>
+              <a:spcAft>
+                <a:spcPts val="200"/>
+              </a:spcAft>
+              <a:buSzPct val="100000"/>
+              <a:buChar char="❑"/>
+            </a:pPr>
+            <a:r>
+              <a:rPr lang="en-US" sz="1400" b="1" u="sng" dirty="0">
+                <a:solidFill>
+                  <a:srgbClr val="1F6B5E"/>
+                </a:solidFill>
+                <a:latin typeface="Calibri" pitchFamily="34" charset="0"/>
+                <a:ea typeface="Calibri" pitchFamily="34" charset="-122"/>
+                <a:cs typeface="Calibri" pitchFamily="34" charset="-120"/>
+              </a:rPr>
+              <a:t>AÉROPORT INTERNATIONAL DE OUAGADOUGOU : LA SAFA RENFORCE LA PRÉPARATION AUX SITUATIONS D’URGENCE</a:t>
+            </a:r>
+            <a:endParaRPr lang="en-US" sz="1300" dirty="0"/>
+          </a:p>
+          <a:p>
+            <a:pPr lvl="1" marL="685800" indent="-342900">
+              <a:spcAft>
+                <a:spcPts val="200"/>
+              </a:spcAft>
+              <a:buSzPct val="100000"/>
+              <a:buChar char="▪"/>
+            </a:pPr>
+            <a:r>
+              <a:rPr lang="en-US" sz="1300" dirty="0">
+                <a:solidFill>
+                  <a:srgbClr val="1F2937"/>
+                </a:solidFill>
+                <a:latin typeface="Calibri" pitchFamily="34" charset="0"/>
+                <a:ea typeface="Calibri" pitchFamily="34" charset="-122"/>
+                <a:cs typeface="Calibri" pitchFamily="34" charset="-120"/>
+              </a:rPr>
+              <a:t>Source : </a:t>
+            </a:r>
+            <a:pPr indent="0" marL="0">
+              <a:spcAft>
+                <a:spcPts val="200"/>
+              </a:spcAft>
+              <a:buNone/>
+            </a:pPr>
+            <a:r>
+              <a:rPr lang="en-US" sz="1300" u="sng" dirty="0">
+                <a:solidFill>
+                  <a:srgbClr val="1F6B5E"/>
+                </a:solidFill>
+                <a:latin typeface="Calibri" pitchFamily="34" charset="0"/>
+                <a:ea typeface="Calibri" pitchFamily="34" charset="-122"/>
+                <a:cs typeface="Calibri" pitchFamily="34" charset="-120"/>
+                <a:hlinkClick r:id="rId2" invalidUrl="" action="" tgtFrame="" tooltip="" history="1" highlightClick="0" endSnd="0">
+                  <a:extLst>
+                    <a:ext uri="{A12FA001-AC4F-418D-AE19-62706E023703}">
+                      <ahyp:hlinkClr xmlns:ahyp="http://schemas.microsoft.com/office/drawing/2018/hyperlinkcolor" val="tx"/>
+                    </a:ext>
+                  </a:extLst>
+                </a:hlinkClick>
+              </a:rPr>
+              <a:t>Faso7</a:t>
+            </a:r>
+            <a:pPr indent="0" marL="0">
+              <a:spcAft>
+                <a:spcPts val="200"/>
+              </a:spcAft>
+              <a:buNone/>
+            </a:pPr>
+            <a:r>
+              <a:rPr lang="en-US" sz="1300" dirty="0">
+                <a:solidFill>
+                  <a:srgbClr val="1F2937"/>
+                </a:solidFill>
+                <a:latin typeface="Calibri" pitchFamily="34" charset="0"/>
+                <a:ea typeface="Calibri" pitchFamily="34" charset="-122"/>
+                <a:cs typeface="Calibri" pitchFamily="34" charset="-120"/>
+              </a:rPr>
+              <a:t> — 22 octobre 2026, 16 h UTC</a:t>
+            </a:r>
+            <a:endParaRPr lang="en-US" sz="1300" dirty="0"/>
+          </a:p>
+        </p:txBody>
+      </p:sp>
+      <p:pic>
+        <p:nvPicPr>
+          <p:cNvPr id="9" name="Image 0" descr="/home/runner/work/SentiqS/SentiqS/scripts/assets/grsci/logo-grsci.png">    </p:cNvPr>
+          <p:cNvPicPr>
+            <a:picLocks noChangeAspect="1"/>
+          </p:cNvPicPr>
+          <p:nvPr/>
+        </p:nvPicPr>
+        <p:blipFill>
+          <a:blip r:embed="rId3"/>
+          <a:stretch>
+            <a:fillRect/>
+          </a:stretch>
+        </p:blipFill>
+        <p:spPr>
+          <a:xfrm>
+            <a:off x="411480" y="5989320"/>
+            <a:ext cx="548640" cy="630936"/>
+          </a:xfrm>
+          <a:prstGeom prst="rect">
+            <a:avLst/>
+          </a:prstGeom>
+        </p:spPr>
+      </p:pic>
+      <p:sp>
+        <p:nvSpPr>
+          <p:cNvPr id="10" name="Text 7"/>
+          <p:cNvSpPr/>
+          <p:nvPr/>
+        </p:nvSpPr>
+        <p:spPr>
+          <a:xfrm>
+            <a:off x="3108960" y="6217920"/>
+            <a:ext cx="4206240" cy="329184"/>
+          </a:xfrm>
+          <a:prstGeom prst="rect">
+            <a:avLst/>
+          </a:prstGeom>
+          <a:noFill/>
+          <a:ln w="9525">
+            <a:solidFill>
+              <a:srgbClr val="1F6B5E"/>
+            </a:solidFill>
+          </a:ln>
+        </p:spPr>
+        <p:txBody>
+          <a:bodyPr wrap="square" rtlCol="0" anchor="ctr"/>
+          <a:lstStyle/>
+          <a:p>
+            <a:pPr algn="ctr" indent="0" marL="0">
+              <a:buNone/>
+            </a:pPr>
+            <a:r>
+              <a:rPr lang="en-US" sz="1200" b="1" dirty="0">
+                <a:solidFill>
+                  <a:srgbClr val="1F2937"/>
+                </a:solidFill>
+                <a:latin typeface="Calibri" pitchFamily="34" charset="0"/>
+                <a:ea typeface="Calibri" pitchFamily="34" charset="-122"/>
+                <a:cs typeface="Calibri" pitchFamily="34" charset="-120"/>
+              </a:rPr>
+              <a:t>G</a:t>
+            </a:r>
+            <a:pPr algn="ctr" indent="0" marL="0">
+              <a:buNone/>
+            </a:pPr>
+            <a:r>
+              <a:rPr lang="en-US" sz="1200" dirty="0">
+                <a:solidFill>
+                  <a:srgbClr val="1F2937"/>
+                </a:solidFill>
+                <a:latin typeface="Calibri" pitchFamily="34" charset="0"/>
+                <a:ea typeface="Calibri" pitchFamily="34" charset="-122"/>
+                <a:cs typeface="Calibri" pitchFamily="34" charset="-120"/>
+              </a:rPr>
+              <a:t>roupe des </a:t>
+            </a:r>
+            <a:pPr algn="ctr" indent="0" marL="0">
+              <a:buNone/>
+            </a:pPr>
+            <a:r>
+              <a:rPr lang="en-US" sz="1200" b="1" dirty="0">
+                <a:solidFill>
+                  <a:srgbClr val="1F2937"/>
+                </a:solidFill>
+                <a:latin typeface="Calibri" pitchFamily="34" charset="0"/>
+                <a:ea typeface="Calibri" pitchFamily="34" charset="-122"/>
+                <a:cs typeface="Calibri" pitchFamily="34" charset="-120"/>
+              </a:rPr>
+              <a:t>R</a:t>
+            </a:r>
+            <a:pPr algn="ctr" indent="0" marL="0">
+              <a:buNone/>
+            </a:pPr>
+            <a:r>
+              <a:rPr lang="en-US" sz="1200" dirty="0">
+                <a:solidFill>
+                  <a:srgbClr val="1F2937"/>
+                </a:solidFill>
+                <a:latin typeface="Calibri" pitchFamily="34" charset="0"/>
+                <a:ea typeface="Calibri" pitchFamily="34" charset="-122"/>
+                <a:cs typeface="Calibri" pitchFamily="34" charset="-120"/>
+              </a:rPr>
+              <a:t>esponsables </a:t>
+            </a:r>
+            <a:pPr algn="ctr" indent="0" marL="0">
+              <a:buNone/>
+            </a:pPr>
+            <a:r>
+              <a:rPr lang="en-US" sz="1200" b="1" dirty="0">
+                <a:solidFill>
+                  <a:srgbClr val="1F2937"/>
+                </a:solidFill>
+                <a:latin typeface="Calibri" pitchFamily="34" charset="0"/>
+                <a:ea typeface="Calibri" pitchFamily="34" charset="-122"/>
+                <a:cs typeface="Calibri" pitchFamily="34" charset="-120"/>
+              </a:rPr>
+              <a:t>S</a:t>
+            </a:r>
+            <a:pPr algn="ctr" indent="0" marL="0">
+              <a:buNone/>
+            </a:pPr>
+            <a:r>
+              <a:rPr lang="en-US" sz="1200" dirty="0">
+                <a:solidFill>
+                  <a:srgbClr val="1F2937"/>
+                </a:solidFill>
+                <a:latin typeface="Calibri" pitchFamily="34" charset="0"/>
+                <a:ea typeface="Calibri" pitchFamily="34" charset="-122"/>
+                <a:cs typeface="Calibri" pitchFamily="34" charset="-120"/>
+              </a:rPr>
+              <a:t>ûreté de </a:t>
+            </a:r>
+            <a:pPr algn="ctr" indent="0" marL="0">
+              <a:buNone/>
+            </a:pPr>
+            <a:r>
+              <a:rPr lang="en-US" sz="1200" b="1" dirty="0">
+                <a:solidFill>
+                  <a:srgbClr val="1F2937"/>
+                </a:solidFill>
+                <a:latin typeface="Calibri" pitchFamily="34" charset="0"/>
+                <a:ea typeface="Calibri" pitchFamily="34" charset="-122"/>
+                <a:cs typeface="Calibri" pitchFamily="34" charset="-120"/>
+              </a:rPr>
+              <a:t>C</a:t>
+            </a:r>
+            <a:pPr algn="ctr" indent="0" marL="0">
+              <a:buNone/>
+            </a:pPr>
+            <a:r>
+              <a:rPr lang="en-US" sz="1200" dirty="0">
+                <a:solidFill>
+                  <a:srgbClr val="1F2937"/>
+                </a:solidFill>
+                <a:latin typeface="Calibri" pitchFamily="34" charset="0"/>
+                <a:ea typeface="Calibri" pitchFamily="34" charset="-122"/>
+                <a:cs typeface="Calibri" pitchFamily="34" charset="-120"/>
+              </a:rPr>
+              <a:t>ôte d'</a:t>
+            </a:r>
+            <a:pPr algn="ctr" indent="0" marL="0">
+              <a:buNone/>
+            </a:pPr>
+            <a:r>
+              <a:rPr lang="en-US" sz="1200" b="1" dirty="0">
+                <a:solidFill>
+                  <a:srgbClr val="1F2937"/>
+                </a:solidFill>
+                <a:latin typeface="Calibri" pitchFamily="34" charset="0"/>
+                <a:ea typeface="Calibri" pitchFamily="34" charset="-122"/>
+                <a:cs typeface="Calibri" pitchFamily="34" charset="-120"/>
+              </a:rPr>
+              <a:t>I</a:t>
+            </a:r>
+            <a:pPr algn="ctr" indent="0" marL="0">
+              <a:buNone/>
+            </a:pPr>
+            <a:r>
+              <a:rPr lang="en-US" sz="1200" dirty="0">
+                <a:solidFill>
+                  <a:srgbClr val="1F2937"/>
+                </a:solidFill>
+                <a:latin typeface="Calibri" pitchFamily="34" charset="0"/>
+                <a:ea typeface="Calibri" pitchFamily="34" charset="-122"/>
+                <a:cs typeface="Calibri" pitchFamily="34" charset="-120"/>
+              </a:rPr>
+              <a:t>voire</a:t>
+            </a:r>
+            <a:endParaRPr lang="en-US" sz="1200" dirty="0"/>
+          </a:p>
+        </p:txBody>
+      </p:sp>
+      <p:sp>
+        <p:nvSpPr>
+          <p:cNvPr id="11" name="Text 8"/>
+          <p:cNvSpPr/>
+          <p:nvPr/>
+        </p:nvSpPr>
+        <p:spPr>
+          <a:xfrm>
+            <a:off x="9418320" y="6309360"/>
+            <a:ext cx="2468880" cy="274320"/>
+          </a:xfrm>
+          <a:prstGeom prst="rect">
+            <a:avLst/>
+          </a:prstGeom>
+          <a:noFill/>
+          <a:ln/>
+        </p:spPr>
+        <p:txBody>
+          <a:bodyPr wrap="square" rtlCol="0" anchor="ctr"/>
+          <a:lstStyle/>
+          <a:p>
+            <a:pPr algn="r" indent="0" marL="0">
+              <a:buNone/>
+            </a:pPr>
+            <a:r>
+              <a:rPr lang="en-US" sz="1000" dirty="0">
+                <a:solidFill>
+                  <a:srgbClr val="1F2937"/>
+                </a:solidFill>
+                <a:latin typeface="Calibri" pitchFamily="34" charset="0"/>
+                <a:ea typeface="Calibri" pitchFamily="34" charset="-122"/>
+                <a:cs typeface="Calibri" pitchFamily="34" charset="-120"/>
+              </a:rPr>
+              <a:t>|  23/10/26   |   6</a:t>
             </a:r>
             <a:endParaRPr lang="en-US" sz="1000" dirty="0"/>
           </a:p>
@@ -13777,7 +10377,7 @@
                 <a:ea typeface="Arial Narrow" pitchFamily="34" charset="-122"/>
                 <a:cs typeface="Arial Narrow" pitchFamily="34" charset="-120"/>
               </a:rPr>
-              <a:t>I</a:t>
+              <a:t>II</a:t>
             </a:r>
             <a:endParaRPr lang="en-US" sz="2400" dirty="0"/>
           </a:p>
@@ -13816,7 +10416,7 @@
                 <a:ea typeface="Arial Narrow" pitchFamily="34" charset="-122"/>
                 <a:cs typeface="Arial Narrow" pitchFamily="34" charset="-120"/>
               </a:rPr>
-              <a:t>Burkina Faso : situation Fin octobre</a:t>
+              <a:t>Mali</a:t>
             </a:r>
             <a:endParaRPr lang="en-US" sz="2800" dirty="0"/>
           </a:p>
@@ -13831,17 +10431,17 @@
         <p:spPr>
           <a:xfrm>
             <a:off x="10881360" y="274320"/>
-            <a:ext cx="905256" cy="283464"/>
+            <a:ext cx="301752" cy="566928"/>
           </a:xfrm>
           <a:prstGeom prst="rect">
             <a:avLst/>
           </a:prstGeom>
           <a:solidFill>
-            <a:srgbClr val="EF2B2D"/>
+            <a:srgbClr val="14B53A"/>
           </a:solidFill>
           <a:ln w="12700">
             <a:solidFill>
-              <a:srgbClr val="EF2B2D"/>
+              <a:srgbClr val="14B53A"/>
             </a:solidFill>
             <a:prstDash val="solid"/>
           </a:ln>
@@ -13855,18 +10455,18 @@
         </p:nvSpPr>
         <p:spPr>
           <a:xfrm>
-            <a:off x="10881360" y="557784"/>
-            <a:ext cx="905256" cy="283464"/>
+            <a:off x="11183112" y="274320"/>
+            <a:ext cx="301752" cy="566928"/>
           </a:xfrm>
           <a:prstGeom prst="rect">
             <a:avLst/>
           </a:prstGeom>
           <a:solidFill>
-            <a:srgbClr val="009E49"/>
+            <a:srgbClr val="FCD116"/>
           </a:solidFill>
           <a:ln w="12700">
             <a:solidFill>
-              <a:srgbClr val="009E49"/>
+              <a:srgbClr val="FCD116"/>
             </a:solidFill>
             <a:prstDash val="solid"/>
           </a:ln>
@@ -13875,6 +10475,31 @@
       <p:sp>
         <p:nvSpPr>
           <p:cNvPr id="6" name="Shape 4"/>
+          <p:cNvSpPr/>
+          <p:nvPr/>
+        </p:nvSpPr>
+        <p:spPr>
+          <a:xfrm>
+            <a:off x="11484864" y="274320"/>
+            <a:ext cx="301752" cy="566928"/>
+          </a:xfrm>
+          <a:prstGeom prst="rect">
+            <a:avLst/>
+          </a:prstGeom>
+          <a:solidFill>
+            <a:srgbClr val="CE1126"/>
+          </a:solidFill>
+          <a:ln w="12700">
+            <a:solidFill>
+              <a:srgbClr val="CE1126"/>
+            </a:solidFill>
+            <a:prstDash val="solid"/>
+          </a:ln>
+        </p:spPr>
+      </p:sp>
+      <p:sp>
+        <p:nvSpPr>
+          <p:cNvPr id="7" name="Shape 5"/>
           <p:cNvSpPr/>
           <p:nvPr/>
         </p:nvSpPr>
@@ -13896,7 +10521,7 @@
       </p:sp>
       <p:sp>
         <p:nvSpPr>
-          <p:cNvPr id="7" name="Shape 5"/>
+          <p:cNvPr id="8" name="Shape 6"/>
           <p:cNvSpPr/>
           <p:nvPr/>
         </p:nvSpPr>
@@ -13919,7 +10544,7 @@
       </p:sp>
       <p:sp>
         <p:nvSpPr>
-          <p:cNvPr id="8" name="Text 6"/>
+          <p:cNvPr id="9" name="Text 7"/>
           <p:cNvSpPr/>
           <p:nvPr/>
         </p:nvSpPr>
@@ -13957,7 +10582,7 @@
                 <a:ea typeface="Calibri" pitchFamily="34" charset="-122"/>
                 <a:cs typeface="Calibri" pitchFamily="34" charset="-120"/>
               </a:rPr>
-              <a:t>LE BURKINA FASO RÉTABLIT LA PEINE DE MORT, ABOLIE EN 2018 !</a:t>
+              <a:t>GRÈVE JUGÉE HORS-CADRE À KOLOKANI : L’ADMINISTRATION SCOLAIRE FIXE UN ULTIMATUM AUX ENSEIGNANTS COMMUNAUTAIRES</a:t>
             </a:r>
             <a:endParaRPr lang="en-US" sz="1300" dirty="0"/>
           </a:p>
@@ -14002,7 +10627,7 @@
                   </a:extLst>
                 </a:hlinkClick>
               </a:rPr>
-              <a:t>Actu Cameroun</a:t>
+              <a:t>Maliactu</a:t>
             </a:r>
             <a:pPr indent="0" marL="0">
               <a:spcAft>
@@ -14019,7 +10644,7 @@
                 <a:ea typeface="Calibri" pitchFamily="34" charset="-122"/>
                 <a:cs typeface="Calibri" pitchFamily="34" charset="-120"/>
               </a:rPr>
-              <a:t> — 21 octobre 2026, 10 h UTC</a:t>
+              <a:t> — 23 octobre 2026, 6 h UTC</a:t>
             </a:r>
             <a:endParaRPr lang="en-US" sz="1300" dirty="0"/>
           </a:p>
@@ -14043,7 +10668,7 @@
                 <a:ea typeface="Calibri" pitchFamily="34" charset="-122"/>
                 <a:cs typeface="Calibri" pitchFamily="34" charset="-120"/>
               </a:rPr>
-              <a:t>« LE SENTIMENTALISME, C’EST FINI » : AU BURKINA FASO, IBRAHIM TRAORÉ RÉTABLIT LA PEINE DE MORT</a:t>
+              <a:t>COUP DE FORCE À LA FRONTIÈRE : L'ARMÉE ALGÉRIENNE FERME TINZAOUATEN ET TIMIAOUINE POUR TRAQUER LES TRAFIQUANTS</a:t>
             </a:r>
             <a:endParaRPr lang="en-US" sz="1300" dirty="0"/>
           </a:p>
@@ -14088,7 +10713,7 @@
                   </a:extLst>
                 </a:hlinkClick>
               </a:rPr>
-              <a:t>Jeune Afrique</a:t>
+              <a:t>Malijet</a:t>
             </a:r>
             <a:pPr indent="0" marL="0">
               <a:spcAft>
@@ -14105,7 +10730,7 @@
                 <a:ea typeface="Calibri" pitchFamily="34" charset="-122"/>
                 <a:cs typeface="Calibri" pitchFamily="34" charset="-120"/>
               </a:rPr>
-              <a:t> — 21 octobre 2026, 9 h UTC</a:t>
+              <a:t> — 22 octobre 2026, 16 h UTC</a:t>
             </a:r>
             <a:endParaRPr lang="en-US" sz="1300" dirty="0"/>
           </a:p>
@@ -14129,7 +10754,7 @@
                 <a:ea typeface="Calibri" pitchFamily="34" charset="-122"/>
                 <a:cs typeface="Calibri" pitchFamily="34" charset="-120"/>
               </a:rPr>
-              <a:t>BURKINA FASO : LA PEINE DE MORT RÉTABLIE DANS LE NOUVEAU CODE PÉNAL</a:t>
+              <a:t>CYBERCRIMINALITÉ : INTERPOL DÉVOILE LE BILAN D’ENVERGURE DE L’OPÉRATION « SERENGETI III » EN AFRIQUE</a:t>
             </a:r>
             <a:endParaRPr lang="en-US" sz="1300" dirty="0"/>
           </a:p>
@@ -14191,7 +10816,7 @@
                 <a:ea typeface="Calibri" pitchFamily="34" charset="-122"/>
                 <a:cs typeface="Calibri" pitchFamily="34" charset="-120"/>
               </a:rPr>
-              <a:t> — 21 octobre 2026, 8 h UTC</a:t>
+              <a:t> — 22 octobre 2026, 19 h UTC</a:t>
             </a:r>
             <a:endParaRPr lang="en-US" sz="1300" dirty="0"/>
           </a:p>
@@ -14215,7 +10840,7 @@
                 <a:ea typeface="Calibri" pitchFamily="34" charset="-122"/>
                 <a:cs typeface="Calibri" pitchFamily="34" charset="-120"/>
               </a:rPr>
-              <a:t>BURKINA FASO : LE PARLEMENT VOTE LE RÉTABLISSEMENT DE LA PEINE DE MORT</a:t>
+              <a:t>MOPTI : LE PARI DU RETOUR AU PAYS, OU COMMENT 40 FAMILLES RÉINVENTENT LEUR AVENIR DANS LE CENTRE DU MALI</a:t>
             </a:r>
             <a:endParaRPr lang="en-US" sz="1300" dirty="0"/>
           </a:p>
@@ -14260,7 +10885,7 @@
                   </a:extLst>
                 </a:hlinkClick>
               </a:rPr>
-              <a:t>Africanews — Chaine panafricaine</a:t>
+              <a:t>Maliactu</a:t>
             </a:r>
             <a:pPr indent="0" marL="0">
               <a:spcAft>
@@ -14277,7 +10902,7 @@
                 <a:ea typeface="Calibri" pitchFamily="34" charset="-122"/>
                 <a:cs typeface="Calibri" pitchFamily="34" charset="-120"/>
               </a:rPr>
-              <a:t> — 21 octobre 2026, 7 h UTC</a:t>
+              <a:t> — 22 octobre 2026, 18 h UTC</a:t>
             </a:r>
             <a:endParaRPr lang="en-US" sz="1300" dirty="0"/>
           </a:p>
@@ -14301,7 +10926,7 @@
                 <a:ea typeface="Calibri" pitchFamily="34" charset="-122"/>
                 <a:cs typeface="Calibri" pitchFamily="34" charset="-120"/>
               </a:rPr>
-              <a:t>BURKINA FASO: LA JUNTE AU POUVOIR RÉTABLIT LA PEINE DE MORT</a:t>
+              <a:t>MALI : LES RAISONS DES TENSIONS ENTRE ISMAËL WAGUÉ ET SÉKOU BOLLY</a:t>
             </a:r>
             <a:endParaRPr lang="en-US" sz="1300" dirty="0"/>
           </a:p>
@@ -14346,7 +10971,7 @@
                   </a:extLst>
                 </a:hlinkClick>
               </a:rPr>
-              <a:t>RFI Afrique</a:t>
+              <a:t>Jeune Afrique</a:t>
             </a:r>
             <a:pPr indent="0" marL="0">
               <a:spcAft>
@@ -14363,7 +10988,7 @@
                 <a:ea typeface="Calibri" pitchFamily="34" charset="-122"/>
                 <a:cs typeface="Calibri" pitchFamily="34" charset="-120"/>
               </a:rPr>
-              <a:t> — 21 octobre 2026, 3 h UTC</a:t>
+              <a:t> — 22 octobre 2026, 7 h UTC</a:t>
             </a:r>
             <a:endParaRPr lang="en-US" sz="1300" dirty="0"/>
           </a:p>
@@ -14371,7 +10996,7 @@
       </p:sp>
       <p:pic>
         <p:nvPicPr>
-          <p:cNvPr id="9" name="Image 0" descr="/home/runner/work/SentiqS/SentiqS/scripts/assets/grsci/logo-grsci.png">    </p:cNvPr>
+          <p:cNvPr id="10" name="Image 0" descr="/home/runner/work/SentiqS/SentiqS/scripts/assets/grsci/logo-grsci.png">    </p:cNvPr>
           <p:cNvPicPr>
             <a:picLocks noChangeAspect="1"/>
           </p:cNvPicPr>
@@ -14395,7 +11020,7 @@
       </p:pic>
       <p:sp>
         <p:nvSpPr>
-          <p:cNvPr id="10" name="Text 7"/>
+          <p:cNvPr id="11" name="Text 8"/>
           <p:cNvSpPr/>
           <p:nvPr/>
         </p:nvSpPr>
@@ -14564,7 +11189,7 @@
       </p:sp>
       <p:sp>
         <p:nvSpPr>
-          <p:cNvPr id="11" name="Text 8"/>
+          <p:cNvPr id="12" name="Text 9"/>
           <p:cNvSpPr/>
           <p:nvPr/>
         </p:nvSpPr>
@@ -14595,7 +11220,7 @@
                 <a:ea typeface="Calibri" pitchFamily="34" charset="-122"/>
                 <a:cs typeface="Calibri" pitchFamily="34" charset="-120"/>
               </a:rPr>
-              <a:t>|  21/10/26   |   7</a:t>
+              <a:t>|  23/10/26   |   7</a:t>
             </a:r>
             <a:endParaRPr lang="en-US" sz="1000" dirty="0"/>
           </a:p>
@@ -14661,7 +11286,7 @@
                 <a:ea typeface="Arial Narrow" pitchFamily="34" charset="-122"/>
                 <a:cs typeface="Arial Narrow" pitchFamily="34" charset="-120"/>
               </a:rPr>
-              <a:t>I</a:t>
+              <a:t>III</a:t>
             </a:r>
             <a:endParaRPr lang="en-US" sz="2400" dirty="0"/>
           </a:p>
@@ -14700,7 +11325,7 @@
                 <a:ea typeface="Arial Narrow" pitchFamily="34" charset="-122"/>
                 <a:cs typeface="Arial Narrow" pitchFamily="34" charset="-120"/>
               </a:rPr>
-              <a:t>Burkina Faso</a:t>
+              <a:t>Niger</a:t>
             </a:r>
             <a:endParaRPr lang="en-US" sz="2800" dirty="0"/>
           </a:p>
@@ -14715,17 +11340,17 @@
         <p:spPr>
           <a:xfrm>
             <a:off x="10881360" y="274320"/>
-            <a:ext cx="905256" cy="283464"/>
+            <a:ext cx="905256" cy="188976"/>
           </a:xfrm>
           <a:prstGeom prst="rect">
             <a:avLst/>
           </a:prstGeom>
           <a:solidFill>
-            <a:srgbClr val="EF2B2D"/>
+            <a:srgbClr val="E05206"/>
           </a:solidFill>
           <a:ln w="12700">
             <a:solidFill>
-              <a:srgbClr val="EF2B2D"/>
+              <a:srgbClr val="E05206"/>
             </a:solidFill>
             <a:prstDash val="solid"/>
           </a:ln>
@@ -14739,18 +11364,18 @@
         </p:nvSpPr>
         <p:spPr>
           <a:xfrm>
-            <a:off x="10881360" y="557784"/>
-            <a:ext cx="905256" cy="283464"/>
+            <a:off x="10881360" y="463296"/>
+            <a:ext cx="905256" cy="188976"/>
           </a:xfrm>
           <a:prstGeom prst="rect">
             <a:avLst/>
           </a:prstGeom>
           <a:solidFill>
-            <a:srgbClr val="009E49"/>
+            <a:srgbClr val="FFFFFF"/>
           </a:solidFill>
           <a:ln w="12700">
             <a:solidFill>
-              <a:srgbClr val="009E49"/>
+              <a:srgbClr val="FFFFFF"/>
             </a:solidFill>
             <a:prstDash val="solid"/>
           </a:ln>
@@ -14759,6 +11384,31 @@
       <p:sp>
         <p:nvSpPr>
           <p:cNvPr id="6" name="Shape 4"/>
+          <p:cNvSpPr/>
+          <p:nvPr/>
+        </p:nvSpPr>
+        <p:spPr>
+          <a:xfrm>
+            <a:off x="10881360" y="652272"/>
+            <a:ext cx="905256" cy="188976"/>
+          </a:xfrm>
+          <a:prstGeom prst="rect">
+            <a:avLst/>
+          </a:prstGeom>
+          <a:solidFill>
+            <a:srgbClr val="0DB02B"/>
+          </a:solidFill>
+          <a:ln w="12700">
+            <a:solidFill>
+              <a:srgbClr val="0DB02B"/>
+            </a:solidFill>
+            <a:prstDash val="solid"/>
+          </a:ln>
+        </p:spPr>
+      </p:sp>
+      <p:sp>
+        <p:nvSpPr>
+          <p:cNvPr id="7" name="Shape 5"/>
           <p:cNvSpPr/>
           <p:nvPr/>
         </p:nvSpPr>
@@ -14780,7 +11430,7 @@
       </p:sp>
       <p:sp>
         <p:nvSpPr>
-          <p:cNvPr id="7" name="Shape 5"/>
+          <p:cNvPr id="8" name="Shape 6"/>
           <p:cNvSpPr/>
           <p:nvPr/>
         </p:nvSpPr>
@@ -14803,7 +11453,7 @@
       </p:sp>
       <p:sp>
         <p:nvSpPr>
-          <p:cNvPr id="8" name="Text 6"/>
+          <p:cNvPr id="9" name="Text 7"/>
           <p:cNvSpPr/>
           <p:nvPr/>
         </p:nvSpPr>
@@ -14841,7 +11491,7 @@
                 <a:ea typeface="Calibri" pitchFamily="34" charset="-122"/>
                 <a:cs typeface="Calibri" pitchFamily="34" charset="-120"/>
               </a:rPr>
-              <a:t>BURKINA FASO : LA PEINE DE MORT RÉINTRODUITE DANS LE CODE PÉNAL</a:t>
+              <a:t>SWISS AND AUSTRIAN WOMEN IN LIBYA AFTER RELEASE FROM NIGER KIDNAP ORDEAL</a:t>
             </a:r>
             <a:endParaRPr lang="en-US" sz="1300" dirty="0"/>
           </a:p>
@@ -14886,7 +11536,7 @@
                   </a:extLst>
                 </a:hlinkClick>
               </a:rPr>
-              <a:t>Guineematin.com</a:t>
+              <a:t>Africanews</a:t>
             </a:r>
             <a:pPr indent="0" marL="0">
               <a:spcAft>
@@ -14903,7 +11553,7 @@
                 <a:ea typeface="Calibri" pitchFamily="34" charset="-122"/>
                 <a:cs typeface="Calibri" pitchFamily="34" charset="-120"/>
               </a:rPr>
-              <a:t> — 20 octobre 2026, 22 h UTC</a:t>
+              <a:t> — 22 octobre 2026, 16 h UTC</a:t>
             </a:r>
             <a:endParaRPr lang="en-US" sz="1300" dirty="0"/>
           </a:p>
@@ -14927,7 +11577,7 @@
                 <a:ea typeface="Calibri" pitchFamily="34" charset="-122"/>
                 <a:cs typeface="Calibri" pitchFamily="34" charset="-120"/>
               </a:rPr>
-              <a:t>OUAGADOUGOU : LA CARAVANE « GRAINE DE COHÉSION » POURSUIT SON COMBAT POUR LA PAIX</a:t>
+              <a:t>PROJET DE GESTION DURABLE DES DÉCHETS ET DE RÉDUCTION DES POLLUANTS : LA BOAD ÉVALUE À NIAMEY L’ÉTAT D’AVANCEMENT DE L’ÉXECUTION DU PROJET</a:t>
             </a:r>
             <a:endParaRPr lang="en-US" sz="1300" dirty="0"/>
           </a:p>
@@ -14972,7 +11622,7 @@
                   </a:extLst>
                 </a:hlinkClick>
               </a:rPr>
-              <a:t>Burkina24</a:t>
+              <a:t>ANP — Agence Nigérienne Presse</a:t>
             </a:r>
             <a:pPr indent="0" marL="0">
               <a:spcAft>
@@ -14989,7 +11639,7 @@
                 <a:ea typeface="Calibri" pitchFamily="34" charset="-122"/>
                 <a:cs typeface="Calibri" pitchFamily="34" charset="-120"/>
               </a:rPr>
-              <a:t> — 21 octobre 2026, 11 h UTC</a:t>
+              <a:t> — 22 octobre 2026, 15 h UTC</a:t>
             </a:r>
             <a:endParaRPr lang="en-US" sz="1300" dirty="0"/>
           </a:p>
@@ -15013,7 +11663,7 @@
                 <a:ea typeface="Calibri" pitchFamily="34" charset="-122"/>
                 <a:cs typeface="Calibri" pitchFamily="34" charset="-120"/>
               </a:rPr>
-              <a:t>BURKINA FASO : LE PREMIER MINISTRE INAUGURE LA RIZERIE GÉANTE DE BAGRÉ ET IMPULSE LA SOUVERAINETÉ ALIMENTAIRE DANS LE NAKAMBÉ</a:t>
+              <a:t>NIGER : LE PRÉSIDENT DE LA RÉPUBLIQUE PRÉSIDE LA CÉRÉMONIE OFFICIELLE DE LA RENTRÉE JUDICAIRE 2026-2027</a:t>
             </a:r>
             <a:endParaRPr lang="en-US" sz="1300" dirty="0"/>
           </a:p>
@@ -15058,7 +11708,7 @@
                   </a:extLst>
                 </a:hlinkClick>
               </a:rPr>
-              <a:t>Burkina24</a:t>
+              <a:t>ANP — Agence Nigérienne Presse</a:t>
             </a:r>
             <a:pPr indent="0" marL="0">
               <a:spcAft>
@@ -15075,7 +11725,7 @@
                 <a:ea typeface="Calibri" pitchFamily="34" charset="-122"/>
                 <a:cs typeface="Calibri" pitchFamily="34" charset="-120"/>
               </a:rPr>
-              <a:t> — 21 octobre 2026, 11 h UTC</a:t>
+              <a:t> — 22 octobre 2026, 15 h UTC</a:t>
             </a:r>
             <a:endParaRPr lang="en-US" sz="1300" dirty="0"/>
           </a:p>
@@ -15099,7 +11749,7 @@
                 <a:ea typeface="Calibri" pitchFamily="34" charset="-122"/>
                 <a:cs typeface="Calibri" pitchFamily="34" charset="-120"/>
               </a:rPr>
-              <a:t>SEMAINE DE L’ÉTUDIANT AU BURKINA FASO : LA COOPÉRATION SINO-BURKINABÈ ET LA SÉCURITÉ DES ÉTUDIANTS AU CŒUR DE LA PREMIÈRE ÉDITION</a:t>
+              <a:t>RENTRÉE JUDICIAIRE 2026-2027 : LE PRÉSIDENT TIANI EXHORTE LES ACTEURS DU DOMAINE À S’INSCRIRE DANS LA DYNAMIQUE DE LA REFONDATION NATIONALE</a:t>
             </a:r>
             <a:endParaRPr lang="en-US" sz="1300" dirty="0"/>
           </a:p>
@@ -15144,7 +11794,7 @@
                   </a:extLst>
                 </a:hlinkClick>
               </a:rPr>
-              <a:t>Burkina24</a:t>
+              <a:t>ANP — Agence Nigérienne Presse</a:t>
             </a:r>
             <a:pPr indent="0" marL="0">
               <a:spcAft>
@@ -15161,7 +11811,7 @@
                 <a:ea typeface="Calibri" pitchFamily="34" charset="-122"/>
                 <a:cs typeface="Calibri" pitchFamily="34" charset="-120"/>
               </a:rPr>
-              <a:t> — 21 octobre 2026, 10 h UTC</a:t>
+              <a:t> — 22 octobre 2026, 14 h UTC</a:t>
             </a:r>
             <a:endParaRPr lang="en-US" sz="1300" dirty="0"/>
           </a:p>
@@ -15185,7 +11835,7 @@
                 <a:ea typeface="Calibri" pitchFamily="34" charset="-122"/>
                 <a:cs typeface="Calibri" pitchFamily="34" charset="-120"/>
               </a:rPr>
-              <a:t>OFFENSIVE AGROPASTORALE : LE PREMIER MINISTRE LANCE LA RÉCOLTE MÉCANISÉE DU MAÏS À BAGRÉ</a:t>
+              <a:t>AU PALAIS DE LA PRÉSIDENCE : LE CHEF DE L’ETAT REÇOIT L’ARTISTE SÉNÉGALAISE COUMBA GAWLO SECK</a:t>
             </a:r>
             <a:endParaRPr lang="en-US" sz="1300" dirty="0"/>
           </a:p>
@@ -15230,7 +11880,7 @@
                   </a:extLst>
                 </a:hlinkClick>
               </a:rPr>
-              <a:t>Gouvernement de transition Burkina Faso</a:t>
+              <a:t>Le Sahel</a:t>
             </a:r>
             <a:pPr indent="0" marL="0">
               <a:spcAft>
@@ -15247,7 +11897,7 @@
                 <a:ea typeface="Calibri" pitchFamily="34" charset="-122"/>
                 <a:cs typeface="Calibri" pitchFamily="34" charset="-120"/>
               </a:rPr>
-              <a:t> — 20 octobre 2026, 20 h UTC</a:t>
+              <a:t> — 22 octobre 2026, 8 h UTC</a:t>
             </a:r>
             <a:endParaRPr lang="en-US" sz="1300" dirty="0"/>
           </a:p>
@@ -15255,7 +11905,7 @@
       </p:sp>
       <p:pic>
         <p:nvPicPr>
-          <p:cNvPr id="9" name="Image 0" descr="/home/runner/work/SentiqS/SentiqS/scripts/assets/grsci/logo-grsci.png">    </p:cNvPr>
+          <p:cNvPr id="10" name="Image 0" descr="/home/runner/work/SentiqS/SentiqS/scripts/assets/grsci/logo-grsci.png">    </p:cNvPr>
           <p:cNvPicPr>
             <a:picLocks noChangeAspect="1"/>
           </p:cNvPicPr>
@@ -15279,7 +11929,7 @@
       </p:pic>
       <p:sp>
         <p:nvSpPr>
-          <p:cNvPr id="10" name="Text 7"/>
+          <p:cNvPr id="11" name="Text 8"/>
           <p:cNvSpPr/>
           <p:nvPr/>
         </p:nvSpPr>
@@ -15448,7 +12098,7 @@
       </p:sp>
       <p:sp>
         <p:nvSpPr>
-          <p:cNvPr id="11" name="Text 8"/>
+          <p:cNvPr id="12" name="Text 9"/>
           <p:cNvSpPr/>
           <p:nvPr/>
         </p:nvSpPr>
@@ -15479,7 +12129,7 @@
                 <a:ea typeface="Calibri" pitchFamily="34" charset="-122"/>
                 <a:cs typeface="Calibri" pitchFamily="34" charset="-120"/>
               </a:rPr>
-              <a:t>|  21/10/26   |   8</a:t>
+              <a:t>|  23/10/26   |   8</a:t>
             </a:r>
             <a:endParaRPr lang="en-US" sz="1000" dirty="0"/>
           </a:p>
@@ -15545,7 +12195,7 @@
                 <a:ea typeface="Arial Narrow" pitchFamily="34" charset="-122"/>
                 <a:cs typeface="Arial Narrow" pitchFamily="34" charset="-120"/>
               </a:rPr>
-              <a:t>II</a:t>
+              <a:t>IV</a:t>
             </a:r>
             <a:endParaRPr lang="en-US" sz="2400" dirty="0"/>
           </a:p>
@@ -15584,7 +12234,7 @@
                 <a:ea typeface="Arial Narrow" pitchFamily="34" charset="-122"/>
                 <a:cs typeface="Arial Narrow" pitchFamily="34" charset="-120"/>
               </a:rPr>
-              <a:t>Mali</a:t>
+              <a:t>Ghana</a:t>
             </a:r>
             <a:endParaRPr lang="en-US" sz="2800" dirty="0"/>
           </a:p>
@@ -15599,17 +12249,17 @@
         <p:spPr>
           <a:xfrm>
             <a:off x="10881360" y="274320"/>
-            <a:ext cx="301752" cy="566928"/>
+            <a:ext cx="905256" cy="188976"/>
           </a:xfrm>
           <a:prstGeom prst="rect">
             <a:avLst/>
           </a:prstGeom>
           <a:solidFill>
-            <a:srgbClr val="14B53A"/>
+            <a:srgbClr val="CE1126"/>
           </a:solidFill>
           <a:ln w="12700">
             <a:solidFill>
-              <a:srgbClr val="14B53A"/>
+              <a:srgbClr val="CE1126"/>
             </a:solidFill>
             <a:prstDash val="solid"/>
           </a:ln>
@@ -15623,8 +12273,8 @@
         </p:nvSpPr>
         <p:spPr>
           <a:xfrm>
-            <a:off x="11183112" y="274320"/>
-            <a:ext cx="301752" cy="566928"/>
+            <a:off x="10881360" y="463296"/>
+            <a:ext cx="905256" cy="188976"/>
           </a:xfrm>
           <a:prstGeom prst="rect">
             <a:avLst/>
@@ -15648,18 +12298,18 @@
         </p:nvSpPr>
         <p:spPr>
           <a:xfrm>
-            <a:off x="11484864" y="274320"/>
-            <a:ext cx="301752" cy="566928"/>
+            <a:off x="10881360" y="652272"/>
+            <a:ext cx="905256" cy="188976"/>
           </a:xfrm>
           <a:prstGeom prst="rect">
             <a:avLst/>
           </a:prstGeom>
           <a:solidFill>
-            <a:srgbClr val="CE1126"/>
+            <a:srgbClr val="006B3F"/>
           </a:solidFill>
           <a:ln w="12700">
             <a:solidFill>
-              <a:srgbClr val="CE1126"/>
+              <a:srgbClr val="006B3F"/>
             </a:solidFill>
             <a:prstDash val="solid"/>
           </a:ln>
@@ -15750,7 +12400,7 @@
                 <a:ea typeface="Calibri" pitchFamily="34" charset="-122"/>
                 <a:cs typeface="Calibri" pitchFamily="34" charset="-120"/>
               </a:rPr>
-              <a:t>MASSACRE IN MALI: ISLAMIC STATE MILITANTS KILL AT LEAST 48 CIVILIANS IN MÉNAKA</a:t>
+              <a:t>KPANDAI: ONE REPORTEDLY KILLED IN KUMDI FARMLAND DISPUTE</a:t>
             </a:r>
             <a:endParaRPr lang="en-US" sz="1300" dirty="0"/>
           </a:p>
@@ -15795,7 +12445,7 @@
                   </a:extLst>
                 </a:hlinkClick>
               </a:rPr>
-              <a:t>The Africa Report</a:t>
+              <a:t>JoyOnline</a:t>
             </a:r>
             <a:pPr indent="0" marL="0">
               <a:spcAft>
@@ -15812,7 +12462,7 @@
                 <a:ea typeface="Calibri" pitchFamily="34" charset="-122"/>
                 <a:cs typeface="Calibri" pitchFamily="34" charset="-120"/>
               </a:rPr>
-              <a:t> — 21 octobre 2026, 10 h UTC</a:t>
+              <a:t> — 23 octobre 2026, 5 h UTC</a:t>
             </a:r>
             <a:endParaRPr lang="en-US" sz="1300" dirty="0"/>
           </a:p>
@@ -15836,7 +12486,7 @@
                 <a:ea typeface="Calibri" pitchFamily="34" charset="-122"/>
                 <a:cs typeface="Calibri" pitchFamily="34" charset="-120"/>
               </a:rPr>
-              <a:t>MASSACRE AU MALI : L’ÉTAT ISLAMIQUE S’ATTAQUE À LA COMMUNAUTÉ IDAKSAHAK DANS LA RÉGION DE MÉNAKA</a:t>
+              <a:t>NAIMOS VOWS SELF-DEFENCE AGAINST HOSTILE ATTACKS AS ANTI-GALAMSEY OPERATIONS INTENSIFY</a:t>
             </a:r>
             <a:endParaRPr lang="en-US" sz="1300" dirty="0"/>
           </a:p>
@@ -15881,7 +12531,7 @@
                   </a:extLst>
                 </a:hlinkClick>
               </a:rPr>
-              <a:t>Jeune Afrique</a:t>
+              <a:t>GBC Ghana Online</a:t>
             </a:r>
             <a:pPr indent="0" marL="0">
               <a:spcAft>
@@ -15898,7 +12548,7 @@
                 <a:ea typeface="Calibri" pitchFamily="34" charset="-122"/>
                 <a:cs typeface="Calibri" pitchFamily="34" charset="-120"/>
               </a:rPr>
-              <a:t> — 20 octobre 2026, 16 h UTC</a:t>
+              <a:t> — 22 octobre 2026, 16 h UTC</a:t>
             </a:r>
             <a:endParaRPr lang="en-US" sz="1300" dirty="0"/>
           </a:p>
@@ -15922,7 +12572,7 @@
                 <a:ea typeface="Calibri" pitchFamily="34" charset="-122"/>
                 <a:cs typeface="Calibri" pitchFamily="34" charset="-120"/>
               </a:rPr>
-              <a:t>MALI : UNE QUARANTAINE DE CIVILS TUÉE DANS UN CAMP DANS LA RÉGION DE MENAKA</a:t>
+              <a:t>GES TO REOPEN OBUASI SHTS NEXT WEEK AFTER AUGUST VIOLENCE</a:t>
             </a:r>
             <a:endParaRPr lang="en-US" sz="1300" dirty="0"/>
           </a:p>
@@ -15967,7 +12617,7 @@
                   </a:extLst>
                 </a:hlinkClick>
               </a:rPr>
-              <a:t>fr.saharamedias.net</a:t>
+              <a:t>GBC Ghana Online</a:t>
             </a:r>
             <a:pPr indent="0" marL="0">
               <a:spcAft>
@@ -15984,7 +12634,7 @@
                 <a:ea typeface="Calibri" pitchFamily="34" charset="-122"/>
                 <a:cs typeface="Calibri" pitchFamily="34" charset="-120"/>
               </a:rPr>
-              <a:t> — 20 octobre 2026, 14 h UTC</a:t>
+              <a:t> — 23 octobre 2026, 4 h UTC</a:t>
             </a:r>
             <a:endParaRPr lang="en-US" sz="1300" dirty="0"/>
           </a:p>
@@ -16008,7 +12658,7 @@
                 <a:ea typeface="Calibri" pitchFamily="34" charset="-122"/>
                 <a:cs typeface="Calibri" pitchFamily="34" charset="-120"/>
               </a:rPr>
-              <a:t>OPÉRATION DOUGOUKOLOKO : PLUSIEURS ÉLÉMENTS TERRORISTES NEUTRALISÉS DANS LA FORÊT DE OUAGADOU</a:t>
+              <a:t>OBUASI SHTS HEADMASTER RAPE CASE SENT TO ATTORNEY GENERAL’S OFFICE</a:t>
             </a:r>
             <a:endParaRPr lang="en-US" sz="1300" dirty="0"/>
           </a:p>
@@ -16053,7 +12703,7 @@
                   </a:extLst>
                 </a:hlinkClick>
               </a:rPr>
-              <a:t>AMAP — Agence Malienne Presse</a:t>
+              <a:t>Ghana Business News</a:t>
             </a:r>
             <a:pPr indent="0" marL="0">
               <a:spcAft>
@@ -16070,93 +12720,7 @@
                 <a:ea typeface="Calibri" pitchFamily="34" charset="-122"/>
                 <a:cs typeface="Calibri" pitchFamily="34" charset="-120"/>
               </a:rPr>
-              <a:t> — 21 octobre 2026, 11 h UTC</a:t>
-            </a:r>
-            <a:endParaRPr lang="en-US" sz="1300" dirty="0"/>
-          </a:p>
-          <a:p>
-            <a:pPr marL="342900" indent="-342900">
-              <a:spcBef>
-                <a:spcPts val="800"/>
-              </a:spcBef>
-              <a:spcAft>
-                <a:spcPts val="200"/>
-              </a:spcAft>
-              <a:buSzPct val="100000"/>
-              <a:buChar char="❑"/>
-            </a:pPr>
-            <a:r>
-              <a:rPr lang="en-US" sz="1400" b="1" u="sng" dirty="0">
-                <a:solidFill>
-                  <a:srgbClr val="1F6B5E"/>
-                </a:solidFill>
-                <a:latin typeface="Calibri" pitchFamily="34" charset="0"/>
-                <a:ea typeface="Calibri" pitchFamily="34" charset="-122"/>
-                <a:cs typeface="Calibri" pitchFamily="34" charset="-120"/>
-              </a:rPr>
-              <a:t>JUSTICE À MOPTI : SÉVICES GRAVES, PÉDOPHILIE ET TRAFIC D’ARMES AU RÔLE DU TRIBUNAL MILITAIRE</a:t>
-            </a:r>
-            <a:endParaRPr lang="en-US" sz="1300" dirty="0"/>
-          </a:p>
-          <a:p>
-            <a:pPr lvl="1" marL="685800" indent="-342900">
-              <a:spcAft>
-                <a:spcPts val="200"/>
-              </a:spcAft>
-              <a:buSzPct val="100000"/>
-              <a:buChar char="▪"/>
-            </a:pPr>
-            <a:r>
-              <a:rPr lang="en-US" sz="1300" dirty="0">
-                <a:solidFill>
-                  <a:srgbClr val="1F2937"/>
-                </a:solidFill>
-                <a:latin typeface="Calibri" pitchFamily="34" charset="0"/>
-                <a:ea typeface="Calibri" pitchFamily="34" charset="-122"/>
-                <a:cs typeface="Calibri" pitchFamily="34" charset="-120"/>
-              </a:rPr>
-              <a:t>Source : </a:t>
-            </a:r>
-            <a:pPr indent="0" marL="0">
-              <a:spcAft>
-                <a:spcPts val="200"/>
-              </a:spcAft>
-              <a:buNone/>
-            </a:pPr>
-            <a:r>
-              <a:rPr lang="en-US" sz="1300" u="sng" dirty="0">
-                <a:solidFill>
-                  <a:srgbClr val="1F6B5E"/>
-                </a:solidFill>
-                <a:latin typeface="Calibri" pitchFamily="34" charset="0"/>
-                <a:ea typeface="Calibri" pitchFamily="34" charset="-122"/>
-                <a:cs typeface="Calibri" pitchFamily="34" charset="-120"/>
-                <a:hlinkClick r:id="rId5" invalidUrl="" action="" tgtFrame="" tooltip="" history="1" highlightClick="0" endSnd="0">
-                  <a:extLst>
-                    <a:ext uri="{A12FA001-AC4F-418D-AE19-62706E023703}">
-                      <ahyp:hlinkClr xmlns:ahyp="http://schemas.microsoft.com/office/drawing/2018/hyperlinkcolor" val="tx"/>
-                    </a:ext>
-                  </a:extLst>
-                </a:hlinkClick>
-              </a:rPr>
-              <a:t>Maliactu</a:t>
-            </a:r>
-            <a:pPr indent="0" marL="0">
-              <a:spcAft>
-                <a:spcPts val="200"/>
-              </a:spcAft>
-              <a:buNone/>
-            </a:pPr>
-            <a:r>
-              <a:rPr lang="en-US" sz="1300" dirty="0">
-                <a:solidFill>
-                  <a:srgbClr val="1F2937"/>
-                </a:solidFill>
-                <a:latin typeface="Calibri" pitchFamily="34" charset="0"/>
-                <a:ea typeface="Calibri" pitchFamily="34" charset="-122"/>
-                <a:cs typeface="Calibri" pitchFamily="34" charset="-120"/>
-              </a:rPr>
-              <a:t> — 21 octobre 2026, 11 h UTC</a:t>
+              <a:t> — 23 octobre 2026, 6 h UTC</a:t>
             </a:r>
             <a:endParaRPr lang="en-US" sz="1300" dirty="0"/>
           </a:p>
@@ -16171,7 +12735,7 @@
           <p:nvPr/>
         </p:nvPicPr>
         <p:blipFill>
-          <a:blip r:embed="rId6"/>
+          <a:blip r:embed="rId5"/>
           <a:stretch>
             <a:fillRect/>
           </a:stretch>
@@ -16388,7 +12952,7 @@
                 <a:ea typeface="Calibri" pitchFamily="34" charset="-122"/>
                 <a:cs typeface="Calibri" pitchFamily="34" charset="-120"/>
               </a:rPr>
-              <a:t>|  21/10/26   |   9</a:t>
+              <a:t>|  23/10/26   |   9</a:t>
             </a:r>
             <a:endParaRPr lang="en-US" sz="1000" dirty="0"/>
           </a:p>
